--- a/Lecture_Slides/PH 123 Lecture 04.pptx
+++ b/Lecture_Slides/PH 123 Lecture 04.pptx
@@ -175,7 +175,7 @@
 <file path=ppt/revisionInfo.xml><?xml version="1.0" encoding="utf-8"?>
 <p1510:revInfo xmlns:a="http://schemas.openxmlformats.org/drawingml/2006/main" xmlns:r="http://schemas.openxmlformats.org/officeDocument/2006/relationships" xmlns:p1510="http://schemas.microsoft.com/office/powerpoint/2015/10/main">
   <p1510:revLst>
-    <p1510:client id="{BA32A1C9-A891-44FA-83B4-28898C6C1AD9}" v="21" dt="2025-04-22T20:06:37.674"/>
+    <p1510:client id="{14AFEE76-69E8-4B0A-917A-00F4FEB8CE72}" v="41" dt="2026-01-09T19:21:55.452"/>
   </p1510:revLst>
 </p1510:revInfo>
 </file>
@@ -183,585 +183,230 @@
 <file path=ppt/changesInfos/changesInfo1.xml><?xml version="1.0" encoding="utf-8"?>
 <pc:chgInfo xmlns:a="http://schemas.openxmlformats.org/drawingml/2006/main" xmlns:r="http://schemas.openxmlformats.org/officeDocument/2006/relationships" xmlns:ac="http://schemas.microsoft.com/office/drawing/2013/main/command" xmlns:pc="http://schemas.microsoft.com/office/powerpoint/2013/main/command">
   <pc:docChgLst>
-    <pc:chgData name="Lines, Todd" userId="afaf7c3a-e8aa-4568-882a-02ad8f9e19b0" providerId="ADAL" clId="{BA32A1C9-A891-44FA-83B4-28898C6C1AD9}"/>
-    <pc:docChg chg="custSel addSld delSld modSld">
-      <pc:chgData name="Lines, Todd" userId="afaf7c3a-e8aa-4568-882a-02ad8f9e19b0" providerId="ADAL" clId="{BA32A1C9-A891-44FA-83B4-28898C6C1AD9}" dt="2025-04-23T20:15:14.009" v="108" actId="11"/>
+    <pc:chgData name="Lines, Todd" userId="afaf7c3a-e8aa-4568-882a-02ad8f9e19b0" providerId="ADAL" clId="{5FF5AC1B-ABA9-43D7-A1E3-2D92732CD6E2}"/>
+    <pc:docChg chg="undo custSel modSld">
+      <pc:chgData name="Lines, Todd" userId="afaf7c3a-e8aa-4568-882a-02ad8f9e19b0" providerId="ADAL" clId="{5FF5AC1B-ABA9-43D7-A1E3-2D92732CD6E2}" dt="2026-01-09T19:21:58.270" v="63" actId="21"/>
       <pc:docMkLst>
         <pc:docMk/>
       </pc:docMkLst>
-      <pc:sldChg chg="del">
-        <pc:chgData name="Lines, Todd" userId="afaf7c3a-e8aa-4568-882a-02ad8f9e19b0" providerId="ADAL" clId="{BA32A1C9-A891-44FA-83B4-28898C6C1AD9}" dt="2025-04-22T20:06:32.057" v="106" actId="2696"/>
-        <pc:sldMkLst>
-          <pc:docMk/>
-          <pc:sldMk cId="0" sldId="257"/>
-        </pc:sldMkLst>
-      </pc:sldChg>
-      <pc:sldChg chg="add">
-        <pc:chgData name="Lines, Todd" userId="afaf7c3a-e8aa-4568-882a-02ad8f9e19b0" providerId="ADAL" clId="{BA32A1C9-A891-44FA-83B4-28898C6C1AD9}" dt="2025-04-22T20:06:37.664" v="107"/>
-        <pc:sldMkLst>
-          <pc:docMk/>
-          <pc:sldMk cId="3108924025" sldId="257"/>
-        </pc:sldMkLst>
-      </pc:sldChg>
-      <pc:sldChg chg="del">
-        <pc:chgData name="Lines, Todd" userId="afaf7c3a-e8aa-4568-882a-02ad8f9e19b0" providerId="ADAL" clId="{BA32A1C9-A891-44FA-83B4-28898C6C1AD9}" dt="2025-04-22T20:06:32.057" v="106" actId="2696"/>
-        <pc:sldMkLst>
-          <pc:docMk/>
-          <pc:sldMk cId="0" sldId="258"/>
-        </pc:sldMkLst>
-      </pc:sldChg>
-      <pc:sldChg chg="add">
-        <pc:chgData name="Lines, Todd" userId="afaf7c3a-e8aa-4568-882a-02ad8f9e19b0" providerId="ADAL" clId="{BA32A1C9-A891-44FA-83B4-28898C6C1AD9}" dt="2025-04-22T20:06:37.664" v="107"/>
-        <pc:sldMkLst>
-          <pc:docMk/>
-          <pc:sldMk cId="1765139758" sldId="258"/>
-        </pc:sldMkLst>
-      </pc:sldChg>
-      <pc:sldChg chg="del">
-        <pc:chgData name="Lines, Todd" userId="afaf7c3a-e8aa-4568-882a-02ad8f9e19b0" providerId="ADAL" clId="{BA32A1C9-A891-44FA-83B4-28898C6C1AD9}" dt="2025-04-22T20:06:32.057" v="106" actId="2696"/>
-        <pc:sldMkLst>
-          <pc:docMk/>
-          <pc:sldMk cId="0" sldId="270"/>
-        </pc:sldMkLst>
-      </pc:sldChg>
-      <pc:sldChg chg="add">
-        <pc:chgData name="Lines, Todd" userId="afaf7c3a-e8aa-4568-882a-02ad8f9e19b0" providerId="ADAL" clId="{BA32A1C9-A891-44FA-83B4-28898C6C1AD9}" dt="2025-04-22T20:06:37.664" v="107"/>
+      <pc:sldChg chg="delSp modSp mod">
+        <pc:chgData name="Lines, Todd" userId="afaf7c3a-e8aa-4568-882a-02ad8f9e19b0" providerId="ADAL" clId="{5FF5AC1B-ABA9-43D7-A1E3-2D92732CD6E2}" dt="2026-01-09T17:55:28.723" v="57" actId="21"/>
         <pc:sldMkLst>
           <pc:docMk/>
           <pc:sldMk cId="2674272521" sldId="270"/>
         </pc:sldMkLst>
+        <pc:picChg chg="del mod">
+          <ac:chgData name="Lines, Todd" userId="afaf7c3a-e8aa-4568-882a-02ad8f9e19b0" providerId="ADAL" clId="{5FF5AC1B-ABA9-43D7-A1E3-2D92732CD6E2}" dt="2026-01-09T17:55:28.723" v="57" actId="21"/>
+          <ac:picMkLst>
+            <pc:docMk/>
+            <pc:sldMk cId="2674272521" sldId="270"/>
+            <ac:picMk id="2" creationId="{13400C51-6D92-AD1C-33D0-8C8BDD5E2D75}"/>
+          </ac:picMkLst>
+        </pc:picChg>
       </pc:sldChg>
-      <pc:sldChg chg="del">
-        <pc:chgData name="Lines, Todd" userId="afaf7c3a-e8aa-4568-882a-02ad8f9e19b0" providerId="ADAL" clId="{BA32A1C9-A891-44FA-83B4-28898C6C1AD9}" dt="2025-04-22T20:06:32.057" v="106" actId="2696"/>
-        <pc:sldMkLst>
-          <pc:docMk/>
-          <pc:sldMk cId="0" sldId="271"/>
-        </pc:sldMkLst>
-      </pc:sldChg>
-      <pc:sldChg chg="add">
-        <pc:chgData name="Lines, Todd" userId="afaf7c3a-e8aa-4568-882a-02ad8f9e19b0" providerId="ADAL" clId="{BA32A1C9-A891-44FA-83B4-28898C6C1AD9}" dt="2025-04-22T20:06:37.664" v="107"/>
+      <pc:sldChg chg="delSp modSp mod">
+        <pc:chgData name="Lines, Todd" userId="afaf7c3a-e8aa-4568-882a-02ad8f9e19b0" providerId="ADAL" clId="{5FF5AC1B-ABA9-43D7-A1E3-2D92732CD6E2}" dt="2026-01-09T17:56:31.888" v="59" actId="21"/>
         <pc:sldMkLst>
           <pc:docMk/>
           <pc:sldMk cId="3489346234" sldId="271"/>
         </pc:sldMkLst>
+        <pc:picChg chg="del mod">
+          <ac:chgData name="Lines, Todd" userId="afaf7c3a-e8aa-4568-882a-02ad8f9e19b0" providerId="ADAL" clId="{5FF5AC1B-ABA9-43D7-A1E3-2D92732CD6E2}" dt="2026-01-09T17:56:31.888" v="59" actId="21"/>
+          <ac:picMkLst>
+            <pc:docMk/>
+            <pc:sldMk cId="3489346234" sldId="271"/>
+            <ac:picMk id="2" creationId="{A59A5F2B-0AD5-6368-BC9B-DE962C1AD9E9}"/>
+          </ac:picMkLst>
+        </pc:picChg>
       </pc:sldChg>
-      <pc:sldChg chg="del">
-        <pc:chgData name="Lines, Todd" userId="afaf7c3a-e8aa-4568-882a-02ad8f9e19b0" providerId="ADAL" clId="{BA32A1C9-A891-44FA-83B4-28898C6C1AD9}" dt="2025-04-22T20:06:32.057" v="106" actId="2696"/>
-        <pc:sldMkLst>
-          <pc:docMk/>
-          <pc:sldMk cId="0" sldId="273"/>
-        </pc:sldMkLst>
-      </pc:sldChg>
-      <pc:sldChg chg="add">
-        <pc:chgData name="Lines, Todd" userId="afaf7c3a-e8aa-4568-882a-02ad8f9e19b0" providerId="ADAL" clId="{BA32A1C9-A891-44FA-83B4-28898C6C1AD9}" dt="2025-04-22T20:06:37.664" v="107"/>
-        <pc:sldMkLst>
-          <pc:docMk/>
-          <pc:sldMk cId="1978645230" sldId="273"/>
-        </pc:sldMkLst>
-      </pc:sldChg>
-      <pc:sldChg chg="modSp mod">
-        <pc:chgData name="Lines, Todd" userId="afaf7c3a-e8aa-4568-882a-02ad8f9e19b0" providerId="ADAL" clId="{BA32A1C9-A891-44FA-83B4-28898C6C1AD9}" dt="2025-04-23T20:15:14.009" v="108" actId="11"/>
-        <pc:sldMkLst>
-          <pc:docMk/>
-          <pc:sldMk cId="4237797791" sldId="281"/>
-        </pc:sldMkLst>
-        <pc:spChg chg="mod">
-          <ac:chgData name="Lines, Todd" userId="afaf7c3a-e8aa-4568-882a-02ad8f9e19b0" providerId="ADAL" clId="{BA32A1C9-A891-44FA-83B4-28898C6C1AD9}" dt="2025-04-23T20:15:14.009" v="108" actId="11"/>
-          <ac:spMkLst>
-            <pc:docMk/>
-            <pc:sldMk cId="4237797791" sldId="281"/>
-            <ac:spMk id="51204" creationId="{00000000-0000-0000-0000-000000000000}"/>
-          </ac:spMkLst>
-        </pc:spChg>
-      </pc:sldChg>
-      <pc:sldChg chg="add">
-        <pc:chgData name="Lines, Todd" userId="afaf7c3a-e8aa-4568-882a-02ad8f9e19b0" providerId="ADAL" clId="{BA32A1C9-A891-44FA-83B4-28898C6C1AD9}" dt="2025-04-22T20:06:37.664" v="107"/>
-        <pc:sldMkLst>
-          <pc:docMk/>
-          <pc:sldMk cId="426158122" sldId="285"/>
-        </pc:sldMkLst>
-      </pc:sldChg>
-      <pc:sldChg chg="del">
-        <pc:chgData name="Lines, Todd" userId="afaf7c3a-e8aa-4568-882a-02ad8f9e19b0" providerId="ADAL" clId="{BA32A1C9-A891-44FA-83B4-28898C6C1AD9}" dt="2025-04-22T20:06:32.057" v="106" actId="2696"/>
-        <pc:sldMkLst>
-          <pc:docMk/>
-          <pc:sldMk cId="3404369500" sldId="285"/>
-        </pc:sldMkLst>
-      </pc:sldChg>
-      <pc:sldChg chg="add">
-        <pc:chgData name="Lines, Todd" userId="afaf7c3a-e8aa-4568-882a-02ad8f9e19b0" providerId="ADAL" clId="{BA32A1C9-A891-44FA-83B4-28898C6C1AD9}" dt="2025-04-22T20:06:37.664" v="107"/>
-        <pc:sldMkLst>
-          <pc:docMk/>
-          <pc:sldMk cId="2845883180" sldId="286"/>
-        </pc:sldMkLst>
-      </pc:sldChg>
-      <pc:sldChg chg="del">
-        <pc:chgData name="Lines, Todd" userId="afaf7c3a-e8aa-4568-882a-02ad8f9e19b0" providerId="ADAL" clId="{BA32A1C9-A891-44FA-83B4-28898C6C1AD9}" dt="2025-04-22T20:06:32.057" v="106" actId="2696"/>
-        <pc:sldMkLst>
-          <pc:docMk/>
-          <pc:sldMk cId="3343280101" sldId="286"/>
-        </pc:sldMkLst>
-      </pc:sldChg>
-      <pc:sldChg chg="del">
-        <pc:chgData name="Lines, Todd" userId="afaf7c3a-e8aa-4568-882a-02ad8f9e19b0" providerId="ADAL" clId="{BA32A1C9-A891-44FA-83B4-28898C6C1AD9}" dt="2025-04-22T20:06:32.057" v="106" actId="2696"/>
-        <pc:sldMkLst>
-          <pc:docMk/>
-          <pc:sldMk cId="1316543325" sldId="312"/>
-        </pc:sldMkLst>
-      </pc:sldChg>
-      <pc:sldChg chg="add">
-        <pc:chgData name="Lines, Todd" userId="afaf7c3a-e8aa-4568-882a-02ad8f9e19b0" providerId="ADAL" clId="{BA32A1C9-A891-44FA-83B4-28898C6C1AD9}" dt="2025-04-22T20:06:37.664" v="107"/>
-        <pc:sldMkLst>
-          <pc:docMk/>
-          <pc:sldMk cId="1670918843" sldId="312"/>
-        </pc:sldMkLst>
-      </pc:sldChg>
-      <pc:sldChg chg="modSp add mod">
-        <pc:chgData name="Lines, Todd" userId="afaf7c3a-e8aa-4568-882a-02ad8f9e19b0" providerId="ADAL" clId="{BA32A1C9-A891-44FA-83B4-28898C6C1AD9}" dt="2025-04-22T19:52:10.368" v="42" actId="1038"/>
-        <pc:sldMkLst>
-          <pc:docMk/>
-          <pc:sldMk cId="0" sldId="385"/>
-        </pc:sldMkLst>
-        <pc:spChg chg="mod">
-          <ac:chgData name="Lines, Todd" userId="afaf7c3a-e8aa-4568-882a-02ad8f9e19b0" providerId="ADAL" clId="{BA32A1C9-A891-44FA-83B4-28898C6C1AD9}" dt="2025-04-22T19:52:01.714" v="33" actId="20577"/>
-          <ac:spMkLst>
-            <pc:docMk/>
-            <pc:sldMk cId="0" sldId="385"/>
-            <ac:spMk id="19460" creationId="{00000000-0000-0000-0000-000000000000}"/>
-          </ac:spMkLst>
-        </pc:spChg>
-        <pc:graphicFrameChg chg="mod">
-          <ac:chgData name="Lines, Todd" userId="afaf7c3a-e8aa-4568-882a-02ad8f9e19b0" providerId="ADAL" clId="{BA32A1C9-A891-44FA-83B4-28898C6C1AD9}" dt="2025-04-22T19:52:10.368" v="42" actId="1038"/>
-          <ac:graphicFrameMkLst>
-            <pc:docMk/>
-            <pc:sldMk cId="0" sldId="385"/>
-            <ac:graphicFrameMk id="19462" creationId="{00000000-0000-0000-0000-000000000000}"/>
-          </ac:graphicFrameMkLst>
-        </pc:graphicFrameChg>
-        <pc:graphicFrameChg chg="mod">
-          <ac:chgData name="Lines, Todd" userId="afaf7c3a-e8aa-4568-882a-02ad8f9e19b0" providerId="ADAL" clId="{BA32A1C9-A891-44FA-83B4-28898C6C1AD9}" dt="2025-04-22T19:51:57.384" v="30" actId="1076"/>
-          <ac:graphicFrameMkLst>
-            <pc:docMk/>
-            <pc:sldMk cId="0" sldId="385"/>
-            <ac:graphicFrameMk id="19464" creationId="{00000000-0000-0000-0000-000000000000}"/>
-          </ac:graphicFrameMkLst>
-        </pc:graphicFrameChg>
-        <pc:graphicFrameChg chg="mod">
-          <ac:chgData name="Lines, Todd" userId="afaf7c3a-e8aa-4568-882a-02ad8f9e19b0" providerId="ADAL" clId="{BA32A1C9-A891-44FA-83B4-28898C6C1AD9}" dt="2025-04-22T19:51:52.530" v="27" actId="1076"/>
-          <ac:graphicFrameMkLst>
-            <pc:docMk/>
-            <pc:sldMk cId="0" sldId="385"/>
-            <ac:graphicFrameMk id="19465" creationId="{00000000-0000-0000-0000-000000000000}"/>
-          </ac:graphicFrameMkLst>
-        </pc:graphicFrameChg>
-      </pc:sldChg>
-      <pc:sldChg chg="modSp add mod">
-        <pc:chgData name="Lines, Todd" userId="afaf7c3a-e8aa-4568-882a-02ad8f9e19b0" providerId="ADAL" clId="{BA32A1C9-A891-44FA-83B4-28898C6C1AD9}" dt="2025-04-22T19:53:09.839" v="65" actId="1035"/>
-        <pc:sldMkLst>
-          <pc:docMk/>
-          <pc:sldMk cId="0" sldId="386"/>
-        </pc:sldMkLst>
-        <pc:spChg chg="mod">
-          <ac:chgData name="Lines, Todd" userId="afaf7c3a-e8aa-4568-882a-02ad8f9e19b0" providerId="ADAL" clId="{BA32A1C9-A891-44FA-83B4-28898C6C1AD9}" dt="2025-04-22T19:52:38.425" v="50" actId="6549"/>
-          <ac:spMkLst>
-            <pc:docMk/>
-            <pc:sldMk cId="0" sldId="386"/>
-            <ac:spMk id="20484" creationId="{00000000-0000-0000-0000-000000000000}"/>
-          </ac:spMkLst>
-        </pc:spChg>
-        <pc:graphicFrameChg chg="mod">
-          <ac:chgData name="Lines, Todd" userId="afaf7c3a-e8aa-4568-882a-02ad8f9e19b0" providerId="ADAL" clId="{BA32A1C9-A891-44FA-83B4-28898C6C1AD9}" dt="2025-04-22T19:53:09.839" v="65" actId="1035"/>
-          <ac:graphicFrameMkLst>
-            <pc:docMk/>
-            <pc:sldMk cId="0" sldId="386"/>
-            <ac:graphicFrameMk id="20486" creationId="{00000000-0000-0000-0000-000000000000}"/>
-          </ac:graphicFrameMkLst>
-        </pc:graphicFrameChg>
-        <pc:graphicFrameChg chg="mod">
-          <ac:chgData name="Lines, Todd" userId="afaf7c3a-e8aa-4568-882a-02ad8f9e19b0" providerId="ADAL" clId="{BA32A1C9-A891-44FA-83B4-28898C6C1AD9}" dt="2025-04-22T19:52:23.024" v="48" actId="1076"/>
-          <ac:graphicFrameMkLst>
-            <pc:docMk/>
-            <pc:sldMk cId="0" sldId="386"/>
-            <ac:graphicFrameMk id="20488" creationId="{00000000-0000-0000-0000-000000000000}"/>
-          </ac:graphicFrameMkLst>
-        </pc:graphicFrameChg>
-        <pc:graphicFrameChg chg="mod">
-          <ac:chgData name="Lines, Todd" userId="afaf7c3a-e8aa-4568-882a-02ad8f9e19b0" providerId="ADAL" clId="{BA32A1C9-A891-44FA-83B4-28898C6C1AD9}" dt="2025-04-22T19:52:48.801" v="54" actId="1076"/>
-          <ac:graphicFrameMkLst>
-            <pc:docMk/>
-            <pc:sldMk cId="0" sldId="386"/>
-            <ac:graphicFrameMk id="20490" creationId="{00000000-0000-0000-0000-000000000000}"/>
-          </ac:graphicFrameMkLst>
-        </pc:graphicFrameChg>
-        <pc:graphicFrameChg chg="mod">
-          <ac:chgData name="Lines, Todd" userId="afaf7c3a-e8aa-4568-882a-02ad8f9e19b0" providerId="ADAL" clId="{BA32A1C9-A891-44FA-83B4-28898C6C1AD9}" dt="2025-04-22T19:53:03.176" v="61" actId="1076"/>
-          <ac:graphicFrameMkLst>
-            <pc:docMk/>
-            <pc:sldMk cId="0" sldId="386"/>
-            <ac:graphicFrameMk id="20491" creationId="{00000000-0000-0000-0000-000000000000}"/>
-          </ac:graphicFrameMkLst>
-        </pc:graphicFrameChg>
-        <pc:graphicFrameChg chg="mod">
-          <ac:chgData name="Lines, Todd" userId="afaf7c3a-e8aa-4568-882a-02ad8f9e19b0" providerId="ADAL" clId="{BA32A1C9-A891-44FA-83B4-28898C6C1AD9}" dt="2025-04-22T19:52:57.784" v="58" actId="1076"/>
-          <ac:graphicFrameMkLst>
-            <pc:docMk/>
-            <pc:sldMk cId="0" sldId="386"/>
-            <ac:graphicFrameMk id="20492" creationId="{00000000-0000-0000-0000-000000000000}"/>
-          </ac:graphicFrameMkLst>
-        </pc:graphicFrameChg>
-      </pc:sldChg>
-      <pc:sldChg chg="modSp add mod">
-        <pc:chgData name="Lines, Todd" userId="afaf7c3a-e8aa-4568-882a-02ad8f9e19b0" providerId="ADAL" clId="{BA32A1C9-A891-44FA-83B4-28898C6C1AD9}" dt="2025-04-22T19:53:24.505" v="71" actId="1076"/>
+      <pc:sldChg chg="addSp delSp modSp mod">
+        <pc:chgData name="Lines, Todd" userId="afaf7c3a-e8aa-4568-882a-02ad8f9e19b0" providerId="ADAL" clId="{5FF5AC1B-ABA9-43D7-A1E3-2D92732CD6E2}" dt="2026-01-09T17:41:54.929" v="39" actId="478"/>
         <pc:sldMkLst>
           <pc:docMk/>
           <pc:sldMk cId="0" sldId="387"/>
         </pc:sldMkLst>
-        <pc:graphicFrameChg chg="mod">
-          <ac:chgData name="Lines, Todd" userId="afaf7c3a-e8aa-4568-882a-02ad8f9e19b0" providerId="ADAL" clId="{BA32A1C9-A891-44FA-83B4-28898C6C1AD9}" dt="2025-04-22T19:53:15.872" v="66" actId="14100"/>
-          <ac:graphicFrameMkLst>
+        <pc:spChg chg="add mod">
+          <ac:chgData name="Lines, Todd" userId="afaf7c3a-e8aa-4568-882a-02ad8f9e19b0" providerId="ADAL" clId="{5FF5AC1B-ABA9-43D7-A1E3-2D92732CD6E2}" dt="2026-01-09T17:40:18.249" v="36" actId="1076"/>
+          <ac:spMkLst>
             <pc:docMk/>
             <pc:sldMk cId="0" sldId="387"/>
-            <ac:graphicFrameMk id="21510" creationId="{00000000-0000-0000-0000-000000000000}"/>
-          </ac:graphicFrameMkLst>
-        </pc:graphicFrameChg>
-        <pc:graphicFrameChg chg="mod">
-          <ac:chgData name="Lines, Todd" userId="afaf7c3a-e8aa-4568-882a-02ad8f9e19b0" providerId="ADAL" clId="{BA32A1C9-A891-44FA-83B4-28898C6C1AD9}" dt="2025-04-22T19:53:24.505" v="71" actId="1076"/>
-          <ac:graphicFrameMkLst>
+            <ac:spMk id="4" creationId="{0688E5AE-D9DC-DC83-D433-49C00485A109}"/>
+          </ac:spMkLst>
+        </pc:spChg>
+        <pc:picChg chg="add mod">
+          <ac:chgData name="Lines, Todd" userId="afaf7c3a-e8aa-4568-882a-02ad8f9e19b0" providerId="ADAL" clId="{5FF5AC1B-ABA9-43D7-A1E3-2D92732CD6E2}" dt="2026-01-09T17:38:49.082" v="3" actId="1076"/>
+          <ac:picMkLst>
             <pc:docMk/>
             <pc:sldMk cId="0" sldId="387"/>
-            <ac:graphicFrameMk id="21513" creationId="{00000000-0000-0000-0000-000000000000}"/>
-          </ac:graphicFrameMkLst>
-        </pc:graphicFrameChg>
+            <ac:picMk id="3" creationId="{917EC7B2-2F6A-A1B0-2D6A-3E58FC72C74C}"/>
+          </ac:picMkLst>
+        </pc:picChg>
+        <pc:picChg chg="del mod">
+          <ac:chgData name="Lines, Todd" userId="afaf7c3a-e8aa-4568-882a-02ad8f9e19b0" providerId="ADAL" clId="{5FF5AC1B-ABA9-43D7-A1E3-2D92732CD6E2}" dt="2026-01-09T17:40:35.923" v="38" actId="21"/>
+          <ac:picMkLst>
+            <pc:docMk/>
+            <pc:sldMk cId="0" sldId="387"/>
+            <ac:picMk id="5" creationId="{48E4702B-F6C4-68F5-D583-20CC6207BF8F}"/>
+          </ac:picMkLst>
+        </pc:picChg>
+        <pc:picChg chg="del mod">
+          <ac:chgData name="Lines, Todd" userId="afaf7c3a-e8aa-4568-882a-02ad8f9e19b0" providerId="ADAL" clId="{5FF5AC1B-ABA9-43D7-A1E3-2D92732CD6E2}" dt="2026-01-09T17:41:54.929" v="39" actId="478"/>
+          <ac:picMkLst>
+            <pc:docMk/>
+            <pc:sldMk cId="0" sldId="387"/>
+            <ac:picMk id="21522" creationId="{00000000-0000-0000-0000-000000000000}"/>
+          </ac:picMkLst>
+        </pc:picChg>
       </pc:sldChg>
-      <pc:sldChg chg="modSp add mod">
-        <pc:chgData name="Lines, Todd" userId="afaf7c3a-e8aa-4568-882a-02ad8f9e19b0" providerId="ADAL" clId="{BA32A1C9-A891-44FA-83B4-28898C6C1AD9}" dt="2025-04-22T19:53:53.640" v="83" actId="1076"/>
-        <pc:sldMkLst>
-          <pc:docMk/>
-          <pc:sldMk cId="0" sldId="388"/>
-        </pc:sldMkLst>
-        <pc:graphicFrameChg chg="mod">
-          <ac:chgData name="Lines, Todd" userId="afaf7c3a-e8aa-4568-882a-02ad8f9e19b0" providerId="ADAL" clId="{BA32A1C9-A891-44FA-83B4-28898C6C1AD9}" dt="2025-04-22T19:53:35.408" v="74" actId="1076"/>
-          <ac:graphicFrameMkLst>
-            <pc:docMk/>
-            <pc:sldMk cId="0" sldId="388"/>
-            <ac:graphicFrameMk id="22534" creationId="{00000000-0000-0000-0000-000000000000}"/>
-          </ac:graphicFrameMkLst>
-        </pc:graphicFrameChg>
-        <pc:graphicFrameChg chg="mod">
-          <ac:chgData name="Lines, Todd" userId="afaf7c3a-e8aa-4568-882a-02ad8f9e19b0" providerId="ADAL" clId="{BA32A1C9-A891-44FA-83B4-28898C6C1AD9}" dt="2025-04-22T19:53:46.184" v="80" actId="1076"/>
-          <ac:graphicFrameMkLst>
-            <pc:docMk/>
-            <pc:sldMk cId="0" sldId="388"/>
-            <ac:graphicFrameMk id="22536" creationId="{00000000-0000-0000-0000-000000000000}"/>
-          </ac:graphicFrameMkLst>
-        </pc:graphicFrameChg>
-        <pc:graphicFrameChg chg="mod">
-          <ac:chgData name="Lines, Todd" userId="afaf7c3a-e8aa-4568-882a-02ad8f9e19b0" providerId="ADAL" clId="{BA32A1C9-A891-44FA-83B4-28898C6C1AD9}" dt="2025-04-22T19:53:53.640" v="83" actId="1076"/>
-          <ac:graphicFrameMkLst>
-            <pc:docMk/>
-            <pc:sldMk cId="0" sldId="388"/>
-            <ac:graphicFrameMk id="22538" creationId="{00000000-0000-0000-0000-000000000000}"/>
-          </ac:graphicFrameMkLst>
-        </pc:graphicFrameChg>
-      </pc:sldChg>
-      <pc:sldChg chg="modSp add mod">
-        <pc:chgData name="Lines, Todd" userId="afaf7c3a-e8aa-4568-882a-02ad8f9e19b0" providerId="ADAL" clId="{BA32A1C9-A891-44FA-83B4-28898C6C1AD9}" dt="2025-04-22T19:50:50.551" v="3" actId="27636"/>
+      <pc:sldChg chg="addSp delSp modSp mod">
+        <pc:chgData name="Lines, Todd" userId="afaf7c3a-e8aa-4568-882a-02ad8f9e19b0" providerId="ADAL" clId="{5FF5AC1B-ABA9-43D7-A1E3-2D92732CD6E2}" dt="2026-01-09T17:43:12.805" v="54" actId="21"/>
         <pc:sldMkLst>
           <pc:docMk/>
           <pc:sldMk cId="0" sldId="389"/>
         </pc:sldMkLst>
-        <pc:spChg chg="mod">
-          <ac:chgData name="Lines, Todd" userId="afaf7c3a-e8aa-4568-882a-02ad8f9e19b0" providerId="ADAL" clId="{BA32A1C9-A891-44FA-83B4-28898C6C1AD9}" dt="2025-04-22T19:50:50.551" v="3" actId="27636"/>
+        <pc:spChg chg="add del">
+          <ac:chgData name="Lines, Todd" userId="afaf7c3a-e8aa-4568-882a-02ad8f9e19b0" providerId="ADAL" clId="{5FF5AC1B-ABA9-43D7-A1E3-2D92732CD6E2}" dt="2026-01-09T17:41:58.978" v="41" actId="22"/>
           <ac:spMkLst>
             <pc:docMk/>
             <pc:sldMk cId="0" sldId="389"/>
-            <ac:spMk id="23556" creationId="{00000000-0000-0000-0000-000000000000}"/>
+            <ac:spMk id="3" creationId="{6B2440F7-B73F-C573-554E-5458FB331C89}"/>
           </ac:spMkLst>
         </pc:spChg>
-      </pc:sldChg>
-      <pc:sldChg chg="addSp delSp modSp add mod delAnim modAnim">
-        <pc:chgData name="Lines, Todd" userId="afaf7c3a-e8aa-4568-882a-02ad8f9e19b0" providerId="ADAL" clId="{BA32A1C9-A891-44FA-83B4-28898C6C1AD9}" dt="2025-04-22T20:00:18.646" v="100" actId="1076"/>
-        <pc:sldMkLst>
-          <pc:docMk/>
-          <pc:sldMk cId="0" sldId="390"/>
-        </pc:sldMkLst>
-        <pc:spChg chg="mod">
-          <ac:chgData name="Lines, Todd" userId="afaf7c3a-e8aa-4568-882a-02ad8f9e19b0" providerId="ADAL" clId="{BA32A1C9-A891-44FA-83B4-28898C6C1AD9}" dt="2025-04-22T20:00:18.646" v="100" actId="1076"/>
+        <pc:spChg chg="add mod">
+          <ac:chgData name="Lines, Todd" userId="afaf7c3a-e8aa-4568-882a-02ad8f9e19b0" providerId="ADAL" clId="{5FF5AC1B-ABA9-43D7-A1E3-2D92732CD6E2}" dt="2026-01-09T17:43:01.051" v="52" actId="1076"/>
           <ac:spMkLst>
             <pc:docMk/>
-            <pc:sldMk cId="0" sldId="390"/>
-            <ac:spMk id="1030" creationId="{00000000-0000-0000-0000-000000000000}"/>
+            <pc:sldMk cId="0" sldId="389"/>
+            <ac:spMk id="6" creationId="{0C2E9D35-DB4B-E837-D5E1-83BA2E873ED1}"/>
           </ac:spMkLst>
         </pc:spChg>
-        <pc:picChg chg="del">
-          <ac:chgData name="Lines, Todd" userId="afaf7c3a-e8aa-4568-882a-02ad8f9e19b0" providerId="ADAL" clId="{BA32A1C9-A891-44FA-83B4-28898C6C1AD9}" dt="2025-04-22T19:59:41.384" v="92" actId="478"/>
+        <pc:picChg chg="add mod ord">
+          <ac:chgData name="Lines, Todd" userId="afaf7c3a-e8aa-4568-882a-02ad8f9e19b0" providerId="ADAL" clId="{5FF5AC1B-ABA9-43D7-A1E3-2D92732CD6E2}" dt="2026-01-09T17:42:33.080" v="50" actId="1076"/>
           <ac:picMkLst>
             <pc:docMk/>
-            <pc:sldMk cId="0" sldId="390"/>
-            <ac:picMk id="2" creationId="{37CE5177-B2E3-4149-9F63-13BA98027829}"/>
+            <pc:sldMk cId="0" sldId="389"/>
+            <ac:picMk id="5" creationId="{414AF7F8-B7BC-892C-BC49-0749EFE74294}"/>
           </ac:picMkLst>
         </pc:picChg>
-        <pc:picChg chg="add del mod">
-          <ac:chgData name="Lines, Todd" userId="afaf7c3a-e8aa-4568-882a-02ad8f9e19b0" providerId="ADAL" clId="{BA32A1C9-A891-44FA-83B4-28898C6C1AD9}" dt="2025-04-22T20:00:13.660" v="97" actId="478"/>
+        <pc:picChg chg="del mod">
+          <ac:chgData name="Lines, Todd" userId="afaf7c3a-e8aa-4568-882a-02ad8f9e19b0" providerId="ADAL" clId="{5FF5AC1B-ABA9-43D7-A1E3-2D92732CD6E2}" dt="2026-01-09T17:43:12.805" v="54" actId="21"/>
           <ac:picMkLst>
             <pc:docMk/>
-            <pc:sldMk cId="0" sldId="390"/>
-            <ac:picMk id="3" creationId="{F1559EC2-A262-A1B7-5ED5-F957796493CD}"/>
+            <pc:sldMk cId="0" sldId="389"/>
+            <ac:picMk id="7" creationId="{0385E765-D460-B164-CA1F-D64F97C820B7}"/>
           </ac:picMkLst>
         </pc:picChg>
         <pc:picChg chg="del">
-          <ac:chgData name="Lines, Todd" userId="afaf7c3a-e8aa-4568-882a-02ad8f9e19b0" providerId="ADAL" clId="{BA32A1C9-A891-44FA-83B4-28898C6C1AD9}" dt="2025-04-22T19:59:41.384" v="92" actId="478"/>
+          <ac:chgData name="Lines, Todd" userId="afaf7c3a-e8aa-4568-882a-02ad8f9e19b0" providerId="ADAL" clId="{5FF5AC1B-ABA9-43D7-A1E3-2D92732CD6E2}" dt="2026-01-09T17:42:18.048" v="47" actId="478"/>
           <ac:picMkLst>
             <pc:docMk/>
-            <pc:sldMk cId="0" sldId="390"/>
-            <ac:picMk id="1031" creationId="{00000000-0000-0000-0000-000000000000}"/>
+            <pc:sldMk cId="0" sldId="389"/>
+            <ac:picMk id="25602" creationId="{00000000-0000-0000-0000-000000000000}"/>
           </ac:picMkLst>
         </pc:picChg>
       </pc:sldChg>
-      <pc:sldChg chg="add">
-        <pc:chgData name="Lines, Todd" userId="afaf7c3a-e8aa-4568-882a-02ad8f9e19b0" providerId="ADAL" clId="{BA32A1C9-A891-44FA-83B4-28898C6C1AD9}" dt="2025-04-22T19:50:50.492" v="0"/>
-        <pc:sldMkLst>
-          <pc:docMk/>
-          <pc:sldMk cId="0" sldId="391"/>
-        </pc:sldMkLst>
-      </pc:sldChg>
-      <pc:sldChg chg="add">
-        <pc:chgData name="Lines, Todd" userId="afaf7c3a-e8aa-4568-882a-02ad8f9e19b0" providerId="ADAL" clId="{BA32A1C9-A891-44FA-83B4-28898C6C1AD9}" dt="2025-04-22T19:50:50.492" v="0"/>
-        <pc:sldMkLst>
-          <pc:docMk/>
-          <pc:sldMk cId="775210015" sldId="393"/>
-        </pc:sldMkLst>
-      </pc:sldChg>
-      <pc:sldChg chg="add">
-        <pc:chgData name="Lines, Todd" userId="afaf7c3a-e8aa-4568-882a-02ad8f9e19b0" providerId="ADAL" clId="{BA32A1C9-A891-44FA-83B4-28898C6C1AD9}" dt="2025-04-22T19:50:50.492" v="0"/>
+      <pc:sldChg chg="addSp delSp modSp mod">
+        <pc:chgData name="Lines, Todd" userId="afaf7c3a-e8aa-4568-882a-02ad8f9e19b0" providerId="ADAL" clId="{5FF5AC1B-ABA9-43D7-A1E3-2D92732CD6E2}" dt="2026-01-09T19:21:58.270" v="63" actId="21"/>
         <pc:sldMkLst>
           <pc:docMk/>
           <pc:sldMk cId="3934662764" sldId="394"/>
         </pc:sldMkLst>
-      </pc:sldChg>
-      <pc:sldChg chg="addSp delSp modSp new mod chgLayout">
-        <pc:chgData name="Lines, Todd" userId="afaf7c3a-e8aa-4568-882a-02ad8f9e19b0" providerId="ADAL" clId="{BA32A1C9-A891-44FA-83B4-28898C6C1AD9}" dt="2025-04-22T19:51:07.984" v="15" actId="20577"/>
-        <pc:sldMkLst>
-          <pc:docMk/>
-          <pc:sldMk cId="2675951293" sldId="395"/>
-        </pc:sldMkLst>
-        <pc:spChg chg="del">
-          <ac:chgData name="Lines, Todd" userId="afaf7c3a-e8aa-4568-882a-02ad8f9e19b0" providerId="ADAL" clId="{BA32A1C9-A891-44FA-83B4-28898C6C1AD9}" dt="2025-04-22T19:51:03.884" v="6" actId="700"/>
+        <pc:spChg chg="mod">
+          <ac:chgData name="Lines, Todd" userId="afaf7c3a-e8aa-4568-882a-02ad8f9e19b0" providerId="ADAL" clId="{5FF5AC1B-ABA9-43D7-A1E3-2D92732CD6E2}" dt="2026-01-09T19:21:55.452" v="61"/>
           <ac:spMkLst>
             <pc:docMk/>
-            <pc:sldMk cId="2675951293" sldId="395"/>
-            <ac:spMk id="2" creationId="{666F62CB-74C9-7FEF-B4A1-6BDAEB13D886}"/>
+            <pc:sldMk cId="3934662764" sldId="394"/>
+            <ac:spMk id="4" creationId="{D52807ED-C6F9-1CA6-3FC7-F6222DF83FD3}"/>
           </ac:spMkLst>
         </pc:spChg>
-        <pc:spChg chg="del">
-          <ac:chgData name="Lines, Todd" userId="afaf7c3a-e8aa-4568-882a-02ad8f9e19b0" providerId="ADAL" clId="{BA32A1C9-A891-44FA-83B4-28898C6C1AD9}" dt="2025-04-22T19:51:03.884" v="6" actId="700"/>
+        <pc:spChg chg="mod">
+          <ac:chgData name="Lines, Todd" userId="afaf7c3a-e8aa-4568-882a-02ad8f9e19b0" providerId="ADAL" clId="{5FF5AC1B-ABA9-43D7-A1E3-2D92732CD6E2}" dt="2026-01-09T19:21:55.452" v="61"/>
           <ac:spMkLst>
             <pc:docMk/>
-            <pc:sldMk cId="2675951293" sldId="395"/>
-            <ac:spMk id="3" creationId="{899E3367-E504-5EEC-5D9E-CFE034A85DC7}"/>
+            <pc:sldMk cId="3934662764" sldId="394"/>
+            <ac:spMk id="5" creationId="{D154C58A-5017-EB13-790A-7F47FF6D57A1}"/>
           </ac:spMkLst>
         </pc:spChg>
-        <pc:spChg chg="add mod ord">
-          <ac:chgData name="Lines, Todd" userId="afaf7c3a-e8aa-4568-882a-02ad8f9e19b0" providerId="ADAL" clId="{BA32A1C9-A891-44FA-83B4-28898C6C1AD9}" dt="2025-04-22T19:51:07.984" v="15" actId="20577"/>
+        <pc:spChg chg="mod">
+          <ac:chgData name="Lines, Todd" userId="afaf7c3a-e8aa-4568-882a-02ad8f9e19b0" providerId="ADAL" clId="{5FF5AC1B-ABA9-43D7-A1E3-2D92732CD6E2}" dt="2026-01-09T19:21:55.452" v="61"/>
           <ac:spMkLst>
             <pc:docMk/>
-            <pc:sldMk cId="2675951293" sldId="395"/>
-            <ac:spMk id="4" creationId="{3F9A2511-CE08-334E-C1AA-00486F792EB2}"/>
+            <pc:sldMk cId="3934662764" sldId="394"/>
+            <ac:spMk id="6" creationId="{D8F68066-E1F9-F9AF-C28D-58935341F1AC}"/>
           </ac:spMkLst>
         </pc:spChg>
-        <pc:spChg chg="add mod ord">
-          <ac:chgData name="Lines, Todd" userId="afaf7c3a-e8aa-4568-882a-02ad8f9e19b0" providerId="ADAL" clId="{BA32A1C9-A891-44FA-83B4-28898C6C1AD9}" dt="2025-04-22T19:51:03.884" v="6" actId="700"/>
+        <pc:spChg chg="mod">
+          <ac:chgData name="Lines, Todd" userId="afaf7c3a-e8aa-4568-882a-02ad8f9e19b0" providerId="ADAL" clId="{5FF5AC1B-ABA9-43D7-A1E3-2D92732CD6E2}" dt="2026-01-09T19:21:55.452" v="61"/>
           <ac:spMkLst>
             <pc:docMk/>
-            <pc:sldMk cId="2675951293" sldId="395"/>
-            <ac:spMk id="5" creationId="{59D50912-2B46-7BD3-859E-9EBF576744C1}"/>
+            <pc:sldMk cId="3934662764" sldId="394"/>
+            <ac:spMk id="7" creationId="{C2FDAEEC-5E5D-04DF-41C9-98412EDF8FEB}"/>
           </ac:spMkLst>
         </pc:spChg>
-      </pc:sldChg>
-      <pc:sldChg chg="addSp delSp modSp new mod modClrScheme chgLayout">
-        <pc:chgData name="Lines, Todd" userId="afaf7c3a-e8aa-4568-882a-02ad8f9e19b0" providerId="ADAL" clId="{BA32A1C9-A891-44FA-83B4-28898C6C1AD9}" dt="2025-04-22T19:54:19.520" v="91" actId="20577"/>
-        <pc:sldMkLst>
-          <pc:docMk/>
-          <pc:sldMk cId="1864722044" sldId="396"/>
-        </pc:sldMkLst>
-        <pc:spChg chg="del mod ord">
-          <ac:chgData name="Lines, Todd" userId="afaf7c3a-e8aa-4568-882a-02ad8f9e19b0" providerId="ADAL" clId="{BA32A1C9-A891-44FA-83B4-28898C6C1AD9}" dt="2025-04-22T19:54:16.434" v="85" actId="700"/>
+        <pc:spChg chg="mod">
+          <ac:chgData name="Lines, Todd" userId="afaf7c3a-e8aa-4568-882a-02ad8f9e19b0" providerId="ADAL" clId="{5FF5AC1B-ABA9-43D7-A1E3-2D92732CD6E2}" dt="2026-01-09T19:21:55.452" v="61"/>
           <ac:spMkLst>
             <pc:docMk/>
-            <pc:sldMk cId="1864722044" sldId="396"/>
-            <ac:spMk id="2" creationId="{52882E5D-FF70-13BE-F69C-F603FFED5236}"/>
+            <pc:sldMk cId="3934662764" sldId="394"/>
+            <ac:spMk id="8" creationId="{155B044E-7280-0CA0-7443-74226115CBC8}"/>
           </ac:spMkLst>
         </pc:spChg>
-        <pc:spChg chg="del mod ord">
-          <ac:chgData name="Lines, Todd" userId="afaf7c3a-e8aa-4568-882a-02ad8f9e19b0" providerId="ADAL" clId="{BA32A1C9-A891-44FA-83B4-28898C6C1AD9}" dt="2025-04-22T19:54:16.434" v="85" actId="700"/>
+        <pc:spChg chg="mod">
+          <ac:chgData name="Lines, Todd" userId="afaf7c3a-e8aa-4568-882a-02ad8f9e19b0" providerId="ADAL" clId="{5FF5AC1B-ABA9-43D7-A1E3-2D92732CD6E2}" dt="2026-01-09T19:21:55.452" v="61"/>
           <ac:spMkLst>
             <pc:docMk/>
-            <pc:sldMk cId="1864722044" sldId="396"/>
-            <ac:spMk id="3" creationId="{A4410AC5-2992-0657-5779-8776DEBC61EA}"/>
+            <pc:sldMk cId="3934662764" sldId="394"/>
+            <ac:spMk id="9" creationId="{4D2D531E-C995-FBA1-C360-A8B0C660A158}"/>
           </ac:spMkLst>
         </pc:spChg>
-        <pc:spChg chg="add mod ord">
-          <ac:chgData name="Lines, Todd" userId="afaf7c3a-e8aa-4568-882a-02ad8f9e19b0" providerId="ADAL" clId="{BA32A1C9-A891-44FA-83B4-28898C6C1AD9}" dt="2025-04-22T19:54:19.520" v="91" actId="20577"/>
+        <pc:spChg chg="mod">
+          <ac:chgData name="Lines, Todd" userId="afaf7c3a-e8aa-4568-882a-02ad8f9e19b0" providerId="ADAL" clId="{5FF5AC1B-ABA9-43D7-A1E3-2D92732CD6E2}" dt="2026-01-09T19:21:55.452" v="61"/>
           <ac:spMkLst>
             <pc:docMk/>
-            <pc:sldMk cId="1864722044" sldId="396"/>
-            <ac:spMk id="4" creationId="{530858EA-35F2-F243-52E6-60F9392877E5}"/>
+            <pc:sldMk cId="3934662764" sldId="394"/>
+            <ac:spMk id="12" creationId="{FADA63E4-0C89-129D-79AC-EC4209BDE054}"/>
           </ac:spMkLst>
         </pc:spChg>
-        <pc:spChg chg="add mod ord">
-          <ac:chgData name="Lines, Todd" userId="afaf7c3a-e8aa-4568-882a-02ad8f9e19b0" providerId="ADAL" clId="{BA32A1C9-A891-44FA-83B4-28898C6C1AD9}" dt="2025-04-22T19:54:16.434" v="85" actId="700"/>
+        <pc:spChg chg="mod">
+          <ac:chgData name="Lines, Todd" userId="afaf7c3a-e8aa-4568-882a-02ad8f9e19b0" providerId="ADAL" clId="{5FF5AC1B-ABA9-43D7-A1E3-2D92732CD6E2}" dt="2026-01-09T19:21:55.452" v="61"/>
           <ac:spMkLst>
             <pc:docMk/>
-            <pc:sldMk cId="1864722044" sldId="396"/>
-            <ac:spMk id="5" creationId="{7677F265-DCF8-2587-426B-3F55ABD8DF64}"/>
+            <pc:sldMk cId="3934662764" sldId="394"/>
+            <ac:spMk id="14" creationId="{78040F16-50B9-CD11-0636-BFD335B88DEB}"/>
           </ac:spMkLst>
         </pc:spChg>
-      </pc:sldChg>
-      <pc:sldChg chg="add">
-        <pc:chgData name="Lines, Todd" userId="afaf7c3a-e8aa-4568-882a-02ad8f9e19b0" providerId="ADAL" clId="{BA32A1C9-A891-44FA-83B4-28898C6C1AD9}" dt="2025-04-22T20:00:10.083" v="96"/>
-        <pc:sldMkLst>
-          <pc:docMk/>
-          <pc:sldMk cId="3531190067" sldId="397"/>
-        </pc:sldMkLst>
-      </pc:sldChg>
-      <pc:sldChg chg="addSp delSp modSp new mod modClrScheme chgLayout">
-        <pc:chgData name="Lines, Todd" userId="afaf7c3a-e8aa-4568-882a-02ad8f9e19b0" providerId="ADAL" clId="{BA32A1C9-A891-44FA-83B4-28898C6C1AD9}" dt="2025-04-22T20:06:01.446" v="105" actId="20577"/>
-        <pc:sldMkLst>
-          <pc:docMk/>
-          <pc:sldMk cId="2778188" sldId="398"/>
-        </pc:sldMkLst>
-        <pc:spChg chg="del mod ord">
-          <ac:chgData name="Lines, Todd" userId="afaf7c3a-e8aa-4568-882a-02ad8f9e19b0" providerId="ADAL" clId="{BA32A1C9-A891-44FA-83B4-28898C6C1AD9}" dt="2025-04-22T20:05:58.908" v="102" actId="700"/>
+        <pc:spChg chg="mod">
+          <ac:chgData name="Lines, Todd" userId="afaf7c3a-e8aa-4568-882a-02ad8f9e19b0" providerId="ADAL" clId="{5FF5AC1B-ABA9-43D7-A1E3-2D92732CD6E2}" dt="2026-01-09T19:21:55.452" v="61"/>
           <ac:spMkLst>
             <pc:docMk/>
-            <pc:sldMk cId="2778188" sldId="398"/>
-            <ac:spMk id="2" creationId="{55F75A3E-58D6-BBC9-5994-66EBCF001992}"/>
+            <pc:sldMk cId="3934662764" sldId="394"/>
+            <ac:spMk id="15" creationId="{79109A0D-C33A-77E7-7B69-B8EA0C37592E}"/>
           </ac:spMkLst>
         </pc:spChg>
-        <pc:spChg chg="del mod ord">
-          <ac:chgData name="Lines, Todd" userId="afaf7c3a-e8aa-4568-882a-02ad8f9e19b0" providerId="ADAL" clId="{BA32A1C9-A891-44FA-83B4-28898C6C1AD9}" dt="2025-04-22T20:05:58.908" v="102" actId="700"/>
-          <ac:spMkLst>
+        <pc:grpChg chg="add del mod">
+          <ac:chgData name="Lines, Todd" userId="afaf7c3a-e8aa-4568-882a-02ad8f9e19b0" providerId="ADAL" clId="{5FF5AC1B-ABA9-43D7-A1E3-2D92732CD6E2}" dt="2026-01-09T19:21:58.270" v="63" actId="21"/>
+          <ac:grpSpMkLst>
             <pc:docMk/>
-            <pc:sldMk cId="2778188" sldId="398"/>
-            <ac:spMk id="3" creationId="{7DE4AA75-0166-D90D-3E06-4D44569FDCEB}"/>
-          </ac:spMkLst>
-        </pc:spChg>
-        <pc:spChg chg="add mod ord">
-          <ac:chgData name="Lines, Todd" userId="afaf7c3a-e8aa-4568-882a-02ad8f9e19b0" providerId="ADAL" clId="{BA32A1C9-A891-44FA-83B4-28898C6C1AD9}" dt="2025-04-22T20:06:01.446" v="105" actId="20577"/>
-          <ac:spMkLst>
+            <pc:sldMk cId="3934662764" sldId="394"/>
+            <ac:grpSpMk id="3" creationId="{82C02C81-5530-CF3E-A600-CB0A3D226344}"/>
+          </ac:grpSpMkLst>
+        </pc:grpChg>
+        <pc:grpChg chg="mod">
+          <ac:chgData name="Lines, Todd" userId="afaf7c3a-e8aa-4568-882a-02ad8f9e19b0" providerId="ADAL" clId="{5FF5AC1B-ABA9-43D7-A1E3-2D92732CD6E2}" dt="2026-01-09T19:21:53.899" v="60" actId="1076"/>
+          <ac:grpSpMkLst>
             <pc:docMk/>
-            <pc:sldMk cId="2778188" sldId="398"/>
-            <ac:spMk id="4" creationId="{0DB75901-7201-0E74-13D3-85C2D3D5ACFD}"/>
-          </ac:spMkLst>
-        </pc:spChg>
-        <pc:spChg chg="add mod ord">
-          <ac:chgData name="Lines, Todd" userId="afaf7c3a-e8aa-4568-882a-02ad8f9e19b0" providerId="ADAL" clId="{BA32A1C9-A891-44FA-83B4-28898C6C1AD9}" dt="2025-04-22T20:05:58.908" v="102" actId="700"/>
-          <ac:spMkLst>
+            <pc:sldMk cId="3934662764" sldId="394"/>
+            <ac:grpSpMk id="451585" creationId="{00000000-0000-0000-0000-000000000000}"/>
+          </ac:grpSpMkLst>
+        </pc:grpChg>
+        <pc:cxnChg chg="mod">
+          <ac:chgData name="Lines, Todd" userId="afaf7c3a-e8aa-4568-882a-02ad8f9e19b0" providerId="ADAL" clId="{5FF5AC1B-ABA9-43D7-A1E3-2D92732CD6E2}" dt="2026-01-09T19:21:58.270" v="63" actId="21"/>
+          <ac:cxnSpMkLst>
             <pc:docMk/>
-            <pc:sldMk cId="2778188" sldId="398"/>
-            <ac:spMk id="5" creationId="{0CC70FC1-530F-7247-9A56-FD4C62B9B2A0}"/>
-          </ac:spMkLst>
-        </pc:spChg>
-      </pc:sldChg>
-    </pc:docChg>
-  </pc:docChgLst>
-  <pc:docChgLst>
-    <pc:chgData name="Lines, Todd" userId="afaf7c3a-e8aa-4568-882a-02ad8f9e19b0" providerId="ADAL" clId="{EB3C6100-2856-4A4E-BC58-789A0A2A91B1}"/>
-    <pc:docChg chg="undo custSel addSld delSld modSld sldOrd">
-      <pc:chgData name="Lines, Todd" userId="afaf7c3a-e8aa-4568-882a-02ad8f9e19b0" providerId="ADAL" clId="{EB3C6100-2856-4A4E-BC58-789A0A2A91B1}" dt="2019-04-26T16:03:20.602" v="1090" actId="2696"/>
-      <pc:docMkLst>
-        <pc:docMk/>
-      </pc:docMkLst>
-      <pc:sldChg chg="addSp modSp ord">
-        <pc:chgData name="Lines, Todd" userId="afaf7c3a-e8aa-4568-882a-02ad8f9e19b0" providerId="ADAL" clId="{EB3C6100-2856-4A4E-BC58-789A0A2A91B1}" dt="2019-04-26T00:01:13.041" v="1072"/>
-        <pc:sldMkLst>
-          <pc:docMk/>
-          <pc:sldMk cId="0" sldId="258"/>
-        </pc:sldMkLst>
-      </pc:sldChg>
-      <pc:sldChg chg="addSp delSp modSp">
-        <pc:chgData name="Lines, Todd" userId="afaf7c3a-e8aa-4568-882a-02ad8f9e19b0" providerId="ADAL" clId="{EB3C6100-2856-4A4E-BC58-789A0A2A91B1}" dt="2019-04-25T23:32:46.750" v="115" actId="108"/>
-        <pc:sldMkLst>
-          <pc:docMk/>
-          <pc:sldMk cId="3343280101" sldId="286"/>
-        </pc:sldMkLst>
-      </pc:sldChg>
-      <pc:sldChg chg="del">
-        <pc:chgData name="Lines, Todd" userId="afaf7c3a-e8aa-4568-882a-02ad8f9e19b0" providerId="ADAL" clId="{EB3C6100-2856-4A4E-BC58-789A0A2A91B1}" dt="2019-04-26T16:03:20.439" v="1081" actId="2696"/>
-        <pc:sldMkLst>
-          <pc:docMk/>
-          <pc:sldMk cId="1775400479" sldId="300"/>
-        </pc:sldMkLst>
-      </pc:sldChg>
-      <pc:sldChg chg="del">
-        <pc:chgData name="Lines, Todd" userId="afaf7c3a-e8aa-4568-882a-02ad8f9e19b0" providerId="ADAL" clId="{EB3C6100-2856-4A4E-BC58-789A0A2A91B1}" dt="2019-04-26T16:03:20.449" v="1082" actId="2696"/>
-        <pc:sldMkLst>
-          <pc:docMk/>
-          <pc:sldMk cId="4024671571" sldId="301"/>
-        </pc:sldMkLst>
-      </pc:sldChg>
-      <pc:sldChg chg="del">
-        <pc:chgData name="Lines, Todd" userId="afaf7c3a-e8aa-4568-882a-02ad8f9e19b0" providerId="ADAL" clId="{EB3C6100-2856-4A4E-BC58-789A0A2A91B1}" dt="2019-04-26T16:03:20.479" v="1083" actId="2696"/>
-        <pc:sldMkLst>
-          <pc:docMk/>
-          <pc:sldMk cId="1639505909" sldId="302"/>
-        </pc:sldMkLst>
-      </pc:sldChg>
-      <pc:sldChg chg="del">
-        <pc:chgData name="Lines, Todd" userId="afaf7c3a-e8aa-4568-882a-02ad8f9e19b0" providerId="ADAL" clId="{EB3C6100-2856-4A4E-BC58-789A0A2A91B1}" dt="2019-04-26T16:03:20.487" v="1084" actId="2696"/>
-        <pc:sldMkLst>
-          <pc:docMk/>
-          <pc:sldMk cId="1545355603" sldId="303"/>
-        </pc:sldMkLst>
-      </pc:sldChg>
-      <pc:sldChg chg="del">
-        <pc:chgData name="Lines, Todd" userId="afaf7c3a-e8aa-4568-882a-02ad8f9e19b0" providerId="ADAL" clId="{EB3C6100-2856-4A4E-BC58-789A0A2A91B1}" dt="2019-04-26T16:03:20.501" v="1085" actId="2696"/>
-        <pc:sldMkLst>
-          <pc:docMk/>
-          <pc:sldMk cId="1559963484" sldId="304"/>
-        </pc:sldMkLst>
-      </pc:sldChg>
-      <pc:sldChg chg="del">
-        <pc:chgData name="Lines, Todd" userId="afaf7c3a-e8aa-4568-882a-02ad8f9e19b0" providerId="ADAL" clId="{EB3C6100-2856-4A4E-BC58-789A0A2A91B1}" dt="2019-04-26T16:03:20.518" v="1086" actId="2696"/>
-        <pc:sldMkLst>
-          <pc:docMk/>
-          <pc:sldMk cId="3684801790" sldId="305"/>
-        </pc:sldMkLst>
-      </pc:sldChg>
-      <pc:sldChg chg="del">
-        <pc:chgData name="Lines, Todd" userId="afaf7c3a-e8aa-4568-882a-02ad8f9e19b0" providerId="ADAL" clId="{EB3C6100-2856-4A4E-BC58-789A0A2A91B1}" dt="2019-04-26T16:03:20.542" v="1087" actId="2696"/>
-        <pc:sldMkLst>
-          <pc:docMk/>
-          <pc:sldMk cId="4228948615" sldId="306"/>
-        </pc:sldMkLst>
-      </pc:sldChg>
-      <pc:sldChg chg="del">
-        <pc:chgData name="Lines, Todd" userId="afaf7c3a-e8aa-4568-882a-02ad8f9e19b0" providerId="ADAL" clId="{EB3C6100-2856-4A4E-BC58-789A0A2A91B1}" dt="2019-04-26T16:03:20.564" v="1088" actId="2696"/>
-        <pc:sldMkLst>
-          <pc:docMk/>
-          <pc:sldMk cId="716709095" sldId="307"/>
-        </pc:sldMkLst>
-      </pc:sldChg>
-      <pc:sldChg chg="del">
-        <pc:chgData name="Lines, Todd" userId="afaf7c3a-e8aa-4568-882a-02ad8f9e19b0" providerId="ADAL" clId="{EB3C6100-2856-4A4E-BC58-789A0A2A91B1}" dt="2019-04-26T16:03:20.584" v="1089" actId="2696"/>
-        <pc:sldMkLst>
-          <pc:docMk/>
-          <pc:sldMk cId="2251573784" sldId="308"/>
-        </pc:sldMkLst>
-      </pc:sldChg>
-      <pc:sldChg chg="del">
-        <pc:chgData name="Lines, Todd" userId="afaf7c3a-e8aa-4568-882a-02ad8f9e19b0" providerId="ADAL" clId="{EB3C6100-2856-4A4E-BC58-789A0A2A91B1}" dt="2019-04-26T16:03:20.602" v="1090" actId="2696"/>
-        <pc:sldMkLst>
-          <pc:docMk/>
-          <pc:sldMk cId="3132341175" sldId="309"/>
-        </pc:sldMkLst>
-      </pc:sldChg>
-      <pc:sldChg chg="addSp delSp modSp add">
-        <pc:chgData name="Lines, Todd" userId="afaf7c3a-e8aa-4568-882a-02ad8f9e19b0" providerId="ADAL" clId="{EB3C6100-2856-4A4E-BC58-789A0A2A91B1}" dt="2019-04-26T00:02:37.199" v="1080"/>
-        <pc:sldMkLst>
-          <pc:docMk/>
-          <pc:sldMk cId="1316543325" sldId="312"/>
-        </pc:sldMkLst>
+            <pc:sldMk cId="3934662764" sldId="394"/>
+            <ac:cxnSpMk id="16" creationId="{48B14E73-A8B2-C087-EF42-C8B90782A026}"/>
+          </ac:cxnSpMkLst>
+        </pc:cxnChg>
       </pc:sldChg>
     </pc:docChg>
   </pc:docChgLst>
@@ -851,7 +496,7 @@
             <a:fld id="{DA2CA0F8-BD70-4694-BD56-6665D6FFBF3C}" type="datetimeFigureOut">
               <a:rPr lang="en-US" smtClean="0"/>
               <a:pPr/>
-              <a:t>4/23/2025</a:t>
+              <a:t>1/9/2026</a:t>
             </a:fld>
             <a:endParaRPr lang="en-US"/>
           </a:p>
@@ -1824,7 +1469,7 @@
             <a:fld id="{81363FC6-F0D5-4376-9B97-08D3CD3871A3}" type="datetimeFigureOut">
               <a:rPr lang="en-US" smtClean="0"/>
               <a:pPr/>
-              <a:t>4/23/2025</a:t>
+              <a:t>1/9/2026</a:t>
             </a:fld>
             <a:endParaRPr lang="en-US"/>
           </a:p>
@@ -1989,7 +1634,7 @@
             <a:fld id="{81363FC6-F0D5-4376-9B97-08D3CD3871A3}" type="datetimeFigureOut">
               <a:rPr lang="en-US" smtClean="0"/>
               <a:pPr/>
-              <a:t>4/23/2025</a:t>
+              <a:t>1/9/2026</a:t>
             </a:fld>
             <a:endParaRPr lang="en-US"/>
           </a:p>
@@ -2164,7 +1809,7 @@
             <a:fld id="{81363FC6-F0D5-4376-9B97-08D3CD3871A3}" type="datetimeFigureOut">
               <a:rPr lang="en-US" smtClean="0"/>
               <a:pPr/>
-              <a:t>4/23/2025</a:t>
+              <a:t>1/9/2026</a:t>
             </a:fld>
             <a:endParaRPr lang="en-US"/>
           </a:p>
@@ -2329,7 +1974,7 @@
             <a:fld id="{81363FC6-F0D5-4376-9B97-08D3CD3871A3}" type="datetimeFigureOut">
               <a:rPr lang="en-US" smtClean="0"/>
               <a:pPr/>
-              <a:t>4/23/2025</a:t>
+              <a:t>1/9/2026</a:t>
             </a:fld>
             <a:endParaRPr lang="en-US"/>
           </a:p>
@@ -2571,7 +2216,7 @@
             <a:fld id="{81363FC6-F0D5-4376-9B97-08D3CD3871A3}" type="datetimeFigureOut">
               <a:rPr lang="en-US" smtClean="0"/>
               <a:pPr/>
-              <a:t>4/23/2025</a:t>
+              <a:t>1/9/2026</a:t>
             </a:fld>
             <a:endParaRPr lang="en-US"/>
           </a:p>
@@ -2853,7 +2498,7 @@
             <a:fld id="{81363FC6-F0D5-4376-9B97-08D3CD3871A3}" type="datetimeFigureOut">
               <a:rPr lang="en-US" smtClean="0"/>
               <a:pPr/>
-              <a:t>4/23/2025</a:t>
+              <a:t>1/9/2026</a:t>
             </a:fld>
             <a:endParaRPr lang="en-US"/>
           </a:p>
@@ -3269,7 +2914,7 @@
             <a:fld id="{81363FC6-F0D5-4376-9B97-08D3CD3871A3}" type="datetimeFigureOut">
               <a:rPr lang="en-US" smtClean="0"/>
               <a:pPr/>
-              <a:t>4/23/2025</a:t>
+              <a:t>1/9/2026</a:t>
             </a:fld>
             <a:endParaRPr lang="en-US"/>
           </a:p>
@@ -3383,7 +3028,7 @@
             <a:fld id="{81363FC6-F0D5-4376-9B97-08D3CD3871A3}" type="datetimeFigureOut">
               <a:rPr lang="en-US" smtClean="0"/>
               <a:pPr/>
-              <a:t>4/23/2025</a:t>
+              <a:t>1/9/2026</a:t>
             </a:fld>
             <a:endParaRPr lang="en-US"/>
           </a:p>
@@ -3475,7 +3120,7 @@
             <a:fld id="{81363FC6-F0D5-4376-9B97-08D3CD3871A3}" type="datetimeFigureOut">
               <a:rPr lang="en-US" smtClean="0"/>
               <a:pPr/>
-              <a:t>4/23/2025</a:t>
+              <a:t>1/9/2026</a:t>
             </a:fld>
             <a:endParaRPr lang="en-US"/>
           </a:p>
@@ -3747,7 +3392,7 @@
             <a:fld id="{81363FC6-F0D5-4376-9B97-08D3CD3871A3}" type="datetimeFigureOut">
               <a:rPr lang="en-US" smtClean="0"/>
               <a:pPr/>
-              <a:t>4/23/2025</a:t>
+              <a:t>1/9/2026</a:t>
             </a:fld>
             <a:endParaRPr lang="en-US"/>
           </a:p>
@@ -3996,7 +3641,7 @@
             <a:fld id="{81363FC6-F0D5-4376-9B97-08D3CD3871A3}" type="datetimeFigureOut">
               <a:rPr lang="en-US" smtClean="0"/>
               <a:pPr/>
-              <a:t>4/23/2025</a:t>
+              <a:t>1/9/2026</a:t>
             </a:fld>
             <a:endParaRPr lang="en-US"/>
           </a:p>
@@ -4204,7 +3849,7 @@
             <a:fld id="{81363FC6-F0D5-4376-9B97-08D3CD3871A3}" type="datetimeFigureOut">
               <a:rPr lang="en-US" smtClean="0"/>
               <a:pPr/>
-              <a:t>4/23/2025</a:t>
+              <a:t>1/9/2026</a:t>
             </a:fld>
             <a:endParaRPr lang="en-US"/>
           </a:p>
@@ -18620,7 +18265,7 @@
         </p:nvGrpSpPr>
         <p:grpSpPr bwMode="auto">
           <a:xfrm>
-            <a:off x="4311255" y="1920480"/>
+            <a:off x="4351734" y="1918692"/>
             <a:ext cx="440531" cy="3020615"/>
             <a:chOff x="4109150" y="685800"/>
             <a:chExt cx="587050" cy="4029020"/>
@@ -51711,68 +51356,128 @@
       </p:graphicFrame>
       <p:pic>
         <p:nvPicPr>
-          <p:cNvPr id="21522" name="Picture 18"/>
+          <p:cNvPr id="3" name="Picture 2">
+            <a:extLst>
+              <a:ext uri="{FF2B5EF4-FFF2-40B4-BE49-F238E27FC236}">
+                <a16:creationId xmlns:a16="http://schemas.microsoft.com/office/drawing/2014/main" id="{917EC7B2-2F6A-A1B0-2D6A-3E58FC72C74C}"/>
+              </a:ext>
+            </a:extLst>
+          </p:cNvPr>
           <p:cNvPicPr>
-            <a:picLocks noChangeAspect="1" noChangeArrowheads="1"/>
+            <a:picLocks noChangeAspect="1"/>
           </p:cNvPicPr>
           <p:nvPr/>
         </p:nvPicPr>
         <p:blipFill>
-          <a:blip r:embed="rId6">
-            <a:extLst>
-              <a:ext uri="{28A0092B-C50C-407E-A947-70E740481C1C}">
-                <a14:useLocalDpi xmlns:a14="http://schemas.microsoft.com/office/drawing/2010/main" val="0"/>
-              </a:ext>
-            </a:extLst>
-          </a:blip>
-          <a:srcRect/>
+          <a:blip r:embed="rId6"/>
           <a:stretch>
             <a:fillRect/>
           </a:stretch>
         </p:blipFill>
-        <p:spPr bwMode="auto">
+        <p:spPr>
           <a:xfrm>
-            <a:off x="3510133" y="2710545"/>
-            <a:ext cx="3848610" cy="2562417"/>
+            <a:off x="3796654" y="2814615"/>
+            <a:ext cx="4014788" cy="2676525"/>
           </a:xfrm>
           <a:prstGeom prst="rect">
             <a:avLst/>
           </a:prstGeom>
-          <a:noFill/>
-          <a:ln>
-            <a:noFill/>
-          </a:ln>
-          <a:effectLst/>
-          <a:extLst>
-            <a:ext uri="{909E8E84-426E-40DD-AFC4-6F175D3DCCD1}">
-              <a14:hiddenFill xmlns:a14="http://schemas.microsoft.com/office/drawing/2010/main">
-                <a:solidFill>
-                  <a:schemeClr val="accent1"/>
-                </a:solidFill>
-              </a14:hiddenFill>
-            </a:ext>
-            <a:ext uri="{91240B29-F687-4F45-9708-019B960494DF}">
-              <a14:hiddenLine xmlns:a14="http://schemas.microsoft.com/office/drawing/2010/main" w="9525">
-                <a:solidFill>
-                  <a:schemeClr val="tx1"/>
-                </a:solidFill>
-                <a:miter lim="800000"/>
-                <a:headEnd/>
-                <a:tailEnd/>
-              </a14:hiddenLine>
-            </a:ext>
-            <a:ext uri="{AF507438-7753-43E0-B8FC-AC1667EBCBE1}">
-              <a14:hiddenEffects xmlns:a14="http://schemas.microsoft.com/office/drawing/2010/main">
-                <a:effectLst>
-                  <a:outerShdw dist="35921" dir="2700000" algn="ctr" rotWithShape="0">
-                    <a:schemeClr val="bg2"/>
-                  </a:outerShdw>
-                </a:effectLst>
-              </a14:hiddenEffects>
-            </a:ext>
-          </a:extLst>
         </p:spPr>
       </p:pic>
+      <mc:AlternateContent xmlns:mc="http://schemas.openxmlformats.org/markup-compatibility/2006" xmlns:a14="http://schemas.microsoft.com/office/drawing/2010/main">
+        <mc:Choice Requires="a14">
+          <p:sp>
+            <p:nvSpPr>
+              <p:cNvPr id="4" name="TextBox 3">
+                <a:extLst>
+                  <a:ext uri="{FF2B5EF4-FFF2-40B4-BE49-F238E27FC236}">
+                    <a16:creationId xmlns:a16="http://schemas.microsoft.com/office/drawing/2014/main" id="{0688E5AE-D9DC-DC83-D433-49C00485A109}"/>
+                  </a:ext>
+                </a:extLst>
+              </p:cNvPr>
+              <p:cNvSpPr txBox="1"/>
+              <p:nvPr/>
+            </p:nvSpPr>
+            <p:spPr>
+              <a:xfrm>
+                <a:off x="6996756" y="5405005"/>
+                <a:ext cx="1027032" cy="276999"/>
+              </a:xfrm>
+              <a:prstGeom prst="rect">
+                <a:avLst/>
+              </a:prstGeom>
+              <a:noFill/>
+            </p:spPr>
+            <p:txBody>
+              <a:bodyPr wrap="square" rtlCol="0">
+                <a:spAutoFit/>
+              </a:bodyPr>
+              <a:lstStyle/>
+              <a:p>
+                <a14:m>
+                  <m:oMath xmlns:m="http://schemas.openxmlformats.org/officeDocument/2006/math">
+                    <m:r>
+                      <a:rPr lang="en-US" sz="1200" i="1" smtClean="0">
+                        <a:latin typeface="Cambria Math" panose="02040503050406030204" pitchFamily="18" charset="0"/>
+                        <a:ea typeface="Cambria Math" panose="02040503050406030204" pitchFamily="18" charset="0"/>
+                      </a:rPr>
+                      <m:t>𝜔</m:t>
+                    </m:r>
+                  </m:oMath>
+                </a14:m>
+                <a:r>
+                  <a:rPr lang="en-US" sz="1200" dirty="0"/>
+                  <a:t> (rad/sec)</a:t>
+                </a:r>
+              </a:p>
+            </p:txBody>
+          </p:sp>
+        </mc:Choice>
+        <mc:Fallback xmlns="">
+          <p:sp>
+            <p:nvSpPr>
+              <p:cNvPr id="4" name="TextBox 3">
+                <a:extLst>
+                  <a:ext uri="{FF2B5EF4-FFF2-40B4-BE49-F238E27FC236}">
+                    <a16:creationId xmlns:a16="http://schemas.microsoft.com/office/drawing/2014/main" id="{0688E5AE-D9DC-DC83-D433-49C00485A109}"/>
+                  </a:ext>
+                </a:extLst>
+              </p:cNvPr>
+              <p:cNvSpPr txBox="1">
+                <a:spLocks noRot="1" noChangeAspect="1" noMove="1" noResize="1" noEditPoints="1" noAdjustHandles="1" noChangeArrowheads="1" noChangeShapeType="1" noTextEdit="1"/>
+              </p:cNvSpPr>
+              <p:nvPr/>
+            </p:nvSpPr>
+            <p:spPr>
+              <a:xfrm>
+                <a:off x="6996756" y="5405005"/>
+                <a:ext cx="1027032" cy="276999"/>
+              </a:xfrm>
+              <a:prstGeom prst="rect">
+                <a:avLst/>
+              </a:prstGeom>
+              <a:blipFill>
+                <a:blip r:embed="rId7"/>
+                <a:stretch>
+                  <a:fillRect t="-2222" b="-17778"/>
+                </a:stretch>
+              </a:blipFill>
+            </p:spPr>
+            <p:txBody>
+              <a:bodyPr/>
+              <a:lstStyle/>
+              <a:p>
+                <a:r>
+                  <a:rPr lang="en-US">
+                    <a:noFill/>
+                  </a:rPr>
+                  <a:t> </a:t>
+                </a:r>
+              </a:p>
+            </p:txBody>
+          </p:sp>
+        </mc:Fallback>
+      </mc:AlternateContent>
     </p:spTree>
   </p:cSld>
   <p:clrMapOvr>
@@ -52420,66 +52125,32 @@
       </p:grpSpPr>
       <p:pic>
         <p:nvPicPr>
-          <p:cNvPr id="25602" name="Picture 2"/>
+          <p:cNvPr id="5" name="Picture 4">
+            <a:extLst>
+              <a:ext uri="{FF2B5EF4-FFF2-40B4-BE49-F238E27FC236}">
+                <a16:creationId xmlns:a16="http://schemas.microsoft.com/office/drawing/2014/main" id="{414AF7F8-B7BC-892C-BC49-0749EFE74294}"/>
+              </a:ext>
+            </a:extLst>
+          </p:cNvPr>
           <p:cNvPicPr>
-            <a:picLocks noChangeAspect="1" noChangeArrowheads="1"/>
+            <a:picLocks noChangeAspect="1"/>
           </p:cNvPicPr>
           <p:nvPr/>
         </p:nvPicPr>
         <p:blipFill>
-          <a:blip r:embed="rId2">
-            <a:extLst>
-              <a:ext uri="{28A0092B-C50C-407E-A947-70E740481C1C}">
-                <a14:useLocalDpi xmlns:a14="http://schemas.microsoft.com/office/drawing/2010/main" val="0"/>
-              </a:ext>
-            </a:extLst>
-          </a:blip>
-          <a:srcRect/>
+          <a:blip r:embed="rId2"/>
           <a:stretch>
             <a:fillRect/>
           </a:stretch>
         </p:blipFill>
-        <p:spPr bwMode="auto">
+        <p:spPr>
           <a:xfrm>
-            <a:off x="4015620" y="2107157"/>
-            <a:ext cx="3750992" cy="2497422"/>
+            <a:off x="4000411" y="1996497"/>
+            <a:ext cx="3750992" cy="2500661"/>
           </a:xfrm>
           <a:prstGeom prst="rect">
             <a:avLst/>
           </a:prstGeom>
-          <a:noFill/>
-          <a:ln>
-            <a:noFill/>
-          </a:ln>
-          <a:effectLst/>
-          <a:extLst>
-            <a:ext uri="{909E8E84-426E-40DD-AFC4-6F175D3DCCD1}">
-              <a14:hiddenFill xmlns:a14="http://schemas.microsoft.com/office/drawing/2010/main">
-                <a:solidFill>
-                  <a:schemeClr val="accent1"/>
-                </a:solidFill>
-              </a14:hiddenFill>
-            </a:ext>
-            <a:ext uri="{91240B29-F687-4F45-9708-019B960494DF}">
-              <a14:hiddenLine xmlns:a14="http://schemas.microsoft.com/office/drawing/2010/main" w="9525">
-                <a:solidFill>
-                  <a:schemeClr val="tx1"/>
-                </a:solidFill>
-                <a:miter lim="800000"/>
-                <a:headEnd/>
-                <a:tailEnd/>
-              </a14:hiddenLine>
-            </a:ext>
-            <a:ext uri="{AF507438-7753-43E0-B8FC-AC1667EBCBE1}">
-              <a14:hiddenEffects xmlns:a14="http://schemas.microsoft.com/office/drawing/2010/main">
-                <a:effectLst>
-                  <a:outerShdw dist="35921" dir="2700000" algn="ctr" rotWithShape="0">
-                    <a:schemeClr val="bg2"/>
-                  </a:outerShdw>
-                </a:effectLst>
-              </a14:hiddenEffects>
-            </a:ext>
-          </a:extLst>
         </p:spPr>
       </p:pic>
       <p:sp>
@@ -53074,6 +52745,100 @@
           </a:p>
         </p:txBody>
       </p:sp>
+      <mc:AlternateContent xmlns:mc="http://schemas.openxmlformats.org/markup-compatibility/2006" xmlns:a14="http://schemas.microsoft.com/office/drawing/2010/main">
+        <mc:Choice Requires="a14">
+          <p:sp>
+            <p:nvSpPr>
+              <p:cNvPr id="6" name="TextBox 5">
+                <a:extLst>
+                  <a:ext uri="{FF2B5EF4-FFF2-40B4-BE49-F238E27FC236}">
+                    <a16:creationId xmlns:a16="http://schemas.microsoft.com/office/drawing/2014/main" id="{0C2E9D35-DB4B-E837-D5E1-83BA2E873ED1}"/>
+                  </a:ext>
+                </a:extLst>
+              </p:cNvPr>
+              <p:cNvSpPr txBox="1"/>
+              <p:nvPr/>
+            </p:nvSpPr>
+            <p:spPr>
+              <a:xfrm>
+                <a:off x="7011110" y="4440611"/>
+                <a:ext cx="1027032" cy="276999"/>
+              </a:xfrm>
+              <a:prstGeom prst="rect">
+                <a:avLst/>
+              </a:prstGeom>
+              <a:noFill/>
+            </p:spPr>
+            <p:txBody>
+              <a:bodyPr wrap="square" rtlCol="0">
+                <a:spAutoFit/>
+              </a:bodyPr>
+              <a:lstStyle/>
+              <a:p>
+                <a14:m>
+                  <m:oMath xmlns:m="http://schemas.openxmlformats.org/officeDocument/2006/math">
+                    <m:r>
+                      <a:rPr lang="en-US" sz="1200" i="1" smtClean="0">
+                        <a:latin typeface="Cambria Math" panose="02040503050406030204" pitchFamily="18" charset="0"/>
+                        <a:ea typeface="Cambria Math" panose="02040503050406030204" pitchFamily="18" charset="0"/>
+                      </a:rPr>
+                      <m:t>𝜔</m:t>
+                    </m:r>
+                  </m:oMath>
+                </a14:m>
+                <a:r>
+                  <a:rPr lang="en-US" sz="1200" dirty="0"/>
+                  <a:t> (rad/sec)</a:t>
+                </a:r>
+              </a:p>
+            </p:txBody>
+          </p:sp>
+        </mc:Choice>
+        <mc:Fallback xmlns="">
+          <p:sp>
+            <p:nvSpPr>
+              <p:cNvPr id="6" name="TextBox 5">
+                <a:extLst>
+                  <a:ext uri="{FF2B5EF4-FFF2-40B4-BE49-F238E27FC236}">
+                    <a16:creationId xmlns:a16="http://schemas.microsoft.com/office/drawing/2014/main" id="{0C2E9D35-DB4B-E837-D5E1-83BA2E873ED1}"/>
+                  </a:ext>
+                </a:extLst>
+              </p:cNvPr>
+              <p:cNvSpPr txBox="1">
+                <a:spLocks noRot="1" noChangeAspect="1" noMove="1" noResize="1" noEditPoints="1" noAdjustHandles="1" noChangeArrowheads="1" noChangeShapeType="1" noTextEdit="1"/>
+              </p:cNvSpPr>
+              <p:nvPr/>
+            </p:nvSpPr>
+            <p:spPr>
+              <a:xfrm>
+                <a:off x="7011110" y="4440611"/>
+                <a:ext cx="1027032" cy="276999"/>
+              </a:xfrm>
+              <a:prstGeom prst="rect">
+                <a:avLst/>
+              </a:prstGeom>
+              <a:blipFill>
+                <a:blip r:embed="rId3"/>
+                <a:stretch>
+                  <a:fillRect b="-15217"/>
+                </a:stretch>
+              </a:blipFill>
+            </p:spPr>
+            <p:txBody>
+              <a:bodyPr/>
+              <a:lstStyle/>
+              <a:p>
+                <a:r>
+                  <a:rPr lang="en-US">
+                    <a:noFill/>
+                  </a:rPr>
+                  <a:t> </a:t>
+                </a:r>
+              </a:p>
+            </p:txBody>
+          </p:sp>
+        </mc:Fallback>
+      </mc:AlternateContent>
     </p:spTree>
   </p:cSld>
   <p:clrMapOvr>

--- a/Lecture_Slides/PH 123 Lecture 04.pptx
+++ b/Lecture_Slides/PH 123 Lecture 04.pptx
@@ -175,7 +175,7 @@
 <file path=ppt/revisionInfo.xml><?xml version="1.0" encoding="utf-8"?>
 <p1510:revInfo xmlns:a="http://schemas.openxmlformats.org/drawingml/2006/main" xmlns:r="http://schemas.openxmlformats.org/officeDocument/2006/relationships" xmlns:p1510="http://schemas.microsoft.com/office/powerpoint/2015/10/main">
   <p1510:revLst>
-    <p1510:client id="{14AFEE76-69E8-4B0A-917A-00F4FEB8CE72}" v="41" dt="2026-01-09T19:21:55.452"/>
+    <p1510:client id="{2B3D251A-BFC7-4975-A9F2-C2C806C625C9}" v="46" dt="2026-04-22T21:08:29.484"/>
   </p1510:revLst>
 </p1510:revInfo>
 </file>
@@ -185,228 +185,221 @@
   <pc:docChgLst>
     <pc:chgData name="Lines, Todd" userId="afaf7c3a-e8aa-4568-882a-02ad8f9e19b0" providerId="ADAL" clId="{5FF5AC1B-ABA9-43D7-A1E3-2D92732CD6E2}"/>
     <pc:docChg chg="undo custSel modSld">
-      <pc:chgData name="Lines, Todd" userId="afaf7c3a-e8aa-4568-882a-02ad8f9e19b0" providerId="ADAL" clId="{5FF5AC1B-ABA9-43D7-A1E3-2D92732CD6E2}" dt="2026-01-09T19:21:58.270" v="63" actId="21"/>
+      <pc:chgData name="Lines, Todd" userId="afaf7c3a-e8aa-4568-882a-02ad8f9e19b0" providerId="ADAL" clId="{5FF5AC1B-ABA9-43D7-A1E3-2D92732CD6E2}" dt="2026-04-22T21:08:29.484" v="174" actId="6549"/>
       <pc:docMkLst>
         <pc:docMk/>
       </pc:docMkLst>
-      <pc:sldChg chg="delSp modSp mod">
-        <pc:chgData name="Lines, Todd" userId="afaf7c3a-e8aa-4568-882a-02ad8f9e19b0" providerId="ADAL" clId="{5FF5AC1B-ABA9-43D7-A1E3-2D92732CD6E2}" dt="2026-01-09T17:55:28.723" v="57" actId="21"/>
+      <pc:sldChg chg="addSp delSp modSp mod">
+        <pc:chgData name="Lines, Todd" userId="afaf7c3a-e8aa-4568-882a-02ad8f9e19b0" providerId="ADAL" clId="{5FF5AC1B-ABA9-43D7-A1E3-2D92732CD6E2}" dt="2026-04-22T21:05:53.764" v="106" actId="20577"/>
         <pc:sldMkLst>
           <pc:docMk/>
-          <pc:sldMk cId="2674272521" sldId="270"/>
+          <pc:sldMk cId="0" sldId="386"/>
         </pc:sldMkLst>
-        <pc:picChg chg="del mod">
-          <ac:chgData name="Lines, Todd" userId="afaf7c3a-e8aa-4568-882a-02ad8f9e19b0" providerId="ADAL" clId="{5FF5AC1B-ABA9-43D7-A1E3-2D92732CD6E2}" dt="2026-01-09T17:55:28.723" v="57" actId="21"/>
-          <ac:picMkLst>
+        <pc:spChg chg="add mod">
+          <ac:chgData name="Lines, Todd" userId="afaf7c3a-e8aa-4568-882a-02ad8f9e19b0" providerId="ADAL" clId="{5FF5AC1B-ABA9-43D7-A1E3-2D92732CD6E2}" dt="2026-04-22T21:05:48.983" v="102" actId="20577"/>
+          <ac:spMkLst>
             <pc:docMk/>
-            <pc:sldMk cId="2674272521" sldId="270"/>
-            <ac:picMk id="2" creationId="{13400C51-6D92-AD1C-33D0-8C8BDD5E2D75}"/>
-          </ac:picMkLst>
-        </pc:picChg>
-      </pc:sldChg>
-      <pc:sldChg chg="delSp modSp mod">
-        <pc:chgData name="Lines, Todd" userId="afaf7c3a-e8aa-4568-882a-02ad8f9e19b0" providerId="ADAL" clId="{5FF5AC1B-ABA9-43D7-A1E3-2D92732CD6E2}" dt="2026-01-09T17:56:31.888" v="59" actId="21"/>
-        <pc:sldMkLst>
-          <pc:docMk/>
-          <pc:sldMk cId="3489346234" sldId="271"/>
-        </pc:sldMkLst>
-        <pc:picChg chg="del mod">
-          <ac:chgData name="Lines, Todd" userId="afaf7c3a-e8aa-4568-882a-02ad8f9e19b0" providerId="ADAL" clId="{5FF5AC1B-ABA9-43D7-A1E3-2D92732CD6E2}" dt="2026-01-09T17:56:31.888" v="59" actId="21"/>
-          <ac:picMkLst>
+            <pc:sldMk cId="0" sldId="386"/>
+            <ac:spMk id="20488" creationId="{00000000-0000-0000-0000-000000000000}"/>
+          </ac:spMkLst>
+        </pc:spChg>
+        <pc:spChg chg="add mod">
+          <ac:chgData name="Lines, Todd" userId="afaf7c3a-e8aa-4568-882a-02ad8f9e19b0" providerId="ADAL" clId="{5FF5AC1B-ABA9-43D7-A1E3-2D92732CD6E2}" dt="2026-04-22T21:05:02.406" v="76" actId="20577"/>
+          <ac:spMkLst>
             <pc:docMk/>
-            <pc:sldMk cId="3489346234" sldId="271"/>
-            <ac:picMk id="2" creationId="{A59A5F2B-0AD5-6368-BC9B-DE962C1AD9E9}"/>
-          </ac:picMkLst>
-        </pc:picChg>
+            <pc:sldMk cId="0" sldId="386"/>
+            <ac:spMk id="20490" creationId="{00000000-0000-0000-0000-000000000000}"/>
+          </ac:spMkLst>
+        </pc:spChg>
+        <pc:spChg chg="add mod">
+          <ac:chgData name="Lines, Todd" userId="afaf7c3a-e8aa-4568-882a-02ad8f9e19b0" providerId="ADAL" clId="{5FF5AC1B-ABA9-43D7-A1E3-2D92732CD6E2}" dt="2026-04-22T21:05:53.764" v="106" actId="20577"/>
+          <ac:spMkLst>
+            <pc:docMk/>
+            <pc:sldMk cId="0" sldId="386"/>
+            <ac:spMk id="20491" creationId="{00000000-0000-0000-0000-000000000000}"/>
+          </ac:spMkLst>
+        </pc:spChg>
+        <pc:spChg chg="add mod">
+          <ac:chgData name="Lines, Todd" userId="afaf7c3a-e8aa-4568-882a-02ad8f9e19b0" providerId="ADAL" clId="{5FF5AC1B-ABA9-43D7-A1E3-2D92732CD6E2}" dt="2026-04-22T21:05:36.244" v="93" actId="14100"/>
+          <ac:spMkLst>
+            <pc:docMk/>
+            <pc:sldMk cId="0" sldId="386"/>
+            <ac:spMk id="20492" creationId="{00000000-0000-0000-0000-000000000000}"/>
+          </ac:spMkLst>
+        </pc:spChg>
+        <pc:graphicFrameChg chg="del mod replId">
+          <ac:chgData name="Lines, Todd" userId="afaf7c3a-e8aa-4568-882a-02ad8f9e19b0" providerId="ADAL" clId="{5FF5AC1B-ABA9-43D7-A1E3-2D92732CD6E2}" dt="2026-04-22T21:04:44.896" v="65"/>
+          <ac:graphicFrameMkLst>
+            <pc:docMk/>
+            <pc:sldMk cId="0" sldId="386"/>
+            <ac:graphicFrameMk id="2" creationId="{00000000-0000-0000-0000-000000000000}"/>
+          </ac:graphicFrameMkLst>
+        </pc:graphicFrameChg>
+        <pc:graphicFrameChg chg="del mod replId">
+          <ac:chgData name="Lines, Todd" userId="afaf7c3a-e8aa-4568-882a-02ad8f9e19b0" providerId="ADAL" clId="{5FF5AC1B-ABA9-43D7-A1E3-2D92732CD6E2}" dt="2026-04-22T21:04:58.997" v="73"/>
+          <ac:graphicFrameMkLst>
+            <pc:docMk/>
+            <pc:sldMk cId="0" sldId="386"/>
+            <ac:graphicFrameMk id="4" creationId="{00000000-0000-0000-0000-000000000000}"/>
+          </ac:graphicFrameMkLst>
+        </pc:graphicFrameChg>
+        <pc:graphicFrameChg chg="del mod replId">
+          <ac:chgData name="Lines, Todd" userId="afaf7c3a-e8aa-4568-882a-02ad8f9e19b0" providerId="ADAL" clId="{5FF5AC1B-ABA9-43D7-A1E3-2D92732CD6E2}" dt="2026-04-22T21:05:10.387" v="78"/>
+          <ac:graphicFrameMkLst>
+            <pc:docMk/>
+            <pc:sldMk cId="0" sldId="386"/>
+            <ac:graphicFrameMk id="6" creationId="{00000000-0000-0000-0000-000000000000}"/>
+          </ac:graphicFrameMkLst>
+        </pc:graphicFrameChg>
+        <pc:graphicFrameChg chg="del mod replId">
+          <ac:chgData name="Lines, Todd" userId="afaf7c3a-e8aa-4568-882a-02ad8f9e19b0" providerId="ADAL" clId="{5FF5AC1B-ABA9-43D7-A1E3-2D92732CD6E2}" dt="2026-04-22T21:05:13.156" v="81"/>
+          <ac:graphicFrameMkLst>
+            <pc:docMk/>
+            <pc:sldMk cId="0" sldId="386"/>
+            <ac:graphicFrameMk id="8" creationId="{00000000-0000-0000-0000-000000000000}"/>
+          </ac:graphicFrameMkLst>
+        </pc:graphicFrameChg>
       </pc:sldChg>
       <pc:sldChg chg="addSp delSp modSp mod">
-        <pc:chgData name="Lines, Todd" userId="afaf7c3a-e8aa-4568-882a-02ad8f9e19b0" providerId="ADAL" clId="{5FF5AC1B-ABA9-43D7-A1E3-2D92732CD6E2}" dt="2026-01-09T17:41:54.929" v="39" actId="478"/>
+        <pc:chgData name="Lines, Todd" userId="afaf7c3a-e8aa-4568-882a-02ad8f9e19b0" providerId="ADAL" clId="{5FF5AC1B-ABA9-43D7-A1E3-2D92732CD6E2}" dt="2026-04-22T21:06:09.421" v="116" actId="20577"/>
         <pc:sldMkLst>
           <pc:docMk/>
           <pc:sldMk cId="0" sldId="387"/>
         </pc:sldMkLst>
         <pc:spChg chg="add mod">
-          <ac:chgData name="Lines, Todd" userId="afaf7c3a-e8aa-4568-882a-02ad8f9e19b0" providerId="ADAL" clId="{5FF5AC1B-ABA9-43D7-A1E3-2D92732CD6E2}" dt="2026-01-09T17:40:18.249" v="36" actId="1076"/>
+          <ac:chgData name="Lines, Todd" userId="afaf7c3a-e8aa-4568-882a-02ad8f9e19b0" providerId="ADAL" clId="{5FF5AC1B-ABA9-43D7-A1E3-2D92732CD6E2}" dt="2026-04-22T21:06:09.421" v="116" actId="20577"/>
           <ac:spMkLst>
             <pc:docMk/>
             <pc:sldMk cId="0" sldId="387"/>
-            <ac:spMk id="4" creationId="{0688E5AE-D9DC-DC83-D433-49C00485A109}"/>
+            <ac:spMk id="21510" creationId="{00000000-0000-0000-0000-000000000000}"/>
           </ac:spMkLst>
         </pc:spChg>
-        <pc:picChg chg="add mod">
-          <ac:chgData name="Lines, Todd" userId="afaf7c3a-e8aa-4568-882a-02ad8f9e19b0" providerId="ADAL" clId="{5FF5AC1B-ABA9-43D7-A1E3-2D92732CD6E2}" dt="2026-01-09T17:38:49.082" v="3" actId="1076"/>
-          <ac:picMkLst>
+        <pc:graphicFrameChg chg="del mod replId">
+          <ac:chgData name="Lines, Todd" userId="afaf7c3a-e8aa-4568-882a-02ad8f9e19b0" providerId="ADAL" clId="{5FF5AC1B-ABA9-43D7-A1E3-2D92732CD6E2}" dt="2026-04-22T21:05:41.586" v="95"/>
+          <ac:graphicFrameMkLst>
             <pc:docMk/>
             <pc:sldMk cId="0" sldId="387"/>
-            <ac:picMk id="3" creationId="{917EC7B2-2F6A-A1B0-2D6A-3E58FC72C74C}"/>
-          </ac:picMkLst>
-        </pc:picChg>
-        <pc:picChg chg="del mod">
-          <ac:chgData name="Lines, Todd" userId="afaf7c3a-e8aa-4568-882a-02ad8f9e19b0" providerId="ADAL" clId="{5FF5AC1B-ABA9-43D7-A1E3-2D92732CD6E2}" dt="2026-01-09T17:40:35.923" v="38" actId="21"/>
-          <ac:picMkLst>
-            <pc:docMk/>
-            <pc:sldMk cId="0" sldId="387"/>
-            <ac:picMk id="5" creationId="{48E4702B-F6C4-68F5-D583-20CC6207BF8F}"/>
-          </ac:picMkLst>
-        </pc:picChg>
-        <pc:picChg chg="del mod">
-          <ac:chgData name="Lines, Todd" userId="afaf7c3a-e8aa-4568-882a-02ad8f9e19b0" providerId="ADAL" clId="{5FF5AC1B-ABA9-43D7-A1E3-2D92732CD6E2}" dt="2026-01-09T17:41:54.929" v="39" actId="478"/>
-          <ac:picMkLst>
-            <pc:docMk/>
-            <pc:sldMk cId="0" sldId="387"/>
-            <ac:picMk id="21522" creationId="{00000000-0000-0000-0000-000000000000}"/>
-          </ac:picMkLst>
-        </pc:picChg>
+            <ac:graphicFrameMk id="2" creationId="{00000000-0000-0000-0000-000000000000}"/>
+          </ac:graphicFrameMkLst>
+        </pc:graphicFrameChg>
       </pc:sldChg>
       <pc:sldChg chg="addSp delSp modSp mod">
-        <pc:chgData name="Lines, Todd" userId="afaf7c3a-e8aa-4568-882a-02ad8f9e19b0" providerId="ADAL" clId="{5FF5AC1B-ABA9-43D7-A1E3-2D92732CD6E2}" dt="2026-01-09T17:43:12.805" v="54" actId="21"/>
+        <pc:chgData name="Lines, Todd" userId="afaf7c3a-e8aa-4568-882a-02ad8f9e19b0" providerId="ADAL" clId="{5FF5AC1B-ABA9-43D7-A1E3-2D92732CD6E2}" dt="2026-04-22T21:06:21.337" v="124" actId="20577"/>
         <pc:sldMkLst>
           <pc:docMk/>
-          <pc:sldMk cId="0" sldId="389"/>
+          <pc:sldMk cId="0" sldId="388"/>
         </pc:sldMkLst>
-        <pc:spChg chg="add del">
-          <ac:chgData name="Lines, Todd" userId="afaf7c3a-e8aa-4568-882a-02ad8f9e19b0" providerId="ADAL" clId="{5FF5AC1B-ABA9-43D7-A1E3-2D92732CD6E2}" dt="2026-01-09T17:41:58.978" v="41" actId="22"/>
+        <pc:spChg chg="add mod">
+          <ac:chgData name="Lines, Todd" userId="afaf7c3a-e8aa-4568-882a-02ad8f9e19b0" providerId="ADAL" clId="{5FF5AC1B-ABA9-43D7-A1E3-2D92732CD6E2}" dt="2026-04-22T21:06:21.337" v="124" actId="20577"/>
           <ac:spMkLst>
             <pc:docMk/>
-            <pc:sldMk cId="0" sldId="389"/>
-            <ac:spMk id="3" creationId="{6B2440F7-B73F-C573-554E-5458FB331C89}"/>
+            <pc:sldMk cId="0" sldId="388"/>
+            <ac:spMk id="22536" creationId="{00000000-0000-0000-0000-000000000000}"/>
+          </ac:spMkLst>
+        </pc:spChg>
+        <pc:graphicFrameChg chg="del mod replId">
+          <ac:chgData name="Lines, Todd" userId="afaf7c3a-e8aa-4568-882a-02ad8f9e19b0" providerId="ADAL" clId="{5FF5AC1B-ABA9-43D7-A1E3-2D92732CD6E2}" dt="2026-04-22T21:06:17.536" v="118"/>
+          <ac:graphicFrameMkLst>
+            <pc:docMk/>
+            <pc:sldMk cId="0" sldId="388"/>
+            <ac:graphicFrameMk id="2" creationId="{00000000-0000-0000-0000-000000000000}"/>
+          </ac:graphicFrameMkLst>
+        </pc:graphicFrameChg>
+      </pc:sldChg>
+      <pc:sldChg chg="addSp delSp modSp mod">
+        <pc:chgData name="Lines, Todd" userId="afaf7c3a-e8aa-4568-882a-02ad8f9e19b0" providerId="ADAL" clId="{5FF5AC1B-ABA9-43D7-A1E3-2D92732CD6E2}" dt="2026-04-22T21:08:29.484" v="174" actId="6549"/>
+        <pc:sldMkLst>
+          <pc:docMk/>
+          <pc:sldMk cId="0" sldId="391"/>
+        </pc:sldMkLst>
+        <pc:spChg chg="add mod">
+          <ac:chgData name="Lines, Todd" userId="afaf7c3a-e8aa-4568-882a-02ad8f9e19b0" providerId="ADAL" clId="{5FF5AC1B-ABA9-43D7-A1E3-2D92732CD6E2}" dt="2026-04-22T21:07:46.291" v="159" actId="20577"/>
+          <ac:spMkLst>
+            <pc:docMk/>
+            <pc:sldMk cId="0" sldId="391"/>
+            <ac:spMk id="24597" creationId="{00000000-0000-0000-0000-000000000000}"/>
           </ac:spMkLst>
         </pc:spChg>
         <pc:spChg chg="add mod">
-          <ac:chgData name="Lines, Todd" userId="afaf7c3a-e8aa-4568-882a-02ad8f9e19b0" providerId="ADAL" clId="{5FF5AC1B-ABA9-43D7-A1E3-2D92732CD6E2}" dt="2026-01-09T17:43:01.051" v="52" actId="1076"/>
+          <ac:chgData name="Lines, Todd" userId="afaf7c3a-e8aa-4568-882a-02ad8f9e19b0" providerId="ADAL" clId="{5FF5AC1B-ABA9-43D7-A1E3-2D92732CD6E2}" dt="2026-04-22T21:07:11.743" v="145" actId="20577"/>
           <ac:spMkLst>
             <pc:docMk/>
-            <pc:sldMk cId="0" sldId="389"/>
-            <ac:spMk id="6" creationId="{0C2E9D35-DB4B-E837-D5E1-83BA2E873ED1}"/>
+            <pc:sldMk cId="0" sldId="391"/>
+            <ac:spMk id="24598" creationId="{00000000-0000-0000-0000-000000000000}"/>
           </ac:spMkLst>
         </pc:spChg>
-        <pc:picChg chg="add mod ord">
-          <ac:chgData name="Lines, Todd" userId="afaf7c3a-e8aa-4568-882a-02ad8f9e19b0" providerId="ADAL" clId="{5FF5AC1B-ABA9-43D7-A1E3-2D92732CD6E2}" dt="2026-01-09T17:42:33.080" v="50" actId="1076"/>
-          <ac:picMkLst>
-            <pc:docMk/>
-            <pc:sldMk cId="0" sldId="389"/>
-            <ac:picMk id="5" creationId="{414AF7F8-B7BC-892C-BC49-0749EFE74294}"/>
-          </ac:picMkLst>
-        </pc:picChg>
-        <pc:picChg chg="del mod">
-          <ac:chgData name="Lines, Todd" userId="afaf7c3a-e8aa-4568-882a-02ad8f9e19b0" providerId="ADAL" clId="{5FF5AC1B-ABA9-43D7-A1E3-2D92732CD6E2}" dt="2026-01-09T17:43:12.805" v="54" actId="21"/>
-          <ac:picMkLst>
-            <pc:docMk/>
-            <pc:sldMk cId="0" sldId="389"/>
-            <ac:picMk id="7" creationId="{0385E765-D460-B164-CA1F-D64F97C820B7}"/>
-          </ac:picMkLst>
-        </pc:picChg>
-        <pc:picChg chg="del">
-          <ac:chgData name="Lines, Todd" userId="afaf7c3a-e8aa-4568-882a-02ad8f9e19b0" providerId="ADAL" clId="{5FF5AC1B-ABA9-43D7-A1E3-2D92732CD6E2}" dt="2026-01-09T17:42:18.048" v="47" actId="478"/>
-          <ac:picMkLst>
-            <pc:docMk/>
-            <pc:sldMk cId="0" sldId="389"/>
-            <ac:picMk id="25602" creationId="{00000000-0000-0000-0000-000000000000}"/>
-          </ac:picMkLst>
-        </pc:picChg>
-      </pc:sldChg>
-      <pc:sldChg chg="addSp delSp modSp mod">
-        <pc:chgData name="Lines, Todd" userId="afaf7c3a-e8aa-4568-882a-02ad8f9e19b0" providerId="ADAL" clId="{5FF5AC1B-ABA9-43D7-A1E3-2D92732CD6E2}" dt="2026-01-09T19:21:58.270" v="63" actId="21"/>
-        <pc:sldMkLst>
-          <pc:docMk/>
-          <pc:sldMk cId="3934662764" sldId="394"/>
-        </pc:sldMkLst>
-        <pc:spChg chg="mod">
-          <ac:chgData name="Lines, Todd" userId="afaf7c3a-e8aa-4568-882a-02ad8f9e19b0" providerId="ADAL" clId="{5FF5AC1B-ABA9-43D7-A1E3-2D92732CD6E2}" dt="2026-01-09T19:21:55.452" v="61"/>
+        <pc:spChg chg="add mod">
+          <ac:chgData name="Lines, Todd" userId="afaf7c3a-e8aa-4568-882a-02ad8f9e19b0" providerId="ADAL" clId="{5FF5AC1B-ABA9-43D7-A1E3-2D92732CD6E2}" dt="2026-04-22T21:07:29.732" v="155" actId="20577"/>
           <ac:spMkLst>
             <pc:docMk/>
-            <pc:sldMk cId="3934662764" sldId="394"/>
-            <ac:spMk id="4" creationId="{D52807ED-C6F9-1CA6-3FC7-F6222DF83FD3}"/>
+            <pc:sldMk cId="0" sldId="391"/>
+            <ac:spMk id="24599" creationId="{00000000-0000-0000-0000-000000000000}"/>
           </ac:spMkLst>
         </pc:spChg>
-        <pc:spChg chg="mod">
-          <ac:chgData name="Lines, Todd" userId="afaf7c3a-e8aa-4568-882a-02ad8f9e19b0" providerId="ADAL" clId="{5FF5AC1B-ABA9-43D7-A1E3-2D92732CD6E2}" dt="2026-01-09T19:21:55.452" v="61"/>
+        <pc:spChg chg="add mod">
+          <ac:chgData name="Lines, Todd" userId="afaf7c3a-e8aa-4568-882a-02ad8f9e19b0" providerId="ADAL" clId="{5FF5AC1B-ABA9-43D7-A1E3-2D92732CD6E2}" dt="2026-04-22T21:08:29.484" v="174" actId="6549"/>
           <ac:spMkLst>
             <pc:docMk/>
-            <pc:sldMk cId="3934662764" sldId="394"/>
-            <ac:spMk id="5" creationId="{D154C58A-5017-EB13-790A-7F47FF6D57A1}"/>
+            <pc:sldMk cId="0" sldId="391"/>
+            <ac:spMk id="24600" creationId="{00000000-0000-0000-0000-000000000000}"/>
           </ac:spMkLst>
         </pc:spChg>
-        <pc:spChg chg="mod">
-          <ac:chgData name="Lines, Todd" userId="afaf7c3a-e8aa-4568-882a-02ad8f9e19b0" providerId="ADAL" clId="{5FF5AC1B-ABA9-43D7-A1E3-2D92732CD6E2}" dt="2026-01-09T19:21:55.452" v="61"/>
+        <pc:spChg chg="add mod">
+          <ac:chgData name="Lines, Todd" userId="afaf7c3a-e8aa-4568-882a-02ad8f9e19b0" providerId="ADAL" clId="{5FF5AC1B-ABA9-43D7-A1E3-2D92732CD6E2}" dt="2026-04-22T21:08:19.995" v="170" actId="20577"/>
           <ac:spMkLst>
             <pc:docMk/>
-            <pc:sldMk cId="3934662764" sldId="394"/>
-            <ac:spMk id="6" creationId="{D8F68066-E1F9-F9AF-C28D-58935341F1AC}"/>
+            <pc:sldMk cId="0" sldId="391"/>
+            <ac:spMk id="24601" creationId="{00000000-0000-0000-0000-000000000000}"/>
           </ac:spMkLst>
         </pc:spChg>
-        <pc:spChg chg="mod">
-          <ac:chgData name="Lines, Todd" userId="afaf7c3a-e8aa-4568-882a-02ad8f9e19b0" providerId="ADAL" clId="{5FF5AC1B-ABA9-43D7-A1E3-2D92732CD6E2}" dt="2026-01-09T19:21:55.452" v="61"/>
-          <ac:spMkLst>
+        <pc:graphicFrameChg chg="del mod replId">
+          <ac:chgData name="Lines, Todd" userId="afaf7c3a-e8aa-4568-882a-02ad8f9e19b0" providerId="ADAL" clId="{5FF5AC1B-ABA9-43D7-A1E3-2D92732CD6E2}" dt="2026-04-22T21:06:47.138" v="126"/>
+          <ac:graphicFrameMkLst>
             <pc:docMk/>
-            <pc:sldMk cId="3934662764" sldId="394"/>
-            <ac:spMk id="7" creationId="{C2FDAEEC-5E5D-04DF-41C9-98412EDF8FEB}"/>
-          </ac:spMkLst>
-        </pc:spChg>
-        <pc:spChg chg="mod">
-          <ac:chgData name="Lines, Todd" userId="afaf7c3a-e8aa-4568-882a-02ad8f9e19b0" providerId="ADAL" clId="{5FF5AC1B-ABA9-43D7-A1E3-2D92732CD6E2}" dt="2026-01-09T19:21:55.452" v="61"/>
-          <ac:spMkLst>
+            <pc:sldMk cId="0" sldId="391"/>
+            <ac:graphicFrameMk id="2" creationId="{00000000-0000-0000-0000-000000000000}"/>
+          </ac:graphicFrameMkLst>
+        </pc:graphicFrameChg>
+        <pc:graphicFrameChg chg="del mod replId">
+          <ac:chgData name="Lines, Todd" userId="afaf7c3a-e8aa-4568-882a-02ad8f9e19b0" providerId="ADAL" clId="{5FF5AC1B-ABA9-43D7-A1E3-2D92732CD6E2}" dt="2026-04-22T21:06:50.360" v="129"/>
+          <ac:graphicFrameMkLst>
             <pc:docMk/>
-            <pc:sldMk cId="3934662764" sldId="394"/>
-            <ac:spMk id="8" creationId="{155B044E-7280-0CA0-7443-74226115CBC8}"/>
-          </ac:spMkLst>
-        </pc:spChg>
-        <pc:spChg chg="mod">
-          <ac:chgData name="Lines, Todd" userId="afaf7c3a-e8aa-4568-882a-02ad8f9e19b0" providerId="ADAL" clId="{5FF5AC1B-ABA9-43D7-A1E3-2D92732CD6E2}" dt="2026-01-09T19:21:55.452" v="61"/>
-          <ac:spMkLst>
+            <pc:sldMk cId="0" sldId="391"/>
+            <ac:graphicFrameMk id="4" creationId="{00000000-0000-0000-0000-000000000000}"/>
+          </ac:graphicFrameMkLst>
+        </pc:graphicFrameChg>
+        <pc:graphicFrameChg chg="del mod replId">
+          <ac:chgData name="Lines, Todd" userId="afaf7c3a-e8aa-4568-882a-02ad8f9e19b0" providerId="ADAL" clId="{5FF5AC1B-ABA9-43D7-A1E3-2D92732CD6E2}" dt="2026-04-22T21:06:52.521" v="132"/>
+          <ac:graphicFrameMkLst>
             <pc:docMk/>
-            <pc:sldMk cId="3934662764" sldId="394"/>
-            <ac:spMk id="9" creationId="{4D2D531E-C995-FBA1-C360-A8B0C660A158}"/>
-          </ac:spMkLst>
-        </pc:spChg>
-        <pc:spChg chg="mod">
-          <ac:chgData name="Lines, Todd" userId="afaf7c3a-e8aa-4568-882a-02ad8f9e19b0" providerId="ADAL" clId="{5FF5AC1B-ABA9-43D7-A1E3-2D92732CD6E2}" dt="2026-01-09T19:21:55.452" v="61"/>
-          <ac:spMkLst>
+            <pc:sldMk cId="0" sldId="391"/>
+            <ac:graphicFrameMk id="6" creationId="{00000000-0000-0000-0000-000000000000}"/>
+          </ac:graphicFrameMkLst>
+        </pc:graphicFrameChg>
+        <pc:graphicFrameChg chg="del mod replId">
+          <ac:chgData name="Lines, Todd" userId="afaf7c3a-e8aa-4568-882a-02ad8f9e19b0" providerId="ADAL" clId="{5FF5AC1B-ABA9-43D7-A1E3-2D92732CD6E2}" dt="2026-04-22T21:06:55.098" v="135"/>
+          <ac:graphicFrameMkLst>
             <pc:docMk/>
-            <pc:sldMk cId="3934662764" sldId="394"/>
-            <ac:spMk id="12" creationId="{FADA63E4-0C89-129D-79AC-EC4209BDE054}"/>
-          </ac:spMkLst>
-        </pc:spChg>
-        <pc:spChg chg="mod">
-          <ac:chgData name="Lines, Todd" userId="afaf7c3a-e8aa-4568-882a-02ad8f9e19b0" providerId="ADAL" clId="{5FF5AC1B-ABA9-43D7-A1E3-2D92732CD6E2}" dt="2026-01-09T19:21:55.452" v="61"/>
-          <ac:spMkLst>
+            <pc:sldMk cId="0" sldId="391"/>
+            <ac:graphicFrameMk id="8" creationId="{00000000-0000-0000-0000-000000000000}"/>
+          </ac:graphicFrameMkLst>
+        </pc:graphicFrameChg>
+        <pc:graphicFrameChg chg="del mod replId">
+          <ac:chgData name="Lines, Todd" userId="afaf7c3a-e8aa-4568-882a-02ad8f9e19b0" providerId="ADAL" clId="{5FF5AC1B-ABA9-43D7-A1E3-2D92732CD6E2}" dt="2026-04-22T21:06:57.751" v="138"/>
+          <ac:graphicFrameMkLst>
             <pc:docMk/>
-            <pc:sldMk cId="3934662764" sldId="394"/>
-            <ac:spMk id="14" creationId="{78040F16-50B9-CD11-0636-BFD335B88DEB}"/>
-          </ac:spMkLst>
-        </pc:spChg>
-        <pc:spChg chg="mod">
-          <ac:chgData name="Lines, Todd" userId="afaf7c3a-e8aa-4568-882a-02ad8f9e19b0" providerId="ADAL" clId="{5FF5AC1B-ABA9-43D7-A1E3-2D92732CD6E2}" dt="2026-01-09T19:21:55.452" v="61"/>
-          <ac:spMkLst>
+            <pc:sldMk cId="0" sldId="391"/>
+            <ac:graphicFrameMk id="10" creationId="{00000000-0000-0000-0000-000000000000}"/>
+          </ac:graphicFrameMkLst>
+        </pc:graphicFrameChg>
+        <pc:graphicFrameChg chg="mod">
+          <ac:chgData name="Lines, Todd" userId="afaf7c3a-e8aa-4568-882a-02ad8f9e19b0" providerId="ADAL" clId="{5FF5AC1B-ABA9-43D7-A1E3-2D92732CD6E2}" dt="2026-04-22T21:07:54.207" v="160" actId="1076"/>
+          <ac:graphicFrameMkLst>
             <pc:docMk/>
-            <pc:sldMk cId="3934662764" sldId="394"/>
-            <ac:spMk id="15" creationId="{79109A0D-C33A-77E7-7B69-B8EA0C37592E}"/>
-          </ac:spMkLst>
-        </pc:spChg>
-        <pc:grpChg chg="add del mod">
-          <ac:chgData name="Lines, Todd" userId="afaf7c3a-e8aa-4568-882a-02ad8f9e19b0" providerId="ADAL" clId="{5FF5AC1B-ABA9-43D7-A1E3-2D92732CD6E2}" dt="2026-01-09T19:21:58.270" v="63" actId="21"/>
-          <ac:grpSpMkLst>
-            <pc:docMk/>
-            <pc:sldMk cId="3934662764" sldId="394"/>
-            <ac:grpSpMk id="3" creationId="{82C02C81-5530-CF3E-A600-CB0A3D226344}"/>
-          </ac:grpSpMkLst>
-        </pc:grpChg>
-        <pc:grpChg chg="mod">
-          <ac:chgData name="Lines, Todd" userId="afaf7c3a-e8aa-4568-882a-02ad8f9e19b0" providerId="ADAL" clId="{5FF5AC1B-ABA9-43D7-A1E3-2D92732CD6E2}" dt="2026-01-09T19:21:53.899" v="60" actId="1076"/>
-          <ac:grpSpMkLst>
-            <pc:docMk/>
-            <pc:sldMk cId="3934662764" sldId="394"/>
-            <ac:grpSpMk id="451585" creationId="{00000000-0000-0000-0000-000000000000}"/>
-          </ac:grpSpMkLst>
-        </pc:grpChg>
-        <pc:cxnChg chg="mod">
-          <ac:chgData name="Lines, Todd" userId="afaf7c3a-e8aa-4568-882a-02ad8f9e19b0" providerId="ADAL" clId="{5FF5AC1B-ABA9-43D7-A1E3-2D92732CD6E2}" dt="2026-01-09T19:21:58.270" v="63" actId="21"/>
-          <ac:cxnSpMkLst>
-            <pc:docMk/>
-            <pc:sldMk cId="3934662764" sldId="394"/>
-            <ac:cxnSpMk id="16" creationId="{48B14E73-A8B2-C087-EF42-C8B90782A026}"/>
-          </ac:cxnSpMkLst>
-        </pc:cxnChg>
+            <pc:sldMk cId="0" sldId="391"/>
+            <ac:graphicFrameMk id="24602" creationId="{00000000-0000-0000-0000-000000000000}"/>
+          </ac:graphicFrameMkLst>
+        </pc:graphicFrameChg>
       </pc:sldChg>
     </pc:docChg>
   </pc:docChgLst>
@@ -496,7 +489,7 @@
             <a:fld id="{DA2CA0F8-BD70-4694-BD56-6665D6FFBF3C}" type="datetimeFigureOut">
               <a:rPr lang="en-US" smtClean="0"/>
               <a:pPr/>
-              <a:t>1/9/2026</a:t>
+              <a:t>4/22/2026</a:t>
             </a:fld>
             <a:endParaRPr lang="en-US"/>
           </a:p>
@@ -1469,7 +1462,7 @@
             <a:fld id="{81363FC6-F0D5-4376-9B97-08D3CD3871A3}" type="datetimeFigureOut">
               <a:rPr lang="en-US" smtClean="0"/>
               <a:pPr/>
-              <a:t>1/9/2026</a:t>
+              <a:t>4/22/2026</a:t>
             </a:fld>
             <a:endParaRPr lang="en-US"/>
           </a:p>
@@ -1634,7 +1627,7 @@
             <a:fld id="{81363FC6-F0D5-4376-9B97-08D3CD3871A3}" type="datetimeFigureOut">
               <a:rPr lang="en-US" smtClean="0"/>
               <a:pPr/>
-              <a:t>1/9/2026</a:t>
+              <a:t>4/22/2026</a:t>
             </a:fld>
             <a:endParaRPr lang="en-US"/>
           </a:p>
@@ -1809,7 +1802,7 @@
             <a:fld id="{81363FC6-F0D5-4376-9B97-08D3CD3871A3}" type="datetimeFigureOut">
               <a:rPr lang="en-US" smtClean="0"/>
               <a:pPr/>
-              <a:t>1/9/2026</a:t>
+              <a:t>4/22/2026</a:t>
             </a:fld>
             <a:endParaRPr lang="en-US"/>
           </a:p>
@@ -1974,7 +1967,7 @@
             <a:fld id="{81363FC6-F0D5-4376-9B97-08D3CD3871A3}" type="datetimeFigureOut">
               <a:rPr lang="en-US" smtClean="0"/>
               <a:pPr/>
-              <a:t>1/9/2026</a:t>
+              <a:t>4/22/2026</a:t>
             </a:fld>
             <a:endParaRPr lang="en-US"/>
           </a:p>
@@ -2216,7 +2209,7 @@
             <a:fld id="{81363FC6-F0D5-4376-9B97-08D3CD3871A3}" type="datetimeFigureOut">
               <a:rPr lang="en-US" smtClean="0"/>
               <a:pPr/>
-              <a:t>1/9/2026</a:t>
+              <a:t>4/22/2026</a:t>
             </a:fld>
             <a:endParaRPr lang="en-US"/>
           </a:p>
@@ -2498,7 +2491,7 @@
             <a:fld id="{81363FC6-F0D5-4376-9B97-08D3CD3871A3}" type="datetimeFigureOut">
               <a:rPr lang="en-US" smtClean="0"/>
               <a:pPr/>
-              <a:t>1/9/2026</a:t>
+              <a:t>4/22/2026</a:t>
             </a:fld>
             <a:endParaRPr lang="en-US"/>
           </a:p>
@@ -2914,7 +2907,7 @@
             <a:fld id="{81363FC6-F0D5-4376-9B97-08D3CD3871A3}" type="datetimeFigureOut">
               <a:rPr lang="en-US" smtClean="0"/>
               <a:pPr/>
-              <a:t>1/9/2026</a:t>
+              <a:t>4/22/2026</a:t>
             </a:fld>
             <a:endParaRPr lang="en-US"/>
           </a:p>
@@ -3028,7 +3021,7 @@
             <a:fld id="{81363FC6-F0D5-4376-9B97-08D3CD3871A3}" type="datetimeFigureOut">
               <a:rPr lang="en-US" smtClean="0"/>
               <a:pPr/>
-              <a:t>1/9/2026</a:t>
+              <a:t>4/22/2026</a:t>
             </a:fld>
             <a:endParaRPr lang="en-US"/>
           </a:p>
@@ -3120,7 +3113,7 @@
             <a:fld id="{81363FC6-F0D5-4376-9B97-08D3CD3871A3}" type="datetimeFigureOut">
               <a:rPr lang="en-US" smtClean="0"/>
               <a:pPr/>
-              <a:t>1/9/2026</a:t>
+              <a:t>4/22/2026</a:t>
             </a:fld>
             <a:endParaRPr lang="en-US"/>
           </a:p>
@@ -3392,7 +3385,7 @@
             <a:fld id="{81363FC6-F0D5-4376-9B97-08D3CD3871A3}" type="datetimeFigureOut">
               <a:rPr lang="en-US" smtClean="0"/>
               <a:pPr/>
-              <a:t>1/9/2026</a:t>
+              <a:t>4/22/2026</a:t>
             </a:fld>
             <a:endParaRPr lang="en-US"/>
           </a:p>
@@ -3641,7 +3634,7 @@
             <a:fld id="{81363FC6-F0D5-4376-9B97-08D3CD3871A3}" type="datetimeFigureOut">
               <a:rPr lang="en-US" smtClean="0"/>
               <a:pPr/>
-              <a:t>1/9/2026</a:t>
+              <a:t>4/22/2026</a:t>
             </a:fld>
             <a:endParaRPr lang="en-US"/>
           </a:p>
@@ -3849,7 +3842,7 @@
             <a:fld id="{81363FC6-F0D5-4376-9B97-08D3CD3871A3}" type="datetimeFigureOut">
               <a:rPr lang="en-US" smtClean="0"/>
               <a:pPr/>
-              <a:t>1/9/2026</a:t>
+              <a:t>4/22/2026</a:t>
             </a:fld>
             <a:endParaRPr lang="en-US"/>
           </a:p>
@@ -4930,7 +4923,7 @@
               </a:lnSpc>
             </a:pPr>
             <a:r>
-              <a:rPr lang="en-US" sz="1200"/>
+              <a:rPr lang="en-US" sz="1200" dirty="0"/>
               <a:t>SHM along a straight line can be thought of as a projection of a uniform circular motion along a diameter of a reference circle</a:t>
             </a:r>
           </a:p>
@@ -4940,7 +4933,7 @@
                 <a:spcPct val="80000"/>
               </a:lnSpc>
             </a:pPr>
-            <a:endParaRPr lang="en-US" sz="1200"/>
+            <a:endParaRPr lang="en-US" sz="1200" dirty="0"/>
           </a:p>
           <a:p>
             <a:pPr eaLnBrk="1" hangingPunct="1">
@@ -4949,7 +4942,7 @@
               </a:lnSpc>
             </a:pPr>
             <a:r>
-              <a:rPr lang="en-US" sz="1200"/>
+              <a:rPr lang="en-US" sz="1200" dirty="0"/>
               <a:t>Pendulum</a:t>
             </a:r>
           </a:p>
@@ -4959,7 +4952,7 @@
                 <a:spcPct val="80000"/>
               </a:lnSpc>
             </a:pPr>
-            <a:endParaRPr lang="en-US" sz="1200"/>
+            <a:endParaRPr lang="en-US" sz="1200" dirty="0"/>
           </a:p>
           <a:p>
             <a:pPr eaLnBrk="1" hangingPunct="1">
@@ -4968,7 +4961,7 @@
               </a:lnSpc>
             </a:pPr>
             <a:r>
-              <a:rPr lang="en-US" sz="1200"/>
+              <a:rPr lang="en-US" sz="1200" dirty="0"/>
               <a:t>Physical Pendulum</a:t>
             </a:r>
           </a:p>
@@ -4978,7 +4971,7 @@
                 <a:spcPct val="80000"/>
               </a:lnSpc>
             </a:pPr>
-            <a:endParaRPr lang="en-US" sz="1200"/>
+            <a:endParaRPr lang="en-US" sz="1200" dirty="0"/>
           </a:p>
           <a:p>
             <a:pPr eaLnBrk="1" hangingPunct="1">
@@ -4987,8 +4980,12 @@
               </a:lnSpc>
             </a:pPr>
             <a:r>
-              <a:rPr lang="en-US" sz="1200"/>
-              <a:t>Torsoinal Pendulum</a:t>
+              <a:rPr lang="en-US" sz="1200" dirty="0" err="1"/>
+              <a:t>Torsoinal</a:t>
+            </a:r>
+            <a:r>
+              <a:rPr lang="en-US" sz="1200" dirty="0"/>
+              <a:t> Pendulum</a:t>
             </a:r>
           </a:p>
           <a:p>
@@ -4997,7 +4994,7 @@
                 <a:spcPct val="80000"/>
               </a:lnSpc>
             </a:pPr>
-            <a:endParaRPr lang="en-US" sz="1200"/>
+            <a:endParaRPr lang="en-US" sz="1200" dirty="0"/>
           </a:p>
           <a:p>
             <a:pPr eaLnBrk="1" hangingPunct="1">
@@ -5005,7 +5002,7 @@
                 <a:spcPct val="80000"/>
               </a:lnSpc>
             </a:pPr>
-            <a:endParaRPr lang="en-US" sz="1200"/>
+            <a:endParaRPr lang="en-US" sz="1200" dirty="0"/>
           </a:p>
           <a:p>
             <a:pPr eaLnBrk="1" hangingPunct="1">
@@ -5014,7 +5011,7 @@
               </a:lnSpc>
             </a:pPr>
             <a:r>
-              <a:rPr lang="en-US" sz="1200"/>
+              <a:rPr lang="en-US" sz="1200" dirty="0"/>
               <a:t>Damped Oscillation</a:t>
             </a:r>
           </a:p>
@@ -5024,7 +5021,7 @@
                 <a:spcPct val="80000"/>
               </a:lnSpc>
             </a:pPr>
-            <a:endParaRPr lang="en-US" sz="1200"/>
+            <a:endParaRPr lang="en-US" sz="1200" dirty="0"/>
           </a:p>
           <a:p>
             <a:pPr eaLnBrk="1" hangingPunct="1">
@@ -5032,7 +5029,7 @@
                 <a:spcPct val="80000"/>
               </a:lnSpc>
             </a:pPr>
-            <a:endParaRPr lang="en-US" sz="1200"/>
+            <a:endParaRPr lang="en-US" sz="1200" dirty="0"/>
           </a:p>
           <a:p>
             <a:pPr eaLnBrk="1" hangingPunct="1">
@@ -5041,7 +5038,7 @@
               </a:lnSpc>
             </a:pPr>
             <a:r>
-              <a:rPr lang="en-US" sz="1200"/>
+              <a:rPr lang="en-US" sz="1200" dirty="0"/>
               <a:t>Forced Oscillation</a:t>
             </a:r>
           </a:p>
@@ -5051,7 +5048,7 @@
                 <a:spcPct val="80000"/>
               </a:lnSpc>
             </a:pPr>
-            <a:endParaRPr lang="en-US" sz="1200"/>
+            <a:endParaRPr lang="en-US" sz="1200" dirty="0"/>
           </a:p>
           <a:p>
             <a:pPr eaLnBrk="1" hangingPunct="1">
@@ -5059,7 +5056,7 @@
                 <a:spcPct val="80000"/>
               </a:lnSpc>
             </a:pPr>
-            <a:endParaRPr lang="en-US" sz="1200"/>
+            <a:endParaRPr lang="en-US" sz="1200" dirty="0"/>
           </a:p>
           <a:p>
             <a:pPr eaLnBrk="1" hangingPunct="1">
@@ -5067,7 +5064,7 @@
                 <a:spcPct val="80000"/>
               </a:lnSpc>
             </a:pPr>
-            <a:endParaRPr lang="en-US" sz="1200"/>
+            <a:endParaRPr lang="en-US" sz="1200" dirty="0"/>
           </a:p>
         </p:txBody>
       </p:sp>
@@ -6429,39 +6426,1315 @@
           </a:graphicData>
         </a:graphic>
       </p:graphicFrame>
+      <mc:AlternateContent xmlns:mc="http://schemas.openxmlformats.org/markup-compatibility/2006">
+        <mc:Choice xmlns:a14="http://schemas.microsoft.com/office/drawing/2010/main" Requires="a14">
+          <p:sp>
+            <p:nvSpPr>
+              <p:cNvPr id="24597" name="Object 20"/>
+              <p:cNvSpPr txBox="1"/>
+              <p:nvPr/>
+            </p:nvSpPr>
+            <p:spPr bwMode="auto">
+              <a:xfrm>
+                <a:off x="6783387" y="3987800"/>
+                <a:ext cx="1124743" cy="482600"/>
+              </a:xfrm>
+              <a:prstGeom prst="rect">
+                <a:avLst/>
+              </a:prstGeom>
+              <a:noFill/>
+              <a:ln>
+                <a:noFill/>
+              </a:ln>
+            </p:spPr>
+            <p:txBody>
+              <a:bodyPr>
+                <a:normAutofit fontScale="40000" lnSpcReduction="20000"/>
+              </a:bodyPr>
+              <a:lstStyle/>
+              <a:p>
+                <a:pPr/>
+                <a14:m>
+                  <m:oMathPara xmlns:m="http://schemas.openxmlformats.org/officeDocument/2006/math">
+                    <m:oMathParaPr>
+                      <m:jc m:val="left"/>
+                    </m:oMathParaPr>
+                    <m:oMath xmlns:m="http://schemas.openxmlformats.org/officeDocument/2006/math">
+                      <m:r>
+                        <a:rPr lang="en-US" i="1" smtClean="0">
+                          <a:solidFill>
+                            <a:srgbClr val="000000"/>
+                          </a:solidFill>
+                          <a:latin typeface="Cambria Math" panose="02040503050406030204" pitchFamily="18" charset="0"/>
+                        </a:rPr>
+                        <m:t>𝜔</m:t>
+                      </m:r>
+                      <m:r>
+                        <a:rPr lang="en-US" i="1" smtClean="0">
+                          <a:solidFill>
+                            <a:srgbClr val="000000"/>
+                          </a:solidFill>
+                          <a:latin typeface="Cambria Math" panose="02040503050406030204" pitchFamily="18" charset="0"/>
+                        </a:rPr>
+                        <m:t>=</m:t>
+                      </m:r>
+                      <m:rad>
+                        <m:radPr>
+                          <m:degHide m:val="on"/>
+                          <m:ctrlPr>
+                            <a:rPr lang="en-US" i="1">
+                              <a:solidFill>
+                                <a:srgbClr val="000000"/>
+                              </a:solidFill>
+                              <a:latin typeface="Cambria Math" panose="02040503050406030204" pitchFamily="18" charset="0"/>
+                            </a:rPr>
+                          </m:ctrlPr>
+                        </m:radPr>
+                        <m:deg/>
+                        <m:e>
+                          <m:sSup>
+                            <m:sSupPr>
+                              <m:ctrlPr>
+                                <a:rPr lang="en-US" i="1">
+                                  <a:solidFill>
+                                    <a:srgbClr val="000000"/>
+                                  </a:solidFill>
+                                  <a:latin typeface="Cambria Math" panose="02040503050406030204" pitchFamily="18" charset="0"/>
+                                </a:rPr>
+                              </m:ctrlPr>
+                            </m:sSupPr>
+                            <m:e>
+                              <m:sSub>
+                                <m:sSubPr>
+                                  <m:ctrlPr>
+                                    <a:rPr lang="en-US" i="1">
+                                      <a:solidFill>
+                                        <a:srgbClr val="000000"/>
+                                      </a:solidFill>
+                                      <a:latin typeface="Cambria Math" panose="02040503050406030204" pitchFamily="18" charset="0"/>
+                                    </a:rPr>
+                                  </m:ctrlPr>
+                                </m:sSubPr>
+                                <m:e>
+                                  <m:r>
+                                    <a:rPr lang="en-US" i="1">
+                                      <a:solidFill>
+                                        <a:srgbClr val="000000"/>
+                                      </a:solidFill>
+                                      <a:latin typeface="Cambria Math" panose="02040503050406030204" pitchFamily="18" charset="0"/>
+                                    </a:rPr>
+                                    <m:t>𝜔</m:t>
+                                  </m:r>
+                                </m:e>
+                                <m:sub>
+                                  <m:r>
+                                    <a:rPr lang="en-US" b="0" i="1" smtClean="0">
+                                      <a:solidFill>
+                                        <a:srgbClr val="000000"/>
+                                      </a:solidFill>
+                                      <a:latin typeface="Cambria Math" panose="02040503050406030204" pitchFamily="18" charset="0"/>
+                                    </a:rPr>
+                                    <m:t>𝑁</m:t>
+                                  </m:r>
+                                </m:sub>
+                              </m:sSub>
+                            </m:e>
+                            <m:sup>
+                              <m:r>
+                                <a:rPr lang="en-US" i="1">
+                                  <a:solidFill>
+                                    <a:srgbClr val="000000"/>
+                                  </a:solidFill>
+                                  <a:latin typeface="Cambria Math" panose="02040503050406030204" pitchFamily="18" charset="0"/>
+                                </a:rPr>
+                                <m:t>2</m:t>
+                              </m:r>
+                            </m:sup>
+                          </m:sSup>
+                          <m:r>
+                            <a:rPr lang="en-US" i="1">
+                              <a:solidFill>
+                                <a:srgbClr val="000000"/>
+                              </a:solidFill>
+                              <a:latin typeface="Cambria Math" panose="02040503050406030204" pitchFamily="18" charset="0"/>
+                            </a:rPr>
+                            <m:t>−</m:t>
+                          </m:r>
+                          <m:sSup>
+                            <m:sSupPr>
+                              <m:ctrlPr>
+                                <a:rPr lang="en-US" i="1">
+                                  <a:solidFill>
+                                    <a:srgbClr val="000000"/>
+                                  </a:solidFill>
+                                  <a:latin typeface="Cambria Math" panose="02040503050406030204" pitchFamily="18" charset="0"/>
+                                </a:rPr>
+                              </m:ctrlPr>
+                            </m:sSupPr>
+                            <m:e>
+                              <m:d>
+                                <m:dPr>
+                                  <m:ctrlPr>
+                                    <a:rPr lang="en-US" i="1">
+                                      <a:solidFill>
+                                        <a:srgbClr val="000000"/>
+                                      </a:solidFill>
+                                      <a:latin typeface="Cambria Math" panose="02040503050406030204" pitchFamily="18" charset="0"/>
+                                    </a:rPr>
+                                  </m:ctrlPr>
+                                </m:dPr>
+                                <m:e>
+                                  <m:f>
+                                    <m:fPr>
+                                      <m:ctrlPr>
+                                        <a:rPr lang="en-US" i="1">
+                                          <a:solidFill>
+                                            <a:srgbClr val="000000"/>
+                                          </a:solidFill>
+                                          <a:latin typeface="Cambria Math" panose="02040503050406030204" pitchFamily="18" charset="0"/>
+                                        </a:rPr>
+                                      </m:ctrlPr>
+                                    </m:fPr>
+                                    <m:num>
+                                      <m:r>
+                                        <a:rPr lang="en-US" i="1">
+                                          <a:solidFill>
+                                            <a:srgbClr val="000000"/>
+                                          </a:solidFill>
+                                          <a:latin typeface="Cambria Math" panose="02040503050406030204" pitchFamily="18" charset="0"/>
+                                        </a:rPr>
+                                        <m:t>𝑏</m:t>
+                                      </m:r>
+                                    </m:num>
+                                    <m:den>
+                                      <m:r>
+                                        <a:rPr lang="en-US" i="1">
+                                          <a:solidFill>
+                                            <a:srgbClr val="000000"/>
+                                          </a:solidFill>
+                                          <a:latin typeface="Cambria Math" panose="02040503050406030204" pitchFamily="18" charset="0"/>
+                                        </a:rPr>
+                                        <m:t>2</m:t>
+                                      </m:r>
+                                      <m:r>
+                                        <a:rPr lang="en-US" i="1">
+                                          <a:solidFill>
+                                            <a:srgbClr val="000000"/>
+                                          </a:solidFill>
+                                          <a:latin typeface="Cambria Math" panose="02040503050406030204" pitchFamily="18" charset="0"/>
+                                        </a:rPr>
+                                        <m:t>𝑚</m:t>
+                                      </m:r>
+                                    </m:den>
+                                  </m:f>
+                                </m:e>
+                              </m:d>
+                            </m:e>
+                            <m:sup>
+                              <m:r>
+                                <a:rPr lang="en-US" i="1">
+                                  <a:solidFill>
+                                    <a:srgbClr val="000000"/>
+                                  </a:solidFill>
+                                  <a:latin typeface="Cambria Math" panose="02040503050406030204" pitchFamily="18" charset="0"/>
+                                </a:rPr>
+                                <m:t>2</m:t>
+                              </m:r>
+                            </m:sup>
+                          </m:sSup>
+                        </m:e>
+                      </m:rad>
+                    </m:oMath>
+                  </m:oMathPara>
+                </a14:m>
+                <a:endParaRPr lang="en-US" dirty="0"/>
+              </a:p>
+            </p:txBody>
+          </p:sp>
+        </mc:Choice>
+        <mc:Fallback>
+          <p:sp>
+            <p:nvSpPr>
+              <p:cNvPr id="24597" name="Object 20"/>
+              <p:cNvSpPr txBox="1">
+                <a:spLocks noRot="1" noChangeAspect="1" noMove="1" noResize="1" noEditPoints="1" noAdjustHandles="1" noChangeArrowheads="1" noChangeShapeType="1" noTextEdit="1"/>
+              </p:cNvSpPr>
+              <p:nvPr/>
+            </p:nvSpPr>
+            <p:spPr bwMode="auto">
+              <a:xfrm>
+                <a:off x="6783387" y="3987800"/>
+                <a:ext cx="1124743" cy="482600"/>
+              </a:xfrm>
+              <a:prstGeom prst="rect">
+                <a:avLst/>
+              </a:prstGeom>
+              <a:blipFill>
+                <a:blip r:embed="rId32"/>
+                <a:stretch>
+                  <a:fillRect/>
+                </a:stretch>
+              </a:blipFill>
+              <a:ln>
+                <a:noFill/>
+              </a:ln>
+            </p:spPr>
+            <p:txBody>
+              <a:bodyPr/>
+              <a:lstStyle/>
+              <a:p>
+                <a:r>
+                  <a:rPr lang="en-US">
+                    <a:noFill/>
+                  </a:rPr>
+                  <a:t> </a:t>
+                </a:r>
+              </a:p>
+            </p:txBody>
+          </p:sp>
+        </mc:Fallback>
+      </mc:AlternateContent>
+      <mc:AlternateContent xmlns:mc="http://schemas.openxmlformats.org/markup-compatibility/2006">
+        <mc:Choice xmlns:a14="http://schemas.microsoft.com/office/drawing/2010/main" Requires="a14">
+          <p:sp>
+            <p:nvSpPr>
+              <p:cNvPr id="24598" name="Object 21"/>
+              <p:cNvSpPr txBox="1"/>
+              <p:nvPr/>
+            </p:nvSpPr>
+            <p:spPr bwMode="auto">
+              <a:xfrm>
+                <a:off x="3275412" y="4371975"/>
+                <a:ext cx="660002" cy="389862"/>
+              </a:xfrm>
+              <a:prstGeom prst="rect">
+                <a:avLst/>
+              </a:prstGeom>
+              <a:noFill/>
+              <a:ln>
+                <a:noFill/>
+              </a:ln>
+            </p:spPr>
+            <p:txBody>
+              <a:bodyPr>
+                <a:normAutofit fontScale="32500" lnSpcReduction="20000"/>
+              </a:bodyPr>
+              <a:lstStyle/>
+              <a:p>
+                <a:pPr/>
+                <a14:m>
+                  <m:oMathPara xmlns:m="http://schemas.openxmlformats.org/officeDocument/2006/math">
+                    <m:oMathParaPr>
+                      <m:jc m:val="left"/>
+                    </m:oMathParaPr>
+                    <m:oMath xmlns:m="http://schemas.openxmlformats.org/officeDocument/2006/math">
+                      <m:sSub>
+                        <m:sSubPr>
+                          <m:ctrlPr>
+                            <a:rPr lang="en-US" i="1" smtClean="0">
+                              <a:solidFill>
+                                <a:srgbClr val="000000"/>
+                              </a:solidFill>
+                              <a:latin typeface="Cambria Math" panose="02040503050406030204" pitchFamily="18" charset="0"/>
+                            </a:rPr>
+                          </m:ctrlPr>
+                        </m:sSubPr>
+                        <m:e>
+                          <m:r>
+                            <a:rPr lang="en-US" i="1">
+                              <a:solidFill>
+                                <a:srgbClr val="000000"/>
+                              </a:solidFill>
+                              <a:latin typeface="Cambria Math" panose="02040503050406030204" pitchFamily="18" charset="0"/>
+                            </a:rPr>
+                            <m:t>𝜔</m:t>
+                          </m:r>
+                        </m:e>
+                        <m:sub>
+                          <m:r>
+                            <a:rPr lang="en-US" b="0" i="1" smtClean="0">
+                              <a:solidFill>
+                                <a:srgbClr val="000000"/>
+                              </a:solidFill>
+                              <a:latin typeface="Cambria Math" panose="02040503050406030204" pitchFamily="18" charset="0"/>
+                            </a:rPr>
+                            <m:t>𝑁</m:t>
+                          </m:r>
+                        </m:sub>
+                      </m:sSub>
+                      <m:r>
+                        <a:rPr lang="en-US" i="1">
+                          <a:solidFill>
+                            <a:srgbClr val="000000"/>
+                          </a:solidFill>
+                          <a:latin typeface="Cambria Math" panose="02040503050406030204" pitchFamily="18" charset="0"/>
+                        </a:rPr>
+                        <m:t>=</m:t>
+                      </m:r>
+                      <m:rad>
+                        <m:radPr>
+                          <m:degHide m:val="on"/>
+                          <m:ctrlPr>
+                            <a:rPr lang="en-US" i="1">
+                              <a:solidFill>
+                                <a:srgbClr val="000000"/>
+                              </a:solidFill>
+                              <a:latin typeface="Cambria Math" panose="02040503050406030204" pitchFamily="18" charset="0"/>
+                            </a:rPr>
+                          </m:ctrlPr>
+                        </m:radPr>
+                        <m:deg/>
+                        <m:e>
+                          <m:f>
+                            <m:fPr>
+                              <m:ctrlPr>
+                                <a:rPr lang="en-US" i="1">
+                                  <a:solidFill>
+                                    <a:srgbClr val="000000"/>
+                                  </a:solidFill>
+                                  <a:latin typeface="Cambria Math" panose="02040503050406030204" pitchFamily="18" charset="0"/>
+                                </a:rPr>
+                              </m:ctrlPr>
+                            </m:fPr>
+                            <m:num>
+                              <m:r>
+                                <a:rPr lang="en-US" i="1">
+                                  <a:solidFill>
+                                    <a:srgbClr val="000000"/>
+                                  </a:solidFill>
+                                  <a:latin typeface="Cambria Math" panose="02040503050406030204" pitchFamily="18" charset="0"/>
+                                </a:rPr>
+                                <m:t>𝑘</m:t>
+                              </m:r>
+                            </m:num>
+                            <m:den>
+                              <m:r>
+                                <a:rPr lang="en-US" i="1">
+                                  <a:solidFill>
+                                    <a:srgbClr val="000000"/>
+                                  </a:solidFill>
+                                  <a:latin typeface="Cambria Math" panose="02040503050406030204" pitchFamily="18" charset="0"/>
+                                </a:rPr>
+                                <m:t>𝑚</m:t>
+                              </m:r>
+                            </m:den>
+                          </m:f>
+                        </m:e>
+                      </m:rad>
+                    </m:oMath>
+                  </m:oMathPara>
+                </a14:m>
+                <a:endParaRPr lang="en-US" dirty="0"/>
+              </a:p>
+            </p:txBody>
+          </p:sp>
+        </mc:Choice>
+        <mc:Fallback>
+          <p:sp>
+            <p:nvSpPr>
+              <p:cNvPr id="24598" name="Object 21"/>
+              <p:cNvSpPr txBox="1">
+                <a:spLocks noRot="1" noChangeAspect="1" noMove="1" noResize="1" noEditPoints="1" noAdjustHandles="1" noChangeArrowheads="1" noChangeShapeType="1" noTextEdit="1"/>
+              </p:cNvSpPr>
+              <p:nvPr/>
+            </p:nvSpPr>
+            <p:spPr bwMode="auto">
+              <a:xfrm>
+                <a:off x="3275412" y="4371975"/>
+                <a:ext cx="660002" cy="389862"/>
+              </a:xfrm>
+              <a:prstGeom prst="rect">
+                <a:avLst/>
+              </a:prstGeom>
+              <a:blipFill>
+                <a:blip r:embed="rId33"/>
+                <a:stretch>
+                  <a:fillRect/>
+                </a:stretch>
+              </a:blipFill>
+              <a:ln>
+                <a:noFill/>
+              </a:ln>
+            </p:spPr>
+            <p:txBody>
+              <a:bodyPr/>
+              <a:lstStyle/>
+              <a:p>
+                <a:r>
+                  <a:rPr lang="en-US">
+                    <a:noFill/>
+                  </a:rPr>
+                  <a:t> </a:t>
+                </a:r>
+              </a:p>
+            </p:txBody>
+          </p:sp>
+        </mc:Fallback>
+      </mc:AlternateContent>
+      <mc:AlternateContent xmlns:mc="http://schemas.openxmlformats.org/markup-compatibility/2006">
+        <mc:Choice xmlns:a14="http://schemas.microsoft.com/office/drawing/2010/main" Requires="a14">
+          <p:sp>
+            <p:nvSpPr>
+              <p:cNvPr id="24599" name="Object 22"/>
+              <p:cNvSpPr txBox="1"/>
+              <p:nvPr/>
+            </p:nvSpPr>
+            <p:spPr bwMode="auto">
+              <a:xfrm>
+                <a:off x="4256088" y="4470400"/>
+                <a:ext cx="840978" cy="330730"/>
+              </a:xfrm>
+              <a:prstGeom prst="rect">
+                <a:avLst/>
+              </a:prstGeom>
+              <a:noFill/>
+              <a:ln>
+                <a:noFill/>
+              </a:ln>
+            </p:spPr>
+            <p:txBody>
+              <a:bodyPr>
+                <a:normAutofit fontScale="55000" lnSpcReduction="20000"/>
+              </a:bodyPr>
+              <a:lstStyle/>
+              <a:p>
+                <a:pPr/>
+                <a14:m>
+                  <m:oMathPara xmlns:m="http://schemas.openxmlformats.org/officeDocument/2006/math">
+                    <m:oMathParaPr>
+                      <m:jc m:val="left"/>
+                    </m:oMathParaPr>
+                    <m:oMath xmlns:m="http://schemas.openxmlformats.org/officeDocument/2006/math">
+                      <m:sSub>
+                        <m:sSubPr>
+                          <m:ctrlPr>
+                            <a:rPr lang="en-US" i="1" smtClean="0">
+                              <a:solidFill>
+                                <a:srgbClr val="000000"/>
+                              </a:solidFill>
+                              <a:latin typeface="Cambria Math" panose="02040503050406030204" pitchFamily="18" charset="0"/>
+                            </a:rPr>
+                          </m:ctrlPr>
+                        </m:sSubPr>
+                        <m:e>
+                          <m:r>
+                            <a:rPr lang="en-US" i="1">
+                              <a:solidFill>
+                                <a:srgbClr val="000000"/>
+                              </a:solidFill>
+                              <a:latin typeface="Cambria Math" panose="02040503050406030204" pitchFamily="18" charset="0"/>
+                            </a:rPr>
+                            <m:t>𝑏</m:t>
+                          </m:r>
+                        </m:e>
+                        <m:sub>
+                          <m:r>
+                            <a:rPr lang="en-US" i="1">
+                              <a:solidFill>
+                                <a:srgbClr val="000000"/>
+                              </a:solidFill>
+                              <a:latin typeface="Cambria Math" panose="02040503050406030204" pitchFamily="18" charset="0"/>
+                            </a:rPr>
+                            <m:t>𝑐</m:t>
+                          </m:r>
+                        </m:sub>
+                      </m:sSub>
+                      <m:r>
+                        <a:rPr lang="en-US" i="1">
+                          <a:solidFill>
+                            <a:srgbClr val="000000"/>
+                          </a:solidFill>
+                          <a:latin typeface="Cambria Math" panose="02040503050406030204" pitchFamily="18" charset="0"/>
+                        </a:rPr>
+                        <m:t>=2</m:t>
+                      </m:r>
+                      <m:r>
+                        <a:rPr lang="en-US" i="1">
+                          <a:solidFill>
+                            <a:srgbClr val="000000"/>
+                          </a:solidFill>
+                          <a:latin typeface="Cambria Math" panose="02040503050406030204" pitchFamily="18" charset="0"/>
+                        </a:rPr>
+                        <m:t>𝑚</m:t>
+                      </m:r>
+                      <m:sSub>
+                        <m:sSubPr>
+                          <m:ctrlPr>
+                            <a:rPr lang="en-US" i="1" smtClean="0">
+                              <a:solidFill>
+                                <a:srgbClr val="000000"/>
+                              </a:solidFill>
+                              <a:latin typeface="Cambria Math" panose="02040503050406030204" pitchFamily="18" charset="0"/>
+                            </a:rPr>
+                          </m:ctrlPr>
+                        </m:sSubPr>
+                        <m:e>
+                          <m:r>
+                            <a:rPr lang="en-US" i="1">
+                              <a:solidFill>
+                                <a:srgbClr val="000000"/>
+                              </a:solidFill>
+                              <a:latin typeface="Cambria Math" panose="02040503050406030204" pitchFamily="18" charset="0"/>
+                            </a:rPr>
+                            <m:t>𝜔</m:t>
+                          </m:r>
+                        </m:e>
+                        <m:sub>
+                          <m:r>
+                            <a:rPr lang="en-US" b="0" i="1" smtClean="0">
+                              <a:solidFill>
+                                <a:srgbClr val="000000"/>
+                              </a:solidFill>
+                              <a:latin typeface="Cambria Math" panose="02040503050406030204" pitchFamily="18" charset="0"/>
+                            </a:rPr>
+                            <m:t>𝑁</m:t>
+                          </m:r>
+                        </m:sub>
+                      </m:sSub>
+                    </m:oMath>
+                  </m:oMathPara>
+                </a14:m>
+                <a:endParaRPr lang="en-US" dirty="0"/>
+              </a:p>
+            </p:txBody>
+          </p:sp>
+        </mc:Choice>
+        <mc:Fallback>
+          <p:sp>
+            <p:nvSpPr>
+              <p:cNvPr id="24599" name="Object 22"/>
+              <p:cNvSpPr txBox="1">
+                <a:spLocks noRot="1" noChangeAspect="1" noMove="1" noResize="1" noEditPoints="1" noAdjustHandles="1" noChangeArrowheads="1" noChangeShapeType="1" noTextEdit="1"/>
+              </p:cNvSpPr>
+              <p:nvPr/>
+            </p:nvSpPr>
+            <p:spPr bwMode="auto">
+              <a:xfrm>
+                <a:off x="4256088" y="4470400"/>
+                <a:ext cx="840978" cy="330730"/>
+              </a:xfrm>
+              <a:prstGeom prst="rect">
+                <a:avLst/>
+              </a:prstGeom>
+              <a:blipFill>
+                <a:blip r:embed="rId34"/>
+                <a:stretch>
+                  <a:fillRect/>
+                </a:stretch>
+              </a:blipFill>
+              <a:ln>
+                <a:noFill/>
+              </a:ln>
+            </p:spPr>
+            <p:txBody>
+              <a:bodyPr/>
+              <a:lstStyle/>
+              <a:p>
+                <a:r>
+                  <a:rPr lang="en-US">
+                    <a:noFill/>
+                  </a:rPr>
+                  <a:t> </a:t>
+                </a:r>
+              </a:p>
+            </p:txBody>
+          </p:sp>
+        </mc:Fallback>
+      </mc:AlternateContent>
+      <mc:AlternateContent xmlns:mc="http://schemas.openxmlformats.org/markup-compatibility/2006">
+        <mc:Choice xmlns:a14="http://schemas.microsoft.com/office/drawing/2010/main" Requires="a14">
+          <p:sp>
+            <p:nvSpPr>
+              <p:cNvPr id="24600" name="Object 23"/>
+              <p:cNvSpPr txBox="1"/>
+              <p:nvPr/>
+            </p:nvSpPr>
+            <p:spPr bwMode="auto">
+              <a:xfrm>
+                <a:off x="3252128" y="4811845"/>
+                <a:ext cx="1316038" cy="238125"/>
+              </a:xfrm>
+              <a:prstGeom prst="rect">
+                <a:avLst/>
+              </a:prstGeom>
+              <a:noFill/>
+              <a:ln>
+                <a:noFill/>
+              </a:ln>
+            </p:spPr>
+            <p:txBody>
+              <a:bodyPr>
+                <a:normAutofit fontScale="40000" lnSpcReduction="20000"/>
+              </a:bodyPr>
+              <a:lstStyle/>
+              <a:p>
+                <a:pPr/>
+                <a14:m>
+                  <m:oMathPara xmlns:m="http://schemas.openxmlformats.org/officeDocument/2006/math">
+                    <m:oMathParaPr>
+                      <m:jc m:val="left"/>
+                    </m:oMathParaPr>
+                    <m:oMath xmlns:m="http://schemas.openxmlformats.org/officeDocument/2006/math">
+                      <m:r>
+                        <a:rPr lang="en-US" i="1" smtClean="0">
+                          <a:solidFill>
+                            <a:srgbClr val="000000"/>
+                          </a:solidFill>
+                          <a:latin typeface="Cambria Math" panose="02040503050406030204" pitchFamily="18" charset="0"/>
+                        </a:rPr>
+                        <m:t>𝐹</m:t>
+                      </m:r>
+                      <m:d>
+                        <m:dPr>
+                          <m:ctrlPr>
+                            <a:rPr lang="en-US" i="1">
+                              <a:solidFill>
+                                <a:srgbClr val="000000"/>
+                              </a:solidFill>
+                              <a:latin typeface="Cambria Math" panose="02040503050406030204" pitchFamily="18" charset="0"/>
+                            </a:rPr>
+                          </m:ctrlPr>
+                        </m:dPr>
+                        <m:e>
+                          <m:r>
+                            <a:rPr lang="en-US" i="1">
+                              <a:solidFill>
+                                <a:srgbClr val="000000"/>
+                              </a:solidFill>
+                              <a:latin typeface="Cambria Math" panose="02040503050406030204" pitchFamily="18" charset="0"/>
+                            </a:rPr>
+                            <m:t>𝑡</m:t>
+                          </m:r>
+                        </m:e>
+                      </m:d>
+                      <m:r>
+                        <a:rPr lang="en-US" i="1">
+                          <a:solidFill>
+                            <a:srgbClr val="000000"/>
+                          </a:solidFill>
+                          <a:latin typeface="Cambria Math" panose="02040503050406030204" pitchFamily="18" charset="0"/>
+                        </a:rPr>
+                        <m:t>=</m:t>
+                      </m:r>
+                      <m:sSub>
+                        <m:sSubPr>
+                          <m:ctrlPr>
+                            <a:rPr lang="en-US" i="1">
+                              <a:solidFill>
+                                <a:srgbClr val="000000"/>
+                              </a:solidFill>
+                              <a:latin typeface="Cambria Math" panose="02040503050406030204" pitchFamily="18" charset="0"/>
+                            </a:rPr>
+                          </m:ctrlPr>
+                        </m:sSubPr>
+                        <m:e>
+                          <m:r>
+                            <a:rPr lang="en-US" i="1">
+                              <a:solidFill>
+                                <a:srgbClr val="000000"/>
+                              </a:solidFill>
+                              <a:latin typeface="Cambria Math" panose="02040503050406030204" pitchFamily="18" charset="0"/>
+                            </a:rPr>
+                            <m:t>𝐹</m:t>
+                          </m:r>
+                        </m:e>
+                        <m:sub>
+                          <m:r>
+                            <a:rPr lang="en-US" b="0" i="1" smtClean="0">
+                              <a:solidFill>
+                                <a:srgbClr val="000000"/>
+                              </a:solidFill>
+                              <a:latin typeface="Cambria Math" panose="02040503050406030204" pitchFamily="18" charset="0"/>
+                            </a:rPr>
+                            <m:t>𝑚𝑎𝑥</m:t>
+                          </m:r>
+                        </m:sub>
+                      </m:sSub>
+                      <m:func>
+                        <m:funcPr>
+                          <m:ctrlPr>
+                            <a:rPr lang="en-US" i="1">
+                              <a:solidFill>
+                                <a:srgbClr val="000000"/>
+                              </a:solidFill>
+                              <a:latin typeface="Cambria Math" panose="02040503050406030204" pitchFamily="18" charset="0"/>
+                            </a:rPr>
+                          </m:ctrlPr>
+                        </m:funcPr>
+                        <m:fName>
+                          <m:r>
+                            <m:rPr>
+                              <m:sty m:val="p"/>
+                            </m:rPr>
+                            <a:rPr lang="en-US" i="0">
+                              <a:solidFill>
+                                <a:srgbClr val="000000"/>
+                              </a:solidFill>
+                              <a:latin typeface="Cambria Math" panose="02040503050406030204" pitchFamily="18" charset="0"/>
+                            </a:rPr>
+                            <m:t>sin</m:t>
+                          </m:r>
+                        </m:fName>
+                        <m:e>
+                          <m:d>
+                            <m:dPr>
+                              <m:ctrlPr>
+                                <a:rPr lang="en-US" i="1">
+                                  <a:solidFill>
+                                    <a:srgbClr val="000000"/>
+                                  </a:solidFill>
+                                  <a:latin typeface="Cambria Math" panose="02040503050406030204" pitchFamily="18" charset="0"/>
+                                </a:rPr>
+                              </m:ctrlPr>
+                            </m:dPr>
+                            <m:e>
+                              <m:sSub>
+                                <m:sSubPr>
+                                  <m:ctrlPr>
+                                    <a:rPr lang="en-US" i="1">
+                                      <a:solidFill>
+                                        <a:srgbClr val="000000"/>
+                                      </a:solidFill>
+                                      <a:latin typeface="Cambria Math" panose="02040503050406030204" pitchFamily="18" charset="0"/>
+                                    </a:rPr>
+                                  </m:ctrlPr>
+                                </m:sSubPr>
+                                <m:e>
+                                  <m:r>
+                                    <a:rPr lang="en-US" i="1">
+                                      <a:solidFill>
+                                        <a:srgbClr val="000000"/>
+                                      </a:solidFill>
+                                      <a:latin typeface="Cambria Math" panose="02040503050406030204" pitchFamily="18" charset="0"/>
+                                    </a:rPr>
+                                    <m:t>𝜔</m:t>
+                                  </m:r>
+                                </m:e>
+                                <m:sub>
+                                  <m:r>
+                                    <a:rPr lang="en-US" i="1">
+                                      <a:solidFill>
+                                        <a:srgbClr val="000000"/>
+                                      </a:solidFill>
+                                      <a:latin typeface="Cambria Math" panose="02040503050406030204" pitchFamily="18" charset="0"/>
+                                    </a:rPr>
+                                    <m:t>𝑓</m:t>
+                                  </m:r>
+                                </m:sub>
+                              </m:sSub>
+                              <m:r>
+                                <a:rPr lang="en-US" i="1">
+                                  <a:solidFill>
+                                    <a:srgbClr val="000000"/>
+                                  </a:solidFill>
+                                  <a:latin typeface="Cambria Math" panose="02040503050406030204" pitchFamily="18" charset="0"/>
+                                </a:rPr>
+                                <m:t>𝑡</m:t>
+                              </m:r>
+                            </m:e>
+                          </m:d>
+                        </m:e>
+                      </m:func>
+                    </m:oMath>
+                  </m:oMathPara>
+                </a14:m>
+                <a:endParaRPr lang="en-US" dirty="0"/>
+              </a:p>
+            </p:txBody>
+          </p:sp>
+        </mc:Choice>
+        <mc:Fallback>
+          <p:sp>
+            <p:nvSpPr>
+              <p:cNvPr id="24600" name="Object 23"/>
+              <p:cNvSpPr txBox="1">
+                <a:spLocks noRot="1" noChangeAspect="1" noMove="1" noResize="1" noEditPoints="1" noAdjustHandles="1" noChangeArrowheads="1" noChangeShapeType="1" noTextEdit="1"/>
+              </p:cNvSpPr>
+              <p:nvPr/>
+            </p:nvSpPr>
+            <p:spPr bwMode="auto">
+              <a:xfrm>
+                <a:off x="3252128" y="4811845"/>
+                <a:ext cx="1316038" cy="238125"/>
+              </a:xfrm>
+              <a:prstGeom prst="rect">
+                <a:avLst/>
+              </a:prstGeom>
+              <a:blipFill>
+                <a:blip r:embed="rId35"/>
+                <a:stretch>
+                  <a:fillRect/>
+                </a:stretch>
+              </a:blipFill>
+              <a:ln>
+                <a:noFill/>
+              </a:ln>
+            </p:spPr>
+            <p:txBody>
+              <a:bodyPr/>
+              <a:lstStyle/>
+              <a:p>
+                <a:r>
+                  <a:rPr lang="en-US">
+                    <a:noFill/>
+                  </a:rPr>
+                  <a:t> </a:t>
+                </a:r>
+              </a:p>
+            </p:txBody>
+          </p:sp>
+        </mc:Fallback>
+      </mc:AlternateContent>
+      <mc:AlternateContent xmlns:mc="http://schemas.openxmlformats.org/markup-compatibility/2006">
+        <mc:Choice xmlns:a14="http://schemas.microsoft.com/office/drawing/2010/main" Requires="a14">
+          <p:sp>
+            <p:nvSpPr>
+              <p:cNvPr id="24601" name="Object 24"/>
+              <p:cNvSpPr txBox="1"/>
+              <p:nvPr/>
+            </p:nvSpPr>
+            <p:spPr bwMode="auto">
+              <a:xfrm>
+                <a:off x="5837238" y="4632324"/>
+                <a:ext cx="1597556" cy="701280"/>
+              </a:xfrm>
+              <a:prstGeom prst="rect">
+                <a:avLst/>
+              </a:prstGeom>
+              <a:noFill/>
+              <a:ln>
+                <a:noFill/>
+              </a:ln>
+            </p:spPr>
+            <p:txBody>
+              <a:bodyPr>
+                <a:normAutofit fontScale="40000" lnSpcReduction="20000"/>
+              </a:bodyPr>
+              <a:lstStyle/>
+              <a:p>
+                <a:pPr/>
+                <a14:m>
+                  <m:oMathPara xmlns:m="http://schemas.openxmlformats.org/officeDocument/2006/math">
+                    <m:oMathParaPr>
+                      <m:jc m:val="left"/>
+                    </m:oMathParaPr>
+                    <m:oMath xmlns:m="http://schemas.openxmlformats.org/officeDocument/2006/math">
+                      <m:r>
+                        <a:rPr lang="en-US" i="1" smtClean="0">
+                          <a:solidFill>
+                            <a:srgbClr val="000000"/>
+                          </a:solidFill>
+                          <a:latin typeface="Cambria Math" panose="02040503050406030204" pitchFamily="18" charset="0"/>
+                        </a:rPr>
+                        <m:t>𝐴</m:t>
+                      </m:r>
+                      <m:r>
+                        <a:rPr lang="en-US" i="1" smtClean="0">
+                          <a:solidFill>
+                            <a:srgbClr val="000000"/>
+                          </a:solidFill>
+                          <a:latin typeface="Cambria Math" panose="02040503050406030204" pitchFamily="18" charset="0"/>
+                        </a:rPr>
+                        <m:t>=</m:t>
+                      </m:r>
+                      <m:f>
+                        <m:fPr>
+                          <m:ctrlPr>
+                            <a:rPr lang="en-US" i="1">
+                              <a:solidFill>
+                                <a:srgbClr val="000000"/>
+                              </a:solidFill>
+                              <a:latin typeface="Cambria Math" panose="02040503050406030204" pitchFamily="18" charset="0"/>
+                            </a:rPr>
+                          </m:ctrlPr>
+                        </m:fPr>
+                        <m:num>
+                          <m:f>
+                            <m:fPr>
+                              <m:ctrlPr>
+                                <a:rPr lang="en-US" i="1">
+                                  <a:solidFill>
+                                    <a:srgbClr val="000000"/>
+                                  </a:solidFill>
+                                  <a:latin typeface="Cambria Math" panose="02040503050406030204" pitchFamily="18" charset="0"/>
+                                </a:rPr>
+                              </m:ctrlPr>
+                            </m:fPr>
+                            <m:num>
+                              <m:sSub>
+                                <m:sSubPr>
+                                  <m:ctrlPr>
+                                    <a:rPr lang="en-US" i="1">
+                                      <a:solidFill>
+                                        <a:srgbClr val="000000"/>
+                                      </a:solidFill>
+                                      <a:latin typeface="Cambria Math" panose="02040503050406030204" pitchFamily="18" charset="0"/>
+                                    </a:rPr>
+                                  </m:ctrlPr>
+                                </m:sSubPr>
+                                <m:e>
+                                  <m:r>
+                                    <a:rPr lang="en-US" i="1">
+                                      <a:solidFill>
+                                        <a:srgbClr val="000000"/>
+                                      </a:solidFill>
+                                      <a:latin typeface="Cambria Math" panose="02040503050406030204" pitchFamily="18" charset="0"/>
+                                    </a:rPr>
+                                    <m:t>𝐹</m:t>
+                                  </m:r>
+                                </m:e>
+                                <m:sub>
+                                  <m:r>
+                                    <a:rPr lang="en-US" b="0" i="1" smtClean="0">
+                                      <a:solidFill>
+                                        <a:srgbClr val="000000"/>
+                                      </a:solidFill>
+                                      <a:latin typeface="Cambria Math" panose="02040503050406030204" pitchFamily="18" charset="0"/>
+                                    </a:rPr>
+                                    <m:t>𝑚𝑎𝑥</m:t>
+                                  </m:r>
+                                </m:sub>
+                              </m:sSub>
+                            </m:num>
+                            <m:den>
+                              <m:r>
+                                <a:rPr lang="en-US" i="1">
+                                  <a:solidFill>
+                                    <a:srgbClr val="000000"/>
+                                  </a:solidFill>
+                                  <a:latin typeface="Cambria Math" panose="02040503050406030204" pitchFamily="18" charset="0"/>
+                                </a:rPr>
+                                <m:t>𝑚</m:t>
+                              </m:r>
+                            </m:den>
+                          </m:f>
+                        </m:num>
+                        <m:den>
+                          <m:rad>
+                            <m:radPr>
+                              <m:degHide m:val="on"/>
+                              <m:ctrlPr>
+                                <a:rPr lang="en-US" i="1">
+                                  <a:solidFill>
+                                    <a:srgbClr val="000000"/>
+                                  </a:solidFill>
+                                  <a:latin typeface="Cambria Math" panose="02040503050406030204" pitchFamily="18" charset="0"/>
+                                </a:rPr>
+                              </m:ctrlPr>
+                            </m:radPr>
+                            <m:deg/>
+                            <m:e>
+                              <m:sSup>
+                                <m:sSupPr>
+                                  <m:ctrlPr>
+                                    <a:rPr lang="en-US" i="1">
+                                      <a:solidFill>
+                                        <a:srgbClr val="000000"/>
+                                      </a:solidFill>
+                                      <a:latin typeface="Cambria Math" panose="02040503050406030204" pitchFamily="18" charset="0"/>
+                                    </a:rPr>
+                                  </m:ctrlPr>
+                                </m:sSupPr>
+                                <m:e>
+                                  <m:d>
+                                    <m:dPr>
+                                      <m:ctrlPr>
+                                        <a:rPr lang="en-US" i="1">
+                                          <a:solidFill>
+                                            <a:srgbClr val="000000"/>
+                                          </a:solidFill>
+                                          <a:latin typeface="Cambria Math" panose="02040503050406030204" pitchFamily="18" charset="0"/>
+                                        </a:rPr>
+                                      </m:ctrlPr>
+                                    </m:dPr>
+                                    <m:e>
+                                      <m:sSup>
+                                        <m:sSupPr>
+                                          <m:ctrlPr>
+                                            <a:rPr lang="en-US" i="1">
+                                              <a:solidFill>
+                                                <a:srgbClr val="000000"/>
+                                              </a:solidFill>
+                                              <a:latin typeface="Cambria Math" panose="02040503050406030204" pitchFamily="18" charset="0"/>
+                                            </a:rPr>
+                                          </m:ctrlPr>
+                                        </m:sSupPr>
+                                        <m:e>
+                                          <m:r>
+                                            <a:rPr lang="en-US" i="1">
+                                              <a:solidFill>
+                                                <a:srgbClr val="000000"/>
+                                              </a:solidFill>
+                                              <a:latin typeface="Cambria Math" panose="02040503050406030204" pitchFamily="18" charset="0"/>
+                                            </a:rPr>
+                                            <m:t>𝜔</m:t>
+                                          </m:r>
+                                        </m:e>
+                                        <m:sup>
+                                          <m:r>
+                                            <a:rPr lang="en-US" i="1">
+                                              <a:solidFill>
+                                                <a:srgbClr val="000000"/>
+                                              </a:solidFill>
+                                              <a:latin typeface="Cambria Math" panose="02040503050406030204" pitchFamily="18" charset="0"/>
+                                            </a:rPr>
+                                            <m:t>2</m:t>
+                                          </m:r>
+                                        </m:sup>
+                                      </m:sSup>
+                                      <m:r>
+                                        <a:rPr lang="en-US" i="1">
+                                          <a:solidFill>
+                                            <a:srgbClr val="000000"/>
+                                          </a:solidFill>
+                                          <a:latin typeface="Cambria Math" panose="02040503050406030204" pitchFamily="18" charset="0"/>
+                                        </a:rPr>
+                                        <m:t>−</m:t>
+                                      </m:r>
+                                      <m:sSubSup>
+                                        <m:sSubSupPr>
+                                          <m:ctrlPr>
+                                            <a:rPr lang="en-US" i="1">
+                                              <a:solidFill>
+                                                <a:srgbClr val="000000"/>
+                                              </a:solidFill>
+                                              <a:latin typeface="Cambria Math" panose="02040503050406030204" pitchFamily="18" charset="0"/>
+                                            </a:rPr>
+                                          </m:ctrlPr>
+                                        </m:sSubSupPr>
+                                        <m:e>
+                                          <m:r>
+                                            <a:rPr lang="en-US" i="1">
+                                              <a:solidFill>
+                                                <a:srgbClr val="000000"/>
+                                              </a:solidFill>
+                                              <a:latin typeface="Cambria Math" panose="02040503050406030204" pitchFamily="18" charset="0"/>
+                                            </a:rPr>
+                                            <m:t>𝜔</m:t>
+                                          </m:r>
+                                        </m:e>
+                                        <m:sub>
+                                          <m:r>
+                                            <a:rPr lang="en-US" b="0" i="1" smtClean="0">
+                                              <a:solidFill>
+                                                <a:srgbClr val="000000"/>
+                                              </a:solidFill>
+                                              <a:latin typeface="Cambria Math" panose="02040503050406030204" pitchFamily="18" charset="0"/>
+                                            </a:rPr>
+                                            <m:t>𝑁</m:t>
+                                          </m:r>
+                                        </m:sub>
+                                        <m:sup>
+                                          <m:r>
+                                            <a:rPr lang="en-US" i="1">
+                                              <a:solidFill>
+                                                <a:srgbClr val="000000"/>
+                                              </a:solidFill>
+                                              <a:latin typeface="Cambria Math" panose="02040503050406030204" pitchFamily="18" charset="0"/>
+                                            </a:rPr>
+                                            <m:t>2</m:t>
+                                          </m:r>
+                                        </m:sup>
+                                      </m:sSubSup>
+                                    </m:e>
+                                  </m:d>
+                                </m:e>
+                                <m:sup>
+                                  <m:r>
+                                    <a:rPr lang="en-US" i="1">
+                                      <a:solidFill>
+                                        <a:srgbClr val="000000"/>
+                                      </a:solidFill>
+                                      <a:latin typeface="Cambria Math" panose="02040503050406030204" pitchFamily="18" charset="0"/>
+                                    </a:rPr>
+                                    <m:t>2</m:t>
+                                  </m:r>
+                                </m:sup>
+                              </m:sSup>
+                              <m:r>
+                                <a:rPr lang="en-US" i="1">
+                                  <a:solidFill>
+                                    <a:srgbClr val="000000"/>
+                                  </a:solidFill>
+                                  <a:latin typeface="Cambria Math" panose="02040503050406030204" pitchFamily="18" charset="0"/>
+                                </a:rPr>
+                                <m:t>+</m:t>
+                              </m:r>
+                              <m:sSup>
+                                <m:sSupPr>
+                                  <m:ctrlPr>
+                                    <a:rPr lang="en-US" i="1">
+                                      <a:solidFill>
+                                        <a:srgbClr val="000000"/>
+                                      </a:solidFill>
+                                      <a:latin typeface="Cambria Math" panose="02040503050406030204" pitchFamily="18" charset="0"/>
+                                    </a:rPr>
+                                  </m:ctrlPr>
+                                </m:sSupPr>
+                                <m:e>
+                                  <m:d>
+                                    <m:dPr>
+                                      <m:ctrlPr>
+                                        <a:rPr lang="en-US" i="1">
+                                          <a:solidFill>
+                                            <a:srgbClr val="000000"/>
+                                          </a:solidFill>
+                                          <a:latin typeface="Cambria Math" panose="02040503050406030204" pitchFamily="18" charset="0"/>
+                                        </a:rPr>
+                                      </m:ctrlPr>
+                                    </m:dPr>
+                                    <m:e>
+                                      <m:f>
+                                        <m:fPr>
+                                          <m:ctrlPr>
+                                            <a:rPr lang="en-US" i="1">
+                                              <a:solidFill>
+                                                <a:srgbClr val="000000"/>
+                                              </a:solidFill>
+                                              <a:latin typeface="Cambria Math" panose="02040503050406030204" pitchFamily="18" charset="0"/>
+                                            </a:rPr>
+                                          </m:ctrlPr>
+                                        </m:fPr>
+                                        <m:num>
+                                          <m:r>
+                                            <a:rPr lang="en-US" i="1">
+                                              <a:solidFill>
+                                                <a:srgbClr val="000000"/>
+                                              </a:solidFill>
+                                              <a:latin typeface="Cambria Math" panose="02040503050406030204" pitchFamily="18" charset="0"/>
+                                            </a:rPr>
+                                            <m:t>𝑏</m:t>
+                                          </m:r>
+                                          <m:r>
+                                            <a:rPr lang="en-US" i="1">
+                                              <a:solidFill>
+                                                <a:srgbClr val="000000"/>
+                                              </a:solidFill>
+                                              <a:latin typeface="Cambria Math" panose="02040503050406030204" pitchFamily="18" charset="0"/>
+                                            </a:rPr>
+                                            <m:t>𝜔</m:t>
+                                          </m:r>
+                                        </m:num>
+                                        <m:den>
+                                          <m:r>
+                                            <a:rPr lang="en-US" i="1">
+                                              <a:solidFill>
+                                                <a:srgbClr val="000000"/>
+                                              </a:solidFill>
+                                              <a:latin typeface="Cambria Math" panose="02040503050406030204" pitchFamily="18" charset="0"/>
+                                            </a:rPr>
+                                            <m:t>𝑚</m:t>
+                                          </m:r>
+                                        </m:den>
+                                      </m:f>
+                                    </m:e>
+                                  </m:d>
+                                </m:e>
+                                <m:sup>
+                                  <m:r>
+                                    <a:rPr lang="en-US" i="1">
+                                      <a:solidFill>
+                                        <a:srgbClr val="000000"/>
+                                      </a:solidFill>
+                                      <a:latin typeface="Cambria Math" panose="02040503050406030204" pitchFamily="18" charset="0"/>
+                                    </a:rPr>
+                                    <m:t>2</m:t>
+                                  </m:r>
+                                </m:sup>
+                              </m:sSup>
+                            </m:e>
+                          </m:rad>
+                        </m:den>
+                      </m:f>
+                    </m:oMath>
+                  </m:oMathPara>
+                </a14:m>
+                <a:endParaRPr lang="en-US" dirty="0"/>
+              </a:p>
+            </p:txBody>
+          </p:sp>
+        </mc:Choice>
+        <mc:Fallback>
+          <p:sp>
+            <p:nvSpPr>
+              <p:cNvPr id="24601" name="Object 24"/>
+              <p:cNvSpPr txBox="1">
+                <a:spLocks noRot="1" noChangeAspect="1" noMove="1" noResize="1" noEditPoints="1" noAdjustHandles="1" noChangeArrowheads="1" noChangeShapeType="1" noTextEdit="1"/>
+              </p:cNvSpPr>
+              <p:nvPr/>
+            </p:nvSpPr>
+            <p:spPr bwMode="auto">
+              <a:xfrm>
+                <a:off x="5837238" y="4632324"/>
+                <a:ext cx="1597556" cy="701280"/>
+              </a:xfrm>
+              <a:prstGeom prst="rect">
+                <a:avLst/>
+              </a:prstGeom>
+              <a:blipFill>
+                <a:blip r:embed="rId36"/>
+                <a:stretch>
+                  <a:fillRect/>
+                </a:stretch>
+              </a:blipFill>
+              <a:ln>
+                <a:noFill/>
+              </a:ln>
+            </p:spPr>
+            <p:txBody>
+              <a:bodyPr/>
+              <a:lstStyle/>
+              <a:p>
+                <a:r>
+                  <a:rPr lang="en-US">
+                    <a:noFill/>
+                  </a:rPr>
+                  <a:t> </a:t>
+                </a:r>
+              </a:p>
+            </p:txBody>
+          </p:sp>
+        </mc:Fallback>
+      </mc:AlternateContent>
       <p:graphicFrame>
         <p:nvGraphicFramePr>
-          <p:cNvPr id="24597" name="Object 20"/>
+          <p:cNvPr id="24602" name="Object 25"/>
           <p:cNvGraphicFramePr>
             <a:graphicFrameLocks noChangeAspect="1"/>
           </p:cNvGraphicFramePr>
-          <p:nvPr/>
+          <p:nvPr>
+            <p:extLst>
+              <p:ext uri="{D42A27DB-BD31-4B8C-83A1-F6EECF244321}">
+                <p14:modId xmlns:p14="http://schemas.microsoft.com/office/powerpoint/2010/main" val="4038857215"/>
+              </p:ext>
+            </p:extLst>
+          </p:nvPr>
         </p:nvGraphicFramePr>
         <p:xfrm>
-          <a:off x="6784181" y="3987405"/>
-          <a:ext cx="685800" cy="291703"/>
+          <a:off x="4594228" y="4866482"/>
+          <a:ext cx="896540" cy="161925"/>
         </p:xfrm>
         <a:graphic>
           <a:graphicData uri="http://schemas.openxmlformats.org/presentationml/2006/ole">
             <mc:AlternateContent xmlns:mc="http://schemas.openxmlformats.org/markup-compatibility/2006">
               <mc:Choice xmlns:v="urn:schemas-microsoft-com:vml" Requires="v">
-                <p:oleObj name="Equation" r:id="rId32" imgW="1193800" imgH="508000" progId="Equation.3">
+                <p:oleObj name="Equation" r:id="rId37" imgW="1193800" imgH="215900" progId="Equation.3">
                   <p:embed/>
                 </p:oleObj>
               </mc:Choice>
               <mc:Fallback>
-                <p:oleObj name="Equation" r:id="rId32" imgW="1193800" imgH="508000" progId="Equation.3">
+                <p:oleObj name="Equation" r:id="rId37" imgW="1193800" imgH="215900" progId="Equation.3">
                   <p:embed/>
                   <p:pic>
                     <p:nvPicPr>
-                      <p:cNvPr id="24597" name="Object 20"/>
+                      <p:cNvPr id="24602" name="Object 25"/>
                       <p:cNvPicPr>
                         <a:picLocks noChangeAspect="1" noChangeArrowheads="1"/>
                       </p:cNvPicPr>
                       <p:nvPr/>
                     </p:nvPicPr>
                     <p:blipFill>
-                      <a:blip r:embed="rId33">
+                      <a:blip r:embed="rId38">
                         <a:extLst>
                           <a:ext uri="{28A0092B-C50C-407E-A947-70E740481C1C}">
                             <a14:useLocalDpi xmlns:a14="http://schemas.microsoft.com/office/drawing/2010/main" val="0"/>
@@ -6475,422 +7748,7 @@
                     </p:blipFill>
                     <p:spPr bwMode="auto">
                       <a:xfrm>
-                        <a:off x="6784181" y="3987405"/>
-                        <a:ext cx="685800" cy="291703"/>
-                      </a:xfrm>
-                      <a:prstGeom prst="rect">
-                        <a:avLst/>
-                      </a:prstGeom>
-                      <a:noFill/>
-                      <a:ln>
-                        <a:noFill/>
-                      </a:ln>
-                      <a:extLst>
-                        <a:ext uri="{909E8E84-426E-40DD-AFC4-6F175D3DCCD1}">
-                          <a14:hiddenFill xmlns:a14="http://schemas.microsoft.com/office/drawing/2010/main">
-                            <a:solidFill>
-                              <a:srgbClr val="FFFFFF"/>
-                            </a:solidFill>
-                          </a14:hiddenFill>
-                        </a:ext>
-                        <a:ext uri="{91240B29-F687-4F45-9708-019B960494DF}">
-                          <a14:hiddenLine xmlns:a14="http://schemas.microsoft.com/office/drawing/2010/main" w="9525">
-                            <a:solidFill>
-                              <a:srgbClr val="000000"/>
-                            </a:solidFill>
-                            <a:miter lim="800000"/>
-                            <a:headEnd/>
-                            <a:tailEnd/>
-                          </a14:hiddenLine>
-                        </a:ext>
-                      </a:extLst>
-                    </p:spPr>
-                  </p:pic>
-                </p:oleObj>
-              </mc:Fallback>
-            </mc:AlternateContent>
-          </a:graphicData>
-        </a:graphic>
-      </p:graphicFrame>
-      <p:graphicFrame>
-        <p:nvGraphicFramePr>
-          <p:cNvPr id="24598" name="Object 21"/>
-          <p:cNvGraphicFramePr>
-            <a:graphicFrameLocks noChangeAspect="1"/>
-          </p:cNvGraphicFramePr>
-          <p:nvPr/>
-        </p:nvGraphicFramePr>
-        <p:xfrm>
-          <a:off x="3517107" y="4371975"/>
-          <a:ext cx="417910" cy="305991"/>
-        </p:xfrm>
-        <a:graphic>
-          <a:graphicData uri="http://schemas.openxmlformats.org/presentationml/2006/ole">
-            <mc:AlternateContent xmlns:mc="http://schemas.openxmlformats.org/markup-compatibility/2006">
-              <mc:Choice xmlns:v="urn:schemas-microsoft-com:vml" Requires="v">
-                <p:oleObj name="Equation" r:id="rId34" imgW="609336" imgH="444307" progId="Equation.3">
-                  <p:embed/>
-                </p:oleObj>
-              </mc:Choice>
-              <mc:Fallback>
-                <p:oleObj name="Equation" r:id="rId34" imgW="609336" imgH="444307" progId="Equation.3">
-                  <p:embed/>
-                  <p:pic>
-                    <p:nvPicPr>
-                      <p:cNvPr id="24598" name="Object 21"/>
-                      <p:cNvPicPr>
-                        <a:picLocks noChangeAspect="1" noChangeArrowheads="1"/>
-                      </p:cNvPicPr>
-                      <p:nvPr/>
-                    </p:nvPicPr>
-                    <p:blipFill>
-                      <a:blip r:embed="rId35">
-                        <a:extLst>
-                          <a:ext uri="{28A0092B-C50C-407E-A947-70E740481C1C}">
-                            <a14:useLocalDpi xmlns:a14="http://schemas.microsoft.com/office/drawing/2010/main" val="0"/>
-                          </a:ext>
-                        </a:extLst>
-                      </a:blip>
-                      <a:srcRect/>
-                      <a:stretch>
-                        <a:fillRect/>
-                      </a:stretch>
-                    </p:blipFill>
-                    <p:spPr bwMode="auto">
-                      <a:xfrm>
-                        <a:off x="3517107" y="4371975"/>
-                        <a:ext cx="417910" cy="305991"/>
-                      </a:xfrm>
-                      <a:prstGeom prst="rect">
-                        <a:avLst/>
-                      </a:prstGeom>
-                      <a:noFill/>
-                      <a:ln>
-                        <a:noFill/>
-                      </a:ln>
-                      <a:extLst>
-                        <a:ext uri="{909E8E84-426E-40DD-AFC4-6F175D3DCCD1}">
-                          <a14:hiddenFill xmlns:a14="http://schemas.microsoft.com/office/drawing/2010/main">
-                            <a:solidFill>
-                              <a:srgbClr val="FFFFFF"/>
-                            </a:solidFill>
-                          </a14:hiddenFill>
-                        </a:ext>
-                        <a:ext uri="{91240B29-F687-4F45-9708-019B960494DF}">
-                          <a14:hiddenLine xmlns:a14="http://schemas.microsoft.com/office/drawing/2010/main" w="9525">
-                            <a:solidFill>
-                              <a:srgbClr val="000000"/>
-                            </a:solidFill>
-                            <a:miter lim="800000"/>
-                            <a:headEnd/>
-                            <a:tailEnd/>
-                          </a14:hiddenLine>
-                        </a:ext>
-                      </a:extLst>
-                    </p:spPr>
-                  </p:pic>
-                </p:oleObj>
-              </mc:Fallback>
-            </mc:AlternateContent>
-          </a:graphicData>
-        </a:graphic>
-      </p:graphicFrame>
-      <p:graphicFrame>
-        <p:nvGraphicFramePr>
-          <p:cNvPr id="24599" name="Object 22"/>
-          <p:cNvGraphicFramePr>
-            <a:graphicFrameLocks noChangeAspect="1"/>
-          </p:cNvGraphicFramePr>
-          <p:nvPr/>
-        </p:nvGraphicFramePr>
-        <p:xfrm>
-          <a:off x="4255294" y="4470799"/>
-          <a:ext cx="563166" cy="191690"/>
-        </p:xfrm>
-        <a:graphic>
-          <a:graphicData uri="http://schemas.openxmlformats.org/presentationml/2006/ole">
-            <mc:AlternateContent xmlns:mc="http://schemas.openxmlformats.org/markup-compatibility/2006">
-              <mc:Choice xmlns:v="urn:schemas-microsoft-com:vml" Requires="v">
-                <p:oleObj name="Equation" r:id="rId36" imgW="672808" imgH="228501" progId="Equation.3">
-                  <p:embed/>
-                </p:oleObj>
-              </mc:Choice>
-              <mc:Fallback>
-                <p:oleObj name="Equation" r:id="rId36" imgW="672808" imgH="228501" progId="Equation.3">
-                  <p:embed/>
-                  <p:pic>
-                    <p:nvPicPr>
-                      <p:cNvPr id="24599" name="Object 22"/>
-                      <p:cNvPicPr>
-                        <a:picLocks noChangeAspect="1" noChangeArrowheads="1"/>
-                      </p:cNvPicPr>
-                      <p:nvPr/>
-                    </p:nvPicPr>
-                    <p:blipFill>
-                      <a:blip r:embed="rId37">
-                        <a:extLst>
-                          <a:ext uri="{28A0092B-C50C-407E-A947-70E740481C1C}">
-                            <a14:useLocalDpi xmlns:a14="http://schemas.microsoft.com/office/drawing/2010/main" val="0"/>
-                          </a:ext>
-                        </a:extLst>
-                      </a:blip>
-                      <a:srcRect/>
-                      <a:stretch>
-                        <a:fillRect/>
-                      </a:stretch>
-                    </p:blipFill>
-                    <p:spPr bwMode="auto">
-                      <a:xfrm>
-                        <a:off x="4255294" y="4470799"/>
-                        <a:ext cx="563166" cy="191690"/>
-                      </a:xfrm>
-                      <a:prstGeom prst="rect">
-                        <a:avLst/>
-                      </a:prstGeom>
-                      <a:noFill/>
-                      <a:ln>
-                        <a:noFill/>
-                      </a:ln>
-                      <a:extLst>
-                        <a:ext uri="{909E8E84-426E-40DD-AFC4-6F175D3DCCD1}">
-                          <a14:hiddenFill xmlns:a14="http://schemas.microsoft.com/office/drawing/2010/main">
-                            <a:solidFill>
-                              <a:srgbClr val="FFFFFF"/>
-                            </a:solidFill>
-                          </a14:hiddenFill>
-                        </a:ext>
-                        <a:ext uri="{91240B29-F687-4F45-9708-019B960494DF}">
-                          <a14:hiddenLine xmlns:a14="http://schemas.microsoft.com/office/drawing/2010/main" w="9525">
-                            <a:solidFill>
-                              <a:srgbClr val="000000"/>
-                            </a:solidFill>
-                            <a:miter lim="800000"/>
-                            <a:headEnd/>
-                            <a:tailEnd/>
-                          </a14:hiddenLine>
-                        </a:ext>
-                      </a:extLst>
-                    </p:spPr>
-                  </p:pic>
-                </p:oleObj>
-              </mc:Fallback>
-            </mc:AlternateContent>
-          </a:graphicData>
-        </a:graphic>
-      </p:graphicFrame>
-      <p:graphicFrame>
-        <p:nvGraphicFramePr>
-          <p:cNvPr id="24600" name="Object 23"/>
-          <p:cNvGraphicFramePr>
-            <a:graphicFrameLocks noChangeAspect="1"/>
-          </p:cNvGraphicFramePr>
-          <p:nvPr/>
-        </p:nvGraphicFramePr>
-        <p:xfrm>
-          <a:off x="3320653" y="4676776"/>
-          <a:ext cx="1062038" cy="232172"/>
-        </p:xfrm>
-        <a:graphic>
-          <a:graphicData uri="http://schemas.openxmlformats.org/presentationml/2006/ole">
-            <mc:AlternateContent xmlns:mc="http://schemas.openxmlformats.org/markup-compatibility/2006">
-              <mc:Choice xmlns:v="urn:schemas-microsoft-com:vml" Requires="v">
-                <p:oleObj name="Equation" r:id="rId38" imgW="1104900" imgH="241300" progId="Equation.3">
-                  <p:embed/>
-                </p:oleObj>
-              </mc:Choice>
-              <mc:Fallback>
-                <p:oleObj name="Equation" r:id="rId38" imgW="1104900" imgH="241300" progId="Equation.3">
-                  <p:embed/>
-                  <p:pic>
-                    <p:nvPicPr>
-                      <p:cNvPr id="24600" name="Object 23"/>
-                      <p:cNvPicPr>
-                        <a:picLocks noChangeAspect="1" noChangeArrowheads="1"/>
-                      </p:cNvPicPr>
-                      <p:nvPr/>
-                    </p:nvPicPr>
-                    <p:blipFill>
-                      <a:blip r:embed="rId39">
-                        <a:extLst>
-                          <a:ext uri="{28A0092B-C50C-407E-A947-70E740481C1C}">
-                            <a14:useLocalDpi xmlns:a14="http://schemas.microsoft.com/office/drawing/2010/main" val="0"/>
-                          </a:ext>
-                        </a:extLst>
-                      </a:blip>
-                      <a:srcRect/>
-                      <a:stretch>
-                        <a:fillRect/>
-                      </a:stretch>
-                    </p:blipFill>
-                    <p:spPr bwMode="auto">
-                      <a:xfrm>
-                        <a:off x="3320653" y="4676776"/>
-                        <a:ext cx="1062038" cy="232172"/>
-                      </a:xfrm>
-                      <a:prstGeom prst="rect">
-                        <a:avLst/>
-                      </a:prstGeom>
-                      <a:noFill/>
-                      <a:ln>
-                        <a:noFill/>
-                      </a:ln>
-                      <a:extLst>
-                        <a:ext uri="{909E8E84-426E-40DD-AFC4-6F175D3DCCD1}">
-                          <a14:hiddenFill xmlns:a14="http://schemas.microsoft.com/office/drawing/2010/main">
-                            <a:solidFill>
-                              <a:srgbClr val="FFFFFF"/>
-                            </a:solidFill>
-                          </a14:hiddenFill>
-                        </a:ext>
-                        <a:ext uri="{91240B29-F687-4F45-9708-019B960494DF}">
-                          <a14:hiddenLine xmlns:a14="http://schemas.microsoft.com/office/drawing/2010/main" w="9525">
-                            <a:solidFill>
-                              <a:srgbClr val="000000"/>
-                            </a:solidFill>
-                            <a:miter lim="800000"/>
-                            <a:headEnd/>
-                            <a:tailEnd/>
-                          </a14:hiddenLine>
-                        </a:ext>
-                      </a:extLst>
-                    </p:spPr>
-                  </p:pic>
-                </p:oleObj>
-              </mc:Fallback>
-            </mc:AlternateContent>
-          </a:graphicData>
-        </a:graphic>
-      </p:graphicFrame>
-      <p:graphicFrame>
-        <p:nvGraphicFramePr>
-          <p:cNvPr id="24601" name="Object 24"/>
-          <p:cNvGraphicFramePr>
-            <a:graphicFrameLocks noChangeAspect="1"/>
-          </p:cNvGraphicFramePr>
-          <p:nvPr/>
-        </p:nvGraphicFramePr>
-        <p:xfrm>
-          <a:off x="5836445" y="4631532"/>
-          <a:ext cx="984647" cy="351235"/>
-        </p:xfrm>
-        <a:graphic>
-          <a:graphicData uri="http://schemas.openxmlformats.org/presentationml/2006/ole">
-            <mc:AlternateContent xmlns:mc="http://schemas.openxmlformats.org/markup-compatibility/2006">
-              <mc:Choice xmlns:v="urn:schemas-microsoft-com:vml" Requires="v">
-                <p:oleObj name="Equation" r:id="rId40" imgW="1497950" imgH="533169" progId="Equation.3">
-                  <p:embed/>
-                </p:oleObj>
-              </mc:Choice>
-              <mc:Fallback>
-                <p:oleObj name="Equation" r:id="rId40" imgW="1497950" imgH="533169" progId="Equation.3">
-                  <p:embed/>
-                  <p:pic>
-                    <p:nvPicPr>
-                      <p:cNvPr id="24601" name="Object 24"/>
-                      <p:cNvPicPr>
-                        <a:picLocks noChangeAspect="1" noChangeArrowheads="1"/>
-                      </p:cNvPicPr>
-                      <p:nvPr/>
-                    </p:nvPicPr>
-                    <p:blipFill>
-                      <a:blip r:embed="rId41">
-                        <a:extLst>
-                          <a:ext uri="{28A0092B-C50C-407E-A947-70E740481C1C}">
-                            <a14:useLocalDpi xmlns:a14="http://schemas.microsoft.com/office/drawing/2010/main" val="0"/>
-                          </a:ext>
-                        </a:extLst>
-                      </a:blip>
-                      <a:srcRect/>
-                      <a:stretch>
-                        <a:fillRect/>
-                      </a:stretch>
-                    </p:blipFill>
-                    <p:spPr bwMode="auto">
-                      <a:xfrm>
-                        <a:off x="5836445" y="4631532"/>
-                        <a:ext cx="984647" cy="351235"/>
-                      </a:xfrm>
-                      <a:prstGeom prst="rect">
-                        <a:avLst/>
-                      </a:prstGeom>
-                      <a:noFill/>
-                      <a:ln>
-                        <a:noFill/>
-                      </a:ln>
-                      <a:extLst>
-                        <a:ext uri="{909E8E84-426E-40DD-AFC4-6F175D3DCCD1}">
-                          <a14:hiddenFill xmlns:a14="http://schemas.microsoft.com/office/drawing/2010/main">
-                            <a:solidFill>
-                              <a:srgbClr val="FFFFFF"/>
-                            </a:solidFill>
-                          </a14:hiddenFill>
-                        </a:ext>
-                        <a:ext uri="{91240B29-F687-4F45-9708-019B960494DF}">
-                          <a14:hiddenLine xmlns:a14="http://schemas.microsoft.com/office/drawing/2010/main" w="9525">
-                            <a:solidFill>
-                              <a:srgbClr val="000000"/>
-                            </a:solidFill>
-                            <a:miter lim="800000"/>
-                            <a:headEnd/>
-                            <a:tailEnd/>
-                          </a14:hiddenLine>
-                        </a:ext>
-                      </a:extLst>
-                    </p:spPr>
-                  </p:pic>
-                </p:oleObj>
-              </mc:Fallback>
-            </mc:AlternateContent>
-          </a:graphicData>
-        </a:graphic>
-      </p:graphicFrame>
-      <p:graphicFrame>
-        <p:nvGraphicFramePr>
-          <p:cNvPr id="24602" name="Object 25"/>
-          <p:cNvGraphicFramePr>
-            <a:graphicFrameLocks noChangeAspect="1"/>
-          </p:cNvGraphicFramePr>
-          <p:nvPr/>
-        </p:nvGraphicFramePr>
-        <p:xfrm>
-          <a:off x="4601767" y="4706541"/>
-          <a:ext cx="896540" cy="161925"/>
-        </p:xfrm>
-        <a:graphic>
-          <a:graphicData uri="http://schemas.openxmlformats.org/presentationml/2006/ole">
-            <mc:AlternateContent xmlns:mc="http://schemas.openxmlformats.org/markup-compatibility/2006">
-              <mc:Choice xmlns:v="urn:schemas-microsoft-com:vml" Requires="v">
-                <p:oleObj name="Equation" r:id="rId42" imgW="1193800" imgH="215900" progId="Equation.3">
-                  <p:embed/>
-                </p:oleObj>
-              </mc:Choice>
-              <mc:Fallback>
-                <p:oleObj name="Equation" r:id="rId42" imgW="1193800" imgH="215900" progId="Equation.3">
-                  <p:embed/>
-                  <p:pic>
-                    <p:nvPicPr>
-                      <p:cNvPr id="24602" name="Object 25"/>
-                      <p:cNvPicPr>
-                        <a:picLocks noChangeAspect="1" noChangeArrowheads="1"/>
-                      </p:cNvPicPr>
-                      <p:nvPr/>
-                    </p:nvPicPr>
-                    <p:blipFill>
-                      <a:blip r:embed="rId43">
-                        <a:extLst>
-                          <a:ext uri="{28A0092B-C50C-407E-A947-70E740481C1C}">
-                            <a14:useLocalDpi xmlns:a14="http://schemas.microsoft.com/office/drawing/2010/main" val="0"/>
-                          </a:ext>
-                        </a:extLst>
-                      </a:blip>
-                      <a:srcRect/>
-                      <a:stretch>
-                        <a:fillRect/>
-                      </a:stretch>
-                    </p:blipFill>
-                    <p:spPr bwMode="auto">
-                      <a:xfrm>
-                        <a:off x="4601767" y="4706541"/>
+                        <a:off x="4594228" y="4866482"/>
                         <a:ext cx="896540" cy="161925"/>
                       </a:xfrm>
                       <a:prstGeom prst="rect">
@@ -50479,95 +51337,453 @@
           </a:p>
         </p:txBody>
       </p:sp>
-      <p:graphicFrame>
-        <p:nvGraphicFramePr>
-          <p:cNvPr id="20488" name="Object 7"/>
-          <p:cNvGraphicFramePr>
-            <a:graphicFrameLocks noChangeAspect="1"/>
-          </p:cNvGraphicFramePr>
-          <p:nvPr>
-            <p:extLst>
-              <p:ext uri="{D42A27DB-BD31-4B8C-83A1-F6EECF244321}">
-                <p14:modId xmlns:p14="http://schemas.microsoft.com/office/powerpoint/2010/main" val="644028530"/>
-              </p:ext>
-            </p:extLst>
-          </p:nvPr>
-        </p:nvGraphicFramePr>
-        <p:xfrm>
-          <a:off x="1937742" y="3639786"/>
-          <a:ext cx="1915716" cy="710803"/>
-        </p:xfrm>
-        <a:graphic>
-          <a:graphicData uri="http://schemas.openxmlformats.org/presentationml/2006/ole">
-            <mc:AlternateContent xmlns:mc="http://schemas.openxmlformats.org/markup-compatibility/2006">
-              <mc:Choice xmlns:v="urn:schemas-microsoft-com:vml" Requires="v">
-                <p:oleObj name="Equation" r:id="rId4" imgW="1536700" imgH="571500" progId="Equation.3">
-                  <p:embed/>
-                </p:oleObj>
-              </mc:Choice>
-              <mc:Fallback>
-                <p:oleObj name="Equation" r:id="rId4" imgW="1536700" imgH="571500" progId="Equation.3">
-                  <p:embed/>
-                  <p:pic>
-                    <p:nvPicPr>
-                      <p:cNvPr id="20488" name="Object 7"/>
-                      <p:cNvPicPr>
-                        <a:picLocks noChangeAspect="1" noChangeArrowheads="1"/>
-                      </p:cNvPicPr>
-                      <p:nvPr/>
-                    </p:nvPicPr>
-                    <p:blipFill>
-                      <a:blip r:embed="rId5">
-                        <a:extLst>
-                          <a:ext uri="{28A0092B-C50C-407E-A947-70E740481C1C}">
-                            <a14:useLocalDpi xmlns:a14="http://schemas.microsoft.com/office/drawing/2010/main" val="0"/>
-                          </a:ext>
-                        </a:extLst>
-                      </a:blip>
-                      <a:srcRect/>
-                      <a:stretch>
-                        <a:fillRect/>
-                      </a:stretch>
-                    </p:blipFill>
-                    <p:spPr bwMode="auto">
-                      <a:xfrm>
-                        <a:off x="1937742" y="3639786"/>
-                        <a:ext cx="1915716" cy="710803"/>
-                      </a:xfrm>
-                      <a:prstGeom prst="rect">
-                        <a:avLst/>
-                      </a:prstGeom>
-                      <a:noFill/>
-                      <a:ln>
-                        <a:noFill/>
-                      </a:ln>
-                      <a:extLst>
-                        <a:ext uri="{909E8E84-426E-40DD-AFC4-6F175D3DCCD1}">
-                          <a14:hiddenFill xmlns:a14="http://schemas.microsoft.com/office/drawing/2010/main">
-                            <a:solidFill>
-                              <a:srgbClr val="FFFFFF"/>
-                            </a:solidFill>
-                          </a14:hiddenFill>
-                        </a:ext>
-                        <a:ext uri="{91240B29-F687-4F45-9708-019B960494DF}">
-                          <a14:hiddenLine xmlns:a14="http://schemas.microsoft.com/office/drawing/2010/main" w="9525">
-                            <a:solidFill>
-                              <a:srgbClr val="000000"/>
-                            </a:solidFill>
-                            <a:miter lim="800000"/>
-                            <a:headEnd/>
-                            <a:tailEnd/>
-                          </a14:hiddenLine>
-                        </a:ext>
-                      </a:extLst>
-                    </p:spPr>
-                  </p:pic>
-                </p:oleObj>
-              </mc:Fallback>
-            </mc:AlternateContent>
-          </a:graphicData>
-        </a:graphic>
-      </p:graphicFrame>
+      <mc:AlternateContent xmlns:mc="http://schemas.openxmlformats.org/markup-compatibility/2006">
+        <mc:Choice xmlns:a14="http://schemas.microsoft.com/office/drawing/2010/main" Requires="a14">
+          <p:sp>
+            <p:nvSpPr>
+              <p:cNvPr id="20488" name="Object 7"/>
+              <p:cNvSpPr txBox="1"/>
+              <p:nvPr/>
+            </p:nvSpPr>
+            <p:spPr bwMode="auto">
+              <a:xfrm>
+                <a:off x="1938338" y="3347940"/>
+                <a:ext cx="2482676" cy="1146351"/>
+              </a:xfrm>
+              <a:prstGeom prst="rect">
+                <a:avLst/>
+              </a:prstGeom>
+              <a:noFill/>
+              <a:ln>
+                <a:noFill/>
+              </a:ln>
+            </p:spPr>
+            <p:txBody>
+              <a:bodyPr>
+                <a:normAutofit fontScale="77500" lnSpcReduction="20000"/>
+              </a:bodyPr>
+              <a:lstStyle/>
+              <a:p>
+                <a:pPr/>
+                <a14:m>
+                  <m:oMathPara xmlns:m="http://schemas.openxmlformats.org/officeDocument/2006/math">
+                    <m:oMathParaPr>
+                      <m:jc m:val="left"/>
+                    </m:oMathParaPr>
+                    <m:oMath xmlns:m="http://schemas.openxmlformats.org/officeDocument/2006/math">
+                      <m:r>
+                        <a:rPr lang="en-US" i="1" smtClean="0">
+                          <a:solidFill>
+                            <a:srgbClr val="000000"/>
+                          </a:solidFill>
+                          <a:latin typeface="Cambria Math" panose="02040503050406030204" pitchFamily="18" charset="0"/>
+                        </a:rPr>
+                        <m:t>𝐴</m:t>
+                      </m:r>
+                      <m:r>
+                        <a:rPr lang="en-US" i="1" smtClean="0">
+                          <a:solidFill>
+                            <a:srgbClr val="000000"/>
+                          </a:solidFill>
+                          <a:latin typeface="Cambria Math" panose="02040503050406030204" pitchFamily="18" charset="0"/>
+                        </a:rPr>
+                        <m:t>=</m:t>
+                      </m:r>
+                      <m:f>
+                        <m:fPr>
+                          <m:ctrlPr>
+                            <a:rPr lang="en-US" i="1">
+                              <a:solidFill>
+                                <a:srgbClr val="000000"/>
+                              </a:solidFill>
+                              <a:latin typeface="Cambria Math" panose="02040503050406030204" pitchFamily="18" charset="0"/>
+                            </a:rPr>
+                          </m:ctrlPr>
+                        </m:fPr>
+                        <m:num>
+                          <m:f>
+                            <m:fPr>
+                              <m:ctrlPr>
+                                <a:rPr lang="en-US" i="1">
+                                  <a:solidFill>
+                                    <a:srgbClr val="000000"/>
+                                  </a:solidFill>
+                                  <a:latin typeface="Cambria Math" panose="02040503050406030204" pitchFamily="18" charset="0"/>
+                                </a:rPr>
+                              </m:ctrlPr>
+                            </m:fPr>
+                            <m:num>
+                              <m:sSub>
+                                <m:sSubPr>
+                                  <m:ctrlPr>
+                                    <a:rPr lang="en-US" i="1">
+                                      <a:solidFill>
+                                        <a:srgbClr val="000000"/>
+                                      </a:solidFill>
+                                      <a:latin typeface="Cambria Math" panose="02040503050406030204" pitchFamily="18" charset="0"/>
+                                    </a:rPr>
+                                  </m:ctrlPr>
+                                </m:sSubPr>
+                                <m:e>
+                                  <m:r>
+                                    <a:rPr lang="en-US" i="1">
+                                      <a:solidFill>
+                                        <a:srgbClr val="000000"/>
+                                      </a:solidFill>
+                                      <a:latin typeface="Cambria Math" panose="02040503050406030204" pitchFamily="18" charset="0"/>
+                                    </a:rPr>
+                                    <m:t>𝐹</m:t>
+                                  </m:r>
+                                </m:e>
+                                <m:sub>
+                                  <m:r>
+                                    <a:rPr lang="en-US" b="0" i="1" smtClean="0">
+                                      <a:solidFill>
+                                        <a:srgbClr val="000000"/>
+                                      </a:solidFill>
+                                      <a:latin typeface="Cambria Math" panose="02040503050406030204" pitchFamily="18" charset="0"/>
+                                    </a:rPr>
+                                    <m:t>𝑚𝑎𝑥</m:t>
+                                  </m:r>
+                                </m:sub>
+                              </m:sSub>
+                            </m:num>
+                            <m:den>
+                              <m:r>
+                                <a:rPr lang="en-US" i="1">
+                                  <a:solidFill>
+                                    <a:srgbClr val="000000"/>
+                                  </a:solidFill>
+                                  <a:latin typeface="Cambria Math" panose="02040503050406030204" pitchFamily="18" charset="0"/>
+                                </a:rPr>
+                                <m:t>𝑚</m:t>
+                              </m:r>
+                            </m:den>
+                          </m:f>
+                        </m:num>
+                        <m:den>
+                          <m:rad>
+                            <m:radPr>
+                              <m:degHide m:val="on"/>
+                              <m:ctrlPr>
+                                <a:rPr lang="en-US" i="1">
+                                  <a:solidFill>
+                                    <a:srgbClr val="000000"/>
+                                  </a:solidFill>
+                                  <a:latin typeface="Cambria Math" panose="02040503050406030204" pitchFamily="18" charset="0"/>
+                                </a:rPr>
+                              </m:ctrlPr>
+                            </m:radPr>
+                            <m:deg/>
+                            <m:e>
+                              <m:sSup>
+                                <m:sSupPr>
+                                  <m:ctrlPr>
+                                    <a:rPr lang="en-US" i="1">
+                                      <a:solidFill>
+                                        <a:srgbClr val="000000"/>
+                                      </a:solidFill>
+                                      <a:latin typeface="Cambria Math" panose="02040503050406030204" pitchFamily="18" charset="0"/>
+                                    </a:rPr>
+                                  </m:ctrlPr>
+                                </m:sSupPr>
+                                <m:e>
+                                  <m:d>
+                                    <m:dPr>
+                                      <m:ctrlPr>
+                                        <a:rPr lang="en-US" i="1">
+                                          <a:solidFill>
+                                            <a:srgbClr val="000000"/>
+                                          </a:solidFill>
+                                          <a:latin typeface="Cambria Math" panose="02040503050406030204" pitchFamily="18" charset="0"/>
+                                        </a:rPr>
+                                      </m:ctrlPr>
+                                    </m:dPr>
+                                    <m:e>
+                                      <m:sSubSup>
+                                        <m:sSubSupPr>
+                                          <m:ctrlPr>
+                                            <a:rPr lang="en-US" i="1">
+                                              <a:solidFill>
+                                                <a:srgbClr val="000000"/>
+                                              </a:solidFill>
+                                              <a:latin typeface="Cambria Math" panose="02040503050406030204" pitchFamily="18" charset="0"/>
+                                            </a:rPr>
+                                          </m:ctrlPr>
+                                        </m:sSubSupPr>
+                                        <m:e>
+                                          <m:r>
+                                            <a:rPr lang="en-US" i="1">
+                                              <a:solidFill>
+                                                <a:srgbClr val="000000"/>
+                                              </a:solidFill>
+                                              <a:latin typeface="Cambria Math" panose="02040503050406030204" pitchFamily="18" charset="0"/>
+                                            </a:rPr>
+                                            <m:t>𝜔</m:t>
+                                          </m:r>
+                                        </m:e>
+                                        <m:sub>
+                                          <m:r>
+                                            <a:rPr lang="en-US" i="1">
+                                              <a:solidFill>
+                                                <a:srgbClr val="000000"/>
+                                              </a:solidFill>
+                                              <a:latin typeface="Cambria Math" panose="02040503050406030204" pitchFamily="18" charset="0"/>
+                                            </a:rPr>
+                                            <m:t>𝑓</m:t>
+                                          </m:r>
+                                        </m:sub>
+                                        <m:sup>
+                                          <m:r>
+                                            <a:rPr lang="en-US" i="1">
+                                              <a:solidFill>
+                                                <a:srgbClr val="000000"/>
+                                              </a:solidFill>
+                                              <a:latin typeface="Cambria Math" panose="02040503050406030204" pitchFamily="18" charset="0"/>
+                                            </a:rPr>
+                                            <m:t>2</m:t>
+                                          </m:r>
+                                        </m:sup>
+                                      </m:sSubSup>
+                                      <m:r>
+                                        <a:rPr lang="en-US" i="1">
+                                          <a:solidFill>
+                                            <a:srgbClr val="000000"/>
+                                          </a:solidFill>
+                                          <a:latin typeface="Cambria Math" panose="02040503050406030204" pitchFamily="18" charset="0"/>
+                                        </a:rPr>
+                                        <m:t>−</m:t>
+                                      </m:r>
+                                      <m:sSubSup>
+                                        <m:sSubSupPr>
+                                          <m:ctrlPr>
+                                            <a:rPr lang="en-US" i="1">
+                                              <a:solidFill>
+                                                <a:srgbClr val="000000"/>
+                                              </a:solidFill>
+                                              <a:latin typeface="Cambria Math" panose="02040503050406030204" pitchFamily="18" charset="0"/>
+                                            </a:rPr>
+                                          </m:ctrlPr>
+                                        </m:sSubSupPr>
+                                        <m:e>
+                                          <m:r>
+                                            <a:rPr lang="en-US" i="1">
+                                              <a:solidFill>
+                                                <a:srgbClr val="000000"/>
+                                              </a:solidFill>
+                                              <a:latin typeface="Cambria Math" panose="02040503050406030204" pitchFamily="18" charset="0"/>
+                                            </a:rPr>
+                                            <m:t>𝜔</m:t>
+                                          </m:r>
+                                        </m:e>
+                                        <m:sub>
+                                          <m:r>
+                                            <a:rPr lang="en-US" b="0" i="1" smtClean="0">
+                                              <a:solidFill>
+                                                <a:srgbClr val="000000"/>
+                                              </a:solidFill>
+                                              <a:latin typeface="Cambria Math" panose="02040503050406030204" pitchFamily="18" charset="0"/>
+                                            </a:rPr>
+                                            <m:t>𝑁</m:t>
+                                          </m:r>
+                                        </m:sub>
+                                        <m:sup>
+                                          <m:r>
+                                            <a:rPr lang="en-US" i="1">
+                                              <a:solidFill>
+                                                <a:srgbClr val="000000"/>
+                                              </a:solidFill>
+                                              <a:latin typeface="Cambria Math" panose="02040503050406030204" pitchFamily="18" charset="0"/>
+                                            </a:rPr>
+                                            <m:t>2</m:t>
+                                          </m:r>
+                                        </m:sup>
+                                      </m:sSubSup>
+                                    </m:e>
+                                  </m:d>
+                                </m:e>
+                                <m:sup>
+                                  <m:r>
+                                    <a:rPr lang="en-US" i="1">
+                                      <a:solidFill>
+                                        <a:srgbClr val="000000"/>
+                                      </a:solidFill>
+                                      <a:latin typeface="Cambria Math" panose="02040503050406030204" pitchFamily="18" charset="0"/>
+                                    </a:rPr>
+                                    <m:t>2</m:t>
+                                  </m:r>
+                                </m:sup>
+                              </m:sSup>
+                              <m:r>
+                                <a:rPr lang="en-US" i="1">
+                                  <a:solidFill>
+                                    <a:srgbClr val="000000"/>
+                                  </a:solidFill>
+                                  <a:latin typeface="Cambria Math" panose="02040503050406030204" pitchFamily="18" charset="0"/>
+                                </a:rPr>
+                                <m:t>+</m:t>
+                              </m:r>
+                              <m:sSup>
+                                <m:sSupPr>
+                                  <m:ctrlPr>
+                                    <a:rPr lang="en-US" i="1">
+                                      <a:solidFill>
+                                        <a:srgbClr val="000000"/>
+                                      </a:solidFill>
+                                      <a:latin typeface="Cambria Math" panose="02040503050406030204" pitchFamily="18" charset="0"/>
+                                    </a:rPr>
+                                  </m:ctrlPr>
+                                </m:sSupPr>
+                                <m:e>
+                                  <m:d>
+                                    <m:dPr>
+                                      <m:ctrlPr>
+                                        <a:rPr lang="en-US" i="1">
+                                          <a:solidFill>
+                                            <a:srgbClr val="000000"/>
+                                          </a:solidFill>
+                                          <a:latin typeface="Cambria Math" panose="02040503050406030204" pitchFamily="18" charset="0"/>
+                                        </a:rPr>
+                                      </m:ctrlPr>
+                                    </m:dPr>
+                                    <m:e>
+                                      <m:f>
+                                        <m:fPr>
+                                          <m:ctrlPr>
+                                            <a:rPr lang="en-US" i="1">
+                                              <a:solidFill>
+                                                <a:srgbClr val="000000"/>
+                                              </a:solidFill>
+                                              <a:latin typeface="Cambria Math" panose="02040503050406030204" pitchFamily="18" charset="0"/>
+                                            </a:rPr>
+                                          </m:ctrlPr>
+                                        </m:fPr>
+                                        <m:num>
+                                          <m:r>
+                                            <a:rPr lang="en-US" i="1">
+                                              <a:solidFill>
+                                                <a:srgbClr val="000000"/>
+                                              </a:solidFill>
+                                              <a:latin typeface="Cambria Math" panose="02040503050406030204" pitchFamily="18" charset="0"/>
+                                            </a:rPr>
+                                            <m:t>𝑏</m:t>
+                                          </m:r>
+                                          <m:sSub>
+                                            <m:sSubPr>
+                                              <m:ctrlPr>
+                                                <a:rPr lang="en-US" i="1">
+                                                  <a:solidFill>
+                                                    <a:srgbClr val="000000"/>
+                                                  </a:solidFill>
+                                                  <a:latin typeface="Cambria Math" panose="02040503050406030204" pitchFamily="18" charset="0"/>
+                                                </a:rPr>
+                                              </m:ctrlPr>
+                                            </m:sSubPr>
+                                            <m:e>
+                                              <m:r>
+                                                <a:rPr lang="en-US" i="1">
+                                                  <a:solidFill>
+                                                    <a:srgbClr val="000000"/>
+                                                  </a:solidFill>
+                                                  <a:latin typeface="Cambria Math" panose="02040503050406030204" pitchFamily="18" charset="0"/>
+                                                </a:rPr>
+                                                <m:t>𝜔</m:t>
+                                              </m:r>
+                                            </m:e>
+                                            <m:sub>
+                                              <m:r>
+                                                <a:rPr lang="en-US" i="1">
+                                                  <a:solidFill>
+                                                    <a:srgbClr val="000000"/>
+                                                  </a:solidFill>
+                                                  <a:latin typeface="Cambria Math" panose="02040503050406030204" pitchFamily="18" charset="0"/>
+                                                </a:rPr>
+                                                <m:t>𝑓</m:t>
+                                              </m:r>
+                                            </m:sub>
+                                          </m:sSub>
+                                        </m:num>
+                                        <m:den>
+                                          <m:r>
+                                            <a:rPr lang="en-US" i="1">
+                                              <a:solidFill>
+                                                <a:srgbClr val="000000"/>
+                                              </a:solidFill>
+                                              <a:latin typeface="Cambria Math" panose="02040503050406030204" pitchFamily="18" charset="0"/>
+                                            </a:rPr>
+                                            <m:t>𝑚</m:t>
+                                          </m:r>
+                                        </m:den>
+                                      </m:f>
+                                    </m:e>
+                                  </m:d>
+                                </m:e>
+                                <m:sup>
+                                  <m:r>
+                                    <a:rPr lang="en-US" i="1">
+                                      <a:solidFill>
+                                        <a:srgbClr val="000000"/>
+                                      </a:solidFill>
+                                      <a:latin typeface="Cambria Math" panose="02040503050406030204" pitchFamily="18" charset="0"/>
+                                    </a:rPr>
+                                    <m:t>2</m:t>
+                                  </m:r>
+                                </m:sup>
+                              </m:sSup>
+                            </m:e>
+                          </m:rad>
+                        </m:den>
+                      </m:f>
+                    </m:oMath>
+                  </m:oMathPara>
+                </a14:m>
+                <a:endParaRPr lang="en-US" dirty="0"/>
+              </a:p>
+            </p:txBody>
+          </p:sp>
+        </mc:Choice>
+        <mc:Fallback>
+          <p:sp>
+            <p:nvSpPr>
+              <p:cNvPr id="20488" name="Object 7"/>
+              <p:cNvSpPr txBox="1">
+                <a:spLocks noRot="1" noChangeAspect="1" noMove="1" noResize="1" noEditPoints="1" noAdjustHandles="1" noChangeArrowheads="1" noChangeShapeType="1" noTextEdit="1"/>
+              </p:cNvSpPr>
+              <p:nvPr/>
+            </p:nvSpPr>
+            <p:spPr bwMode="auto">
+              <a:xfrm>
+                <a:off x="1938338" y="3347940"/>
+                <a:ext cx="2482676" cy="1146351"/>
+              </a:xfrm>
+              <a:prstGeom prst="rect">
+                <a:avLst/>
+              </a:prstGeom>
+              <a:blipFill>
+                <a:blip r:embed="rId4"/>
+                <a:stretch>
+                  <a:fillRect/>
+                </a:stretch>
+              </a:blipFill>
+              <a:ln>
+                <a:noFill/>
+              </a:ln>
+            </p:spPr>
+            <p:txBody>
+              <a:bodyPr/>
+              <a:lstStyle/>
+              <a:p>
+                <a:r>
+                  <a:rPr lang="en-US">
+                    <a:noFill/>
+                  </a:rPr>
+                  <a:t> </a:t>
+                </a:r>
+              </a:p>
+            </p:txBody>
+          </p:sp>
+        </mc:Fallback>
+      </mc:AlternateContent>
       <p:sp>
         <p:nvSpPr>
           <p:cNvPr id="20489" name="Rectangle 8"/>
@@ -50618,216 +51834,806 @@
           </a:p>
         </p:txBody>
       </p:sp>
-      <p:graphicFrame>
-        <p:nvGraphicFramePr>
-          <p:cNvPr id="20490" name="Object 9"/>
-          <p:cNvGraphicFramePr>
-            <a:graphicFrameLocks noChangeAspect="1"/>
-          </p:cNvGraphicFramePr>
-          <p:nvPr>
-            <p:extLst>
-              <p:ext uri="{D42A27DB-BD31-4B8C-83A1-F6EECF244321}">
-                <p14:modId xmlns:p14="http://schemas.microsoft.com/office/powerpoint/2010/main" val="4234541534"/>
-              </p:ext>
-            </p:extLst>
-          </p:nvPr>
-        </p:nvGraphicFramePr>
-        <p:xfrm>
-          <a:off x="2534232" y="4597211"/>
-          <a:ext cx="722736" cy="526995"/>
-        </p:xfrm>
-        <a:graphic>
-          <a:graphicData uri="http://schemas.openxmlformats.org/presentationml/2006/ole">
-            <mc:AlternateContent xmlns:mc="http://schemas.openxmlformats.org/markup-compatibility/2006">
-              <mc:Choice xmlns:v="urn:schemas-microsoft-com:vml" Requires="v">
-                <p:oleObj name="Equation" r:id="rId6" imgW="609336" imgH="444307" progId="Equation.3">
-                  <p:embed/>
-                </p:oleObj>
-              </mc:Choice>
-              <mc:Fallback>
-                <p:oleObj name="Equation" r:id="rId6" imgW="609336" imgH="444307" progId="Equation.3">
-                  <p:embed/>
-                  <p:pic>
-                    <p:nvPicPr>
-                      <p:cNvPr id="20490" name="Object 9"/>
-                      <p:cNvPicPr>
-                        <a:picLocks noChangeAspect="1" noChangeArrowheads="1"/>
-                      </p:cNvPicPr>
-                      <p:nvPr/>
-                    </p:nvPicPr>
-                    <p:blipFill>
-                      <a:blip r:embed="rId7">
-                        <a:extLst>
-                          <a:ext uri="{28A0092B-C50C-407E-A947-70E740481C1C}">
-                            <a14:useLocalDpi xmlns:a14="http://schemas.microsoft.com/office/drawing/2010/main" val="0"/>
-                          </a:ext>
-                        </a:extLst>
-                      </a:blip>
-                      <a:srcRect/>
-                      <a:stretch>
-                        <a:fillRect/>
-                      </a:stretch>
-                    </p:blipFill>
-                    <p:spPr bwMode="auto">
-                      <a:xfrm>
-                        <a:off x="2534232" y="4597211"/>
-                        <a:ext cx="722736" cy="526995"/>
-                      </a:xfrm>
-                      <a:prstGeom prst="rect">
-                        <a:avLst/>
-                      </a:prstGeom>
-                      <a:noFill/>
-                      <a:ln>
-                        <a:noFill/>
-                      </a:ln>
-                    </p:spPr>
-                  </p:pic>
-                </p:oleObj>
-              </mc:Fallback>
-            </mc:AlternateContent>
-          </a:graphicData>
-        </a:graphic>
-      </p:graphicFrame>
-      <p:graphicFrame>
-        <p:nvGraphicFramePr>
-          <p:cNvPr id="20491" name="Object 10"/>
-          <p:cNvGraphicFramePr>
-            <a:graphicFrameLocks noChangeAspect="1"/>
-          </p:cNvGraphicFramePr>
-          <p:nvPr>
-            <p:extLst>
-              <p:ext uri="{D42A27DB-BD31-4B8C-83A1-F6EECF244321}">
-                <p14:modId xmlns:p14="http://schemas.microsoft.com/office/powerpoint/2010/main" val="2349011366"/>
-              </p:ext>
-            </p:extLst>
-          </p:nvPr>
-        </p:nvGraphicFramePr>
-        <p:xfrm>
-          <a:off x="4421014" y="5799783"/>
-          <a:ext cx="1829943" cy="652760"/>
-        </p:xfrm>
-        <a:graphic>
-          <a:graphicData uri="http://schemas.openxmlformats.org/presentationml/2006/ole">
-            <mc:AlternateContent xmlns:mc="http://schemas.openxmlformats.org/markup-compatibility/2006">
-              <mc:Choice xmlns:v="urn:schemas-microsoft-com:vml" Requires="v">
-                <p:oleObj name="Equation" r:id="rId8" imgW="1497950" imgH="533169" progId="Equation.3">
-                  <p:embed/>
-                </p:oleObj>
-              </mc:Choice>
-              <mc:Fallback>
-                <p:oleObj name="Equation" r:id="rId8" imgW="1497950" imgH="533169" progId="Equation.3">
-                  <p:embed/>
-                  <p:pic>
-                    <p:nvPicPr>
-                      <p:cNvPr id="20491" name="Object 10"/>
-                      <p:cNvPicPr>
-                        <a:picLocks noChangeAspect="1" noChangeArrowheads="1"/>
-                      </p:cNvPicPr>
-                      <p:nvPr/>
-                    </p:nvPicPr>
-                    <p:blipFill>
-                      <a:blip r:embed="rId9">
-                        <a:extLst>
-                          <a:ext uri="{28A0092B-C50C-407E-A947-70E740481C1C}">
-                            <a14:useLocalDpi xmlns:a14="http://schemas.microsoft.com/office/drawing/2010/main" val="0"/>
-                          </a:ext>
-                        </a:extLst>
-                      </a:blip>
-                      <a:srcRect/>
-                      <a:stretch>
-                        <a:fillRect/>
-                      </a:stretch>
-                    </p:blipFill>
-                    <p:spPr bwMode="auto">
-                      <a:xfrm>
-                        <a:off x="4421014" y="5799783"/>
-                        <a:ext cx="1829943" cy="652760"/>
-                      </a:xfrm>
-                      <a:prstGeom prst="rect">
-                        <a:avLst/>
-                      </a:prstGeom>
-                      <a:noFill/>
-                      <a:ln>
-                        <a:noFill/>
-                      </a:ln>
-                    </p:spPr>
-                  </p:pic>
-                </p:oleObj>
-              </mc:Fallback>
-            </mc:AlternateContent>
-          </a:graphicData>
-        </a:graphic>
-      </p:graphicFrame>
-      <p:graphicFrame>
-        <p:nvGraphicFramePr>
-          <p:cNvPr id="20492" name="Object 11"/>
-          <p:cNvGraphicFramePr>
-            <a:graphicFrameLocks noChangeAspect="1"/>
-          </p:cNvGraphicFramePr>
-          <p:nvPr>
-            <p:extLst>
-              <p:ext uri="{D42A27DB-BD31-4B8C-83A1-F6EECF244321}">
-                <p14:modId xmlns:p14="http://schemas.microsoft.com/office/powerpoint/2010/main" val="1639990998"/>
-              </p:ext>
-            </p:extLst>
-          </p:nvPr>
-        </p:nvGraphicFramePr>
-        <p:xfrm>
-          <a:off x="1918571" y="5953635"/>
-          <a:ext cx="1896545" cy="345056"/>
-        </p:xfrm>
-        <a:graphic>
-          <a:graphicData uri="http://schemas.openxmlformats.org/presentationml/2006/ole">
-            <mc:AlternateContent xmlns:mc="http://schemas.openxmlformats.org/markup-compatibility/2006">
-              <mc:Choice xmlns:v="urn:schemas-microsoft-com:vml" Requires="v">
-                <p:oleObj name="Equation" r:id="rId10" imgW="1193800" imgH="215900" progId="Equation.3">
-                  <p:embed/>
-                </p:oleObj>
-              </mc:Choice>
-              <mc:Fallback>
-                <p:oleObj name="Equation" r:id="rId10" imgW="1193800" imgH="215900" progId="Equation.3">
-                  <p:embed/>
-                  <p:pic>
-                    <p:nvPicPr>
-                      <p:cNvPr id="20492" name="Object 11"/>
-                      <p:cNvPicPr>
-                        <a:picLocks noChangeAspect="1" noChangeArrowheads="1"/>
-                      </p:cNvPicPr>
-                      <p:nvPr/>
-                    </p:nvPicPr>
-                    <p:blipFill>
-                      <a:blip r:embed="rId11">
-                        <a:extLst>
-                          <a:ext uri="{28A0092B-C50C-407E-A947-70E740481C1C}">
-                            <a14:useLocalDpi xmlns:a14="http://schemas.microsoft.com/office/drawing/2010/main" val="0"/>
-                          </a:ext>
-                        </a:extLst>
-                      </a:blip>
-                      <a:srcRect/>
-                      <a:stretch>
-                        <a:fillRect/>
-                      </a:stretch>
-                    </p:blipFill>
-                    <p:spPr bwMode="auto">
-                      <a:xfrm>
-                        <a:off x="1918571" y="5953635"/>
-                        <a:ext cx="1896545" cy="345056"/>
-                      </a:xfrm>
-                      <a:prstGeom prst="rect">
-                        <a:avLst/>
-                      </a:prstGeom>
-                      <a:noFill/>
-                      <a:ln>
-                        <a:noFill/>
-                      </a:ln>
-                    </p:spPr>
-                  </p:pic>
-                </p:oleObj>
-              </mc:Fallback>
-            </mc:AlternateContent>
-          </a:graphicData>
-        </a:graphic>
-      </p:graphicFrame>
+      <mc:AlternateContent xmlns:mc="http://schemas.openxmlformats.org/markup-compatibility/2006">
+        <mc:Choice xmlns:a14="http://schemas.microsoft.com/office/drawing/2010/main" Requires="a14">
+          <p:sp>
+            <p:nvSpPr>
+              <p:cNvPr id="20490" name="Object 9"/>
+              <p:cNvSpPr txBox="1"/>
+              <p:nvPr/>
+            </p:nvSpPr>
+            <p:spPr bwMode="auto">
+              <a:xfrm>
+                <a:off x="2533650" y="4597400"/>
+                <a:ext cx="723900" cy="527050"/>
+              </a:xfrm>
+              <a:prstGeom prst="rect">
+                <a:avLst/>
+              </a:prstGeom>
+              <a:noFill/>
+              <a:ln>
+                <a:noFill/>
+              </a:ln>
+            </p:spPr>
+            <p:txBody>
+              <a:bodyPr>
+                <a:normAutofit fontScale="47500" lnSpcReduction="20000"/>
+              </a:bodyPr>
+              <a:lstStyle/>
+              <a:p>
+                <a:pPr/>
+                <a14:m>
+                  <m:oMathPara xmlns:m="http://schemas.openxmlformats.org/officeDocument/2006/math">
+                    <m:oMathParaPr>
+                      <m:jc m:val="left"/>
+                    </m:oMathParaPr>
+                    <m:oMath xmlns:m="http://schemas.openxmlformats.org/officeDocument/2006/math">
+                      <m:sSub>
+                        <m:sSubPr>
+                          <m:ctrlPr>
+                            <a:rPr lang="en-US" i="1" smtClean="0">
+                              <a:solidFill>
+                                <a:srgbClr val="000000"/>
+                              </a:solidFill>
+                              <a:latin typeface="Cambria Math" panose="02040503050406030204" pitchFamily="18" charset="0"/>
+                            </a:rPr>
+                          </m:ctrlPr>
+                        </m:sSubPr>
+                        <m:e>
+                          <m:r>
+                            <a:rPr lang="en-US" i="1">
+                              <a:solidFill>
+                                <a:srgbClr val="000000"/>
+                              </a:solidFill>
+                              <a:latin typeface="Cambria Math" panose="02040503050406030204" pitchFamily="18" charset="0"/>
+                            </a:rPr>
+                            <m:t>𝜔</m:t>
+                          </m:r>
+                        </m:e>
+                        <m:sub>
+                          <m:r>
+                            <a:rPr lang="en-US" b="0" i="1" smtClean="0">
+                              <a:solidFill>
+                                <a:srgbClr val="000000"/>
+                              </a:solidFill>
+                              <a:latin typeface="Cambria Math" panose="02040503050406030204" pitchFamily="18" charset="0"/>
+                            </a:rPr>
+                            <m:t>𝑁</m:t>
+                          </m:r>
+                        </m:sub>
+                      </m:sSub>
+                      <m:r>
+                        <a:rPr lang="en-US" i="1">
+                          <a:solidFill>
+                            <a:srgbClr val="000000"/>
+                          </a:solidFill>
+                          <a:latin typeface="Cambria Math" panose="02040503050406030204" pitchFamily="18" charset="0"/>
+                        </a:rPr>
+                        <m:t>=</m:t>
+                      </m:r>
+                      <m:rad>
+                        <m:radPr>
+                          <m:degHide m:val="on"/>
+                          <m:ctrlPr>
+                            <a:rPr lang="en-US" i="1">
+                              <a:solidFill>
+                                <a:srgbClr val="000000"/>
+                              </a:solidFill>
+                              <a:latin typeface="Cambria Math" panose="02040503050406030204" pitchFamily="18" charset="0"/>
+                            </a:rPr>
+                          </m:ctrlPr>
+                        </m:radPr>
+                        <m:deg/>
+                        <m:e>
+                          <m:f>
+                            <m:fPr>
+                              <m:ctrlPr>
+                                <a:rPr lang="en-US" i="1">
+                                  <a:solidFill>
+                                    <a:srgbClr val="000000"/>
+                                  </a:solidFill>
+                                  <a:latin typeface="Cambria Math" panose="02040503050406030204" pitchFamily="18" charset="0"/>
+                                </a:rPr>
+                              </m:ctrlPr>
+                            </m:fPr>
+                            <m:num>
+                              <m:r>
+                                <a:rPr lang="en-US" i="1">
+                                  <a:solidFill>
+                                    <a:srgbClr val="000000"/>
+                                  </a:solidFill>
+                                  <a:latin typeface="Cambria Math" panose="02040503050406030204" pitchFamily="18" charset="0"/>
+                                </a:rPr>
+                                <m:t>𝑘</m:t>
+                              </m:r>
+                            </m:num>
+                            <m:den>
+                              <m:r>
+                                <a:rPr lang="en-US" i="1">
+                                  <a:solidFill>
+                                    <a:srgbClr val="000000"/>
+                                  </a:solidFill>
+                                  <a:latin typeface="Cambria Math" panose="02040503050406030204" pitchFamily="18" charset="0"/>
+                                </a:rPr>
+                                <m:t>𝑚</m:t>
+                              </m:r>
+                            </m:den>
+                          </m:f>
+                        </m:e>
+                      </m:rad>
+                    </m:oMath>
+                  </m:oMathPara>
+                </a14:m>
+                <a:endParaRPr lang="en-US" dirty="0"/>
+              </a:p>
+            </p:txBody>
+          </p:sp>
+        </mc:Choice>
+        <mc:Fallback>
+          <p:sp>
+            <p:nvSpPr>
+              <p:cNvPr id="20490" name="Object 9"/>
+              <p:cNvSpPr txBox="1">
+                <a:spLocks noRot="1" noChangeAspect="1" noMove="1" noResize="1" noEditPoints="1" noAdjustHandles="1" noChangeArrowheads="1" noChangeShapeType="1" noTextEdit="1"/>
+              </p:cNvSpPr>
+              <p:nvPr/>
+            </p:nvSpPr>
+            <p:spPr bwMode="auto">
+              <a:xfrm>
+                <a:off x="2533650" y="4597400"/>
+                <a:ext cx="723900" cy="527050"/>
+              </a:xfrm>
+              <a:prstGeom prst="rect">
+                <a:avLst/>
+              </a:prstGeom>
+              <a:blipFill>
+                <a:blip r:embed="rId5"/>
+                <a:stretch>
+                  <a:fillRect/>
+                </a:stretch>
+              </a:blipFill>
+              <a:ln>
+                <a:noFill/>
+              </a:ln>
+            </p:spPr>
+            <p:txBody>
+              <a:bodyPr/>
+              <a:lstStyle/>
+              <a:p>
+                <a:r>
+                  <a:rPr lang="en-US">
+                    <a:noFill/>
+                  </a:rPr>
+                  <a:t> </a:t>
+                </a:r>
+              </a:p>
+            </p:txBody>
+          </p:sp>
+        </mc:Fallback>
+      </mc:AlternateContent>
+      <mc:AlternateContent xmlns:mc="http://schemas.openxmlformats.org/markup-compatibility/2006">
+        <mc:Choice xmlns:a14="http://schemas.microsoft.com/office/drawing/2010/main" Requires="a14">
+          <p:sp>
+            <p:nvSpPr>
+              <p:cNvPr id="20491" name="Object 10"/>
+              <p:cNvSpPr txBox="1"/>
+              <p:nvPr/>
+            </p:nvSpPr>
+            <p:spPr bwMode="auto">
+              <a:xfrm>
+                <a:off x="4117976" y="5621867"/>
+                <a:ext cx="2655357" cy="1146351"/>
+              </a:xfrm>
+              <a:prstGeom prst="rect">
+                <a:avLst/>
+              </a:prstGeom>
+              <a:noFill/>
+              <a:ln>
+                <a:noFill/>
+              </a:ln>
+            </p:spPr>
+            <p:txBody>
+              <a:bodyPr>
+                <a:normAutofit fontScale="77500" lnSpcReduction="20000"/>
+              </a:bodyPr>
+              <a:lstStyle/>
+              <a:p>
+                <a:pPr/>
+                <a14:m>
+                  <m:oMathPara xmlns:m="http://schemas.openxmlformats.org/officeDocument/2006/math">
+                    <m:oMathParaPr>
+                      <m:jc m:val="left"/>
+                    </m:oMathParaPr>
+                    <m:oMath xmlns:m="http://schemas.openxmlformats.org/officeDocument/2006/math">
+                      <m:r>
+                        <a:rPr lang="en-US" i="1" smtClean="0">
+                          <a:solidFill>
+                            <a:srgbClr val="000000"/>
+                          </a:solidFill>
+                          <a:latin typeface="Cambria Math" panose="02040503050406030204" pitchFamily="18" charset="0"/>
+                        </a:rPr>
+                        <m:t>𝐴</m:t>
+                      </m:r>
+                      <m:r>
+                        <a:rPr lang="en-US" i="1" smtClean="0">
+                          <a:solidFill>
+                            <a:srgbClr val="000000"/>
+                          </a:solidFill>
+                          <a:latin typeface="Cambria Math" panose="02040503050406030204" pitchFamily="18" charset="0"/>
+                        </a:rPr>
+                        <m:t>=</m:t>
+                      </m:r>
+                      <m:f>
+                        <m:fPr>
+                          <m:ctrlPr>
+                            <a:rPr lang="en-US" i="1">
+                              <a:solidFill>
+                                <a:srgbClr val="000000"/>
+                              </a:solidFill>
+                              <a:latin typeface="Cambria Math" panose="02040503050406030204" pitchFamily="18" charset="0"/>
+                            </a:rPr>
+                          </m:ctrlPr>
+                        </m:fPr>
+                        <m:num>
+                          <m:f>
+                            <m:fPr>
+                              <m:ctrlPr>
+                                <a:rPr lang="en-US" i="1">
+                                  <a:solidFill>
+                                    <a:srgbClr val="000000"/>
+                                  </a:solidFill>
+                                  <a:latin typeface="Cambria Math" panose="02040503050406030204" pitchFamily="18" charset="0"/>
+                                </a:rPr>
+                              </m:ctrlPr>
+                            </m:fPr>
+                            <m:num>
+                              <m:sSub>
+                                <m:sSubPr>
+                                  <m:ctrlPr>
+                                    <a:rPr lang="en-US" i="1">
+                                      <a:solidFill>
+                                        <a:srgbClr val="000000"/>
+                                      </a:solidFill>
+                                      <a:latin typeface="Cambria Math" panose="02040503050406030204" pitchFamily="18" charset="0"/>
+                                    </a:rPr>
+                                  </m:ctrlPr>
+                                </m:sSubPr>
+                                <m:e>
+                                  <m:r>
+                                    <a:rPr lang="en-US" i="1">
+                                      <a:solidFill>
+                                        <a:srgbClr val="000000"/>
+                                      </a:solidFill>
+                                      <a:latin typeface="Cambria Math" panose="02040503050406030204" pitchFamily="18" charset="0"/>
+                                    </a:rPr>
+                                    <m:t>𝐹</m:t>
+                                  </m:r>
+                                </m:e>
+                                <m:sub>
+                                  <m:r>
+                                    <a:rPr lang="en-US" b="0" i="1" smtClean="0">
+                                      <a:solidFill>
+                                        <a:srgbClr val="000000"/>
+                                      </a:solidFill>
+                                      <a:latin typeface="Cambria Math" panose="02040503050406030204" pitchFamily="18" charset="0"/>
+                                    </a:rPr>
+                                    <m:t>𝑚𝑎𝑥</m:t>
+                                  </m:r>
+                                </m:sub>
+                              </m:sSub>
+                            </m:num>
+                            <m:den>
+                              <m:r>
+                                <a:rPr lang="en-US" i="1">
+                                  <a:solidFill>
+                                    <a:srgbClr val="000000"/>
+                                  </a:solidFill>
+                                  <a:latin typeface="Cambria Math" panose="02040503050406030204" pitchFamily="18" charset="0"/>
+                                </a:rPr>
+                                <m:t>𝑚</m:t>
+                              </m:r>
+                            </m:den>
+                          </m:f>
+                        </m:num>
+                        <m:den>
+                          <m:rad>
+                            <m:radPr>
+                              <m:degHide m:val="on"/>
+                              <m:ctrlPr>
+                                <a:rPr lang="en-US" i="1">
+                                  <a:solidFill>
+                                    <a:srgbClr val="000000"/>
+                                  </a:solidFill>
+                                  <a:latin typeface="Cambria Math" panose="02040503050406030204" pitchFamily="18" charset="0"/>
+                                </a:rPr>
+                              </m:ctrlPr>
+                            </m:radPr>
+                            <m:deg/>
+                            <m:e>
+                              <m:sSup>
+                                <m:sSupPr>
+                                  <m:ctrlPr>
+                                    <a:rPr lang="en-US" i="1">
+                                      <a:solidFill>
+                                        <a:srgbClr val="000000"/>
+                                      </a:solidFill>
+                                      <a:latin typeface="Cambria Math" panose="02040503050406030204" pitchFamily="18" charset="0"/>
+                                    </a:rPr>
+                                  </m:ctrlPr>
+                                </m:sSupPr>
+                                <m:e>
+                                  <m:d>
+                                    <m:dPr>
+                                      <m:ctrlPr>
+                                        <a:rPr lang="en-US" i="1">
+                                          <a:solidFill>
+                                            <a:srgbClr val="000000"/>
+                                          </a:solidFill>
+                                          <a:latin typeface="Cambria Math" panose="02040503050406030204" pitchFamily="18" charset="0"/>
+                                        </a:rPr>
+                                      </m:ctrlPr>
+                                    </m:dPr>
+                                    <m:e>
+                                      <m:sSup>
+                                        <m:sSupPr>
+                                          <m:ctrlPr>
+                                            <a:rPr lang="en-US" i="1">
+                                              <a:solidFill>
+                                                <a:srgbClr val="000000"/>
+                                              </a:solidFill>
+                                              <a:latin typeface="Cambria Math" panose="02040503050406030204" pitchFamily="18" charset="0"/>
+                                            </a:rPr>
+                                          </m:ctrlPr>
+                                        </m:sSupPr>
+                                        <m:e>
+                                          <m:r>
+                                            <a:rPr lang="en-US" i="1">
+                                              <a:solidFill>
+                                                <a:srgbClr val="000000"/>
+                                              </a:solidFill>
+                                              <a:latin typeface="Cambria Math" panose="02040503050406030204" pitchFamily="18" charset="0"/>
+                                            </a:rPr>
+                                            <m:t>𝜔</m:t>
+                                          </m:r>
+                                        </m:e>
+                                        <m:sup>
+                                          <m:r>
+                                            <a:rPr lang="en-US" i="1">
+                                              <a:solidFill>
+                                                <a:srgbClr val="000000"/>
+                                              </a:solidFill>
+                                              <a:latin typeface="Cambria Math" panose="02040503050406030204" pitchFamily="18" charset="0"/>
+                                            </a:rPr>
+                                            <m:t>2</m:t>
+                                          </m:r>
+                                        </m:sup>
+                                      </m:sSup>
+                                      <m:r>
+                                        <a:rPr lang="en-US" i="1">
+                                          <a:solidFill>
+                                            <a:srgbClr val="000000"/>
+                                          </a:solidFill>
+                                          <a:latin typeface="Cambria Math" panose="02040503050406030204" pitchFamily="18" charset="0"/>
+                                        </a:rPr>
+                                        <m:t>−</m:t>
+                                      </m:r>
+                                      <m:sSubSup>
+                                        <m:sSubSupPr>
+                                          <m:ctrlPr>
+                                            <a:rPr lang="en-US" i="1">
+                                              <a:solidFill>
+                                                <a:srgbClr val="000000"/>
+                                              </a:solidFill>
+                                              <a:latin typeface="Cambria Math" panose="02040503050406030204" pitchFamily="18" charset="0"/>
+                                            </a:rPr>
+                                          </m:ctrlPr>
+                                        </m:sSubSupPr>
+                                        <m:e>
+                                          <m:r>
+                                            <a:rPr lang="en-US" i="1">
+                                              <a:solidFill>
+                                                <a:srgbClr val="000000"/>
+                                              </a:solidFill>
+                                              <a:latin typeface="Cambria Math" panose="02040503050406030204" pitchFamily="18" charset="0"/>
+                                            </a:rPr>
+                                            <m:t>𝜔</m:t>
+                                          </m:r>
+                                        </m:e>
+                                        <m:sub>
+                                          <m:r>
+                                            <a:rPr lang="en-US" b="0" i="1" smtClean="0">
+                                              <a:solidFill>
+                                                <a:srgbClr val="000000"/>
+                                              </a:solidFill>
+                                              <a:latin typeface="Cambria Math" panose="02040503050406030204" pitchFamily="18" charset="0"/>
+                                            </a:rPr>
+                                            <m:t>𝑁</m:t>
+                                          </m:r>
+                                        </m:sub>
+                                        <m:sup>
+                                          <m:r>
+                                            <a:rPr lang="en-US" i="1">
+                                              <a:solidFill>
+                                                <a:srgbClr val="000000"/>
+                                              </a:solidFill>
+                                              <a:latin typeface="Cambria Math" panose="02040503050406030204" pitchFamily="18" charset="0"/>
+                                            </a:rPr>
+                                            <m:t>2</m:t>
+                                          </m:r>
+                                        </m:sup>
+                                      </m:sSubSup>
+                                    </m:e>
+                                  </m:d>
+                                </m:e>
+                                <m:sup>
+                                  <m:r>
+                                    <a:rPr lang="en-US" i="1">
+                                      <a:solidFill>
+                                        <a:srgbClr val="000000"/>
+                                      </a:solidFill>
+                                      <a:latin typeface="Cambria Math" panose="02040503050406030204" pitchFamily="18" charset="0"/>
+                                    </a:rPr>
+                                    <m:t>2</m:t>
+                                  </m:r>
+                                </m:sup>
+                              </m:sSup>
+                              <m:r>
+                                <a:rPr lang="en-US" i="1">
+                                  <a:solidFill>
+                                    <a:srgbClr val="000000"/>
+                                  </a:solidFill>
+                                  <a:latin typeface="Cambria Math" panose="02040503050406030204" pitchFamily="18" charset="0"/>
+                                </a:rPr>
+                                <m:t>+</m:t>
+                              </m:r>
+                              <m:sSup>
+                                <m:sSupPr>
+                                  <m:ctrlPr>
+                                    <a:rPr lang="en-US" i="1">
+                                      <a:solidFill>
+                                        <a:srgbClr val="000000"/>
+                                      </a:solidFill>
+                                      <a:latin typeface="Cambria Math" panose="02040503050406030204" pitchFamily="18" charset="0"/>
+                                    </a:rPr>
+                                  </m:ctrlPr>
+                                </m:sSupPr>
+                                <m:e>
+                                  <m:d>
+                                    <m:dPr>
+                                      <m:ctrlPr>
+                                        <a:rPr lang="en-US" i="1">
+                                          <a:solidFill>
+                                            <a:srgbClr val="000000"/>
+                                          </a:solidFill>
+                                          <a:latin typeface="Cambria Math" panose="02040503050406030204" pitchFamily="18" charset="0"/>
+                                        </a:rPr>
+                                      </m:ctrlPr>
+                                    </m:dPr>
+                                    <m:e>
+                                      <m:f>
+                                        <m:fPr>
+                                          <m:ctrlPr>
+                                            <a:rPr lang="en-US" i="1">
+                                              <a:solidFill>
+                                                <a:srgbClr val="000000"/>
+                                              </a:solidFill>
+                                              <a:latin typeface="Cambria Math" panose="02040503050406030204" pitchFamily="18" charset="0"/>
+                                            </a:rPr>
+                                          </m:ctrlPr>
+                                        </m:fPr>
+                                        <m:num>
+                                          <m:r>
+                                            <a:rPr lang="en-US" i="1">
+                                              <a:solidFill>
+                                                <a:srgbClr val="000000"/>
+                                              </a:solidFill>
+                                              <a:latin typeface="Cambria Math" panose="02040503050406030204" pitchFamily="18" charset="0"/>
+                                            </a:rPr>
+                                            <m:t>𝑏</m:t>
+                                          </m:r>
+                                          <m:r>
+                                            <a:rPr lang="en-US" i="1">
+                                              <a:solidFill>
+                                                <a:srgbClr val="000000"/>
+                                              </a:solidFill>
+                                              <a:latin typeface="Cambria Math" panose="02040503050406030204" pitchFamily="18" charset="0"/>
+                                            </a:rPr>
+                                            <m:t>𝜔</m:t>
+                                          </m:r>
+                                        </m:num>
+                                        <m:den>
+                                          <m:r>
+                                            <a:rPr lang="en-US" i="1">
+                                              <a:solidFill>
+                                                <a:srgbClr val="000000"/>
+                                              </a:solidFill>
+                                              <a:latin typeface="Cambria Math" panose="02040503050406030204" pitchFamily="18" charset="0"/>
+                                            </a:rPr>
+                                            <m:t>𝑚</m:t>
+                                          </m:r>
+                                        </m:den>
+                                      </m:f>
+                                    </m:e>
+                                  </m:d>
+                                </m:e>
+                                <m:sup>
+                                  <m:r>
+                                    <a:rPr lang="en-US" i="1">
+                                      <a:solidFill>
+                                        <a:srgbClr val="000000"/>
+                                      </a:solidFill>
+                                      <a:latin typeface="Cambria Math" panose="02040503050406030204" pitchFamily="18" charset="0"/>
+                                    </a:rPr>
+                                    <m:t>2</m:t>
+                                  </m:r>
+                                </m:sup>
+                              </m:sSup>
+                            </m:e>
+                          </m:rad>
+                        </m:den>
+                      </m:f>
+                    </m:oMath>
+                  </m:oMathPara>
+                </a14:m>
+                <a:endParaRPr lang="en-US" dirty="0"/>
+              </a:p>
+            </p:txBody>
+          </p:sp>
+        </mc:Choice>
+        <mc:Fallback>
+          <p:sp>
+            <p:nvSpPr>
+              <p:cNvPr id="20491" name="Object 10"/>
+              <p:cNvSpPr txBox="1">
+                <a:spLocks noRot="1" noChangeAspect="1" noMove="1" noResize="1" noEditPoints="1" noAdjustHandles="1" noChangeArrowheads="1" noChangeShapeType="1" noTextEdit="1"/>
+              </p:cNvSpPr>
+              <p:nvPr/>
+            </p:nvSpPr>
+            <p:spPr bwMode="auto">
+              <a:xfrm>
+                <a:off x="4117976" y="5621867"/>
+                <a:ext cx="2655357" cy="1146351"/>
+              </a:xfrm>
+              <a:prstGeom prst="rect">
+                <a:avLst/>
+              </a:prstGeom>
+              <a:blipFill>
+                <a:blip r:embed="rId6"/>
+                <a:stretch>
+                  <a:fillRect/>
+                </a:stretch>
+              </a:blipFill>
+              <a:ln>
+                <a:noFill/>
+              </a:ln>
+            </p:spPr>
+            <p:txBody>
+              <a:bodyPr/>
+              <a:lstStyle/>
+              <a:p>
+                <a:r>
+                  <a:rPr lang="en-US">
+                    <a:noFill/>
+                  </a:rPr>
+                  <a:t> </a:t>
+                </a:r>
+              </a:p>
+            </p:txBody>
+          </p:sp>
+        </mc:Fallback>
+      </mc:AlternateContent>
+      <mc:AlternateContent xmlns:mc="http://schemas.openxmlformats.org/markup-compatibility/2006">
+        <mc:Choice xmlns:a14="http://schemas.microsoft.com/office/drawing/2010/main" Requires="a14">
+          <p:sp>
+            <p:nvSpPr>
+              <p:cNvPr id="20492" name="Object 11"/>
+              <p:cNvSpPr txBox="1"/>
+              <p:nvPr/>
+            </p:nvSpPr>
+            <p:spPr bwMode="auto">
+              <a:xfrm>
+                <a:off x="1016001" y="5772151"/>
+                <a:ext cx="2912532" cy="654050"/>
+              </a:xfrm>
+              <a:prstGeom prst="rect">
+                <a:avLst/>
+              </a:prstGeom>
+              <a:noFill/>
+              <a:ln>
+                <a:noFill/>
+              </a:ln>
+            </p:spPr>
+            <p:txBody>
+              <a:bodyPr>
+                <a:normAutofit/>
+              </a:bodyPr>
+              <a:lstStyle/>
+              <a:p>
+                <a:pPr/>
+                <a14:m>
+                  <m:oMathPara xmlns:m="http://schemas.openxmlformats.org/officeDocument/2006/math">
+                    <m:oMathParaPr>
+                      <m:jc m:val="left"/>
+                    </m:oMathParaPr>
+                    <m:oMath xmlns:m="http://schemas.openxmlformats.org/officeDocument/2006/math">
+                      <m:r>
+                        <a:rPr lang="en-US" i="1">
+                          <a:solidFill>
+                            <a:srgbClr val="000000"/>
+                          </a:solidFill>
+                          <a:latin typeface="Cambria Math" panose="02040503050406030204" pitchFamily="18" charset="0"/>
+                        </a:rPr>
+                        <m:t>𝑥</m:t>
+                      </m:r>
+                      <m:d>
+                        <m:dPr>
+                          <m:ctrlPr>
+                            <a:rPr lang="en-US" i="1">
+                              <a:solidFill>
+                                <a:srgbClr val="000000"/>
+                              </a:solidFill>
+                              <a:latin typeface="Cambria Math" panose="02040503050406030204" pitchFamily="18" charset="0"/>
+                            </a:rPr>
+                          </m:ctrlPr>
+                        </m:dPr>
+                        <m:e>
+                          <m:r>
+                            <a:rPr lang="en-US" i="1">
+                              <a:solidFill>
+                                <a:srgbClr val="000000"/>
+                              </a:solidFill>
+                              <a:latin typeface="Cambria Math" panose="02040503050406030204" pitchFamily="18" charset="0"/>
+                            </a:rPr>
+                            <m:t>𝑡</m:t>
+                          </m:r>
+                        </m:e>
+                      </m:d>
+                      <m:r>
+                        <a:rPr lang="en-US" i="1">
+                          <a:solidFill>
+                            <a:srgbClr val="000000"/>
+                          </a:solidFill>
+                          <a:latin typeface="Cambria Math" panose="02040503050406030204" pitchFamily="18" charset="0"/>
+                        </a:rPr>
+                        <m:t>=</m:t>
+                      </m:r>
+                      <m:r>
+                        <a:rPr lang="en-US" i="1">
+                          <a:solidFill>
+                            <a:srgbClr val="000000"/>
+                          </a:solidFill>
+                          <a:latin typeface="Cambria Math" panose="02040503050406030204" pitchFamily="18" charset="0"/>
+                        </a:rPr>
+                        <m:t>𝐴</m:t>
+                      </m:r>
+                      <m:func>
+                        <m:funcPr>
+                          <m:ctrlPr>
+                            <a:rPr lang="en-US" i="1">
+                              <a:solidFill>
+                                <a:srgbClr val="000000"/>
+                              </a:solidFill>
+                              <a:latin typeface="Cambria Math" panose="02040503050406030204" pitchFamily="18" charset="0"/>
+                            </a:rPr>
+                          </m:ctrlPr>
+                        </m:funcPr>
+                        <m:fName>
+                          <m:r>
+                            <m:rPr>
+                              <m:sty m:val="p"/>
+                            </m:rPr>
+                            <a:rPr lang="en-US" i="0">
+                              <a:solidFill>
+                                <a:srgbClr val="000000"/>
+                              </a:solidFill>
+                              <a:latin typeface="Cambria Math" panose="02040503050406030204" pitchFamily="18" charset="0"/>
+                            </a:rPr>
+                            <m:t>cos</m:t>
+                          </m:r>
+                        </m:fName>
+                        <m:e>
+                          <m:d>
+                            <m:dPr>
+                              <m:ctrlPr>
+                                <a:rPr lang="en-US" i="1">
+                                  <a:solidFill>
+                                    <a:srgbClr val="000000"/>
+                                  </a:solidFill>
+                                  <a:latin typeface="Cambria Math" panose="02040503050406030204" pitchFamily="18" charset="0"/>
+                                </a:rPr>
+                              </m:ctrlPr>
+                            </m:dPr>
+                            <m:e>
+                              <m:r>
+                                <a:rPr lang="en-US" i="1">
+                                  <a:solidFill>
+                                    <a:srgbClr val="000000"/>
+                                  </a:solidFill>
+                                  <a:latin typeface="Cambria Math" panose="02040503050406030204" pitchFamily="18" charset="0"/>
+                                </a:rPr>
+                                <m:t>𝜔</m:t>
+                              </m:r>
+                              <m:r>
+                                <a:rPr lang="en-US" i="1">
+                                  <a:solidFill>
+                                    <a:srgbClr val="000000"/>
+                                  </a:solidFill>
+                                  <a:latin typeface="Cambria Math" panose="02040503050406030204" pitchFamily="18" charset="0"/>
+                                </a:rPr>
+                                <m:t>𝑡</m:t>
+                              </m:r>
+                              <m:r>
+                                <a:rPr lang="en-US" i="1">
+                                  <a:solidFill>
+                                    <a:srgbClr val="000000"/>
+                                  </a:solidFill>
+                                  <a:latin typeface="Cambria Math" panose="02040503050406030204" pitchFamily="18" charset="0"/>
+                                </a:rPr>
+                                <m:t>+</m:t>
+                              </m:r>
+                              <m:r>
+                                <a:rPr lang="en-US" i="1">
+                                  <a:solidFill>
+                                    <a:srgbClr val="000000"/>
+                                  </a:solidFill>
+                                  <a:latin typeface="Cambria Math" panose="02040503050406030204" pitchFamily="18" charset="0"/>
+                                </a:rPr>
+                                <m:t>𝜑</m:t>
+                              </m:r>
+                            </m:e>
+                          </m:d>
+                        </m:e>
+                      </m:func>
+                    </m:oMath>
+                  </m:oMathPara>
+                </a14:m>
+                <a:endParaRPr lang="en-US" dirty="0"/>
+              </a:p>
+            </p:txBody>
+          </p:sp>
+        </mc:Choice>
+        <mc:Fallback>
+          <p:sp>
+            <p:nvSpPr>
+              <p:cNvPr id="20492" name="Object 11"/>
+              <p:cNvSpPr txBox="1">
+                <a:spLocks noRot="1" noChangeAspect="1" noMove="1" noResize="1" noEditPoints="1" noAdjustHandles="1" noChangeArrowheads="1" noChangeShapeType="1" noTextEdit="1"/>
+              </p:cNvSpPr>
+              <p:nvPr/>
+            </p:nvSpPr>
+            <p:spPr bwMode="auto">
+              <a:xfrm>
+                <a:off x="1016001" y="5772151"/>
+                <a:ext cx="2912532" cy="654050"/>
+              </a:xfrm>
+              <a:prstGeom prst="rect">
+                <a:avLst/>
+              </a:prstGeom>
+              <a:blipFill>
+                <a:blip r:embed="rId7"/>
+                <a:stretch>
+                  <a:fillRect/>
+                </a:stretch>
+              </a:blipFill>
+              <a:ln>
+                <a:noFill/>
+              </a:ln>
+            </p:spPr>
+            <p:txBody>
+              <a:bodyPr/>
+              <a:lstStyle/>
+              <a:p>
+                <a:r>
+                  <a:rPr lang="en-US">
+                    <a:noFill/>
+                  </a:rPr>
+                  <a:t> </a:t>
+                </a:r>
+              </a:p>
+            </p:txBody>
+          </p:sp>
+        </mc:Fallback>
+      </mc:AlternateContent>
     </p:spTree>
   </p:cSld>
   <p:clrMapOvr>
@@ -51114,76 +52920,417 @@
           </a:p>
         </p:txBody>
       </p:sp>
-      <p:graphicFrame>
-        <p:nvGraphicFramePr>
-          <p:cNvPr id="21510" name="Object 5"/>
-          <p:cNvGraphicFramePr>
-            <a:graphicFrameLocks noChangeAspect="1"/>
-          </p:cNvGraphicFramePr>
-          <p:nvPr>
-            <p:extLst>
-              <p:ext uri="{D42A27DB-BD31-4B8C-83A1-F6EECF244321}">
-                <p14:modId xmlns:p14="http://schemas.microsoft.com/office/powerpoint/2010/main" val="2024892340"/>
-              </p:ext>
-            </p:extLst>
-          </p:nvPr>
-        </p:nvGraphicFramePr>
-        <p:xfrm>
-          <a:off x="1332558" y="3128963"/>
-          <a:ext cx="1874987" cy="667940"/>
-        </p:xfrm>
-        <a:graphic>
-          <a:graphicData uri="http://schemas.openxmlformats.org/presentationml/2006/ole">
-            <mc:AlternateContent xmlns:mc="http://schemas.openxmlformats.org/markup-compatibility/2006">
-              <mc:Choice xmlns:v="urn:schemas-microsoft-com:vml" Requires="v">
-                <p:oleObj name="Equation" r:id="rId2" imgW="1497950" imgH="533169" progId="Equation.3">
-                  <p:embed/>
-                </p:oleObj>
-              </mc:Choice>
-              <mc:Fallback>
-                <p:oleObj name="Equation" r:id="rId2" imgW="1497950" imgH="533169" progId="Equation.3">
-                  <p:embed/>
-                  <p:pic>
-                    <p:nvPicPr>
-                      <p:cNvPr id="21510" name="Object 5"/>
-                      <p:cNvPicPr>
-                        <a:picLocks noChangeAspect="1" noChangeArrowheads="1"/>
-                      </p:cNvPicPr>
-                      <p:nvPr/>
-                    </p:nvPicPr>
-                    <p:blipFill>
-                      <a:blip r:embed="rId3">
-                        <a:extLst>
-                          <a:ext uri="{28A0092B-C50C-407E-A947-70E740481C1C}">
-                            <a14:useLocalDpi xmlns:a14="http://schemas.microsoft.com/office/drawing/2010/main" val="0"/>
-                          </a:ext>
-                        </a:extLst>
-                      </a:blip>
-                      <a:srcRect/>
-                      <a:stretch>
-                        <a:fillRect/>
-                      </a:stretch>
-                    </p:blipFill>
-                    <p:spPr bwMode="auto">
-                      <a:xfrm>
-                        <a:off x="1332558" y="3128963"/>
-                        <a:ext cx="1874987" cy="667940"/>
-                      </a:xfrm>
-                      <a:prstGeom prst="rect">
-                        <a:avLst/>
-                      </a:prstGeom>
-                      <a:noFill/>
-                      <a:ln>
-                        <a:noFill/>
-                      </a:ln>
-                    </p:spPr>
-                  </p:pic>
-                </p:oleObj>
-              </mc:Fallback>
-            </mc:AlternateContent>
-          </a:graphicData>
-        </a:graphic>
-      </p:graphicFrame>
+      <mc:AlternateContent xmlns:mc="http://schemas.openxmlformats.org/markup-compatibility/2006">
+        <mc:Choice xmlns:a14="http://schemas.microsoft.com/office/drawing/2010/main" Requires="a14">
+          <p:sp>
+            <p:nvSpPr>
+              <p:cNvPr id="21510" name="Object 5"/>
+              <p:cNvSpPr txBox="1"/>
+              <p:nvPr/>
+            </p:nvSpPr>
+            <p:spPr bwMode="auto">
+              <a:xfrm>
+                <a:off x="756357" y="2814615"/>
+                <a:ext cx="2731910" cy="1281136"/>
+              </a:xfrm>
+              <a:prstGeom prst="rect">
+                <a:avLst/>
+              </a:prstGeom>
+              <a:noFill/>
+              <a:ln>
+                <a:noFill/>
+              </a:ln>
+            </p:spPr>
+            <p:txBody>
+              <a:bodyPr>
+                <a:normAutofit fontScale="85000" lnSpcReduction="10000"/>
+              </a:bodyPr>
+              <a:lstStyle/>
+              <a:p>
+                <a:pPr/>
+                <a14:m>
+                  <m:oMathPara xmlns:m="http://schemas.openxmlformats.org/officeDocument/2006/math">
+                    <m:oMathParaPr>
+                      <m:jc m:val="left"/>
+                    </m:oMathParaPr>
+                    <m:oMath xmlns:m="http://schemas.openxmlformats.org/officeDocument/2006/math">
+                      <m:r>
+                        <a:rPr lang="en-US" i="1" smtClean="0">
+                          <a:solidFill>
+                            <a:srgbClr val="000000"/>
+                          </a:solidFill>
+                          <a:latin typeface="Cambria Math" panose="02040503050406030204" pitchFamily="18" charset="0"/>
+                        </a:rPr>
+                        <m:t>𝐴</m:t>
+                      </m:r>
+                      <m:r>
+                        <a:rPr lang="en-US" i="1" smtClean="0">
+                          <a:solidFill>
+                            <a:srgbClr val="000000"/>
+                          </a:solidFill>
+                          <a:latin typeface="Cambria Math" panose="02040503050406030204" pitchFamily="18" charset="0"/>
+                        </a:rPr>
+                        <m:t>=</m:t>
+                      </m:r>
+                      <m:f>
+                        <m:fPr>
+                          <m:ctrlPr>
+                            <a:rPr lang="en-US" i="1">
+                              <a:solidFill>
+                                <a:srgbClr val="000000"/>
+                              </a:solidFill>
+                              <a:latin typeface="Cambria Math" panose="02040503050406030204" pitchFamily="18" charset="0"/>
+                            </a:rPr>
+                          </m:ctrlPr>
+                        </m:fPr>
+                        <m:num>
+                          <m:f>
+                            <m:fPr>
+                              <m:ctrlPr>
+                                <a:rPr lang="en-US" i="1">
+                                  <a:solidFill>
+                                    <a:srgbClr val="000000"/>
+                                  </a:solidFill>
+                                  <a:latin typeface="Cambria Math" panose="02040503050406030204" pitchFamily="18" charset="0"/>
+                                </a:rPr>
+                              </m:ctrlPr>
+                            </m:fPr>
+                            <m:num>
+                              <m:sSub>
+                                <m:sSubPr>
+                                  <m:ctrlPr>
+                                    <a:rPr lang="en-US" i="1">
+                                      <a:solidFill>
+                                        <a:srgbClr val="000000"/>
+                                      </a:solidFill>
+                                      <a:latin typeface="Cambria Math" panose="02040503050406030204" pitchFamily="18" charset="0"/>
+                                    </a:rPr>
+                                  </m:ctrlPr>
+                                </m:sSubPr>
+                                <m:e>
+                                  <m:r>
+                                    <a:rPr lang="en-US" i="1">
+                                      <a:solidFill>
+                                        <a:srgbClr val="000000"/>
+                                      </a:solidFill>
+                                      <a:latin typeface="Cambria Math" panose="02040503050406030204" pitchFamily="18" charset="0"/>
+                                    </a:rPr>
+                                    <m:t>𝐹</m:t>
+                                  </m:r>
+                                </m:e>
+                                <m:sub>
+                                  <m:r>
+                                    <a:rPr lang="en-US" b="0" i="1" smtClean="0">
+                                      <a:solidFill>
+                                        <a:srgbClr val="000000"/>
+                                      </a:solidFill>
+                                      <a:latin typeface="Cambria Math" panose="02040503050406030204" pitchFamily="18" charset="0"/>
+                                    </a:rPr>
+                                    <m:t>𝑚𝑎𝑥</m:t>
+                                  </m:r>
+                                </m:sub>
+                              </m:sSub>
+                            </m:num>
+                            <m:den>
+                              <m:r>
+                                <a:rPr lang="en-US" i="1">
+                                  <a:solidFill>
+                                    <a:srgbClr val="000000"/>
+                                  </a:solidFill>
+                                  <a:latin typeface="Cambria Math" panose="02040503050406030204" pitchFamily="18" charset="0"/>
+                                </a:rPr>
+                                <m:t>𝑚</m:t>
+                              </m:r>
+                            </m:den>
+                          </m:f>
+                        </m:num>
+                        <m:den>
+                          <m:rad>
+                            <m:radPr>
+                              <m:degHide m:val="on"/>
+                              <m:ctrlPr>
+                                <a:rPr lang="en-US" i="1">
+                                  <a:solidFill>
+                                    <a:srgbClr val="000000"/>
+                                  </a:solidFill>
+                                  <a:latin typeface="Cambria Math" panose="02040503050406030204" pitchFamily="18" charset="0"/>
+                                </a:rPr>
+                              </m:ctrlPr>
+                            </m:radPr>
+                            <m:deg/>
+                            <m:e>
+                              <m:sSup>
+                                <m:sSupPr>
+                                  <m:ctrlPr>
+                                    <a:rPr lang="en-US" i="1">
+                                      <a:solidFill>
+                                        <a:srgbClr val="000000"/>
+                                      </a:solidFill>
+                                      <a:latin typeface="Cambria Math" panose="02040503050406030204" pitchFamily="18" charset="0"/>
+                                    </a:rPr>
+                                  </m:ctrlPr>
+                                </m:sSupPr>
+                                <m:e>
+                                  <m:d>
+                                    <m:dPr>
+                                      <m:ctrlPr>
+                                        <a:rPr lang="en-US" i="1">
+                                          <a:solidFill>
+                                            <a:srgbClr val="000000"/>
+                                          </a:solidFill>
+                                          <a:latin typeface="Cambria Math" panose="02040503050406030204" pitchFamily="18" charset="0"/>
+                                        </a:rPr>
+                                      </m:ctrlPr>
+                                    </m:dPr>
+                                    <m:e>
+                                      <m:sSup>
+                                        <m:sSupPr>
+                                          <m:ctrlPr>
+                                            <a:rPr lang="en-US" i="1">
+                                              <a:solidFill>
+                                                <a:srgbClr val="000000"/>
+                                              </a:solidFill>
+                                              <a:latin typeface="Cambria Math" panose="02040503050406030204" pitchFamily="18" charset="0"/>
+                                            </a:rPr>
+                                          </m:ctrlPr>
+                                        </m:sSupPr>
+                                        <m:e>
+                                          <m:r>
+                                            <a:rPr lang="en-US" i="1">
+                                              <a:solidFill>
+                                                <a:srgbClr val="000000"/>
+                                              </a:solidFill>
+                                              <a:latin typeface="Cambria Math" panose="02040503050406030204" pitchFamily="18" charset="0"/>
+                                            </a:rPr>
+                                            <m:t>𝜔</m:t>
+                                          </m:r>
+                                        </m:e>
+                                        <m:sup>
+                                          <m:r>
+                                            <a:rPr lang="en-US" i="1">
+                                              <a:solidFill>
+                                                <a:srgbClr val="000000"/>
+                                              </a:solidFill>
+                                              <a:latin typeface="Cambria Math" panose="02040503050406030204" pitchFamily="18" charset="0"/>
+                                            </a:rPr>
+                                            <m:t>2</m:t>
+                                          </m:r>
+                                        </m:sup>
+                                      </m:sSup>
+                                      <m:r>
+                                        <a:rPr lang="en-US" i="1">
+                                          <a:solidFill>
+                                            <a:srgbClr val="000000"/>
+                                          </a:solidFill>
+                                          <a:latin typeface="Cambria Math" panose="02040503050406030204" pitchFamily="18" charset="0"/>
+                                        </a:rPr>
+                                        <m:t>−</m:t>
+                                      </m:r>
+                                      <m:sSubSup>
+                                        <m:sSubSupPr>
+                                          <m:ctrlPr>
+                                            <a:rPr lang="en-US" i="1">
+                                              <a:solidFill>
+                                                <a:srgbClr val="000000"/>
+                                              </a:solidFill>
+                                              <a:latin typeface="Cambria Math" panose="02040503050406030204" pitchFamily="18" charset="0"/>
+                                            </a:rPr>
+                                          </m:ctrlPr>
+                                        </m:sSubSupPr>
+                                        <m:e>
+                                          <m:r>
+                                            <a:rPr lang="en-US" i="1">
+                                              <a:solidFill>
+                                                <a:srgbClr val="000000"/>
+                                              </a:solidFill>
+                                              <a:latin typeface="Cambria Math" panose="02040503050406030204" pitchFamily="18" charset="0"/>
+                                            </a:rPr>
+                                            <m:t>𝜔</m:t>
+                                          </m:r>
+                                        </m:e>
+                                        <m:sub>
+                                          <m:r>
+                                            <a:rPr lang="en-US" b="0" i="1" smtClean="0">
+                                              <a:solidFill>
+                                                <a:srgbClr val="000000"/>
+                                              </a:solidFill>
+                                              <a:latin typeface="Cambria Math" panose="02040503050406030204" pitchFamily="18" charset="0"/>
+                                            </a:rPr>
+                                            <m:t>𝑁</m:t>
+                                          </m:r>
+                                        </m:sub>
+                                        <m:sup>
+                                          <m:r>
+                                            <a:rPr lang="en-US" i="1">
+                                              <a:solidFill>
+                                                <a:srgbClr val="000000"/>
+                                              </a:solidFill>
+                                              <a:latin typeface="Cambria Math" panose="02040503050406030204" pitchFamily="18" charset="0"/>
+                                            </a:rPr>
+                                            <m:t>2</m:t>
+                                          </m:r>
+                                        </m:sup>
+                                      </m:sSubSup>
+                                    </m:e>
+                                  </m:d>
+                                </m:e>
+                                <m:sup>
+                                  <m:r>
+                                    <a:rPr lang="en-US" i="1">
+                                      <a:solidFill>
+                                        <a:srgbClr val="000000"/>
+                                      </a:solidFill>
+                                      <a:latin typeface="Cambria Math" panose="02040503050406030204" pitchFamily="18" charset="0"/>
+                                    </a:rPr>
+                                    <m:t>2</m:t>
+                                  </m:r>
+                                </m:sup>
+                              </m:sSup>
+                              <m:r>
+                                <a:rPr lang="en-US" i="1">
+                                  <a:solidFill>
+                                    <a:srgbClr val="000000"/>
+                                  </a:solidFill>
+                                  <a:latin typeface="Cambria Math" panose="02040503050406030204" pitchFamily="18" charset="0"/>
+                                </a:rPr>
+                                <m:t>+</m:t>
+                              </m:r>
+                              <m:sSup>
+                                <m:sSupPr>
+                                  <m:ctrlPr>
+                                    <a:rPr lang="en-US" i="1">
+                                      <a:solidFill>
+                                        <a:srgbClr val="000000"/>
+                                      </a:solidFill>
+                                      <a:latin typeface="Cambria Math" panose="02040503050406030204" pitchFamily="18" charset="0"/>
+                                    </a:rPr>
+                                  </m:ctrlPr>
+                                </m:sSupPr>
+                                <m:e>
+                                  <m:d>
+                                    <m:dPr>
+                                      <m:ctrlPr>
+                                        <a:rPr lang="en-US" i="1">
+                                          <a:solidFill>
+                                            <a:srgbClr val="000000"/>
+                                          </a:solidFill>
+                                          <a:latin typeface="Cambria Math" panose="02040503050406030204" pitchFamily="18" charset="0"/>
+                                        </a:rPr>
+                                      </m:ctrlPr>
+                                    </m:dPr>
+                                    <m:e>
+                                      <m:f>
+                                        <m:fPr>
+                                          <m:ctrlPr>
+                                            <a:rPr lang="en-US" i="1">
+                                              <a:solidFill>
+                                                <a:srgbClr val="000000"/>
+                                              </a:solidFill>
+                                              <a:latin typeface="Cambria Math" panose="02040503050406030204" pitchFamily="18" charset="0"/>
+                                            </a:rPr>
+                                          </m:ctrlPr>
+                                        </m:fPr>
+                                        <m:num>
+                                          <m:r>
+                                            <a:rPr lang="en-US" i="1">
+                                              <a:solidFill>
+                                                <a:srgbClr val="000000"/>
+                                              </a:solidFill>
+                                              <a:latin typeface="Cambria Math" panose="02040503050406030204" pitchFamily="18" charset="0"/>
+                                            </a:rPr>
+                                            <m:t>𝑏</m:t>
+                                          </m:r>
+                                          <m:r>
+                                            <a:rPr lang="en-US" i="1">
+                                              <a:solidFill>
+                                                <a:srgbClr val="000000"/>
+                                              </a:solidFill>
+                                              <a:latin typeface="Cambria Math" panose="02040503050406030204" pitchFamily="18" charset="0"/>
+                                            </a:rPr>
+                                            <m:t>𝜔</m:t>
+                                          </m:r>
+                                        </m:num>
+                                        <m:den>
+                                          <m:r>
+                                            <a:rPr lang="en-US" i="1">
+                                              <a:solidFill>
+                                                <a:srgbClr val="000000"/>
+                                              </a:solidFill>
+                                              <a:latin typeface="Cambria Math" panose="02040503050406030204" pitchFamily="18" charset="0"/>
+                                            </a:rPr>
+                                            <m:t>𝑚</m:t>
+                                          </m:r>
+                                        </m:den>
+                                      </m:f>
+                                    </m:e>
+                                  </m:d>
+                                </m:e>
+                                <m:sup>
+                                  <m:r>
+                                    <a:rPr lang="en-US" i="1">
+                                      <a:solidFill>
+                                        <a:srgbClr val="000000"/>
+                                      </a:solidFill>
+                                      <a:latin typeface="Cambria Math" panose="02040503050406030204" pitchFamily="18" charset="0"/>
+                                    </a:rPr>
+                                    <m:t>2</m:t>
+                                  </m:r>
+                                </m:sup>
+                              </m:sSup>
+                            </m:e>
+                          </m:rad>
+                        </m:den>
+                      </m:f>
+                    </m:oMath>
+                  </m:oMathPara>
+                </a14:m>
+                <a:endParaRPr lang="en-US" dirty="0"/>
+              </a:p>
+            </p:txBody>
+          </p:sp>
+        </mc:Choice>
+        <mc:Fallback>
+          <p:sp>
+            <p:nvSpPr>
+              <p:cNvPr id="21510" name="Object 5"/>
+              <p:cNvSpPr txBox="1">
+                <a:spLocks noRot="1" noChangeAspect="1" noMove="1" noResize="1" noEditPoints="1" noAdjustHandles="1" noChangeArrowheads="1" noChangeShapeType="1" noTextEdit="1"/>
+              </p:cNvSpPr>
+              <p:nvPr/>
+            </p:nvSpPr>
+            <p:spPr bwMode="auto">
+              <a:xfrm>
+                <a:off x="756357" y="2814615"/>
+                <a:ext cx="2731910" cy="1281136"/>
+              </a:xfrm>
+              <a:prstGeom prst="rect">
+                <a:avLst/>
+              </a:prstGeom>
+              <a:blipFill>
+                <a:blip r:embed="rId2"/>
+                <a:stretch>
+                  <a:fillRect/>
+                </a:stretch>
+              </a:blipFill>
+              <a:ln>
+                <a:noFill/>
+              </a:ln>
+            </p:spPr>
+            <p:txBody>
+              <a:bodyPr/>
+              <a:lstStyle/>
+              <a:p>
+                <a:r>
+                  <a:rPr lang="en-US">
+                    <a:noFill/>
+                  </a:rPr>
+                  <a:t> </a:t>
+                </a:r>
+              </a:p>
+            </p:txBody>
+          </p:sp>
+        </mc:Fallback>
+      </mc:AlternateContent>
       <p:sp>
         <p:nvSpPr>
           <p:cNvPr id="21511" name="Rectangle 6"/>
@@ -51306,12 +53453,12 @@
           <a:graphicData uri="http://schemas.openxmlformats.org/presentationml/2006/ole">
             <mc:AlternateContent xmlns:mc="http://schemas.openxmlformats.org/markup-compatibility/2006">
               <mc:Choice xmlns:v="urn:schemas-microsoft-com:vml" Requires="v">
-                <p:oleObj name="Equation" r:id="rId4" imgW="672808" imgH="888614" progId="Equation.3">
+                <p:oleObj name="Equation" r:id="rId3" imgW="672808" imgH="888614" progId="Equation.3">
                   <p:embed/>
                 </p:oleObj>
               </mc:Choice>
               <mc:Fallback>
-                <p:oleObj name="Equation" r:id="rId4" imgW="672808" imgH="888614" progId="Equation.3">
+                <p:oleObj name="Equation" r:id="rId3" imgW="672808" imgH="888614" progId="Equation.3">
                   <p:embed/>
                   <p:pic>
                     <p:nvPicPr>
@@ -51322,7 +53469,7 @@
                       <p:nvPr/>
                     </p:nvPicPr>
                     <p:blipFill>
-                      <a:blip r:embed="rId5">
+                      <a:blip r:embed="rId4">
                         <a:extLst>
                           <a:ext uri="{28A0092B-C50C-407E-A947-70E740481C1C}">
                             <a14:useLocalDpi xmlns:a14="http://schemas.microsoft.com/office/drawing/2010/main" val="0"/>
@@ -51369,7 +53516,7 @@
           <p:nvPr/>
         </p:nvPicPr>
         <p:blipFill>
-          <a:blip r:embed="rId6"/>
+          <a:blip r:embed="rId5"/>
           <a:stretch>
             <a:fillRect/>
           </a:stretch>
@@ -51687,52 +53834,52 @@
           <a:p>
             <a:pPr eaLnBrk="1" hangingPunct="1"/>
             <a:r>
-              <a:rPr lang="en-US" sz="1500"/>
+              <a:rPr lang="en-US" sz="1500" dirty="0"/>
               <a:t>To see why resonance happens, think of the velocity</a:t>
             </a:r>
           </a:p>
           <a:p>
             <a:pPr eaLnBrk="1" hangingPunct="1"/>
-            <a:endParaRPr lang="en-US" sz="1500"/>
+            <a:endParaRPr lang="en-US" sz="1500" dirty="0"/>
           </a:p>
           <a:p>
             <a:pPr eaLnBrk="1" hangingPunct="1"/>
-            <a:endParaRPr lang="en-US" sz="1500"/>
+            <a:endParaRPr lang="en-US" sz="1500" dirty="0"/>
           </a:p>
           <a:p>
             <a:pPr eaLnBrk="1" hangingPunct="1"/>
             <a:r>
-              <a:rPr lang="en-US" sz="1500"/>
+              <a:rPr lang="en-US" sz="1500" dirty="0"/>
               <a:t>And our driving force is</a:t>
             </a:r>
           </a:p>
           <a:p>
             <a:pPr eaLnBrk="1" hangingPunct="1"/>
-            <a:endParaRPr lang="en-US" sz="1500"/>
+            <a:endParaRPr lang="en-US" sz="1500" dirty="0"/>
           </a:p>
           <a:p>
             <a:pPr eaLnBrk="1" hangingPunct="1"/>
-            <a:endParaRPr lang="en-US" sz="1500"/>
+            <a:endParaRPr lang="en-US" sz="1500" dirty="0"/>
           </a:p>
           <a:p>
             <a:pPr eaLnBrk="1" hangingPunct="1"/>
             <a:r>
-              <a:rPr lang="en-US" sz="1500"/>
+              <a:rPr lang="en-US" sz="1500" dirty="0"/>
               <a:t>The rate at which work is done (power) is</a:t>
             </a:r>
           </a:p>
           <a:p>
             <a:pPr eaLnBrk="1" hangingPunct="1"/>
-            <a:endParaRPr lang="en-US" sz="1500"/>
+            <a:endParaRPr lang="en-US" sz="1500" dirty="0"/>
           </a:p>
           <a:p>
             <a:pPr eaLnBrk="1" hangingPunct="1"/>
-            <a:endParaRPr lang="en-US" sz="1500"/>
+            <a:endParaRPr lang="en-US" sz="1500" dirty="0"/>
           </a:p>
           <a:p>
             <a:pPr eaLnBrk="1" hangingPunct="1"/>
             <a:r>
-              <a:rPr lang="en-US" sz="1500"/>
+              <a:rPr lang="en-US" sz="1500" dirty="0"/>
               <a:t> if  F and v are in phase, the power will be at a maximum!</a:t>
             </a:r>
           </a:p>
@@ -51908,76 +54055,225 @@
           </a:p>
         </p:txBody>
       </p:sp>
-      <p:graphicFrame>
-        <p:nvGraphicFramePr>
-          <p:cNvPr id="22536" name="Object 7"/>
-          <p:cNvGraphicFramePr>
-            <a:graphicFrameLocks noChangeAspect="1"/>
-          </p:cNvGraphicFramePr>
-          <p:nvPr>
-            <p:extLst>
-              <p:ext uri="{D42A27DB-BD31-4B8C-83A1-F6EECF244321}">
-                <p14:modId xmlns:p14="http://schemas.microsoft.com/office/powerpoint/2010/main" val="2557385535"/>
-              </p:ext>
-            </p:extLst>
-          </p:nvPr>
-        </p:nvGraphicFramePr>
-        <p:xfrm>
-          <a:off x="3208091" y="2409429"/>
-          <a:ext cx="1848541" cy="407580"/>
-        </p:xfrm>
-        <a:graphic>
-          <a:graphicData uri="http://schemas.openxmlformats.org/presentationml/2006/ole">
-            <mc:AlternateContent xmlns:mc="http://schemas.openxmlformats.org/markup-compatibility/2006">
-              <mc:Choice xmlns:v="urn:schemas-microsoft-com:vml" Requires="v">
-                <p:oleObj name="Equation" r:id="rId4" imgW="1040948" imgH="228501" progId="Equation.3">
-                  <p:embed/>
-                </p:oleObj>
-              </mc:Choice>
-              <mc:Fallback>
-                <p:oleObj name="Equation" r:id="rId4" imgW="1040948" imgH="228501" progId="Equation.3">
-                  <p:embed/>
-                  <p:pic>
-                    <p:nvPicPr>
-                      <p:cNvPr id="22536" name="Object 7"/>
-                      <p:cNvPicPr>
-                        <a:picLocks noChangeAspect="1" noChangeArrowheads="1"/>
-                      </p:cNvPicPr>
-                      <p:nvPr/>
-                    </p:nvPicPr>
-                    <p:blipFill>
-                      <a:blip r:embed="rId5">
-                        <a:extLst>
-                          <a:ext uri="{28A0092B-C50C-407E-A947-70E740481C1C}">
-                            <a14:useLocalDpi xmlns:a14="http://schemas.microsoft.com/office/drawing/2010/main" val="0"/>
-                          </a:ext>
-                        </a:extLst>
-                      </a:blip>
-                      <a:srcRect/>
-                      <a:stretch>
-                        <a:fillRect/>
-                      </a:stretch>
-                    </p:blipFill>
-                    <p:spPr bwMode="auto">
-                      <a:xfrm>
-                        <a:off x="3208091" y="2409429"/>
-                        <a:ext cx="1848541" cy="407580"/>
-                      </a:xfrm>
-                      <a:prstGeom prst="rect">
-                        <a:avLst/>
-                      </a:prstGeom>
-                      <a:noFill/>
-                      <a:ln>
-                        <a:noFill/>
-                      </a:ln>
-                    </p:spPr>
-                  </p:pic>
-                </p:oleObj>
-              </mc:Fallback>
-            </mc:AlternateContent>
-          </a:graphicData>
-        </a:graphic>
-      </p:graphicFrame>
+      <mc:AlternateContent xmlns:mc="http://schemas.openxmlformats.org/markup-compatibility/2006">
+        <mc:Choice xmlns:a14="http://schemas.microsoft.com/office/drawing/2010/main" Requires="a14">
+          <p:sp>
+            <p:nvSpPr>
+              <p:cNvPr id="22536" name="Object 7"/>
+              <p:cNvSpPr txBox="1"/>
+              <p:nvPr/>
+            </p:nvSpPr>
+            <p:spPr bwMode="auto">
+              <a:xfrm>
+                <a:off x="3208338" y="2409825"/>
+                <a:ext cx="1847850" cy="406400"/>
+              </a:xfrm>
+              <a:prstGeom prst="rect">
+                <a:avLst/>
+              </a:prstGeom>
+              <a:noFill/>
+              <a:ln>
+                <a:noFill/>
+              </a:ln>
+            </p:spPr>
+            <p:txBody>
+              <a:bodyPr>
+                <a:normAutofit fontScale="85000" lnSpcReduction="10000"/>
+              </a:bodyPr>
+              <a:lstStyle/>
+              <a:p>
+                <a:pPr/>
+                <a14:m>
+                  <m:oMathPara xmlns:m="http://schemas.openxmlformats.org/officeDocument/2006/math">
+                    <m:oMathParaPr>
+                      <m:jc m:val="left"/>
+                    </m:oMathParaPr>
+                    <m:oMath xmlns:m="http://schemas.openxmlformats.org/officeDocument/2006/math">
+                      <m:r>
+                        <a:rPr lang="en-US" i="1" smtClean="0">
+                          <a:solidFill>
+                            <a:srgbClr val="000000"/>
+                          </a:solidFill>
+                          <a:latin typeface="Cambria Math" panose="02040503050406030204" pitchFamily="18" charset="0"/>
+                        </a:rPr>
+                        <m:t>𝐹</m:t>
+                      </m:r>
+                      <m:d>
+                        <m:dPr>
+                          <m:ctrlPr>
+                            <a:rPr lang="en-US" i="1">
+                              <a:solidFill>
+                                <a:srgbClr val="000000"/>
+                              </a:solidFill>
+                              <a:latin typeface="Cambria Math" panose="02040503050406030204" pitchFamily="18" charset="0"/>
+                            </a:rPr>
+                          </m:ctrlPr>
+                        </m:dPr>
+                        <m:e>
+                          <m:r>
+                            <a:rPr lang="en-US" i="1">
+                              <a:solidFill>
+                                <a:srgbClr val="000000"/>
+                              </a:solidFill>
+                              <a:latin typeface="Cambria Math" panose="02040503050406030204" pitchFamily="18" charset="0"/>
+                            </a:rPr>
+                            <m:t>𝑡</m:t>
+                          </m:r>
+                        </m:e>
+                      </m:d>
+                      <m:r>
+                        <a:rPr lang="en-US" i="1">
+                          <a:solidFill>
+                            <a:srgbClr val="000000"/>
+                          </a:solidFill>
+                          <a:latin typeface="Cambria Math" panose="02040503050406030204" pitchFamily="18" charset="0"/>
+                        </a:rPr>
+                        <m:t>=</m:t>
+                      </m:r>
+                      <m:sSub>
+                        <m:sSubPr>
+                          <m:ctrlPr>
+                            <a:rPr lang="en-US" i="1">
+                              <a:solidFill>
+                                <a:srgbClr val="000000"/>
+                              </a:solidFill>
+                              <a:latin typeface="Cambria Math" panose="02040503050406030204" pitchFamily="18" charset="0"/>
+                            </a:rPr>
+                          </m:ctrlPr>
+                        </m:sSubPr>
+                        <m:e>
+                          <m:r>
+                            <a:rPr lang="en-US" i="1">
+                              <a:solidFill>
+                                <a:srgbClr val="000000"/>
+                              </a:solidFill>
+                              <a:latin typeface="Cambria Math" panose="02040503050406030204" pitchFamily="18" charset="0"/>
+                            </a:rPr>
+                            <m:t>𝐹</m:t>
+                          </m:r>
+                        </m:e>
+                        <m:sub>
+                          <m:r>
+                            <a:rPr lang="en-US" b="0" i="1" smtClean="0">
+                              <a:solidFill>
+                                <a:srgbClr val="000000"/>
+                              </a:solidFill>
+                              <a:latin typeface="Cambria Math" panose="02040503050406030204" pitchFamily="18" charset="0"/>
+                            </a:rPr>
+                            <m:t>𝑚𝑎𝑥</m:t>
+                          </m:r>
+                        </m:sub>
+                      </m:sSub>
+                      <m:func>
+                        <m:funcPr>
+                          <m:ctrlPr>
+                            <a:rPr lang="en-US" i="1">
+                              <a:solidFill>
+                                <a:srgbClr val="000000"/>
+                              </a:solidFill>
+                              <a:latin typeface="Cambria Math" panose="02040503050406030204" pitchFamily="18" charset="0"/>
+                            </a:rPr>
+                          </m:ctrlPr>
+                        </m:funcPr>
+                        <m:fName>
+                          <m:r>
+                            <m:rPr>
+                              <m:sty m:val="p"/>
+                            </m:rPr>
+                            <a:rPr lang="en-US" i="0">
+                              <a:solidFill>
+                                <a:srgbClr val="000000"/>
+                              </a:solidFill>
+                              <a:latin typeface="Cambria Math" panose="02040503050406030204" pitchFamily="18" charset="0"/>
+                            </a:rPr>
+                            <m:t>sin</m:t>
+                          </m:r>
+                        </m:fName>
+                        <m:e>
+                          <m:d>
+                            <m:dPr>
+                              <m:ctrlPr>
+                                <a:rPr lang="en-US" i="1">
+                                  <a:solidFill>
+                                    <a:srgbClr val="000000"/>
+                                  </a:solidFill>
+                                  <a:latin typeface="Cambria Math" panose="02040503050406030204" pitchFamily="18" charset="0"/>
+                                </a:rPr>
+                              </m:ctrlPr>
+                            </m:dPr>
+                            <m:e>
+                              <m:r>
+                                <a:rPr lang="en-US" i="1">
+                                  <a:solidFill>
+                                    <a:srgbClr val="000000"/>
+                                  </a:solidFill>
+                                  <a:latin typeface="Cambria Math" panose="02040503050406030204" pitchFamily="18" charset="0"/>
+                                </a:rPr>
+                                <m:t>𝜔</m:t>
+                              </m:r>
+                              <m:r>
+                                <a:rPr lang="en-US" i="1">
+                                  <a:solidFill>
+                                    <a:srgbClr val="000000"/>
+                                  </a:solidFill>
+                                  <a:latin typeface="Cambria Math" panose="02040503050406030204" pitchFamily="18" charset="0"/>
+                                </a:rPr>
+                                <m:t>𝑡</m:t>
+                              </m:r>
+                            </m:e>
+                          </m:d>
+                        </m:e>
+                      </m:func>
+                    </m:oMath>
+                  </m:oMathPara>
+                </a14:m>
+                <a:endParaRPr lang="en-US" dirty="0"/>
+              </a:p>
+            </p:txBody>
+          </p:sp>
+        </mc:Choice>
+        <mc:Fallback>
+          <p:sp>
+            <p:nvSpPr>
+              <p:cNvPr id="22536" name="Object 7"/>
+              <p:cNvSpPr txBox="1">
+                <a:spLocks noRot="1" noChangeAspect="1" noMove="1" noResize="1" noEditPoints="1" noAdjustHandles="1" noChangeArrowheads="1" noChangeShapeType="1" noTextEdit="1"/>
+              </p:cNvSpPr>
+              <p:nvPr/>
+            </p:nvSpPr>
+            <p:spPr bwMode="auto">
+              <a:xfrm>
+                <a:off x="3208338" y="2409825"/>
+                <a:ext cx="1847850" cy="406400"/>
+              </a:xfrm>
+              <a:prstGeom prst="rect">
+                <a:avLst/>
+              </a:prstGeom>
+              <a:blipFill>
+                <a:blip r:embed="rId4"/>
+                <a:stretch>
+                  <a:fillRect/>
+                </a:stretch>
+              </a:blipFill>
+              <a:ln>
+                <a:noFill/>
+              </a:ln>
+            </p:spPr>
+            <p:txBody>
+              <a:bodyPr/>
+              <a:lstStyle/>
+              <a:p>
+                <a:r>
+                  <a:rPr lang="en-US">
+                    <a:noFill/>
+                  </a:rPr>
+                  <a:t> </a:t>
+                </a:r>
+              </a:p>
+            </p:txBody>
+          </p:sp>
+        </mc:Fallback>
+      </mc:AlternateContent>
       <p:sp>
         <p:nvSpPr>
           <p:cNvPr id="22537" name="Rectangle 8"/>
@@ -52050,12 +54346,12 @@
           <a:graphicData uri="http://schemas.openxmlformats.org/presentationml/2006/ole">
             <mc:AlternateContent xmlns:mc="http://schemas.openxmlformats.org/markup-compatibility/2006">
               <mc:Choice xmlns:v="urn:schemas-microsoft-com:vml" Requires="v">
-                <p:oleObj name="Equation" r:id="rId6" imgW="1066337" imgH="393529" progId="Equation.3">
+                <p:oleObj name="Equation" r:id="rId5" imgW="1066337" imgH="393529" progId="Equation.3">
                   <p:embed/>
                 </p:oleObj>
               </mc:Choice>
               <mc:Fallback>
-                <p:oleObj name="Equation" r:id="rId6" imgW="1066337" imgH="393529" progId="Equation.3">
+                <p:oleObj name="Equation" r:id="rId5" imgW="1066337" imgH="393529" progId="Equation.3">
                   <p:embed/>
                   <p:pic>
                     <p:nvPicPr>
@@ -52066,7 +54362,7 @@
                       <p:nvPr/>
                     </p:nvPicPr>
                     <p:blipFill>
-                      <a:blip r:embed="rId7">
+                      <a:blip r:embed="rId6">
                         <a:extLst>
                           <a:ext uri="{28A0092B-C50C-407E-A947-70E740481C1C}">
                             <a14:useLocalDpi xmlns:a14="http://schemas.microsoft.com/office/drawing/2010/main" val="0"/>

--- a/Lecture_Slides/PH 123 Lecture 04.pptx
+++ b/Lecture_Slides/PH 123 Lecture 04.pptx
@@ -5,7 +5,7 @@
     <p:sldMasterId id="2147483648" r:id="rId1"/>
   </p:sldMasterIdLst>
   <p:notesMasterIdLst>
-    <p:notesMasterId r:id="rId49"/>
+    <p:notesMasterId r:id="rId50"/>
   </p:notesMasterIdLst>
   <p:sldIdLst>
     <p:sldId id="395" r:id="rId2"/>
@@ -17,44 +17,45 @@
     <p:sldId id="388" r:id="rId8"/>
     <p:sldId id="389" r:id="rId9"/>
     <p:sldId id="390" r:id="rId10"/>
-    <p:sldId id="397" r:id="rId11"/>
-    <p:sldId id="391" r:id="rId12"/>
-    <p:sldId id="396" r:id="rId13"/>
-    <p:sldId id="274" r:id="rId14"/>
-    <p:sldId id="275" r:id="rId15"/>
-    <p:sldId id="276" r:id="rId16"/>
-    <p:sldId id="277" r:id="rId17"/>
-    <p:sldId id="287" r:id="rId18"/>
-    <p:sldId id="288" r:id="rId19"/>
-    <p:sldId id="278" r:id="rId20"/>
-    <p:sldId id="299" r:id="rId21"/>
-    <p:sldId id="310" r:id="rId22"/>
-    <p:sldId id="311" r:id="rId23"/>
-    <p:sldId id="279" r:id="rId24"/>
-    <p:sldId id="280" r:id="rId25"/>
-    <p:sldId id="281" r:id="rId26"/>
-    <p:sldId id="285" r:id="rId27"/>
-    <p:sldId id="273" r:id="rId28"/>
-    <p:sldId id="270" r:id="rId29"/>
-    <p:sldId id="271" r:id="rId30"/>
-    <p:sldId id="286" r:id="rId31"/>
-    <p:sldId id="312" r:id="rId32"/>
-    <p:sldId id="258" r:id="rId33"/>
-    <p:sldId id="257" r:id="rId34"/>
-    <p:sldId id="398" r:id="rId35"/>
-    <p:sldId id="289" r:id="rId36"/>
-    <p:sldId id="290" r:id="rId37"/>
-    <p:sldId id="291" r:id="rId38"/>
-    <p:sldId id="292" r:id="rId39"/>
-    <p:sldId id="293" r:id="rId40"/>
-    <p:sldId id="294" r:id="rId41"/>
-    <p:sldId id="295" r:id="rId42"/>
-    <p:sldId id="296" r:id="rId43"/>
-    <p:sldId id="297" r:id="rId44"/>
-    <p:sldId id="298" r:id="rId45"/>
-    <p:sldId id="282" r:id="rId46"/>
-    <p:sldId id="283" r:id="rId47"/>
-    <p:sldId id="284" r:id="rId48"/>
+    <p:sldId id="399" r:id="rId11"/>
+    <p:sldId id="397" r:id="rId12"/>
+    <p:sldId id="391" r:id="rId13"/>
+    <p:sldId id="396" r:id="rId14"/>
+    <p:sldId id="274" r:id="rId15"/>
+    <p:sldId id="275" r:id="rId16"/>
+    <p:sldId id="276" r:id="rId17"/>
+    <p:sldId id="277" r:id="rId18"/>
+    <p:sldId id="287" r:id="rId19"/>
+    <p:sldId id="288" r:id="rId20"/>
+    <p:sldId id="278" r:id="rId21"/>
+    <p:sldId id="299" r:id="rId22"/>
+    <p:sldId id="310" r:id="rId23"/>
+    <p:sldId id="311" r:id="rId24"/>
+    <p:sldId id="279" r:id="rId25"/>
+    <p:sldId id="280" r:id="rId26"/>
+    <p:sldId id="281" r:id="rId27"/>
+    <p:sldId id="285" r:id="rId28"/>
+    <p:sldId id="273" r:id="rId29"/>
+    <p:sldId id="270" r:id="rId30"/>
+    <p:sldId id="271" r:id="rId31"/>
+    <p:sldId id="286" r:id="rId32"/>
+    <p:sldId id="312" r:id="rId33"/>
+    <p:sldId id="258" r:id="rId34"/>
+    <p:sldId id="257" r:id="rId35"/>
+    <p:sldId id="398" r:id="rId36"/>
+    <p:sldId id="289" r:id="rId37"/>
+    <p:sldId id="290" r:id="rId38"/>
+    <p:sldId id="291" r:id="rId39"/>
+    <p:sldId id="292" r:id="rId40"/>
+    <p:sldId id="293" r:id="rId41"/>
+    <p:sldId id="294" r:id="rId42"/>
+    <p:sldId id="295" r:id="rId43"/>
+    <p:sldId id="296" r:id="rId44"/>
+    <p:sldId id="297" r:id="rId45"/>
+    <p:sldId id="298" r:id="rId46"/>
+    <p:sldId id="282" r:id="rId47"/>
+    <p:sldId id="283" r:id="rId48"/>
+    <p:sldId id="284" r:id="rId49"/>
   </p:sldIdLst>
   <p:sldSz cx="9144000" cy="6858000" type="screen4x3"/>
   <p:notesSz cx="6858000" cy="9144000"/>
@@ -172,234 +173,52 @@
 </p:presentation>
 </file>
 
-<file path=ppt/revisionInfo.xml><?xml version="1.0" encoding="utf-8"?>
-<p1510:revInfo xmlns:a="http://schemas.openxmlformats.org/drawingml/2006/main" xmlns:r="http://schemas.openxmlformats.org/officeDocument/2006/relationships" xmlns:p1510="http://schemas.microsoft.com/office/powerpoint/2015/10/main">
-  <p1510:revLst>
-    <p1510:client id="{2B3D251A-BFC7-4975-A9F2-C2C806C625C9}" v="46" dt="2026-04-22T21:08:29.484"/>
-  </p1510:revLst>
-</p1510:revInfo>
-</file>
-
 <file path=ppt/changesInfos/changesInfo1.xml><?xml version="1.0" encoding="utf-8"?>
 <pc:chgInfo xmlns:a="http://schemas.openxmlformats.org/drawingml/2006/main" xmlns:r="http://schemas.openxmlformats.org/officeDocument/2006/relationships" xmlns:ac="http://schemas.microsoft.com/office/drawing/2013/main/command" xmlns:pc="http://schemas.microsoft.com/office/powerpoint/2013/main/command">
   <pc:docChgLst>
-    <pc:chgData name="Lines, Todd" userId="afaf7c3a-e8aa-4568-882a-02ad8f9e19b0" providerId="ADAL" clId="{5FF5AC1B-ABA9-43D7-A1E3-2D92732CD6E2}"/>
-    <pc:docChg chg="undo custSel modSld">
-      <pc:chgData name="Lines, Todd" userId="afaf7c3a-e8aa-4568-882a-02ad8f9e19b0" providerId="ADAL" clId="{5FF5AC1B-ABA9-43D7-A1E3-2D92732CD6E2}" dt="2026-04-22T21:08:29.484" v="174" actId="6549"/>
+    <pc:chgData name="Todd Lines" userId="afaf7c3a-e8aa-4568-882a-02ad8f9e19b0" providerId="ADAL" clId="{5FF5AC1B-ABA9-43D7-A1E3-2D92732CD6E2}"/>
+    <pc:docChg chg="custSel addSld modSld">
+      <pc:chgData name="Todd Lines" userId="afaf7c3a-e8aa-4568-882a-02ad8f9e19b0" providerId="ADAL" clId="{5FF5AC1B-ABA9-43D7-A1E3-2D92732CD6E2}" dt="2026-08-17T20:35:19.437" v="9" actId="21"/>
       <pc:docMkLst>
         <pc:docMk/>
       </pc:docMkLst>
       <pc:sldChg chg="addSp delSp modSp mod">
-        <pc:chgData name="Lines, Todd" userId="afaf7c3a-e8aa-4568-882a-02ad8f9e19b0" providerId="ADAL" clId="{5FF5AC1B-ABA9-43D7-A1E3-2D92732CD6E2}" dt="2026-04-22T21:05:53.764" v="106" actId="20577"/>
+        <pc:chgData name="Todd Lines" userId="afaf7c3a-e8aa-4568-882a-02ad8f9e19b0" providerId="ADAL" clId="{5FF5AC1B-ABA9-43D7-A1E3-2D92732CD6E2}" dt="2026-08-17T20:35:19.437" v="9" actId="21"/>
         <pc:sldMkLst>
           <pc:docMk/>
-          <pc:sldMk cId="0" sldId="386"/>
+          <pc:sldMk cId="0" sldId="390"/>
         </pc:sldMkLst>
-        <pc:spChg chg="add mod">
-          <ac:chgData name="Lines, Todd" userId="afaf7c3a-e8aa-4568-882a-02ad8f9e19b0" providerId="ADAL" clId="{5FF5AC1B-ABA9-43D7-A1E3-2D92732CD6E2}" dt="2026-04-22T21:05:48.983" v="102" actId="20577"/>
+        <pc:spChg chg="mod">
+          <ac:chgData name="Todd Lines" userId="afaf7c3a-e8aa-4568-882a-02ad8f9e19b0" providerId="ADAL" clId="{5FF5AC1B-ABA9-43D7-A1E3-2D92732CD6E2}" dt="2026-08-17T20:34:57.805" v="5" actId="14100"/>
           <ac:spMkLst>
             <pc:docMk/>
-            <pc:sldMk cId="0" sldId="386"/>
-            <ac:spMk id="20488" creationId="{00000000-0000-0000-0000-000000000000}"/>
+            <pc:sldMk cId="0" sldId="390"/>
+            <ac:spMk id="1030" creationId="{00000000-0000-0000-0000-000000000000}"/>
           </ac:spMkLst>
         </pc:spChg>
-        <pc:spChg chg="add mod">
-          <ac:chgData name="Lines, Todd" userId="afaf7c3a-e8aa-4568-882a-02ad8f9e19b0" providerId="ADAL" clId="{5FF5AC1B-ABA9-43D7-A1E3-2D92732CD6E2}" dt="2026-04-22T21:05:02.406" v="76" actId="20577"/>
-          <ac:spMkLst>
+        <pc:picChg chg="add mod">
+          <ac:chgData name="Todd Lines" userId="afaf7c3a-e8aa-4568-882a-02ad8f9e19b0" providerId="ADAL" clId="{5FF5AC1B-ABA9-43D7-A1E3-2D92732CD6E2}" dt="2026-08-17T20:35:00.420" v="6" actId="1076"/>
+          <ac:picMkLst>
             <pc:docMk/>
-            <pc:sldMk cId="0" sldId="386"/>
-            <ac:spMk id="20490" creationId="{00000000-0000-0000-0000-000000000000}"/>
-          </ac:spMkLst>
-        </pc:spChg>
-        <pc:spChg chg="add mod">
-          <ac:chgData name="Lines, Todd" userId="afaf7c3a-e8aa-4568-882a-02ad8f9e19b0" providerId="ADAL" clId="{5FF5AC1B-ABA9-43D7-A1E3-2D92732CD6E2}" dt="2026-04-22T21:05:53.764" v="106" actId="20577"/>
-          <ac:spMkLst>
+            <pc:sldMk cId="0" sldId="390"/>
+            <ac:picMk id="2" creationId="{97DA0287-7C11-6853-614F-8CB4B73A9652}"/>
+          </ac:picMkLst>
+        </pc:picChg>
+        <pc:picChg chg="add del mod">
+          <ac:chgData name="Todd Lines" userId="afaf7c3a-e8aa-4568-882a-02ad8f9e19b0" providerId="ADAL" clId="{5FF5AC1B-ABA9-43D7-A1E3-2D92732CD6E2}" dt="2026-08-17T20:35:19.437" v="9" actId="21"/>
+          <ac:picMkLst>
             <pc:docMk/>
-            <pc:sldMk cId="0" sldId="386"/>
-            <ac:spMk id="20491" creationId="{00000000-0000-0000-0000-000000000000}"/>
-          </ac:spMkLst>
-        </pc:spChg>
-        <pc:spChg chg="add mod">
-          <ac:chgData name="Lines, Todd" userId="afaf7c3a-e8aa-4568-882a-02ad8f9e19b0" providerId="ADAL" clId="{5FF5AC1B-ABA9-43D7-A1E3-2D92732CD6E2}" dt="2026-04-22T21:05:36.244" v="93" actId="14100"/>
-          <ac:spMkLst>
-            <pc:docMk/>
-            <pc:sldMk cId="0" sldId="386"/>
-            <ac:spMk id="20492" creationId="{00000000-0000-0000-0000-000000000000}"/>
-          </ac:spMkLst>
-        </pc:spChg>
-        <pc:graphicFrameChg chg="del mod replId">
-          <ac:chgData name="Lines, Todd" userId="afaf7c3a-e8aa-4568-882a-02ad8f9e19b0" providerId="ADAL" clId="{5FF5AC1B-ABA9-43D7-A1E3-2D92732CD6E2}" dt="2026-04-22T21:04:44.896" v="65"/>
-          <ac:graphicFrameMkLst>
-            <pc:docMk/>
-            <pc:sldMk cId="0" sldId="386"/>
-            <ac:graphicFrameMk id="2" creationId="{00000000-0000-0000-0000-000000000000}"/>
-          </ac:graphicFrameMkLst>
-        </pc:graphicFrameChg>
-        <pc:graphicFrameChg chg="del mod replId">
-          <ac:chgData name="Lines, Todd" userId="afaf7c3a-e8aa-4568-882a-02ad8f9e19b0" providerId="ADAL" clId="{5FF5AC1B-ABA9-43D7-A1E3-2D92732CD6E2}" dt="2026-04-22T21:04:58.997" v="73"/>
-          <ac:graphicFrameMkLst>
-            <pc:docMk/>
-            <pc:sldMk cId="0" sldId="386"/>
-            <ac:graphicFrameMk id="4" creationId="{00000000-0000-0000-0000-000000000000}"/>
-          </ac:graphicFrameMkLst>
-        </pc:graphicFrameChg>
-        <pc:graphicFrameChg chg="del mod replId">
-          <ac:chgData name="Lines, Todd" userId="afaf7c3a-e8aa-4568-882a-02ad8f9e19b0" providerId="ADAL" clId="{5FF5AC1B-ABA9-43D7-A1E3-2D92732CD6E2}" dt="2026-04-22T21:05:10.387" v="78"/>
-          <ac:graphicFrameMkLst>
-            <pc:docMk/>
-            <pc:sldMk cId="0" sldId="386"/>
-            <ac:graphicFrameMk id="6" creationId="{00000000-0000-0000-0000-000000000000}"/>
-          </ac:graphicFrameMkLst>
-        </pc:graphicFrameChg>
-        <pc:graphicFrameChg chg="del mod replId">
-          <ac:chgData name="Lines, Todd" userId="afaf7c3a-e8aa-4568-882a-02ad8f9e19b0" providerId="ADAL" clId="{5FF5AC1B-ABA9-43D7-A1E3-2D92732CD6E2}" dt="2026-04-22T21:05:13.156" v="81"/>
-          <ac:graphicFrameMkLst>
-            <pc:docMk/>
-            <pc:sldMk cId="0" sldId="386"/>
-            <ac:graphicFrameMk id="8" creationId="{00000000-0000-0000-0000-000000000000}"/>
-          </ac:graphicFrameMkLst>
-        </pc:graphicFrameChg>
+            <pc:sldMk cId="0" sldId="390"/>
+            <ac:picMk id="4" creationId="{BCE4F324-8B92-F631-0B80-BC90EE5CA5EE}"/>
+          </ac:picMkLst>
+        </pc:picChg>
       </pc:sldChg>
-      <pc:sldChg chg="addSp delSp modSp mod">
-        <pc:chgData name="Lines, Todd" userId="afaf7c3a-e8aa-4568-882a-02ad8f9e19b0" providerId="ADAL" clId="{5FF5AC1B-ABA9-43D7-A1E3-2D92732CD6E2}" dt="2026-04-22T21:06:09.421" v="116" actId="20577"/>
+      <pc:sldChg chg="new">
+        <pc:chgData name="Todd Lines" userId="afaf7c3a-e8aa-4568-882a-02ad8f9e19b0" providerId="ADAL" clId="{5FF5AC1B-ABA9-43D7-A1E3-2D92732CD6E2}" dt="2026-08-17T20:34:43.998" v="0" actId="680"/>
         <pc:sldMkLst>
           <pc:docMk/>
-          <pc:sldMk cId="0" sldId="387"/>
+          <pc:sldMk cId="1986014694" sldId="399"/>
         </pc:sldMkLst>
-        <pc:spChg chg="add mod">
-          <ac:chgData name="Lines, Todd" userId="afaf7c3a-e8aa-4568-882a-02ad8f9e19b0" providerId="ADAL" clId="{5FF5AC1B-ABA9-43D7-A1E3-2D92732CD6E2}" dt="2026-04-22T21:06:09.421" v="116" actId="20577"/>
-          <ac:spMkLst>
-            <pc:docMk/>
-            <pc:sldMk cId="0" sldId="387"/>
-            <ac:spMk id="21510" creationId="{00000000-0000-0000-0000-000000000000}"/>
-          </ac:spMkLst>
-        </pc:spChg>
-        <pc:graphicFrameChg chg="del mod replId">
-          <ac:chgData name="Lines, Todd" userId="afaf7c3a-e8aa-4568-882a-02ad8f9e19b0" providerId="ADAL" clId="{5FF5AC1B-ABA9-43D7-A1E3-2D92732CD6E2}" dt="2026-04-22T21:05:41.586" v="95"/>
-          <ac:graphicFrameMkLst>
-            <pc:docMk/>
-            <pc:sldMk cId="0" sldId="387"/>
-            <ac:graphicFrameMk id="2" creationId="{00000000-0000-0000-0000-000000000000}"/>
-          </ac:graphicFrameMkLst>
-        </pc:graphicFrameChg>
-      </pc:sldChg>
-      <pc:sldChg chg="addSp delSp modSp mod">
-        <pc:chgData name="Lines, Todd" userId="afaf7c3a-e8aa-4568-882a-02ad8f9e19b0" providerId="ADAL" clId="{5FF5AC1B-ABA9-43D7-A1E3-2D92732CD6E2}" dt="2026-04-22T21:06:21.337" v="124" actId="20577"/>
-        <pc:sldMkLst>
-          <pc:docMk/>
-          <pc:sldMk cId="0" sldId="388"/>
-        </pc:sldMkLst>
-        <pc:spChg chg="add mod">
-          <ac:chgData name="Lines, Todd" userId="afaf7c3a-e8aa-4568-882a-02ad8f9e19b0" providerId="ADAL" clId="{5FF5AC1B-ABA9-43D7-A1E3-2D92732CD6E2}" dt="2026-04-22T21:06:21.337" v="124" actId="20577"/>
-          <ac:spMkLst>
-            <pc:docMk/>
-            <pc:sldMk cId="0" sldId="388"/>
-            <ac:spMk id="22536" creationId="{00000000-0000-0000-0000-000000000000}"/>
-          </ac:spMkLst>
-        </pc:spChg>
-        <pc:graphicFrameChg chg="del mod replId">
-          <ac:chgData name="Lines, Todd" userId="afaf7c3a-e8aa-4568-882a-02ad8f9e19b0" providerId="ADAL" clId="{5FF5AC1B-ABA9-43D7-A1E3-2D92732CD6E2}" dt="2026-04-22T21:06:17.536" v="118"/>
-          <ac:graphicFrameMkLst>
-            <pc:docMk/>
-            <pc:sldMk cId="0" sldId="388"/>
-            <ac:graphicFrameMk id="2" creationId="{00000000-0000-0000-0000-000000000000}"/>
-          </ac:graphicFrameMkLst>
-        </pc:graphicFrameChg>
-      </pc:sldChg>
-      <pc:sldChg chg="addSp delSp modSp mod">
-        <pc:chgData name="Lines, Todd" userId="afaf7c3a-e8aa-4568-882a-02ad8f9e19b0" providerId="ADAL" clId="{5FF5AC1B-ABA9-43D7-A1E3-2D92732CD6E2}" dt="2026-04-22T21:08:29.484" v="174" actId="6549"/>
-        <pc:sldMkLst>
-          <pc:docMk/>
-          <pc:sldMk cId="0" sldId="391"/>
-        </pc:sldMkLst>
-        <pc:spChg chg="add mod">
-          <ac:chgData name="Lines, Todd" userId="afaf7c3a-e8aa-4568-882a-02ad8f9e19b0" providerId="ADAL" clId="{5FF5AC1B-ABA9-43D7-A1E3-2D92732CD6E2}" dt="2026-04-22T21:07:46.291" v="159" actId="20577"/>
-          <ac:spMkLst>
-            <pc:docMk/>
-            <pc:sldMk cId="0" sldId="391"/>
-            <ac:spMk id="24597" creationId="{00000000-0000-0000-0000-000000000000}"/>
-          </ac:spMkLst>
-        </pc:spChg>
-        <pc:spChg chg="add mod">
-          <ac:chgData name="Lines, Todd" userId="afaf7c3a-e8aa-4568-882a-02ad8f9e19b0" providerId="ADAL" clId="{5FF5AC1B-ABA9-43D7-A1E3-2D92732CD6E2}" dt="2026-04-22T21:07:11.743" v="145" actId="20577"/>
-          <ac:spMkLst>
-            <pc:docMk/>
-            <pc:sldMk cId="0" sldId="391"/>
-            <ac:spMk id="24598" creationId="{00000000-0000-0000-0000-000000000000}"/>
-          </ac:spMkLst>
-        </pc:spChg>
-        <pc:spChg chg="add mod">
-          <ac:chgData name="Lines, Todd" userId="afaf7c3a-e8aa-4568-882a-02ad8f9e19b0" providerId="ADAL" clId="{5FF5AC1B-ABA9-43D7-A1E3-2D92732CD6E2}" dt="2026-04-22T21:07:29.732" v="155" actId="20577"/>
-          <ac:spMkLst>
-            <pc:docMk/>
-            <pc:sldMk cId="0" sldId="391"/>
-            <ac:spMk id="24599" creationId="{00000000-0000-0000-0000-000000000000}"/>
-          </ac:spMkLst>
-        </pc:spChg>
-        <pc:spChg chg="add mod">
-          <ac:chgData name="Lines, Todd" userId="afaf7c3a-e8aa-4568-882a-02ad8f9e19b0" providerId="ADAL" clId="{5FF5AC1B-ABA9-43D7-A1E3-2D92732CD6E2}" dt="2026-04-22T21:08:29.484" v="174" actId="6549"/>
-          <ac:spMkLst>
-            <pc:docMk/>
-            <pc:sldMk cId="0" sldId="391"/>
-            <ac:spMk id="24600" creationId="{00000000-0000-0000-0000-000000000000}"/>
-          </ac:spMkLst>
-        </pc:spChg>
-        <pc:spChg chg="add mod">
-          <ac:chgData name="Lines, Todd" userId="afaf7c3a-e8aa-4568-882a-02ad8f9e19b0" providerId="ADAL" clId="{5FF5AC1B-ABA9-43D7-A1E3-2D92732CD6E2}" dt="2026-04-22T21:08:19.995" v="170" actId="20577"/>
-          <ac:spMkLst>
-            <pc:docMk/>
-            <pc:sldMk cId="0" sldId="391"/>
-            <ac:spMk id="24601" creationId="{00000000-0000-0000-0000-000000000000}"/>
-          </ac:spMkLst>
-        </pc:spChg>
-        <pc:graphicFrameChg chg="del mod replId">
-          <ac:chgData name="Lines, Todd" userId="afaf7c3a-e8aa-4568-882a-02ad8f9e19b0" providerId="ADAL" clId="{5FF5AC1B-ABA9-43D7-A1E3-2D92732CD6E2}" dt="2026-04-22T21:06:47.138" v="126"/>
-          <ac:graphicFrameMkLst>
-            <pc:docMk/>
-            <pc:sldMk cId="0" sldId="391"/>
-            <ac:graphicFrameMk id="2" creationId="{00000000-0000-0000-0000-000000000000}"/>
-          </ac:graphicFrameMkLst>
-        </pc:graphicFrameChg>
-        <pc:graphicFrameChg chg="del mod replId">
-          <ac:chgData name="Lines, Todd" userId="afaf7c3a-e8aa-4568-882a-02ad8f9e19b0" providerId="ADAL" clId="{5FF5AC1B-ABA9-43D7-A1E3-2D92732CD6E2}" dt="2026-04-22T21:06:50.360" v="129"/>
-          <ac:graphicFrameMkLst>
-            <pc:docMk/>
-            <pc:sldMk cId="0" sldId="391"/>
-            <ac:graphicFrameMk id="4" creationId="{00000000-0000-0000-0000-000000000000}"/>
-          </ac:graphicFrameMkLst>
-        </pc:graphicFrameChg>
-        <pc:graphicFrameChg chg="del mod replId">
-          <ac:chgData name="Lines, Todd" userId="afaf7c3a-e8aa-4568-882a-02ad8f9e19b0" providerId="ADAL" clId="{5FF5AC1B-ABA9-43D7-A1E3-2D92732CD6E2}" dt="2026-04-22T21:06:52.521" v="132"/>
-          <ac:graphicFrameMkLst>
-            <pc:docMk/>
-            <pc:sldMk cId="0" sldId="391"/>
-            <ac:graphicFrameMk id="6" creationId="{00000000-0000-0000-0000-000000000000}"/>
-          </ac:graphicFrameMkLst>
-        </pc:graphicFrameChg>
-        <pc:graphicFrameChg chg="del mod replId">
-          <ac:chgData name="Lines, Todd" userId="afaf7c3a-e8aa-4568-882a-02ad8f9e19b0" providerId="ADAL" clId="{5FF5AC1B-ABA9-43D7-A1E3-2D92732CD6E2}" dt="2026-04-22T21:06:55.098" v="135"/>
-          <ac:graphicFrameMkLst>
-            <pc:docMk/>
-            <pc:sldMk cId="0" sldId="391"/>
-            <ac:graphicFrameMk id="8" creationId="{00000000-0000-0000-0000-000000000000}"/>
-          </ac:graphicFrameMkLst>
-        </pc:graphicFrameChg>
-        <pc:graphicFrameChg chg="del mod replId">
-          <ac:chgData name="Lines, Todd" userId="afaf7c3a-e8aa-4568-882a-02ad8f9e19b0" providerId="ADAL" clId="{5FF5AC1B-ABA9-43D7-A1E3-2D92732CD6E2}" dt="2026-04-22T21:06:57.751" v="138"/>
-          <ac:graphicFrameMkLst>
-            <pc:docMk/>
-            <pc:sldMk cId="0" sldId="391"/>
-            <ac:graphicFrameMk id="10" creationId="{00000000-0000-0000-0000-000000000000}"/>
-          </ac:graphicFrameMkLst>
-        </pc:graphicFrameChg>
-        <pc:graphicFrameChg chg="mod">
-          <ac:chgData name="Lines, Todd" userId="afaf7c3a-e8aa-4568-882a-02ad8f9e19b0" providerId="ADAL" clId="{5FF5AC1B-ABA9-43D7-A1E3-2D92732CD6E2}" dt="2026-04-22T21:07:54.207" v="160" actId="1076"/>
-          <ac:graphicFrameMkLst>
-            <pc:docMk/>
-            <pc:sldMk cId="0" sldId="391"/>
-            <ac:graphicFrameMk id="24602" creationId="{00000000-0000-0000-0000-000000000000}"/>
-          </ac:graphicFrameMkLst>
-        </pc:graphicFrameChg>
       </pc:sldChg>
     </pc:docChg>
   </pc:docChgLst>
@@ -489,7 +308,7 @@
             <a:fld id="{DA2CA0F8-BD70-4694-BD56-6665D6FFBF3C}" type="datetimeFigureOut">
               <a:rPr lang="en-US" smtClean="0"/>
               <a:pPr/>
-              <a:t>4/22/2026</a:t>
+              <a:t>8/17/2026</a:t>
             </a:fld>
             <a:endParaRPr lang="en-US"/>
           </a:p>
@@ -867,7 +686,7 @@
                   <a:spcPct val="0"/>
                 </a:spcAft>
               </a:pPr>
-              <a:t>41</a:t>
+              <a:t>42</a:t>
             </a:fld>
             <a:endParaRPr lang="en-US" dirty="0"/>
           </a:p>
@@ -999,7 +818,7 @@
                   <a:spcPct val="0"/>
                 </a:spcAft>
               </a:pPr>
-              <a:t>42</a:t>
+              <a:t>43</a:t>
             </a:fld>
             <a:endParaRPr lang="en-US" dirty="0"/>
           </a:p>
@@ -1131,7 +950,7 @@
                   <a:spcPct val="0"/>
                 </a:spcAft>
               </a:pPr>
-              <a:t>43</a:t>
+              <a:t>44</a:t>
             </a:fld>
             <a:endParaRPr lang="en-US" dirty="0"/>
           </a:p>
@@ -1263,7 +1082,7 @@
                   <a:spcPct val="0"/>
                 </a:spcAft>
               </a:pPr>
-              <a:t>44</a:t>
+              <a:t>45</a:t>
             </a:fld>
             <a:endParaRPr lang="en-US" dirty="0"/>
           </a:p>
@@ -1462,7 +1281,7 @@
             <a:fld id="{81363FC6-F0D5-4376-9B97-08D3CD3871A3}" type="datetimeFigureOut">
               <a:rPr lang="en-US" smtClean="0"/>
               <a:pPr/>
-              <a:t>4/22/2026</a:t>
+              <a:t>8/17/2026</a:t>
             </a:fld>
             <a:endParaRPr lang="en-US"/>
           </a:p>
@@ -1627,7 +1446,7 @@
             <a:fld id="{81363FC6-F0D5-4376-9B97-08D3CD3871A3}" type="datetimeFigureOut">
               <a:rPr lang="en-US" smtClean="0"/>
               <a:pPr/>
-              <a:t>4/22/2026</a:t>
+              <a:t>8/17/2026</a:t>
             </a:fld>
             <a:endParaRPr lang="en-US"/>
           </a:p>
@@ -1802,7 +1621,7 @@
             <a:fld id="{81363FC6-F0D5-4376-9B97-08D3CD3871A3}" type="datetimeFigureOut">
               <a:rPr lang="en-US" smtClean="0"/>
               <a:pPr/>
-              <a:t>4/22/2026</a:t>
+              <a:t>8/17/2026</a:t>
             </a:fld>
             <a:endParaRPr lang="en-US"/>
           </a:p>
@@ -1967,7 +1786,7 @@
             <a:fld id="{81363FC6-F0D5-4376-9B97-08D3CD3871A3}" type="datetimeFigureOut">
               <a:rPr lang="en-US" smtClean="0"/>
               <a:pPr/>
-              <a:t>4/22/2026</a:t>
+              <a:t>8/17/2026</a:t>
             </a:fld>
             <a:endParaRPr lang="en-US"/>
           </a:p>
@@ -2209,7 +2028,7 @@
             <a:fld id="{81363FC6-F0D5-4376-9B97-08D3CD3871A3}" type="datetimeFigureOut">
               <a:rPr lang="en-US" smtClean="0"/>
               <a:pPr/>
-              <a:t>4/22/2026</a:t>
+              <a:t>8/17/2026</a:t>
             </a:fld>
             <a:endParaRPr lang="en-US"/>
           </a:p>
@@ -2491,7 +2310,7 @@
             <a:fld id="{81363FC6-F0D5-4376-9B97-08D3CD3871A3}" type="datetimeFigureOut">
               <a:rPr lang="en-US" smtClean="0"/>
               <a:pPr/>
-              <a:t>4/22/2026</a:t>
+              <a:t>8/17/2026</a:t>
             </a:fld>
             <a:endParaRPr lang="en-US"/>
           </a:p>
@@ -2907,7 +2726,7 @@
             <a:fld id="{81363FC6-F0D5-4376-9B97-08D3CD3871A3}" type="datetimeFigureOut">
               <a:rPr lang="en-US" smtClean="0"/>
               <a:pPr/>
-              <a:t>4/22/2026</a:t>
+              <a:t>8/17/2026</a:t>
             </a:fld>
             <a:endParaRPr lang="en-US"/>
           </a:p>
@@ -3021,7 +2840,7 @@
             <a:fld id="{81363FC6-F0D5-4376-9B97-08D3CD3871A3}" type="datetimeFigureOut">
               <a:rPr lang="en-US" smtClean="0"/>
               <a:pPr/>
-              <a:t>4/22/2026</a:t>
+              <a:t>8/17/2026</a:t>
             </a:fld>
             <a:endParaRPr lang="en-US"/>
           </a:p>
@@ -3113,7 +2932,7 @@
             <a:fld id="{81363FC6-F0D5-4376-9B97-08D3CD3871A3}" type="datetimeFigureOut">
               <a:rPr lang="en-US" smtClean="0"/>
               <a:pPr/>
-              <a:t>4/22/2026</a:t>
+              <a:t>8/17/2026</a:t>
             </a:fld>
             <a:endParaRPr lang="en-US"/>
           </a:p>
@@ -3385,7 +3204,7 @@
             <a:fld id="{81363FC6-F0D5-4376-9B97-08D3CD3871A3}" type="datetimeFigureOut">
               <a:rPr lang="en-US" smtClean="0"/>
               <a:pPr/>
-              <a:t>4/22/2026</a:t>
+              <a:t>8/17/2026</a:t>
             </a:fld>
             <a:endParaRPr lang="en-US"/>
           </a:p>
@@ -3634,7 +3453,7 @@
             <a:fld id="{81363FC6-F0D5-4376-9B97-08D3CD3871A3}" type="datetimeFigureOut">
               <a:rPr lang="en-US" smtClean="0"/>
               <a:pPr/>
-              <a:t>4/22/2026</a:t>
+              <a:t>8/17/2026</a:t>
             </a:fld>
             <a:endParaRPr lang="en-US"/>
           </a:p>
@@ -3842,7 +3661,7 @@
             <a:fld id="{81363FC6-F0D5-4376-9B97-08D3CD3871A3}" type="datetimeFigureOut">
               <a:rPr lang="en-US" smtClean="0"/>
               <a:pPr/>
-              <a:t>4/22/2026</a:t>
+              <a:t>8/17/2026</a:t>
             </a:fld>
             <a:endParaRPr lang="en-US"/>
           </a:p>
@@ -4284,6 +4103,86 @@
   <p:cSld>
     <p:spTree>
       <p:nvGrpSpPr>
+        <p:cNvPr id="1" name=""/>
+        <p:cNvGrpSpPr/>
+        <p:nvPr/>
+      </p:nvGrpSpPr>
+      <p:grpSpPr>
+        <a:xfrm>
+          <a:off x="0" y="0"/>
+          <a:ext cx="0" cy="0"/>
+          <a:chOff x="0" y="0"/>
+          <a:chExt cx="0" cy="0"/>
+        </a:xfrm>
+      </p:grpSpPr>
+      <p:sp>
+        <p:nvSpPr>
+          <p:cNvPr id="2" name="Title 1">
+            <a:extLst>
+              <a:ext uri="{FF2B5EF4-FFF2-40B4-BE49-F238E27FC236}">
+                <a16:creationId xmlns:a16="http://schemas.microsoft.com/office/drawing/2014/main" id="{AC05CECC-A911-41A9-CB8F-896E3C140D1E}"/>
+              </a:ext>
+            </a:extLst>
+          </p:cNvPr>
+          <p:cNvSpPr>
+            <a:spLocks noGrp="1"/>
+          </p:cNvSpPr>
+          <p:nvPr>
+            <p:ph type="title"/>
+          </p:nvPr>
+        </p:nvSpPr>
+        <p:spPr/>
+        <p:txBody>
+          <a:bodyPr/>
+          <a:lstStyle/>
+          <a:p>
+            <a:endParaRPr lang="en-US"/>
+          </a:p>
+        </p:txBody>
+      </p:sp>
+      <p:sp>
+        <p:nvSpPr>
+          <p:cNvPr id="3" name="Content Placeholder 2">
+            <a:extLst>
+              <a:ext uri="{FF2B5EF4-FFF2-40B4-BE49-F238E27FC236}">
+                <a16:creationId xmlns:a16="http://schemas.microsoft.com/office/drawing/2014/main" id="{81A691B2-768F-0B80-CC3E-B5E95360A4C1}"/>
+              </a:ext>
+            </a:extLst>
+          </p:cNvPr>
+          <p:cNvSpPr>
+            <a:spLocks noGrp="1"/>
+          </p:cNvSpPr>
+          <p:nvPr>
+            <p:ph idx="1"/>
+          </p:nvPr>
+        </p:nvSpPr>
+        <p:spPr/>
+        <p:txBody>
+          <a:bodyPr/>
+          <a:lstStyle/>
+          <a:p>
+            <a:endParaRPr lang="en-US"/>
+          </a:p>
+        </p:txBody>
+      </p:sp>
+    </p:spTree>
+    <p:extLst>
+      <p:ext uri="{BB962C8B-B14F-4D97-AF65-F5344CB8AC3E}">
+        <p14:creationId xmlns:p14="http://schemas.microsoft.com/office/powerpoint/2010/main" val="1986014694"/>
+      </p:ext>
+    </p:extLst>
+  </p:cSld>
+  <p:clrMapOvr>
+    <a:masterClrMapping/>
+  </p:clrMapOvr>
+</p:sld>
+</file>
+
+<file path=ppt/slides/slide11.xml><?xml version="1.0" encoding="utf-8"?>
+<p:sld xmlns:a="http://schemas.openxmlformats.org/drawingml/2006/main" xmlns:r="http://schemas.openxmlformats.org/officeDocument/2006/relationships" xmlns:p="http://schemas.openxmlformats.org/presentationml/2006/main">
+  <p:cSld>
+    <p:spTree>
+      <p:nvGrpSpPr>
         <p:cNvPr id="1" name="">
           <a:extLst>
             <a:ext uri="{FF2B5EF4-FFF2-40B4-BE49-F238E27FC236}">
@@ -4446,7 +4345,7 @@
             <a:fld id="{FEE5103E-6A1B-4022-ADD9-EEAD660E9795}" type="slidenum">
               <a:rPr lang="en-US" smtClean="0"/>
               <a:pPr eaLnBrk="1" hangingPunct="1"/>
-              <a:t>10</a:t>
+              <a:t>11</a:t>
             </a:fld>
             <a:endParaRPr lang="en-US"/>
           </a:p>
@@ -4713,7 +4612,7 @@
 </p:sld>
 </file>
 
-<file path=ppt/slides/slide11.xml><?xml version="1.0" encoding="utf-8"?>
+<file path=ppt/slides/slide12.xml><?xml version="1.0" encoding="utf-8"?>
 <p:sld xmlns:a="http://schemas.openxmlformats.org/drawingml/2006/main" xmlns:r="http://schemas.openxmlformats.org/officeDocument/2006/relationships" xmlns:p="http://schemas.openxmlformats.org/presentationml/2006/main">
   <p:cSld>
     <p:spTree>
@@ -4868,7 +4767,7 @@
             <a:fld id="{4E51C186-1BB2-4F1F-9C5C-C604BA7AA83F}" type="slidenum">
               <a:rPr lang="en-US" smtClean="0"/>
               <a:pPr eaLnBrk="1" hangingPunct="1"/>
-              <a:t>11</a:t>
+              <a:t>12</a:t>
             </a:fld>
             <a:endParaRPr lang="en-US"/>
           </a:p>
@@ -6426,8 +6325,8 @@
           </a:graphicData>
         </a:graphic>
       </p:graphicFrame>
-      <mc:AlternateContent xmlns:mc="http://schemas.openxmlformats.org/markup-compatibility/2006">
-        <mc:Choice xmlns:a14="http://schemas.microsoft.com/office/drawing/2010/main" Requires="a14">
+      <mc:AlternateContent xmlns:mc="http://schemas.openxmlformats.org/markup-compatibility/2006" xmlns:a14="http://schemas.microsoft.com/office/drawing/2010/main">
+        <mc:Choice Requires="a14">
           <p:sp>
             <p:nvSpPr>
               <p:cNvPr id="24597" name="Object 20"/>
@@ -6459,7 +6358,7 @@
                     <m:oMathParaPr>
                       <m:jc m:val="left"/>
                     </m:oMathParaPr>
-                    <m:oMath xmlns:m="http://schemas.openxmlformats.org/officeDocument/2006/math">
+                    <m:oMath>
                       <m:r>
                         <a:rPr lang="en-US" i="1" smtClean="0">
                           <a:solidFill>
@@ -6652,7 +6551,7 @@
             </p:txBody>
           </p:sp>
         </mc:Choice>
-        <mc:Fallback>
+        <mc:Fallback xmlns="">
           <p:sp>
             <p:nvSpPr>
               <p:cNvPr id="24597" name="Object 20"/>
@@ -6694,8 +6593,8 @@
           </p:sp>
         </mc:Fallback>
       </mc:AlternateContent>
-      <mc:AlternateContent xmlns:mc="http://schemas.openxmlformats.org/markup-compatibility/2006">
-        <mc:Choice xmlns:a14="http://schemas.microsoft.com/office/drawing/2010/main" Requires="a14">
+      <mc:AlternateContent xmlns:mc="http://schemas.openxmlformats.org/markup-compatibility/2006" xmlns:a14="http://schemas.microsoft.com/office/drawing/2010/main">
+        <mc:Choice Requires="a14">
           <p:sp>
             <p:nvSpPr>
               <p:cNvPr id="24598" name="Object 21"/>
@@ -6727,11 +6626,11 @@
                     <m:oMathParaPr>
                       <m:jc m:val="left"/>
                     </m:oMathParaPr>
-                    <m:oMath xmlns:m="http://schemas.openxmlformats.org/officeDocument/2006/math">
+                    <m:oMath>
                       <m:sSub>
                         <m:sSubPr>
                           <m:ctrlPr>
-                            <a:rPr lang="en-US" i="1" smtClean="0">
+                            <a:rPr lang="en-US" i="1">
                               <a:solidFill>
                                 <a:srgbClr val="000000"/>
                               </a:solidFill>
@@ -6829,7 +6728,7 @@
             </p:txBody>
           </p:sp>
         </mc:Choice>
-        <mc:Fallback>
+        <mc:Fallback xmlns="">
           <p:sp>
             <p:nvSpPr>
               <p:cNvPr id="24598" name="Object 21"/>
@@ -6871,8 +6770,8 @@
           </p:sp>
         </mc:Fallback>
       </mc:AlternateContent>
-      <mc:AlternateContent xmlns:mc="http://schemas.openxmlformats.org/markup-compatibility/2006">
-        <mc:Choice xmlns:a14="http://schemas.microsoft.com/office/drawing/2010/main" Requires="a14">
+      <mc:AlternateContent xmlns:mc="http://schemas.openxmlformats.org/markup-compatibility/2006" xmlns:a14="http://schemas.microsoft.com/office/drawing/2010/main">
+        <mc:Choice Requires="a14">
           <p:sp>
             <p:nvSpPr>
               <p:cNvPr id="24599" name="Object 22"/>
@@ -6904,11 +6803,11 @@
                     <m:oMathParaPr>
                       <m:jc m:val="left"/>
                     </m:oMathParaPr>
-                    <m:oMath xmlns:m="http://schemas.openxmlformats.org/officeDocument/2006/math">
+                    <m:oMath>
                       <m:sSub>
                         <m:sSubPr>
                           <m:ctrlPr>
-                            <a:rPr lang="en-US" i="1" smtClean="0">
+                            <a:rPr lang="en-US" i="1">
                               <a:solidFill>
                                 <a:srgbClr val="000000"/>
                               </a:solidFill>
@@ -6960,7 +6859,7 @@
                       <m:sSub>
                         <m:sSubPr>
                           <m:ctrlPr>
-                            <a:rPr lang="en-US" i="1" smtClean="0">
+                            <a:rPr lang="en-US" i="1">
                               <a:solidFill>
                                 <a:srgbClr val="000000"/>
                               </a:solidFill>
@@ -6999,7 +6898,7 @@
             </p:txBody>
           </p:sp>
         </mc:Choice>
-        <mc:Fallback>
+        <mc:Fallback xmlns="">
           <p:sp>
             <p:nvSpPr>
               <p:cNvPr id="24599" name="Object 22"/>
@@ -7041,8 +6940,8 @@
           </p:sp>
         </mc:Fallback>
       </mc:AlternateContent>
-      <mc:AlternateContent xmlns:mc="http://schemas.openxmlformats.org/markup-compatibility/2006">
-        <mc:Choice xmlns:a14="http://schemas.microsoft.com/office/drawing/2010/main" Requires="a14">
+      <mc:AlternateContent xmlns:mc="http://schemas.openxmlformats.org/markup-compatibility/2006" xmlns:a14="http://schemas.microsoft.com/office/drawing/2010/main">
+        <mc:Choice Requires="a14">
           <p:sp>
             <p:nvSpPr>
               <p:cNvPr id="24600" name="Object 23"/>
@@ -7074,7 +6973,7 @@
                     <m:oMathParaPr>
                       <m:jc m:val="left"/>
                     </m:oMathParaPr>
-                    <m:oMath xmlns:m="http://schemas.openxmlformats.org/officeDocument/2006/math">
+                    <m:oMath>
                       <m:r>
                         <a:rPr lang="en-US" i="1" smtClean="0">
                           <a:solidFill>
@@ -7153,7 +7052,7 @@
                       <m:func>
                         <m:funcPr>
                           <m:ctrlPr>
-                            <a:rPr lang="en-US" i="1">
+                            <a:rPr lang="en-US" i="0">
                               <a:solidFill>
                                 <a:srgbClr val="000000"/>
                               </a:solidFill>
@@ -7243,7 +7142,7 @@
             </p:txBody>
           </p:sp>
         </mc:Choice>
-        <mc:Fallback>
+        <mc:Fallback xmlns="">
           <p:sp>
             <p:nvSpPr>
               <p:cNvPr id="24600" name="Object 23"/>
@@ -7285,8 +7184,8 @@
           </p:sp>
         </mc:Fallback>
       </mc:AlternateContent>
-      <mc:AlternateContent xmlns:mc="http://schemas.openxmlformats.org/markup-compatibility/2006">
-        <mc:Choice xmlns:a14="http://schemas.microsoft.com/office/drawing/2010/main" Requires="a14">
+      <mc:AlternateContent xmlns:mc="http://schemas.openxmlformats.org/markup-compatibility/2006" xmlns:a14="http://schemas.microsoft.com/office/drawing/2010/main">
+        <mc:Choice Requires="a14">
           <p:sp>
             <p:nvSpPr>
               <p:cNvPr id="24601" name="Object 24"/>
@@ -7318,7 +7217,7 @@
                     <m:oMathParaPr>
                       <m:jc m:val="left"/>
                     </m:oMathParaPr>
-                    <m:oMath xmlns:m="http://schemas.openxmlformats.org/officeDocument/2006/math">
+                    <m:oMath>
                       <m:r>
                         <a:rPr lang="en-US" i="1" smtClean="0">
                           <a:solidFill>
@@ -7654,7 +7553,7 @@
             </p:txBody>
           </p:sp>
         </mc:Choice>
-        <mc:Fallback>
+        <mc:Fallback xmlns="">
           <p:sp>
             <p:nvSpPr>
               <p:cNvPr id="24601" name="Object 24"/>
@@ -7793,7 +7692,7 @@
 </p:sld>
 </file>
 
-<file path=ppt/slides/slide12.xml><?xml version="1.0" encoding="utf-8"?>
+<file path=ppt/slides/slide13.xml><?xml version="1.0" encoding="utf-8"?>
 <p:sld xmlns:a="http://schemas.openxmlformats.org/drawingml/2006/main" xmlns:r="http://schemas.openxmlformats.org/officeDocument/2006/relationships" xmlns:p="http://schemas.openxmlformats.org/presentationml/2006/main">
   <p:cSld>
     <p:spTree>
@@ -7876,7 +7775,7 @@
 </p:sld>
 </file>
 
-<file path=ppt/slides/slide13.xml><?xml version="1.0" encoding="utf-8"?>
+<file path=ppt/slides/slide14.xml><?xml version="1.0" encoding="utf-8"?>
 <p:sld xmlns:a="http://schemas.openxmlformats.org/drawingml/2006/main" xmlns:r="http://schemas.openxmlformats.org/officeDocument/2006/relationships" xmlns:p="http://schemas.openxmlformats.org/presentationml/2006/main">
   <p:cSld>
     <p:spTree>
@@ -8001,7 +7900,7 @@
             <a:fld id="{A450C633-03AE-4E00-8281-A488FB2231B1}" type="slidenum">
               <a:rPr lang="en-US" smtClean="0"/>
               <a:pPr/>
-              <a:t>13</a:t>
+              <a:t>14</a:t>
             </a:fld>
             <a:endParaRPr lang="en-US"/>
           </a:p>
@@ -8020,7 +7919,7 @@
 </p:sld>
 </file>
 
-<file path=ppt/slides/slide14.xml><?xml version="1.0" encoding="utf-8"?>
+<file path=ppt/slides/slide15.xml><?xml version="1.0" encoding="utf-8"?>
 <p:sld xmlns:a="http://schemas.openxmlformats.org/drawingml/2006/main" xmlns:r="http://schemas.openxmlformats.org/officeDocument/2006/relationships" xmlns:p="http://schemas.openxmlformats.org/presentationml/2006/main">
   <p:cSld>
     <p:spTree>
@@ -8150,7 +8049,7 @@
             <a:fld id="{4AD62F2E-7083-45D0-8919-2DFD6873DB31}" type="slidenum">
               <a:rPr lang="en-US" smtClean="0"/>
               <a:pPr/>
-              <a:t>14</a:t>
+              <a:t>15</a:t>
             </a:fld>
             <a:endParaRPr lang="en-US"/>
           </a:p>
@@ -8201,7 +8100,7 @@
 </p:sld>
 </file>
 
-<file path=ppt/slides/slide15.xml><?xml version="1.0" encoding="utf-8"?>
+<file path=ppt/slides/slide16.xml><?xml version="1.0" encoding="utf-8"?>
 <p:sld xmlns:a="http://schemas.openxmlformats.org/drawingml/2006/main" xmlns:r="http://schemas.openxmlformats.org/officeDocument/2006/relationships" xmlns:p="http://schemas.openxmlformats.org/presentationml/2006/main">
   <p:cSld>
     <p:spTree>
@@ -8321,7 +8220,7 @@
             <a:fld id="{4AD62F2E-7083-45D0-8919-2DFD6873DB31}" type="slidenum">
               <a:rPr lang="en-US" smtClean="0"/>
               <a:pPr/>
-              <a:t>15</a:t>
+              <a:t>16</a:t>
             </a:fld>
             <a:endParaRPr lang="en-US"/>
           </a:p>
@@ -8372,7 +8271,7 @@
 </p:sld>
 </file>
 
-<file path=ppt/slides/slide16.xml><?xml version="1.0" encoding="utf-8"?>
+<file path=ppt/slides/slide17.xml><?xml version="1.0" encoding="utf-8"?>
 <p:sld xmlns:a="http://schemas.openxmlformats.org/drawingml/2006/main" xmlns:r="http://schemas.openxmlformats.org/officeDocument/2006/relationships" xmlns:p="http://schemas.openxmlformats.org/presentationml/2006/main">
   <p:cSld>
     <p:spTree>
@@ -8614,7 +8513,7 @@
             <a:fld id="{DA3A0356-25C4-47A8-BD36-BE5A8451A2B5}" type="slidenum">
               <a:rPr lang="en-US" smtClean="0"/>
               <a:pPr/>
-              <a:t>16</a:t>
+              <a:t>17</a:t>
             </a:fld>
             <a:endParaRPr lang="en-US"/>
           </a:p>
@@ -8633,7 +8532,7 @@
 </p:sld>
 </file>
 
-<file path=ppt/slides/slide17.xml><?xml version="1.0" encoding="utf-8"?>
+<file path=ppt/slides/slide18.xml><?xml version="1.0" encoding="utf-8"?>
 <p:sld xmlns:a="http://schemas.openxmlformats.org/drawingml/2006/main" xmlns:r="http://schemas.openxmlformats.org/officeDocument/2006/relationships" xmlns:p="http://schemas.openxmlformats.org/presentationml/2006/main">
   <p:cSld>
     <p:spTree>
@@ -18393,7 +18292,7 @@
 </p:sld>
 </file>
 
-<file path=ppt/slides/slide18.xml><?xml version="1.0" encoding="utf-8"?>
+<file path=ppt/slides/slide19.xml><?xml version="1.0" encoding="utf-8"?>
 <p:sld xmlns:a="http://schemas.openxmlformats.org/drawingml/2006/main" xmlns:r="http://schemas.openxmlformats.org/officeDocument/2006/relationships" xmlns:p="http://schemas.openxmlformats.org/presentationml/2006/main">
   <p:cSld>
     <p:spTree>
@@ -18447,646 +18346,6 @@
     <p:extLst>
       <p:ext uri="{BB962C8B-B14F-4D97-AF65-F5344CB8AC3E}">
         <p14:creationId xmlns:p14="http://schemas.microsoft.com/office/powerpoint/2010/main" val="3921976112"/>
-      </p:ext>
-    </p:extLst>
-  </p:cSld>
-  <p:clrMapOvr>
-    <a:masterClrMapping/>
-  </p:clrMapOvr>
-</p:sld>
-</file>
-
-<file path=ppt/slides/slide19.xml><?xml version="1.0" encoding="utf-8"?>
-<p:sld xmlns:a="http://schemas.openxmlformats.org/drawingml/2006/main" xmlns:r="http://schemas.openxmlformats.org/officeDocument/2006/relationships" xmlns:p="http://schemas.openxmlformats.org/presentationml/2006/main">
-  <p:cSld>
-    <p:spTree>
-      <p:nvGrpSpPr>
-        <p:cNvPr id="1" name=""/>
-        <p:cNvGrpSpPr/>
-        <p:nvPr/>
-      </p:nvGrpSpPr>
-      <p:grpSpPr>
-        <a:xfrm>
-          <a:off x="0" y="0"/>
-          <a:ext cx="0" cy="0"/>
-          <a:chOff x="0" y="0"/>
-          <a:chExt cx="0" cy="0"/>
-        </a:xfrm>
-      </p:grpSpPr>
-      <p:sp>
-        <p:nvSpPr>
-          <p:cNvPr id="2" name="Title 1"/>
-          <p:cNvSpPr>
-            <a:spLocks noGrp="1"/>
-          </p:cNvSpPr>
-          <p:nvPr>
-            <p:ph type="title"/>
-          </p:nvPr>
-        </p:nvSpPr>
-        <p:spPr>
-          <a:xfrm>
-            <a:off x="457200" y="72933"/>
-            <a:ext cx="8229600" cy="1143000"/>
-          </a:xfrm>
-        </p:spPr>
-        <p:txBody>
-          <a:bodyPr/>
-          <a:lstStyle/>
-          <a:p>
-            <a:r>
-              <a:rPr lang="en-US" dirty="0"/>
-              <a:t>Question 223.2.5</a:t>
-            </a:r>
-          </a:p>
-        </p:txBody>
-      </p:sp>
-      <p:sp>
-        <p:nvSpPr>
-          <p:cNvPr id="6" name="Rectangle 3"/>
-          <p:cNvSpPr>
-            <a:spLocks noGrp="1" noChangeArrowheads="1"/>
-          </p:cNvSpPr>
-          <p:nvPr>
-            <p:ph idx="1"/>
-          </p:nvPr>
-        </p:nvSpPr>
-        <p:spPr>
-          <a:xfrm>
-            <a:off x="0" y="932983"/>
-            <a:ext cx="4921624" cy="4525963"/>
-          </a:xfrm>
-        </p:spPr>
-        <p:txBody>
-          <a:bodyPr/>
-          <a:lstStyle/>
-          <a:p>
-            <a:pPr marL="609600" indent="-609600" eaLnBrk="1" hangingPunct="1">
-              <a:buFontTx/>
-              <a:buNone/>
-            </a:pPr>
-            <a:r>
-              <a:rPr lang="en-US" dirty="0"/>
-              <a:t>In an ocean wave, what would be the most likely path a single particle traverses as the wave moves by? </a:t>
-            </a:r>
-          </a:p>
-        </p:txBody>
-      </p:sp>
-      <p:pic>
-        <p:nvPicPr>
-          <p:cNvPr id="7" name="Picture 4" descr="J5P87D0K"/>
-          <p:cNvPicPr>
-            <a:picLocks noChangeAspect="1" noChangeArrowheads="1"/>
-          </p:cNvPicPr>
-          <p:nvPr/>
-        </p:nvPicPr>
-        <p:blipFill>
-          <a:blip r:embed="rId2" cstate="print"/>
-          <a:srcRect l="15001" r="16221"/>
-          <a:stretch>
-            <a:fillRect/>
-          </a:stretch>
-        </p:blipFill>
-        <p:spPr bwMode="auto">
-          <a:xfrm>
-            <a:off x="5403271" y="1403933"/>
-            <a:ext cx="2759825" cy="1881704"/>
-          </a:xfrm>
-          <a:prstGeom prst="rect">
-            <a:avLst/>
-          </a:prstGeom>
-          <a:noFill/>
-          <a:ln w="9525">
-            <a:noFill/>
-            <a:miter lim="800000"/>
-            <a:headEnd/>
-            <a:tailEnd/>
-          </a:ln>
-        </p:spPr>
-      </p:pic>
-      <p:sp>
-        <p:nvSpPr>
-          <p:cNvPr id="8" name="Oval 7"/>
-          <p:cNvSpPr/>
-          <p:nvPr/>
-        </p:nvSpPr>
-        <p:spPr>
-          <a:xfrm>
-            <a:off x="6251169" y="1926361"/>
-            <a:ext cx="166254" cy="149629"/>
-          </a:xfrm>
-          <a:prstGeom prst="ellipse">
-            <a:avLst/>
-          </a:prstGeom>
-          <a:solidFill>
-            <a:srgbClr val="FF0000"/>
-          </a:solidFill>
-          <a:ln>
-            <a:noFill/>
-          </a:ln>
-        </p:spPr>
-        <p:style>
-          <a:lnRef idx="2">
-            <a:schemeClr val="accent1">
-              <a:shade val="50000"/>
-            </a:schemeClr>
-          </a:lnRef>
-          <a:fillRef idx="1">
-            <a:schemeClr val="accent1"/>
-          </a:fillRef>
-          <a:effectRef idx="0">
-            <a:schemeClr val="accent1"/>
-          </a:effectRef>
-          <a:fontRef idx="minor">
-            <a:schemeClr val="lt1"/>
-          </a:fontRef>
-        </p:style>
-        <p:txBody>
-          <a:bodyPr rtlCol="0" anchor="ctr"/>
-          <a:lstStyle/>
-          <a:p>
-            <a:pPr algn="ctr"/>
-            <a:endParaRPr lang="en-US"/>
-          </a:p>
-        </p:txBody>
-      </p:sp>
-      <p:cxnSp>
-        <p:nvCxnSpPr>
-          <p:cNvPr id="10" name="Straight Arrow Connector 9"/>
-          <p:cNvCxnSpPr>
-            <a:stCxn id="8" idx="6"/>
-          </p:cNvCxnSpPr>
-          <p:nvPr/>
-        </p:nvCxnSpPr>
-        <p:spPr>
-          <a:xfrm>
-            <a:off x="6417423" y="2001176"/>
-            <a:ext cx="1280161" cy="8315"/>
-          </a:xfrm>
-          <a:prstGeom prst="straightConnector1">
-            <a:avLst/>
-          </a:prstGeom>
-          <a:ln w="38100">
-            <a:solidFill>
-              <a:srgbClr val="FF0000"/>
-            </a:solidFill>
-            <a:tailEnd type="arrow"/>
-          </a:ln>
-        </p:spPr>
-        <p:style>
-          <a:lnRef idx="1">
-            <a:schemeClr val="accent1"/>
-          </a:lnRef>
-          <a:fillRef idx="0">
-            <a:schemeClr val="accent1"/>
-          </a:fillRef>
-          <a:effectRef idx="0">
-            <a:schemeClr val="accent1"/>
-          </a:effectRef>
-          <a:fontRef idx="minor">
-            <a:schemeClr val="tx1"/>
-          </a:fontRef>
-        </p:style>
-      </p:cxnSp>
-      <p:pic>
-        <p:nvPicPr>
-          <p:cNvPr id="11" name="Picture 4" descr="J5P87D0K"/>
-          <p:cNvPicPr>
-            <a:picLocks noChangeAspect="1" noChangeArrowheads="1"/>
-          </p:cNvPicPr>
-          <p:nvPr/>
-        </p:nvPicPr>
-        <p:blipFill>
-          <a:blip r:embed="rId2" cstate="print"/>
-          <a:srcRect l="15001" r="16221"/>
-          <a:stretch>
-            <a:fillRect/>
-          </a:stretch>
-        </p:blipFill>
-        <p:spPr bwMode="auto">
-          <a:xfrm>
-            <a:off x="584661" y="4282894"/>
-            <a:ext cx="2759825" cy="1881704"/>
-          </a:xfrm>
-          <a:prstGeom prst="rect">
-            <a:avLst/>
-          </a:prstGeom>
-          <a:noFill/>
-          <a:ln w="9525">
-            <a:noFill/>
-            <a:miter lim="800000"/>
-            <a:headEnd/>
-            <a:tailEnd/>
-          </a:ln>
-        </p:spPr>
-      </p:pic>
-      <p:sp>
-        <p:nvSpPr>
-          <p:cNvPr id="12" name="Oval 11"/>
-          <p:cNvSpPr/>
-          <p:nvPr/>
-        </p:nvSpPr>
-        <p:spPr>
-          <a:xfrm>
-            <a:off x="1432559" y="4805322"/>
-            <a:ext cx="166254" cy="149629"/>
-          </a:xfrm>
-          <a:prstGeom prst="ellipse">
-            <a:avLst/>
-          </a:prstGeom>
-          <a:solidFill>
-            <a:srgbClr val="FF0000"/>
-          </a:solidFill>
-          <a:ln>
-            <a:noFill/>
-          </a:ln>
-        </p:spPr>
-        <p:style>
-          <a:lnRef idx="2">
-            <a:schemeClr val="accent1">
-              <a:shade val="50000"/>
-            </a:schemeClr>
-          </a:lnRef>
-          <a:fillRef idx="1">
-            <a:schemeClr val="accent1"/>
-          </a:fillRef>
-          <a:effectRef idx="0">
-            <a:schemeClr val="accent1"/>
-          </a:effectRef>
-          <a:fontRef idx="minor">
-            <a:schemeClr val="lt1"/>
-          </a:fontRef>
-        </p:style>
-        <p:txBody>
-          <a:bodyPr rtlCol="0" anchor="ctr"/>
-          <a:lstStyle/>
-          <a:p>
-            <a:pPr algn="ctr"/>
-            <a:endParaRPr lang="en-US"/>
-          </a:p>
-        </p:txBody>
-      </p:sp>
-      <p:cxnSp>
-        <p:nvCxnSpPr>
-          <p:cNvPr id="13" name="Straight Arrow Connector 12"/>
-          <p:cNvCxnSpPr/>
-          <p:nvPr/>
-        </p:nvCxnSpPr>
-        <p:spPr>
-          <a:xfrm rot="16200000" flipH="1">
-            <a:off x="1055716" y="4877368"/>
-            <a:ext cx="914403" cy="3"/>
-          </a:xfrm>
-          <a:prstGeom prst="straightConnector1">
-            <a:avLst/>
-          </a:prstGeom>
-          <a:ln w="38100">
-            <a:solidFill>
-              <a:srgbClr val="FF0000"/>
-            </a:solidFill>
-            <a:headEnd type="arrow"/>
-            <a:tailEnd type="arrow"/>
-          </a:ln>
-        </p:spPr>
-        <p:style>
-          <a:lnRef idx="1">
-            <a:schemeClr val="accent1"/>
-          </a:lnRef>
-          <a:fillRef idx="0">
-            <a:schemeClr val="accent1"/>
-          </a:fillRef>
-          <a:effectRef idx="0">
-            <a:schemeClr val="accent1"/>
-          </a:effectRef>
-          <a:fontRef idx="minor">
-            <a:schemeClr val="tx1"/>
-          </a:fontRef>
-        </p:style>
-      </p:cxnSp>
-      <p:pic>
-        <p:nvPicPr>
-          <p:cNvPr id="18" name="Picture 4" descr="J5P87D0K"/>
-          <p:cNvPicPr>
-            <a:picLocks noChangeAspect="1" noChangeArrowheads="1"/>
-          </p:cNvPicPr>
-          <p:nvPr/>
-        </p:nvPicPr>
-        <p:blipFill>
-          <a:blip r:embed="rId2" cstate="print"/>
-          <a:srcRect l="15001" r="16221"/>
-          <a:stretch>
-            <a:fillRect/>
-          </a:stretch>
-        </p:blipFill>
-        <p:spPr bwMode="auto">
-          <a:xfrm>
-            <a:off x="5408814" y="4318918"/>
-            <a:ext cx="2759825" cy="1881704"/>
-          </a:xfrm>
-          <a:prstGeom prst="rect">
-            <a:avLst/>
-          </a:prstGeom>
-          <a:noFill/>
-          <a:ln w="9525">
-            <a:noFill/>
-            <a:miter lim="800000"/>
-            <a:headEnd/>
-            <a:tailEnd/>
-          </a:ln>
-        </p:spPr>
-      </p:pic>
-      <p:sp>
-        <p:nvSpPr>
-          <p:cNvPr id="19" name="Oval 18"/>
-          <p:cNvSpPr/>
-          <p:nvPr/>
-        </p:nvSpPr>
-        <p:spPr>
-          <a:xfrm>
-            <a:off x="6256712" y="4841346"/>
-            <a:ext cx="166254" cy="149629"/>
-          </a:xfrm>
-          <a:prstGeom prst="ellipse">
-            <a:avLst/>
-          </a:prstGeom>
-          <a:solidFill>
-            <a:srgbClr val="FF0000"/>
-          </a:solidFill>
-          <a:ln>
-            <a:noFill/>
-          </a:ln>
-        </p:spPr>
-        <p:style>
-          <a:lnRef idx="2">
-            <a:schemeClr val="accent1">
-              <a:shade val="50000"/>
-            </a:schemeClr>
-          </a:lnRef>
-          <a:fillRef idx="1">
-            <a:schemeClr val="accent1"/>
-          </a:fillRef>
-          <a:effectRef idx="0">
-            <a:schemeClr val="accent1"/>
-          </a:effectRef>
-          <a:fontRef idx="minor">
-            <a:schemeClr val="lt1"/>
-          </a:fontRef>
-        </p:style>
-        <p:txBody>
-          <a:bodyPr rtlCol="0" anchor="ctr"/>
-          <a:lstStyle/>
-          <a:p>
-            <a:pPr algn="ctr"/>
-            <a:endParaRPr lang="en-US"/>
-          </a:p>
-        </p:txBody>
-      </p:sp>
-      <p:sp>
-        <p:nvSpPr>
-          <p:cNvPr id="21" name="Arc 20"/>
-          <p:cNvSpPr/>
-          <p:nvPr/>
-        </p:nvSpPr>
-        <p:spPr>
-          <a:xfrm>
-            <a:off x="5968538" y="4569804"/>
-            <a:ext cx="731520" cy="665017"/>
-          </a:xfrm>
-          <a:prstGeom prst="arc">
-            <a:avLst>
-              <a:gd name="adj1" fmla="val 16200000"/>
-              <a:gd name="adj2" fmla="val 12516622"/>
-            </a:avLst>
-          </a:prstGeom>
-          <a:ln w="38100">
-            <a:solidFill>
-              <a:srgbClr val="FF0000"/>
-            </a:solidFill>
-            <a:headEnd type="none"/>
-            <a:tailEnd type="triangle"/>
-          </a:ln>
-        </p:spPr>
-        <p:style>
-          <a:lnRef idx="1">
-            <a:schemeClr val="accent1"/>
-          </a:lnRef>
-          <a:fillRef idx="0">
-            <a:schemeClr val="accent1"/>
-          </a:fillRef>
-          <a:effectRef idx="0">
-            <a:schemeClr val="accent1"/>
-          </a:effectRef>
-          <a:fontRef idx="minor">
-            <a:schemeClr val="tx1"/>
-          </a:fontRef>
-        </p:style>
-        <p:txBody>
-          <a:bodyPr rtlCol="0" anchor="ctr"/>
-          <a:lstStyle/>
-          <a:p>
-            <a:pPr algn="ctr"/>
-            <a:endParaRPr lang="en-US"/>
-          </a:p>
-        </p:txBody>
-      </p:sp>
-      <p:cxnSp>
-        <p:nvCxnSpPr>
-          <p:cNvPr id="22" name="Straight Arrow Connector 21"/>
-          <p:cNvCxnSpPr/>
-          <p:nvPr/>
-        </p:nvCxnSpPr>
-        <p:spPr>
-          <a:xfrm>
-            <a:off x="6054434" y="1122798"/>
-            <a:ext cx="1280161" cy="8315"/>
-          </a:xfrm>
-          <a:prstGeom prst="straightConnector1">
-            <a:avLst/>
-          </a:prstGeom>
-          <a:ln w="38100">
-            <a:solidFill>
-              <a:schemeClr val="accent1"/>
-            </a:solidFill>
-            <a:tailEnd type="arrow"/>
-          </a:ln>
-        </p:spPr>
-        <p:style>
-          <a:lnRef idx="1">
-            <a:schemeClr val="accent1"/>
-          </a:lnRef>
-          <a:fillRef idx="0">
-            <a:schemeClr val="accent1"/>
-          </a:fillRef>
-          <a:effectRef idx="0">
-            <a:schemeClr val="accent1"/>
-          </a:effectRef>
-          <a:fontRef idx="minor">
-            <a:schemeClr val="tx1"/>
-          </a:fontRef>
-        </p:style>
-      </p:cxnSp>
-      <p:cxnSp>
-        <p:nvCxnSpPr>
-          <p:cNvPr id="23" name="Straight Arrow Connector 22"/>
-          <p:cNvCxnSpPr/>
-          <p:nvPr/>
-        </p:nvCxnSpPr>
-        <p:spPr>
-          <a:xfrm>
-            <a:off x="6123708" y="4118140"/>
-            <a:ext cx="1280161" cy="8315"/>
-          </a:xfrm>
-          <a:prstGeom prst="straightConnector1">
-            <a:avLst/>
-          </a:prstGeom>
-          <a:ln w="38100">
-            <a:solidFill>
-              <a:schemeClr val="accent1"/>
-            </a:solidFill>
-            <a:tailEnd type="arrow"/>
-          </a:ln>
-        </p:spPr>
-        <p:style>
-          <a:lnRef idx="1">
-            <a:schemeClr val="accent1"/>
-          </a:lnRef>
-          <a:fillRef idx="0">
-            <a:schemeClr val="accent1"/>
-          </a:fillRef>
-          <a:effectRef idx="0">
-            <a:schemeClr val="accent1"/>
-          </a:effectRef>
-          <a:fontRef idx="minor">
-            <a:schemeClr val="tx1"/>
-          </a:fontRef>
-        </p:style>
-      </p:cxnSp>
-      <p:cxnSp>
-        <p:nvCxnSpPr>
-          <p:cNvPr id="24" name="Straight Arrow Connector 23"/>
-          <p:cNvCxnSpPr/>
-          <p:nvPr/>
-        </p:nvCxnSpPr>
-        <p:spPr>
-          <a:xfrm>
-            <a:off x="1205345" y="4120909"/>
-            <a:ext cx="1280161" cy="8315"/>
-          </a:xfrm>
-          <a:prstGeom prst="straightConnector1">
-            <a:avLst/>
-          </a:prstGeom>
-          <a:ln w="38100">
-            <a:solidFill>
-              <a:schemeClr val="accent1"/>
-            </a:solidFill>
-            <a:tailEnd type="arrow"/>
-          </a:ln>
-        </p:spPr>
-        <p:style>
-          <a:lnRef idx="1">
-            <a:schemeClr val="accent1"/>
-          </a:lnRef>
-          <a:fillRef idx="0">
-            <a:schemeClr val="accent1"/>
-          </a:fillRef>
-          <a:effectRef idx="0">
-            <a:schemeClr val="accent1"/>
-          </a:effectRef>
-          <a:fontRef idx="minor">
-            <a:schemeClr val="tx1"/>
-          </a:fontRef>
-        </p:style>
-      </p:cxnSp>
-      <p:sp>
-        <p:nvSpPr>
-          <p:cNvPr id="25" name="TextBox 24"/>
-          <p:cNvSpPr txBox="1"/>
-          <p:nvPr/>
-        </p:nvSpPr>
-        <p:spPr>
-          <a:xfrm>
-            <a:off x="1745672" y="6165842"/>
-            <a:ext cx="338554" cy="369332"/>
-          </a:xfrm>
-          <a:prstGeom prst="rect">
-            <a:avLst/>
-          </a:prstGeom>
-          <a:noFill/>
-        </p:spPr>
-        <p:txBody>
-          <a:bodyPr wrap="none" rtlCol="0">
-            <a:spAutoFit/>
-          </a:bodyPr>
-          <a:lstStyle/>
-          <a:p>
-            <a:r>
-              <a:rPr lang="en-US" dirty="0"/>
-              <a:t>A</a:t>
-            </a:r>
-          </a:p>
-        </p:txBody>
-      </p:sp>
-      <p:sp>
-        <p:nvSpPr>
-          <p:cNvPr id="26" name="TextBox 25"/>
-          <p:cNvSpPr txBox="1"/>
-          <p:nvPr/>
-        </p:nvSpPr>
-        <p:spPr>
-          <a:xfrm>
-            <a:off x="6553199" y="3309045"/>
-            <a:ext cx="338554" cy="369332"/>
-          </a:xfrm>
-          <a:prstGeom prst="rect">
-            <a:avLst/>
-          </a:prstGeom>
-          <a:noFill/>
-        </p:spPr>
-        <p:txBody>
-          <a:bodyPr wrap="none" rtlCol="0">
-            <a:spAutoFit/>
-          </a:bodyPr>
-          <a:lstStyle/>
-          <a:p>
-            <a:r>
-              <a:rPr lang="en-US" dirty="0"/>
-              <a:t>B</a:t>
-            </a:r>
-          </a:p>
-        </p:txBody>
-      </p:sp>
-      <p:sp>
-        <p:nvSpPr>
-          <p:cNvPr id="27" name="TextBox 26"/>
-          <p:cNvSpPr txBox="1"/>
-          <p:nvPr/>
-        </p:nvSpPr>
-        <p:spPr>
-          <a:xfrm>
-            <a:off x="6555974" y="6187945"/>
-            <a:ext cx="351378" cy="369332"/>
-          </a:xfrm>
-          <a:prstGeom prst="rect">
-            <a:avLst/>
-          </a:prstGeom>
-          <a:noFill/>
-        </p:spPr>
-        <p:txBody>
-          <a:bodyPr wrap="none" rtlCol="0">
-            <a:spAutoFit/>
-          </a:bodyPr>
-          <a:lstStyle/>
-          <a:p>
-            <a:r>
-              <a:rPr lang="en-US" dirty="0"/>
-              <a:t>C</a:t>
-            </a:r>
-          </a:p>
-        </p:txBody>
-      </p:sp>
-    </p:spTree>
-    <p:extLst>
-      <p:ext uri="{BB962C8B-B14F-4D97-AF65-F5344CB8AC3E}">
-        <p14:creationId xmlns:p14="http://schemas.microsoft.com/office/powerpoint/2010/main" val="1479243362"/>
       </p:ext>
     </p:extLst>
   </p:cSld>
@@ -19525,6 +18784,646 @@
             <p:ph type="title"/>
           </p:nvPr>
         </p:nvSpPr>
+        <p:spPr>
+          <a:xfrm>
+            <a:off x="457200" y="72933"/>
+            <a:ext cx="8229600" cy="1143000"/>
+          </a:xfrm>
+        </p:spPr>
+        <p:txBody>
+          <a:bodyPr/>
+          <a:lstStyle/>
+          <a:p>
+            <a:r>
+              <a:rPr lang="en-US" dirty="0"/>
+              <a:t>Question 223.2.5</a:t>
+            </a:r>
+          </a:p>
+        </p:txBody>
+      </p:sp>
+      <p:sp>
+        <p:nvSpPr>
+          <p:cNvPr id="6" name="Rectangle 3"/>
+          <p:cNvSpPr>
+            <a:spLocks noGrp="1" noChangeArrowheads="1"/>
+          </p:cNvSpPr>
+          <p:nvPr>
+            <p:ph idx="1"/>
+          </p:nvPr>
+        </p:nvSpPr>
+        <p:spPr>
+          <a:xfrm>
+            <a:off x="0" y="932983"/>
+            <a:ext cx="4921624" cy="4525963"/>
+          </a:xfrm>
+        </p:spPr>
+        <p:txBody>
+          <a:bodyPr/>
+          <a:lstStyle/>
+          <a:p>
+            <a:pPr marL="609600" indent="-609600" eaLnBrk="1" hangingPunct="1">
+              <a:buFontTx/>
+              <a:buNone/>
+            </a:pPr>
+            <a:r>
+              <a:rPr lang="en-US" dirty="0"/>
+              <a:t>In an ocean wave, what would be the most likely path a single particle traverses as the wave moves by? </a:t>
+            </a:r>
+          </a:p>
+        </p:txBody>
+      </p:sp>
+      <p:pic>
+        <p:nvPicPr>
+          <p:cNvPr id="7" name="Picture 4" descr="J5P87D0K"/>
+          <p:cNvPicPr>
+            <a:picLocks noChangeAspect="1" noChangeArrowheads="1"/>
+          </p:cNvPicPr>
+          <p:nvPr/>
+        </p:nvPicPr>
+        <p:blipFill>
+          <a:blip r:embed="rId2" cstate="print"/>
+          <a:srcRect l="15001" r="16221"/>
+          <a:stretch>
+            <a:fillRect/>
+          </a:stretch>
+        </p:blipFill>
+        <p:spPr bwMode="auto">
+          <a:xfrm>
+            <a:off x="5403271" y="1403933"/>
+            <a:ext cx="2759825" cy="1881704"/>
+          </a:xfrm>
+          <a:prstGeom prst="rect">
+            <a:avLst/>
+          </a:prstGeom>
+          <a:noFill/>
+          <a:ln w="9525">
+            <a:noFill/>
+            <a:miter lim="800000"/>
+            <a:headEnd/>
+            <a:tailEnd/>
+          </a:ln>
+        </p:spPr>
+      </p:pic>
+      <p:sp>
+        <p:nvSpPr>
+          <p:cNvPr id="8" name="Oval 7"/>
+          <p:cNvSpPr/>
+          <p:nvPr/>
+        </p:nvSpPr>
+        <p:spPr>
+          <a:xfrm>
+            <a:off x="6251169" y="1926361"/>
+            <a:ext cx="166254" cy="149629"/>
+          </a:xfrm>
+          <a:prstGeom prst="ellipse">
+            <a:avLst/>
+          </a:prstGeom>
+          <a:solidFill>
+            <a:srgbClr val="FF0000"/>
+          </a:solidFill>
+          <a:ln>
+            <a:noFill/>
+          </a:ln>
+        </p:spPr>
+        <p:style>
+          <a:lnRef idx="2">
+            <a:schemeClr val="accent1">
+              <a:shade val="50000"/>
+            </a:schemeClr>
+          </a:lnRef>
+          <a:fillRef idx="1">
+            <a:schemeClr val="accent1"/>
+          </a:fillRef>
+          <a:effectRef idx="0">
+            <a:schemeClr val="accent1"/>
+          </a:effectRef>
+          <a:fontRef idx="minor">
+            <a:schemeClr val="lt1"/>
+          </a:fontRef>
+        </p:style>
+        <p:txBody>
+          <a:bodyPr rtlCol="0" anchor="ctr"/>
+          <a:lstStyle/>
+          <a:p>
+            <a:pPr algn="ctr"/>
+            <a:endParaRPr lang="en-US"/>
+          </a:p>
+        </p:txBody>
+      </p:sp>
+      <p:cxnSp>
+        <p:nvCxnSpPr>
+          <p:cNvPr id="10" name="Straight Arrow Connector 9"/>
+          <p:cNvCxnSpPr>
+            <a:stCxn id="8" idx="6"/>
+          </p:cNvCxnSpPr>
+          <p:nvPr/>
+        </p:nvCxnSpPr>
+        <p:spPr>
+          <a:xfrm>
+            <a:off x="6417423" y="2001176"/>
+            <a:ext cx="1280161" cy="8315"/>
+          </a:xfrm>
+          <a:prstGeom prst="straightConnector1">
+            <a:avLst/>
+          </a:prstGeom>
+          <a:ln w="38100">
+            <a:solidFill>
+              <a:srgbClr val="FF0000"/>
+            </a:solidFill>
+            <a:tailEnd type="arrow"/>
+          </a:ln>
+        </p:spPr>
+        <p:style>
+          <a:lnRef idx="1">
+            <a:schemeClr val="accent1"/>
+          </a:lnRef>
+          <a:fillRef idx="0">
+            <a:schemeClr val="accent1"/>
+          </a:fillRef>
+          <a:effectRef idx="0">
+            <a:schemeClr val="accent1"/>
+          </a:effectRef>
+          <a:fontRef idx="minor">
+            <a:schemeClr val="tx1"/>
+          </a:fontRef>
+        </p:style>
+      </p:cxnSp>
+      <p:pic>
+        <p:nvPicPr>
+          <p:cNvPr id="11" name="Picture 4" descr="J5P87D0K"/>
+          <p:cNvPicPr>
+            <a:picLocks noChangeAspect="1" noChangeArrowheads="1"/>
+          </p:cNvPicPr>
+          <p:nvPr/>
+        </p:nvPicPr>
+        <p:blipFill>
+          <a:blip r:embed="rId2" cstate="print"/>
+          <a:srcRect l="15001" r="16221"/>
+          <a:stretch>
+            <a:fillRect/>
+          </a:stretch>
+        </p:blipFill>
+        <p:spPr bwMode="auto">
+          <a:xfrm>
+            <a:off x="584661" y="4282894"/>
+            <a:ext cx="2759825" cy="1881704"/>
+          </a:xfrm>
+          <a:prstGeom prst="rect">
+            <a:avLst/>
+          </a:prstGeom>
+          <a:noFill/>
+          <a:ln w="9525">
+            <a:noFill/>
+            <a:miter lim="800000"/>
+            <a:headEnd/>
+            <a:tailEnd/>
+          </a:ln>
+        </p:spPr>
+      </p:pic>
+      <p:sp>
+        <p:nvSpPr>
+          <p:cNvPr id="12" name="Oval 11"/>
+          <p:cNvSpPr/>
+          <p:nvPr/>
+        </p:nvSpPr>
+        <p:spPr>
+          <a:xfrm>
+            <a:off x="1432559" y="4805322"/>
+            <a:ext cx="166254" cy="149629"/>
+          </a:xfrm>
+          <a:prstGeom prst="ellipse">
+            <a:avLst/>
+          </a:prstGeom>
+          <a:solidFill>
+            <a:srgbClr val="FF0000"/>
+          </a:solidFill>
+          <a:ln>
+            <a:noFill/>
+          </a:ln>
+        </p:spPr>
+        <p:style>
+          <a:lnRef idx="2">
+            <a:schemeClr val="accent1">
+              <a:shade val="50000"/>
+            </a:schemeClr>
+          </a:lnRef>
+          <a:fillRef idx="1">
+            <a:schemeClr val="accent1"/>
+          </a:fillRef>
+          <a:effectRef idx="0">
+            <a:schemeClr val="accent1"/>
+          </a:effectRef>
+          <a:fontRef idx="minor">
+            <a:schemeClr val="lt1"/>
+          </a:fontRef>
+        </p:style>
+        <p:txBody>
+          <a:bodyPr rtlCol="0" anchor="ctr"/>
+          <a:lstStyle/>
+          <a:p>
+            <a:pPr algn="ctr"/>
+            <a:endParaRPr lang="en-US"/>
+          </a:p>
+        </p:txBody>
+      </p:sp>
+      <p:cxnSp>
+        <p:nvCxnSpPr>
+          <p:cNvPr id="13" name="Straight Arrow Connector 12"/>
+          <p:cNvCxnSpPr/>
+          <p:nvPr/>
+        </p:nvCxnSpPr>
+        <p:spPr>
+          <a:xfrm rot="16200000" flipH="1">
+            <a:off x="1055716" y="4877368"/>
+            <a:ext cx="914403" cy="3"/>
+          </a:xfrm>
+          <a:prstGeom prst="straightConnector1">
+            <a:avLst/>
+          </a:prstGeom>
+          <a:ln w="38100">
+            <a:solidFill>
+              <a:srgbClr val="FF0000"/>
+            </a:solidFill>
+            <a:headEnd type="arrow"/>
+            <a:tailEnd type="arrow"/>
+          </a:ln>
+        </p:spPr>
+        <p:style>
+          <a:lnRef idx="1">
+            <a:schemeClr val="accent1"/>
+          </a:lnRef>
+          <a:fillRef idx="0">
+            <a:schemeClr val="accent1"/>
+          </a:fillRef>
+          <a:effectRef idx="0">
+            <a:schemeClr val="accent1"/>
+          </a:effectRef>
+          <a:fontRef idx="minor">
+            <a:schemeClr val="tx1"/>
+          </a:fontRef>
+        </p:style>
+      </p:cxnSp>
+      <p:pic>
+        <p:nvPicPr>
+          <p:cNvPr id="18" name="Picture 4" descr="J5P87D0K"/>
+          <p:cNvPicPr>
+            <a:picLocks noChangeAspect="1" noChangeArrowheads="1"/>
+          </p:cNvPicPr>
+          <p:nvPr/>
+        </p:nvPicPr>
+        <p:blipFill>
+          <a:blip r:embed="rId2" cstate="print"/>
+          <a:srcRect l="15001" r="16221"/>
+          <a:stretch>
+            <a:fillRect/>
+          </a:stretch>
+        </p:blipFill>
+        <p:spPr bwMode="auto">
+          <a:xfrm>
+            <a:off x="5408814" y="4318918"/>
+            <a:ext cx="2759825" cy="1881704"/>
+          </a:xfrm>
+          <a:prstGeom prst="rect">
+            <a:avLst/>
+          </a:prstGeom>
+          <a:noFill/>
+          <a:ln w="9525">
+            <a:noFill/>
+            <a:miter lim="800000"/>
+            <a:headEnd/>
+            <a:tailEnd/>
+          </a:ln>
+        </p:spPr>
+      </p:pic>
+      <p:sp>
+        <p:nvSpPr>
+          <p:cNvPr id="19" name="Oval 18"/>
+          <p:cNvSpPr/>
+          <p:nvPr/>
+        </p:nvSpPr>
+        <p:spPr>
+          <a:xfrm>
+            <a:off x="6256712" y="4841346"/>
+            <a:ext cx="166254" cy="149629"/>
+          </a:xfrm>
+          <a:prstGeom prst="ellipse">
+            <a:avLst/>
+          </a:prstGeom>
+          <a:solidFill>
+            <a:srgbClr val="FF0000"/>
+          </a:solidFill>
+          <a:ln>
+            <a:noFill/>
+          </a:ln>
+        </p:spPr>
+        <p:style>
+          <a:lnRef idx="2">
+            <a:schemeClr val="accent1">
+              <a:shade val="50000"/>
+            </a:schemeClr>
+          </a:lnRef>
+          <a:fillRef idx="1">
+            <a:schemeClr val="accent1"/>
+          </a:fillRef>
+          <a:effectRef idx="0">
+            <a:schemeClr val="accent1"/>
+          </a:effectRef>
+          <a:fontRef idx="minor">
+            <a:schemeClr val="lt1"/>
+          </a:fontRef>
+        </p:style>
+        <p:txBody>
+          <a:bodyPr rtlCol="0" anchor="ctr"/>
+          <a:lstStyle/>
+          <a:p>
+            <a:pPr algn="ctr"/>
+            <a:endParaRPr lang="en-US"/>
+          </a:p>
+        </p:txBody>
+      </p:sp>
+      <p:sp>
+        <p:nvSpPr>
+          <p:cNvPr id="21" name="Arc 20"/>
+          <p:cNvSpPr/>
+          <p:nvPr/>
+        </p:nvSpPr>
+        <p:spPr>
+          <a:xfrm>
+            <a:off x="5968538" y="4569804"/>
+            <a:ext cx="731520" cy="665017"/>
+          </a:xfrm>
+          <a:prstGeom prst="arc">
+            <a:avLst>
+              <a:gd name="adj1" fmla="val 16200000"/>
+              <a:gd name="adj2" fmla="val 12516622"/>
+            </a:avLst>
+          </a:prstGeom>
+          <a:ln w="38100">
+            <a:solidFill>
+              <a:srgbClr val="FF0000"/>
+            </a:solidFill>
+            <a:headEnd type="none"/>
+            <a:tailEnd type="triangle"/>
+          </a:ln>
+        </p:spPr>
+        <p:style>
+          <a:lnRef idx="1">
+            <a:schemeClr val="accent1"/>
+          </a:lnRef>
+          <a:fillRef idx="0">
+            <a:schemeClr val="accent1"/>
+          </a:fillRef>
+          <a:effectRef idx="0">
+            <a:schemeClr val="accent1"/>
+          </a:effectRef>
+          <a:fontRef idx="minor">
+            <a:schemeClr val="tx1"/>
+          </a:fontRef>
+        </p:style>
+        <p:txBody>
+          <a:bodyPr rtlCol="0" anchor="ctr"/>
+          <a:lstStyle/>
+          <a:p>
+            <a:pPr algn="ctr"/>
+            <a:endParaRPr lang="en-US"/>
+          </a:p>
+        </p:txBody>
+      </p:sp>
+      <p:cxnSp>
+        <p:nvCxnSpPr>
+          <p:cNvPr id="22" name="Straight Arrow Connector 21"/>
+          <p:cNvCxnSpPr/>
+          <p:nvPr/>
+        </p:nvCxnSpPr>
+        <p:spPr>
+          <a:xfrm>
+            <a:off x="6054434" y="1122798"/>
+            <a:ext cx="1280161" cy="8315"/>
+          </a:xfrm>
+          <a:prstGeom prst="straightConnector1">
+            <a:avLst/>
+          </a:prstGeom>
+          <a:ln w="38100">
+            <a:solidFill>
+              <a:schemeClr val="accent1"/>
+            </a:solidFill>
+            <a:tailEnd type="arrow"/>
+          </a:ln>
+        </p:spPr>
+        <p:style>
+          <a:lnRef idx="1">
+            <a:schemeClr val="accent1"/>
+          </a:lnRef>
+          <a:fillRef idx="0">
+            <a:schemeClr val="accent1"/>
+          </a:fillRef>
+          <a:effectRef idx="0">
+            <a:schemeClr val="accent1"/>
+          </a:effectRef>
+          <a:fontRef idx="minor">
+            <a:schemeClr val="tx1"/>
+          </a:fontRef>
+        </p:style>
+      </p:cxnSp>
+      <p:cxnSp>
+        <p:nvCxnSpPr>
+          <p:cNvPr id="23" name="Straight Arrow Connector 22"/>
+          <p:cNvCxnSpPr/>
+          <p:nvPr/>
+        </p:nvCxnSpPr>
+        <p:spPr>
+          <a:xfrm>
+            <a:off x="6123708" y="4118140"/>
+            <a:ext cx="1280161" cy="8315"/>
+          </a:xfrm>
+          <a:prstGeom prst="straightConnector1">
+            <a:avLst/>
+          </a:prstGeom>
+          <a:ln w="38100">
+            <a:solidFill>
+              <a:schemeClr val="accent1"/>
+            </a:solidFill>
+            <a:tailEnd type="arrow"/>
+          </a:ln>
+        </p:spPr>
+        <p:style>
+          <a:lnRef idx="1">
+            <a:schemeClr val="accent1"/>
+          </a:lnRef>
+          <a:fillRef idx="0">
+            <a:schemeClr val="accent1"/>
+          </a:fillRef>
+          <a:effectRef idx="0">
+            <a:schemeClr val="accent1"/>
+          </a:effectRef>
+          <a:fontRef idx="minor">
+            <a:schemeClr val="tx1"/>
+          </a:fontRef>
+        </p:style>
+      </p:cxnSp>
+      <p:cxnSp>
+        <p:nvCxnSpPr>
+          <p:cNvPr id="24" name="Straight Arrow Connector 23"/>
+          <p:cNvCxnSpPr/>
+          <p:nvPr/>
+        </p:nvCxnSpPr>
+        <p:spPr>
+          <a:xfrm>
+            <a:off x="1205345" y="4120909"/>
+            <a:ext cx="1280161" cy="8315"/>
+          </a:xfrm>
+          <a:prstGeom prst="straightConnector1">
+            <a:avLst/>
+          </a:prstGeom>
+          <a:ln w="38100">
+            <a:solidFill>
+              <a:schemeClr val="accent1"/>
+            </a:solidFill>
+            <a:tailEnd type="arrow"/>
+          </a:ln>
+        </p:spPr>
+        <p:style>
+          <a:lnRef idx="1">
+            <a:schemeClr val="accent1"/>
+          </a:lnRef>
+          <a:fillRef idx="0">
+            <a:schemeClr val="accent1"/>
+          </a:fillRef>
+          <a:effectRef idx="0">
+            <a:schemeClr val="accent1"/>
+          </a:effectRef>
+          <a:fontRef idx="minor">
+            <a:schemeClr val="tx1"/>
+          </a:fontRef>
+        </p:style>
+      </p:cxnSp>
+      <p:sp>
+        <p:nvSpPr>
+          <p:cNvPr id="25" name="TextBox 24"/>
+          <p:cNvSpPr txBox="1"/>
+          <p:nvPr/>
+        </p:nvSpPr>
+        <p:spPr>
+          <a:xfrm>
+            <a:off x="1745672" y="6165842"/>
+            <a:ext cx="338554" cy="369332"/>
+          </a:xfrm>
+          <a:prstGeom prst="rect">
+            <a:avLst/>
+          </a:prstGeom>
+          <a:noFill/>
+        </p:spPr>
+        <p:txBody>
+          <a:bodyPr wrap="none" rtlCol="0">
+            <a:spAutoFit/>
+          </a:bodyPr>
+          <a:lstStyle/>
+          <a:p>
+            <a:r>
+              <a:rPr lang="en-US" dirty="0"/>
+              <a:t>A</a:t>
+            </a:r>
+          </a:p>
+        </p:txBody>
+      </p:sp>
+      <p:sp>
+        <p:nvSpPr>
+          <p:cNvPr id="26" name="TextBox 25"/>
+          <p:cNvSpPr txBox="1"/>
+          <p:nvPr/>
+        </p:nvSpPr>
+        <p:spPr>
+          <a:xfrm>
+            <a:off x="6553199" y="3309045"/>
+            <a:ext cx="338554" cy="369332"/>
+          </a:xfrm>
+          <a:prstGeom prst="rect">
+            <a:avLst/>
+          </a:prstGeom>
+          <a:noFill/>
+        </p:spPr>
+        <p:txBody>
+          <a:bodyPr wrap="none" rtlCol="0">
+            <a:spAutoFit/>
+          </a:bodyPr>
+          <a:lstStyle/>
+          <a:p>
+            <a:r>
+              <a:rPr lang="en-US" dirty="0"/>
+              <a:t>B</a:t>
+            </a:r>
+          </a:p>
+        </p:txBody>
+      </p:sp>
+      <p:sp>
+        <p:nvSpPr>
+          <p:cNvPr id="27" name="TextBox 26"/>
+          <p:cNvSpPr txBox="1"/>
+          <p:nvPr/>
+        </p:nvSpPr>
+        <p:spPr>
+          <a:xfrm>
+            <a:off x="6555974" y="6187945"/>
+            <a:ext cx="351378" cy="369332"/>
+          </a:xfrm>
+          <a:prstGeom prst="rect">
+            <a:avLst/>
+          </a:prstGeom>
+          <a:noFill/>
+        </p:spPr>
+        <p:txBody>
+          <a:bodyPr wrap="none" rtlCol="0">
+            <a:spAutoFit/>
+          </a:bodyPr>
+          <a:lstStyle/>
+          <a:p>
+            <a:r>
+              <a:rPr lang="en-US" dirty="0"/>
+              <a:t>C</a:t>
+            </a:r>
+          </a:p>
+        </p:txBody>
+      </p:sp>
+    </p:spTree>
+    <p:extLst>
+      <p:ext uri="{BB962C8B-B14F-4D97-AF65-F5344CB8AC3E}">
+        <p14:creationId xmlns:p14="http://schemas.microsoft.com/office/powerpoint/2010/main" val="1479243362"/>
+      </p:ext>
+    </p:extLst>
+  </p:cSld>
+  <p:clrMapOvr>
+    <a:masterClrMapping/>
+  </p:clrMapOvr>
+</p:sld>
+</file>
+
+<file path=ppt/slides/slide21.xml><?xml version="1.0" encoding="utf-8"?>
+<p:sld xmlns:a="http://schemas.openxmlformats.org/drawingml/2006/main" xmlns:r="http://schemas.openxmlformats.org/officeDocument/2006/relationships" xmlns:p="http://schemas.openxmlformats.org/presentationml/2006/main">
+  <p:cSld>
+    <p:spTree>
+      <p:nvGrpSpPr>
+        <p:cNvPr id="1" name=""/>
+        <p:cNvGrpSpPr/>
+        <p:nvPr/>
+      </p:nvGrpSpPr>
+      <p:grpSpPr>
+        <a:xfrm>
+          <a:off x="0" y="0"/>
+          <a:ext cx="0" cy="0"/>
+          <a:chOff x="0" y="0"/>
+          <a:chExt cx="0" cy="0"/>
+        </a:xfrm>
+      </p:grpSpPr>
+      <p:sp>
+        <p:nvSpPr>
+          <p:cNvPr id="2" name="Title 1"/>
+          <p:cNvSpPr>
+            <a:spLocks noGrp="1"/>
+          </p:cNvSpPr>
+          <p:nvPr>
+            <p:ph type="title"/>
+          </p:nvPr>
+        </p:nvSpPr>
         <p:spPr/>
         <p:txBody>
           <a:bodyPr/>
@@ -19623,7 +19522,7 @@
 </p:sld>
 </file>
 
-<file path=ppt/slides/slide21.xml><?xml version="1.0" encoding="utf-8"?>
+<file path=ppt/slides/slide22.xml><?xml version="1.0" encoding="utf-8"?>
 <p:sld xmlns:a="http://schemas.openxmlformats.org/drawingml/2006/main" xmlns:r="http://schemas.openxmlformats.org/officeDocument/2006/relationships" xmlns:p="http://schemas.openxmlformats.org/presentationml/2006/main">
   <p:cSld>
     <p:spTree>
@@ -19701,14 +19600,11 @@
                 </a:pPr>
                 <a14:m>
                   <m:oMathPara xmlns:m="http://schemas.openxmlformats.org/officeDocument/2006/math">
-                    <m:oMathParaPr>
-                      <m:jc m:val="centerGroup"/>
-                    </m:oMathParaPr>
-                    <m:oMath xmlns:m="http://schemas.openxmlformats.org/officeDocument/2006/math">
+                    <m:oMath>
                       <m:f>
                         <m:fPr>
                           <m:ctrlPr>
-                            <a:rPr lang="en-US" i="1" smtClean="0">
+                            <a:rPr lang="en-US" b="0" i="1" smtClean="0">
                               <a:latin typeface="Cambria Math" panose="02040503050406030204" pitchFamily="18" charset="0"/>
                             </a:rPr>
                           </m:ctrlPr>
@@ -19851,7 +19747,7 @@
 </p:sld>
 </file>
 
-<file path=ppt/slides/slide22.xml><?xml version="1.0" encoding="utf-8"?>
+<file path=ppt/slides/slide23.xml><?xml version="1.0" encoding="utf-8"?>
 <p:sld xmlns:a="http://schemas.openxmlformats.org/drawingml/2006/main" xmlns:r="http://schemas.openxmlformats.org/officeDocument/2006/relationships" xmlns:p="http://schemas.openxmlformats.org/presentationml/2006/main">
   <p:cSld>
     <p:spTree>
@@ -19929,14 +19825,11 @@
                 </a:pPr>
                 <a14:m>
                   <m:oMathPara xmlns:m="http://schemas.openxmlformats.org/officeDocument/2006/math">
-                    <m:oMathParaPr>
-                      <m:jc m:val="centerGroup"/>
-                    </m:oMathParaPr>
-                    <m:oMath xmlns:m="http://schemas.openxmlformats.org/officeDocument/2006/math">
+                    <m:oMath>
                       <m:f>
                         <m:fPr>
                           <m:ctrlPr>
-                            <a:rPr lang="en-US" i="1" smtClean="0">
+                            <a:rPr lang="en-US" b="0" i="1" smtClean="0">
                               <a:latin typeface="Cambria Math" panose="02040503050406030204" pitchFamily="18" charset="0"/>
                             </a:rPr>
                           </m:ctrlPr>
@@ -20083,7 +19976,7 @@
 </p:sld>
 </file>
 
-<file path=ppt/slides/slide23.xml><?xml version="1.0" encoding="utf-8"?>
+<file path=ppt/slides/slide24.xml><?xml version="1.0" encoding="utf-8"?>
 <p:sld xmlns:a="http://schemas.openxmlformats.org/drawingml/2006/main" xmlns:r="http://schemas.openxmlformats.org/officeDocument/2006/relationships" xmlns:p="http://schemas.openxmlformats.org/presentationml/2006/main">
   <p:cSld>
     <p:spTree>
@@ -20310,7 +20203,7 @@
 </p:sld>
 </file>
 
-<file path=ppt/slides/slide24.xml><?xml version="1.0" encoding="utf-8"?>
+<file path=ppt/slides/slide25.xml><?xml version="1.0" encoding="utf-8"?>
 <p:sld xmlns:a="http://schemas.openxmlformats.org/drawingml/2006/main" xmlns:r="http://schemas.openxmlformats.org/officeDocument/2006/relationships" xmlns:p="http://schemas.openxmlformats.org/presentationml/2006/main">
   <p:cSld>
     <p:spTree>
@@ -20415,7 +20308,7 @@
             <a:fld id="{2D6BF6D5-4A63-45E5-8F7F-88530ECEECFE}" type="slidenum">
               <a:rPr lang="en-US" smtClean="0"/>
               <a:pPr/>
-              <a:t>24</a:t>
+              <a:t>25</a:t>
             </a:fld>
             <a:endParaRPr lang="en-US"/>
           </a:p>
@@ -20434,7 +20327,7 @@
 </p:sld>
 </file>
 
-<file path=ppt/slides/slide25.xml><?xml version="1.0" encoding="utf-8"?>
+<file path=ppt/slides/slide26.xml><?xml version="1.0" encoding="utf-8"?>
 <p:sld xmlns:a="http://schemas.openxmlformats.org/drawingml/2006/main" xmlns:r="http://schemas.openxmlformats.org/officeDocument/2006/relationships" xmlns:p="http://schemas.openxmlformats.org/presentationml/2006/main">
   <p:cSld>
     <p:spTree>
@@ -20539,7 +20432,7 @@
             <a:fld id="{527FF320-592F-4310-BED6-ED57DA8E0B3F}" type="slidenum">
               <a:rPr lang="en-US" smtClean="0"/>
               <a:pPr/>
-              <a:t>25</a:t>
+              <a:t>26</a:t>
             </a:fld>
             <a:endParaRPr lang="en-US"/>
           </a:p>
@@ -20558,7 +20451,7 @@
 </p:sld>
 </file>
 
-<file path=ppt/slides/slide26.xml><?xml version="1.0" encoding="utf-8"?>
+<file path=ppt/slides/slide27.xml><?xml version="1.0" encoding="utf-8"?>
 <p:sld xmlns:a="http://schemas.openxmlformats.org/drawingml/2006/main" xmlns:r="http://schemas.openxmlformats.org/officeDocument/2006/relationships" xmlns:p="http://schemas.openxmlformats.org/presentationml/2006/main">
   <p:cSld>
     <p:spTree>
@@ -20689,7 +20582,7 @@
             <a:fld id="{94A61778-175D-474E-885D-81B1AC1A62AB}" type="slidenum">
               <a:rPr lang="en-US" smtClean="0"/>
               <a:pPr/>
-              <a:t>26</a:t>
+              <a:t>27</a:t>
             </a:fld>
             <a:endParaRPr lang="en-US"/>
           </a:p>
@@ -20951,7 +20844,7 @@
 </p:sld>
 </file>
 
-<file path=ppt/slides/slide27.xml><?xml version="1.0" encoding="utf-8"?>
+<file path=ppt/slides/slide28.xml><?xml version="1.0" encoding="utf-8"?>
 <p:sld xmlns:a="http://schemas.openxmlformats.org/drawingml/2006/main" xmlns:r="http://schemas.openxmlformats.org/officeDocument/2006/relationships" xmlns:p="http://schemas.openxmlformats.org/presentationml/2006/main">
   <p:cSld>
     <p:spTree>
@@ -21013,7 +20906,7 @@
 </p:sld>
 </file>
 
-<file path=ppt/slides/slide28.xml><?xml version="1.0" encoding="utf-8"?>
+<file path=ppt/slides/slide29.xml><?xml version="1.0" encoding="utf-8"?>
 <p:sld xmlns:a="http://schemas.openxmlformats.org/drawingml/2006/main" xmlns:r="http://schemas.openxmlformats.org/officeDocument/2006/relationships" xmlns:p="http://schemas.openxmlformats.org/presentationml/2006/main">
   <p:cSld>
     <p:spTree>
@@ -21067,69 +20960,6 @@
     <p:extLst>
       <p:ext uri="{BB962C8B-B14F-4D97-AF65-F5344CB8AC3E}">
         <p14:creationId xmlns:p14="http://schemas.microsoft.com/office/powerpoint/2010/main" val="2674272521"/>
-      </p:ext>
-    </p:extLst>
-  </p:cSld>
-  <p:clrMapOvr>
-    <a:masterClrMapping/>
-  </p:clrMapOvr>
-</p:sld>
-</file>
-
-<file path=ppt/slides/slide29.xml><?xml version="1.0" encoding="utf-8"?>
-<p:sld xmlns:a="http://schemas.openxmlformats.org/drawingml/2006/main" xmlns:r="http://schemas.openxmlformats.org/officeDocument/2006/relationships" xmlns:p="http://schemas.openxmlformats.org/presentationml/2006/main">
-  <p:cSld>
-    <p:spTree>
-      <p:nvGrpSpPr>
-        <p:cNvPr id="1" name=""/>
-        <p:cNvGrpSpPr/>
-        <p:nvPr/>
-      </p:nvGrpSpPr>
-      <p:grpSpPr>
-        <a:xfrm>
-          <a:off x="0" y="0"/>
-          <a:ext cx="0" cy="0"/>
-          <a:chOff x="0" y="0"/>
-          <a:chExt cx="0" cy="0"/>
-        </a:xfrm>
-      </p:grpSpPr>
-      <p:pic>
-        <p:nvPicPr>
-          <p:cNvPr id="5122" name="Picture 2"/>
-          <p:cNvPicPr>
-            <a:picLocks noChangeAspect="1" noChangeArrowheads="1"/>
-          </p:cNvPicPr>
-          <p:nvPr/>
-        </p:nvPicPr>
-        <p:blipFill>
-          <a:blip r:embed="rId2" cstate="print"/>
-          <a:srcRect/>
-          <a:stretch>
-            <a:fillRect/>
-          </a:stretch>
-        </p:blipFill>
-        <p:spPr bwMode="auto">
-          <a:xfrm>
-            <a:off x="815926" y="927598"/>
-            <a:ext cx="7519811" cy="5008968"/>
-          </a:xfrm>
-          <a:prstGeom prst="rect">
-            <a:avLst/>
-          </a:prstGeom>
-          <a:noFill/>
-          <a:ln w="9525">
-            <a:noFill/>
-            <a:miter lim="800000"/>
-            <a:headEnd/>
-            <a:tailEnd/>
-          </a:ln>
-          <a:effectLst/>
-        </p:spPr>
-      </p:pic>
-    </p:spTree>
-    <p:extLst>
-      <p:ext uri="{BB962C8B-B14F-4D97-AF65-F5344CB8AC3E}">
-        <p14:creationId xmlns:p14="http://schemas.microsoft.com/office/powerpoint/2010/main" val="3489346234"/>
       </p:ext>
     </p:extLst>
   </p:cSld>
@@ -22411,6 +22241,69 @@
           <a:chExt cx="0" cy="0"/>
         </a:xfrm>
       </p:grpSpPr>
+      <p:pic>
+        <p:nvPicPr>
+          <p:cNvPr id="5122" name="Picture 2"/>
+          <p:cNvPicPr>
+            <a:picLocks noChangeAspect="1" noChangeArrowheads="1"/>
+          </p:cNvPicPr>
+          <p:nvPr/>
+        </p:nvPicPr>
+        <p:blipFill>
+          <a:blip r:embed="rId2" cstate="print"/>
+          <a:srcRect/>
+          <a:stretch>
+            <a:fillRect/>
+          </a:stretch>
+        </p:blipFill>
+        <p:spPr bwMode="auto">
+          <a:xfrm>
+            <a:off x="815926" y="927598"/>
+            <a:ext cx="7519811" cy="5008968"/>
+          </a:xfrm>
+          <a:prstGeom prst="rect">
+            <a:avLst/>
+          </a:prstGeom>
+          <a:noFill/>
+          <a:ln w="9525">
+            <a:noFill/>
+            <a:miter lim="800000"/>
+            <a:headEnd/>
+            <a:tailEnd/>
+          </a:ln>
+          <a:effectLst/>
+        </p:spPr>
+      </p:pic>
+    </p:spTree>
+    <p:extLst>
+      <p:ext uri="{BB962C8B-B14F-4D97-AF65-F5344CB8AC3E}">
+        <p14:creationId xmlns:p14="http://schemas.microsoft.com/office/powerpoint/2010/main" val="3489346234"/>
+      </p:ext>
+    </p:extLst>
+  </p:cSld>
+  <p:clrMapOvr>
+    <a:masterClrMapping/>
+  </p:clrMapOvr>
+</p:sld>
+</file>
+
+<file path=ppt/slides/slide31.xml><?xml version="1.0" encoding="utf-8"?>
+<p:sld xmlns:a="http://schemas.openxmlformats.org/drawingml/2006/main" xmlns:r="http://schemas.openxmlformats.org/officeDocument/2006/relationships" xmlns:p="http://schemas.openxmlformats.org/presentationml/2006/main">
+  <p:cSld>
+    <p:spTree>
+      <p:nvGrpSpPr>
+        <p:cNvPr id="1" name=""/>
+        <p:cNvGrpSpPr/>
+        <p:nvPr/>
+      </p:nvGrpSpPr>
+      <p:grpSpPr>
+        <a:xfrm>
+          <a:off x="0" y="0"/>
+          <a:ext cx="0" cy="0"/>
+          <a:chOff x="0" y="0"/>
+          <a:chExt cx="0" cy="0"/>
+        </a:xfrm>
+      </p:grpSpPr>
       <p:sp>
         <p:nvSpPr>
           <p:cNvPr id="2" name="Title 1"/>
@@ -23613,7 +23506,7 @@
 </p:sld>
 </file>
 
-<file path=ppt/slides/slide31.xml><?xml version="1.0" encoding="utf-8"?>
+<file path=ppt/slides/slide32.xml><?xml version="1.0" encoding="utf-8"?>
 <p:sld xmlns:a="http://schemas.openxmlformats.org/drawingml/2006/main" xmlns:r="http://schemas.openxmlformats.org/officeDocument/2006/relationships" xmlns:p="http://schemas.openxmlformats.org/presentationml/2006/main">
   <p:cSld>
     <p:spTree>
@@ -26830,7 +26723,7 @@
 </p:sld>
 </file>
 
-<file path=ppt/slides/slide32.xml><?xml version="1.0" encoding="utf-8"?>
+<file path=ppt/slides/slide33.xml><?xml version="1.0" encoding="utf-8"?>
 <p:sld xmlns:a="http://schemas.openxmlformats.org/drawingml/2006/main" xmlns:r="http://schemas.openxmlformats.org/officeDocument/2006/relationships" xmlns:p="http://schemas.openxmlformats.org/presentationml/2006/main">
   <p:cSld>
     <p:spTree>
@@ -27007,7 +26900,7 @@
 </p:sld>
 </file>
 
-<file path=ppt/slides/slide33.xml><?xml version="1.0" encoding="utf-8"?>
+<file path=ppt/slides/slide34.xml><?xml version="1.0" encoding="utf-8"?>
 <p:sld xmlns:a="http://schemas.openxmlformats.org/drawingml/2006/main" xmlns:r="http://schemas.openxmlformats.org/officeDocument/2006/relationships" xmlns:p="http://schemas.openxmlformats.org/presentationml/2006/main">
   <p:cSld>
     <p:spTree>
@@ -27159,7 +27052,7 @@
 </p:sld>
 </file>
 
-<file path=ppt/slides/slide34.xml><?xml version="1.0" encoding="utf-8"?>
+<file path=ppt/slides/slide35.xml><?xml version="1.0" encoding="utf-8"?>
 <p:sld xmlns:a="http://schemas.openxmlformats.org/drawingml/2006/main" xmlns:r="http://schemas.openxmlformats.org/officeDocument/2006/relationships" xmlns:p="http://schemas.openxmlformats.org/presentationml/2006/main">
   <p:cSld>
     <p:spTree>
@@ -27242,7 +27135,7 @@
 </p:sld>
 </file>
 
-<file path=ppt/slides/slide35.xml><?xml version="1.0" encoding="utf-8"?>
+<file path=ppt/slides/slide36.xml><?xml version="1.0" encoding="utf-8"?>
 <p:sld xmlns:a="http://schemas.openxmlformats.org/drawingml/2006/main" xmlns:r="http://schemas.openxmlformats.org/officeDocument/2006/relationships" xmlns:p="http://schemas.openxmlformats.org/presentationml/2006/main">
   <p:cSld>
     <p:spTree>
@@ -27505,7 +27398,7 @@
 </p:sld>
 </file>
 
-<file path=ppt/slides/slide36.xml><?xml version="1.0" encoding="utf-8"?>
+<file path=ppt/slides/slide37.xml><?xml version="1.0" encoding="utf-8"?>
 <p:sld xmlns:a="http://schemas.openxmlformats.org/drawingml/2006/main" xmlns:r="http://schemas.openxmlformats.org/officeDocument/2006/relationships" xmlns:p="http://schemas.openxmlformats.org/presentationml/2006/main">
   <p:cSld>
     <p:spTree>
@@ -28988,7 +28881,7 @@
 </p:sld>
 </file>
 
-<file path=ppt/slides/slide37.xml><?xml version="1.0" encoding="utf-8"?>
+<file path=ppt/slides/slide38.xml><?xml version="1.0" encoding="utf-8"?>
 <p:sld xmlns:a="http://schemas.openxmlformats.org/drawingml/2006/main" xmlns:r="http://schemas.openxmlformats.org/officeDocument/2006/relationships" xmlns:p="http://schemas.openxmlformats.org/presentationml/2006/main">
   <p:cSld>
     <p:spTree>
@@ -29050,7 +28943,7 @@
 </p:sld>
 </file>
 
-<file path=ppt/slides/slide38.xml><?xml version="1.0" encoding="utf-8"?>
+<file path=ppt/slides/slide39.xml><?xml version="1.0" encoding="utf-8"?>
 <p:sld xmlns:a="http://schemas.openxmlformats.org/drawingml/2006/main" xmlns:r="http://schemas.openxmlformats.org/officeDocument/2006/relationships" xmlns:p="http://schemas.openxmlformats.org/presentationml/2006/main">
   <p:cSld>
     <p:spTree>
@@ -29112,7 +29005,620 @@
 </p:sld>
 </file>
 
-<file path=ppt/slides/slide39.xml><?xml version="1.0" encoding="utf-8"?>
+<file path=ppt/slides/slide4.xml><?xml version="1.0" encoding="utf-8"?>
+<p:sld xmlns:a="http://schemas.openxmlformats.org/drawingml/2006/main" xmlns:r="http://schemas.openxmlformats.org/officeDocument/2006/relationships" xmlns:p="http://schemas.openxmlformats.org/presentationml/2006/main">
+  <p:cSld>
+    <p:spTree>
+      <p:nvGrpSpPr>
+        <p:cNvPr id="1" name=""/>
+        <p:cNvGrpSpPr/>
+        <p:nvPr/>
+      </p:nvGrpSpPr>
+      <p:grpSpPr>
+        <a:xfrm>
+          <a:off x="0" y="0"/>
+          <a:ext cx="0" cy="0"/>
+          <a:chOff x="0" y="0"/>
+          <a:chExt cx="0" cy="0"/>
+        </a:xfrm>
+      </p:grpSpPr>
+      <p:sp>
+        <p:nvSpPr>
+          <p:cNvPr id="19458" name="Slide Number Placeholder 5"/>
+          <p:cNvSpPr>
+            <a:spLocks noGrp="1"/>
+          </p:cNvSpPr>
+          <p:nvPr>
+            <p:ph type="sldNum" sz="quarter" idx="12"/>
+          </p:nvPr>
+        </p:nvSpPr>
+        <p:spPr>
+          <a:noFill/>
+          <a:ln/>
+          <a:extLst>
+            <a:ext uri="{909E8E84-426E-40DD-AFC4-6F175D3DCCD1}">
+              <a14:hiddenFill xmlns:a14="http://schemas.microsoft.com/office/drawing/2010/main">
+                <a:solidFill>
+                  <a:srgbClr val="FFFFFF"/>
+                </a:solidFill>
+              </a14:hiddenFill>
+            </a:ext>
+            <a:ext uri="{91240B29-F687-4F45-9708-019B960494DF}">
+              <a14:hiddenLine xmlns:a14="http://schemas.microsoft.com/office/drawing/2010/main" w="9525">
+                <a:solidFill>
+                  <a:srgbClr val="000000"/>
+                </a:solidFill>
+                <a:miter lim="800000"/>
+                <a:headEnd/>
+                <a:tailEnd/>
+              </a14:hiddenLine>
+            </a:ext>
+          </a:extLst>
+        </p:spPr>
+        <p:txBody>
+          <a:bodyPr/>
+          <a:lstStyle>
+            <a:lvl1pPr eaLnBrk="0" hangingPunct="0">
+              <a:defRPr>
+                <a:solidFill>
+                  <a:schemeClr val="tx1"/>
+                </a:solidFill>
+                <a:latin typeface="Arial" charset="0"/>
+              </a:defRPr>
+            </a:lvl1pPr>
+            <a:lvl2pPr marL="557213" indent="-214313" eaLnBrk="0" hangingPunct="0">
+              <a:defRPr>
+                <a:solidFill>
+                  <a:schemeClr val="tx1"/>
+                </a:solidFill>
+                <a:latin typeface="Arial" charset="0"/>
+              </a:defRPr>
+            </a:lvl2pPr>
+            <a:lvl3pPr marL="857250" indent="-171450" eaLnBrk="0" hangingPunct="0">
+              <a:defRPr>
+                <a:solidFill>
+                  <a:schemeClr val="tx1"/>
+                </a:solidFill>
+                <a:latin typeface="Arial" charset="0"/>
+              </a:defRPr>
+            </a:lvl3pPr>
+            <a:lvl4pPr marL="1200150" indent="-171450" eaLnBrk="0" hangingPunct="0">
+              <a:defRPr>
+                <a:solidFill>
+                  <a:schemeClr val="tx1"/>
+                </a:solidFill>
+                <a:latin typeface="Arial" charset="0"/>
+              </a:defRPr>
+            </a:lvl4pPr>
+            <a:lvl5pPr marL="1543050" indent="-171450" eaLnBrk="0" hangingPunct="0">
+              <a:defRPr>
+                <a:solidFill>
+                  <a:schemeClr val="tx1"/>
+                </a:solidFill>
+                <a:latin typeface="Arial" charset="0"/>
+              </a:defRPr>
+            </a:lvl5pPr>
+            <a:lvl6pPr marL="1885950" indent="-171450" eaLnBrk="0" fontAlgn="base" hangingPunct="0">
+              <a:spcBef>
+                <a:spcPct val="0"/>
+              </a:spcBef>
+              <a:spcAft>
+                <a:spcPct val="0"/>
+              </a:spcAft>
+              <a:defRPr>
+                <a:solidFill>
+                  <a:schemeClr val="tx1"/>
+                </a:solidFill>
+                <a:latin typeface="Arial" charset="0"/>
+              </a:defRPr>
+            </a:lvl6pPr>
+            <a:lvl7pPr marL="2228850" indent="-171450" eaLnBrk="0" fontAlgn="base" hangingPunct="0">
+              <a:spcBef>
+                <a:spcPct val="0"/>
+              </a:spcBef>
+              <a:spcAft>
+                <a:spcPct val="0"/>
+              </a:spcAft>
+              <a:defRPr>
+                <a:solidFill>
+                  <a:schemeClr val="tx1"/>
+                </a:solidFill>
+                <a:latin typeface="Arial" charset="0"/>
+              </a:defRPr>
+            </a:lvl7pPr>
+            <a:lvl8pPr marL="2571750" indent="-171450" eaLnBrk="0" fontAlgn="base" hangingPunct="0">
+              <a:spcBef>
+                <a:spcPct val="0"/>
+              </a:spcBef>
+              <a:spcAft>
+                <a:spcPct val="0"/>
+              </a:spcAft>
+              <a:defRPr>
+                <a:solidFill>
+                  <a:schemeClr val="tx1"/>
+                </a:solidFill>
+                <a:latin typeface="Arial" charset="0"/>
+              </a:defRPr>
+            </a:lvl8pPr>
+            <a:lvl9pPr marL="2914650" indent="-171450" eaLnBrk="0" fontAlgn="base" hangingPunct="0">
+              <a:spcBef>
+                <a:spcPct val="0"/>
+              </a:spcBef>
+              <a:spcAft>
+                <a:spcPct val="0"/>
+              </a:spcAft>
+              <a:defRPr>
+                <a:solidFill>
+                  <a:schemeClr val="tx1"/>
+                </a:solidFill>
+                <a:latin typeface="Arial" charset="0"/>
+              </a:defRPr>
+            </a:lvl9pPr>
+          </a:lstStyle>
+          <a:p>
+            <a:pPr eaLnBrk="1" hangingPunct="1"/>
+            <a:fld id="{5DE43916-2E53-4087-A7F0-C9C9128B3A17}" type="slidenum">
+              <a:rPr lang="en-US" smtClean="0"/>
+              <a:pPr eaLnBrk="1" hangingPunct="1"/>
+              <a:t>4</a:t>
+            </a:fld>
+            <a:endParaRPr lang="en-US"/>
+          </a:p>
+        </p:txBody>
+      </p:sp>
+      <p:sp>
+        <p:nvSpPr>
+          <p:cNvPr id="19459" name="Rectangle 2"/>
+          <p:cNvSpPr>
+            <a:spLocks noGrp="1" noChangeArrowheads="1"/>
+          </p:cNvSpPr>
+          <p:nvPr>
+            <p:ph type="title"/>
+          </p:nvPr>
+        </p:nvSpPr>
+        <p:spPr/>
+        <p:txBody>
+          <a:bodyPr/>
+          <a:lstStyle/>
+          <a:p>
+            <a:pPr eaLnBrk="1" hangingPunct="1"/>
+            <a:r>
+              <a:rPr lang="en-US"/>
+              <a:t>Driving Force</a:t>
+            </a:r>
+          </a:p>
+        </p:txBody>
+      </p:sp>
+      <p:sp>
+        <p:nvSpPr>
+          <p:cNvPr id="19460" name="Rectangle 3"/>
+          <p:cNvSpPr>
+            <a:spLocks noGrp="1" noChangeArrowheads="1"/>
+          </p:cNvSpPr>
+          <p:nvPr>
+            <p:ph type="body" idx="1"/>
+          </p:nvPr>
+        </p:nvSpPr>
+        <p:spPr/>
+        <p:txBody>
+          <a:bodyPr>
+            <a:normAutofit/>
+          </a:bodyPr>
+          <a:lstStyle/>
+          <a:p>
+            <a:pPr eaLnBrk="1" hangingPunct="1"/>
+            <a:r>
+              <a:rPr lang="en-US" sz="1800" dirty="0"/>
+              <a:t>Last section we added a force                   that killed our oscillation</a:t>
+            </a:r>
+          </a:p>
+          <a:p>
+            <a:pPr eaLnBrk="1" hangingPunct="1"/>
+            <a:endParaRPr lang="en-US" sz="1800" dirty="0"/>
+          </a:p>
+          <a:p>
+            <a:pPr eaLnBrk="1" hangingPunct="1"/>
+            <a:r>
+              <a:rPr lang="en-US" sz="1800" dirty="0"/>
+              <a:t>Suppose we want to keep it going</a:t>
+            </a:r>
+          </a:p>
+          <a:p>
+            <a:pPr eaLnBrk="1" hangingPunct="1"/>
+            <a:endParaRPr lang="en-US" sz="1800" dirty="0"/>
+          </a:p>
+          <a:p>
+            <a:pPr eaLnBrk="1" hangingPunct="1"/>
+            <a:r>
+              <a:rPr lang="en-US" sz="1800" dirty="0"/>
+              <a:t>Add a force </a:t>
+            </a:r>
+          </a:p>
+          <a:p>
+            <a:pPr eaLnBrk="1" hangingPunct="1"/>
+            <a:endParaRPr lang="en-US" sz="1800" dirty="0"/>
+          </a:p>
+          <a:p>
+            <a:pPr eaLnBrk="1" hangingPunct="1">
+              <a:buFontTx/>
+              <a:buNone/>
+            </a:pPr>
+            <a:r>
+              <a:rPr lang="en-US" sz="1800" dirty="0"/>
+              <a:t>     where F</a:t>
+            </a:r>
+            <a:r>
+              <a:rPr lang="en-US" sz="1800" baseline="-25000" dirty="0"/>
+              <a:t>o</a:t>
+            </a:r>
+            <a:r>
+              <a:rPr lang="en-US" sz="1800" dirty="0"/>
+              <a:t> is a constant and where </a:t>
+            </a:r>
+            <a:r>
+              <a:rPr lang="en-US" sz="1800" dirty="0">
+                <a:sym typeface="Symbol" pitchFamily="18" charset="2"/>
+              </a:rPr>
+              <a:t></a:t>
+            </a:r>
+            <a:r>
+              <a:rPr lang="en-US" sz="1800" baseline="-25000" dirty="0"/>
+              <a:t>f</a:t>
+            </a:r>
+            <a:r>
+              <a:rPr lang="en-US" sz="1800" dirty="0"/>
+              <a:t> is the angular frequency of the driving force</a:t>
+            </a:r>
+          </a:p>
+          <a:p>
+            <a:pPr eaLnBrk="1" hangingPunct="1">
+              <a:buFontTx/>
+              <a:buNone/>
+            </a:pPr>
+            <a:endParaRPr lang="en-US" sz="1800" dirty="0"/>
+          </a:p>
+          <a:p>
+            <a:pPr eaLnBrk="1" hangingPunct="1">
+              <a:buFontTx/>
+              <a:buNone/>
+            </a:pPr>
+            <a:endParaRPr lang="en-US" sz="1800" dirty="0"/>
+          </a:p>
+          <a:p>
+            <a:pPr eaLnBrk="1" hangingPunct="1">
+              <a:buFontTx/>
+              <a:buNone/>
+            </a:pPr>
+            <a:endParaRPr lang="en-US" sz="1800" dirty="0"/>
+          </a:p>
+          <a:p>
+            <a:pPr eaLnBrk="1" hangingPunct="1"/>
+            <a:r>
+              <a:rPr lang="en-US" sz="1800" dirty="0"/>
+              <a:t>This one is very hard to solve</a:t>
+            </a:r>
+          </a:p>
+        </p:txBody>
+      </p:sp>
+      <p:sp>
+        <p:nvSpPr>
+          <p:cNvPr id="19461" name="Rectangle 4"/>
+          <p:cNvSpPr>
+            <a:spLocks noChangeArrowheads="1"/>
+          </p:cNvSpPr>
+          <p:nvPr/>
+        </p:nvSpPr>
+        <p:spPr bwMode="auto">
+          <a:xfrm>
+            <a:off x="1143001" y="707209"/>
+            <a:ext cx="184731" cy="300082"/>
+          </a:xfrm>
+          <a:prstGeom prst="rect">
+            <a:avLst/>
+          </a:prstGeom>
+          <a:noFill/>
+          <a:ln>
+            <a:noFill/>
+          </a:ln>
+          <a:extLst>
+            <a:ext uri="{909E8E84-426E-40DD-AFC4-6F175D3DCCD1}">
+              <a14:hiddenFill xmlns:a14="http://schemas.microsoft.com/office/drawing/2010/main">
+                <a:solidFill>
+                  <a:srgbClr val="FFFFFF"/>
+                </a:solidFill>
+              </a14:hiddenFill>
+            </a:ext>
+            <a:ext uri="{91240B29-F687-4F45-9708-019B960494DF}">
+              <a14:hiddenLine xmlns:a14="http://schemas.microsoft.com/office/drawing/2010/main" w="9525" algn="ctr">
+                <a:solidFill>
+                  <a:srgbClr val="000000"/>
+                </a:solidFill>
+                <a:miter lim="800000"/>
+                <a:headEnd/>
+                <a:tailEnd/>
+              </a14:hiddenLine>
+            </a:ext>
+          </a:extLst>
+        </p:spPr>
+        <p:txBody>
+          <a:bodyPr wrap="none" anchor="ctr">
+            <a:spAutoFit/>
+          </a:bodyPr>
+          <a:lstStyle/>
+          <a:p>
+            <a:endParaRPr lang="en-US" sz="1350"/>
+          </a:p>
+        </p:txBody>
+      </p:sp>
+      <p:graphicFrame>
+        <p:nvGraphicFramePr>
+          <p:cNvPr id="19462" name="Object 5"/>
+          <p:cNvGraphicFramePr>
+            <a:graphicFrameLocks noChangeAspect="1"/>
+          </p:cNvGraphicFramePr>
+          <p:nvPr>
+            <p:extLst>
+              <p:ext uri="{D42A27DB-BD31-4B8C-83A1-F6EECF244321}">
+                <p14:modId xmlns:p14="http://schemas.microsoft.com/office/powerpoint/2010/main" val="3118549179"/>
+              </p:ext>
+            </p:extLst>
+          </p:nvPr>
+        </p:nvGraphicFramePr>
+        <p:xfrm>
+          <a:off x="3731481" y="1669537"/>
+          <a:ext cx="757170" cy="292098"/>
+        </p:xfrm>
+        <a:graphic>
+          <a:graphicData uri="http://schemas.openxmlformats.org/presentationml/2006/ole">
+            <mc:AlternateContent xmlns:mc="http://schemas.openxmlformats.org/markup-compatibility/2006">
+              <mc:Choice xmlns:v="urn:schemas-microsoft-com:vml" Requires="v">
+                <p:oleObj name="Equation" r:id="rId2" imgW="596900" imgH="228600" progId="Equation.3">
+                  <p:embed/>
+                </p:oleObj>
+              </mc:Choice>
+              <mc:Fallback>
+                <p:oleObj name="Equation" r:id="rId2" imgW="596900" imgH="228600" progId="Equation.3">
+                  <p:embed/>
+                  <p:pic>
+                    <p:nvPicPr>
+                      <p:cNvPr id="19462" name="Object 5"/>
+                      <p:cNvPicPr>
+                        <a:picLocks noChangeAspect="1" noChangeArrowheads="1"/>
+                      </p:cNvPicPr>
+                      <p:nvPr/>
+                    </p:nvPicPr>
+                    <p:blipFill>
+                      <a:blip r:embed="rId3">
+                        <a:extLst>
+                          <a:ext uri="{28A0092B-C50C-407E-A947-70E740481C1C}">
+                            <a14:useLocalDpi xmlns:a14="http://schemas.microsoft.com/office/drawing/2010/main" val="0"/>
+                          </a:ext>
+                        </a:extLst>
+                      </a:blip>
+                      <a:srcRect/>
+                      <a:stretch>
+                        <a:fillRect/>
+                      </a:stretch>
+                    </p:blipFill>
+                    <p:spPr bwMode="auto">
+                      <a:xfrm>
+                        <a:off x="3731481" y="1669537"/>
+                        <a:ext cx="757170" cy="292098"/>
+                      </a:xfrm>
+                      <a:prstGeom prst="rect">
+                        <a:avLst/>
+                      </a:prstGeom>
+                      <a:noFill/>
+                      <a:ln>
+                        <a:noFill/>
+                      </a:ln>
+                    </p:spPr>
+                  </p:pic>
+                </p:oleObj>
+              </mc:Fallback>
+            </mc:AlternateContent>
+          </a:graphicData>
+        </a:graphic>
+      </p:graphicFrame>
+      <p:sp>
+        <p:nvSpPr>
+          <p:cNvPr id="19463" name="Rectangle 6"/>
+          <p:cNvSpPr>
+            <a:spLocks noChangeArrowheads="1"/>
+          </p:cNvSpPr>
+          <p:nvPr/>
+        </p:nvSpPr>
+        <p:spPr bwMode="auto">
+          <a:xfrm>
+            <a:off x="1143001" y="707209"/>
+            <a:ext cx="184731" cy="300082"/>
+          </a:xfrm>
+          <a:prstGeom prst="rect">
+            <a:avLst/>
+          </a:prstGeom>
+          <a:noFill/>
+          <a:ln>
+            <a:noFill/>
+          </a:ln>
+          <a:extLst>
+            <a:ext uri="{909E8E84-426E-40DD-AFC4-6F175D3DCCD1}">
+              <a14:hiddenFill xmlns:a14="http://schemas.microsoft.com/office/drawing/2010/main">
+                <a:solidFill>
+                  <a:srgbClr val="FFFFFF"/>
+                </a:solidFill>
+              </a14:hiddenFill>
+            </a:ext>
+            <a:ext uri="{91240B29-F687-4F45-9708-019B960494DF}">
+              <a14:hiddenLine xmlns:a14="http://schemas.microsoft.com/office/drawing/2010/main" w="9525" algn="ctr">
+                <a:solidFill>
+                  <a:srgbClr val="000000"/>
+                </a:solidFill>
+                <a:miter lim="800000"/>
+                <a:headEnd/>
+                <a:tailEnd/>
+              </a14:hiddenLine>
+            </a:ext>
+          </a:extLst>
+        </p:spPr>
+        <p:txBody>
+          <a:bodyPr wrap="none" anchor="ctr">
+            <a:spAutoFit/>
+          </a:bodyPr>
+          <a:lstStyle/>
+          <a:p>
+            <a:endParaRPr lang="en-US" sz="1350"/>
+          </a:p>
+        </p:txBody>
+      </p:sp>
+      <p:graphicFrame>
+        <p:nvGraphicFramePr>
+          <p:cNvPr id="19464" name="Object 7"/>
+          <p:cNvGraphicFramePr>
+            <a:graphicFrameLocks noChangeAspect="1"/>
+          </p:cNvGraphicFramePr>
+          <p:nvPr>
+            <p:extLst>
+              <p:ext uri="{D42A27DB-BD31-4B8C-83A1-F6EECF244321}">
+                <p14:modId xmlns:p14="http://schemas.microsoft.com/office/powerpoint/2010/main" val="1315654589"/>
+              </p:ext>
+            </p:extLst>
+          </p:nvPr>
+        </p:nvGraphicFramePr>
+        <p:xfrm>
+          <a:off x="2109932" y="2860706"/>
+          <a:ext cx="1990990" cy="436308"/>
+        </p:xfrm>
+        <a:graphic>
+          <a:graphicData uri="http://schemas.openxmlformats.org/presentationml/2006/ole">
+            <mc:AlternateContent xmlns:mc="http://schemas.openxmlformats.org/markup-compatibility/2006">
+              <mc:Choice xmlns:v="urn:schemas-microsoft-com:vml" Requires="v">
+                <p:oleObj name="Equation" r:id="rId4" imgW="1104900" imgH="241300" progId="Equation.3">
+                  <p:embed/>
+                </p:oleObj>
+              </mc:Choice>
+              <mc:Fallback>
+                <p:oleObj name="Equation" r:id="rId4" imgW="1104900" imgH="241300" progId="Equation.3">
+                  <p:embed/>
+                  <p:pic>
+                    <p:nvPicPr>
+                      <p:cNvPr id="19464" name="Object 7"/>
+                      <p:cNvPicPr>
+                        <a:picLocks noChangeAspect="1" noChangeArrowheads="1"/>
+                      </p:cNvPicPr>
+                      <p:nvPr/>
+                    </p:nvPicPr>
+                    <p:blipFill>
+                      <a:blip r:embed="rId5">
+                        <a:extLst>
+                          <a:ext uri="{28A0092B-C50C-407E-A947-70E740481C1C}">
+                            <a14:useLocalDpi xmlns:a14="http://schemas.microsoft.com/office/drawing/2010/main" val="0"/>
+                          </a:ext>
+                        </a:extLst>
+                      </a:blip>
+                      <a:srcRect/>
+                      <a:stretch>
+                        <a:fillRect/>
+                      </a:stretch>
+                    </p:blipFill>
+                    <p:spPr bwMode="auto">
+                      <a:xfrm>
+                        <a:off x="2109932" y="2860706"/>
+                        <a:ext cx="1990990" cy="436308"/>
+                      </a:xfrm>
+                      <a:prstGeom prst="rect">
+                        <a:avLst/>
+                      </a:prstGeom>
+                      <a:noFill/>
+                      <a:ln>
+                        <a:noFill/>
+                      </a:ln>
+                    </p:spPr>
+                  </p:pic>
+                </p:oleObj>
+              </mc:Fallback>
+            </mc:AlternateContent>
+          </a:graphicData>
+        </a:graphic>
+      </p:graphicFrame>
+      <p:graphicFrame>
+        <p:nvGraphicFramePr>
+          <p:cNvPr id="19465" name="Object 8"/>
+          <p:cNvGraphicFramePr>
+            <a:graphicFrameLocks noChangeAspect="1"/>
+          </p:cNvGraphicFramePr>
+          <p:nvPr>
+            <p:extLst>
+              <p:ext uri="{D42A27DB-BD31-4B8C-83A1-F6EECF244321}">
+                <p14:modId xmlns:p14="http://schemas.microsoft.com/office/powerpoint/2010/main" val="1468611588"/>
+              </p:ext>
+            </p:extLst>
+          </p:nvPr>
+        </p:nvGraphicFramePr>
+        <p:xfrm>
+          <a:off x="2482883" y="4275280"/>
+          <a:ext cx="3585914" cy="436309"/>
+        </p:xfrm>
+        <a:graphic>
+          <a:graphicData uri="http://schemas.openxmlformats.org/presentationml/2006/ole">
+            <mc:AlternateContent xmlns:mc="http://schemas.openxmlformats.org/markup-compatibility/2006">
+              <mc:Choice xmlns:v="urn:schemas-microsoft-com:vml" Requires="v">
+                <p:oleObj name="Equation" r:id="rId6" imgW="1993900" imgH="241300" progId="Equation.3">
+                  <p:embed/>
+                </p:oleObj>
+              </mc:Choice>
+              <mc:Fallback>
+                <p:oleObj name="Equation" r:id="rId6" imgW="1993900" imgH="241300" progId="Equation.3">
+                  <p:embed/>
+                  <p:pic>
+                    <p:nvPicPr>
+                      <p:cNvPr id="19465" name="Object 8"/>
+                      <p:cNvPicPr>
+                        <a:picLocks noChangeAspect="1" noChangeArrowheads="1"/>
+                      </p:cNvPicPr>
+                      <p:nvPr/>
+                    </p:nvPicPr>
+                    <p:blipFill>
+                      <a:blip r:embed="rId7">
+                        <a:extLst>
+                          <a:ext uri="{28A0092B-C50C-407E-A947-70E740481C1C}">
+                            <a14:useLocalDpi xmlns:a14="http://schemas.microsoft.com/office/drawing/2010/main" val="0"/>
+                          </a:ext>
+                        </a:extLst>
+                      </a:blip>
+                      <a:srcRect/>
+                      <a:stretch>
+                        <a:fillRect/>
+                      </a:stretch>
+                    </p:blipFill>
+                    <p:spPr bwMode="auto">
+                      <a:xfrm>
+                        <a:off x="2482883" y="4275280"/>
+                        <a:ext cx="3585914" cy="436309"/>
+                      </a:xfrm>
+                      <a:prstGeom prst="rect">
+                        <a:avLst/>
+                      </a:prstGeom>
+                      <a:noFill/>
+                      <a:ln>
+                        <a:noFill/>
+                      </a:ln>
+                    </p:spPr>
+                  </p:pic>
+                </p:oleObj>
+              </mc:Fallback>
+            </mc:AlternateContent>
+          </a:graphicData>
+        </a:graphic>
+      </p:graphicFrame>
+    </p:spTree>
+  </p:cSld>
+  <p:clrMapOvr>
+    <a:masterClrMapping/>
+  </p:clrMapOvr>
+</p:sld>
+</file>
+
+<file path=ppt/slides/slide40.xml><?xml version="1.0" encoding="utf-8"?>
 <p:sld xmlns:a="http://schemas.openxmlformats.org/drawingml/2006/main" xmlns:r="http://schemas.openxmlformats.org/officeDocument/2006/relationships" xmlns:p="http://schemas.openxmlformats.org/presentationml/2006/main">
   <p:cSld>
     <p:spTree>
@@ -29497,620 +30003,7 @@
 </p:sld>
 </file>
 
-<file path=ppt/slides/slide4.xml><?xml version="1.0" encoding="utf-8"?>
-<p:sld xmlns:a="http://schemas.openxmlformats.org/drawingml/2006/main" xmlns:r="http://schemas.openxmlformats.org/officeDocument/2006/relationships" xmlns:p="http://schemas.openxmlformats.org/presentationml/2006/main">
-  <p:cSld>
-    <p:spTree>
-      <p:nvGrpSpPr>
-        <p:cNvPr id="1" name=""/>
-        <p:cNvGrpSpPr/>
-        <p:nvPr/>
-      </p:nvGrpSpPr>
-      <p:grpSpPr>
-        <a:xfrm>
-          <a:off x="0" y="0"/>
-          <a:ext cx="0" cy="0"/>
-          <a:chOff x="0" y="0"/>
-          <a:chExt cx="0" cy="0"/>
-        </a:xfrm>
-      </p:grpSpPr>
-      <p:sp>
-        <p:nvSpPr>
-          <p:cNvPr id="19458" name="Slide Number Placeholder 5"/>
-          <p:cNvSpPr>
-            <a:spLocks noGrp="1"/>
-          </p:cNvSpPr>
-          <p:nvPr>
-            <p:ph type="sldNum" sz="quarter" idx="12"/>
-          </p:nvPr>
-        </p:nvSpPr>
-        <p:spPr>
-          <a:noFill/>
-          <a:ln/>
-          <a:extLst>
-            <a:ext uri="{909E8E84-426E-40DD-AFC4-6F175D3DCCD1}">
-              <a14:hiddenFill xmlns:a14="http://schemas.microsoft.com/office/drawing/2010/main">
-                <a:solidFill>
-                  <a:srgbClr val="FFFFFF"/>
-                </a:solidFill>
-              </a14:hiddenFill>
-            </a:ext>
-            <a:ext uri="{91240B29-F687-4F45-9708-019B960494DF}">
-              <a14:hiddenLine xmlns:a14="http://schemas.microsoft.com/office/drawing/2010/main" w="9525">
-                <a:solidFill>
-                  <a:srgbClr val="000000"/>
-                </a:solidFill>
-                <a:miter lim="800000"/>
-                <a:headEnd/>
-                <a:tailEnd/>
-              </a14:hiddenLine>
-            </a:ext>
-          </a:extLst>
-        </p:spPr>
-        <p:txBody>
-          <a:bodyPr/>
-          <a:lstStyle>
-            <a:lvl1pPr eaLnBrk="0" hangingPunct="0">
-              <a:defRPr>
-                <a:solidFill>
-                  <a:schemeClr val="tx1"/>
-                </a:solidFill>
-                <a:latin typeface="Arial" charset="0"/>
-              </a:defRPr>
-            </a:lvl1pPr>
-            <a:lvl2pPr marL="557213" indent="-214313" eaLnBrk="0" hangingPunct="0">
-              <a:defRPr>
-                <a:solidFill>
-                  <a:schemeClr val="tx1"/>
-                </a:solidFill>
-                <a:latin typeface="Arial" charset="0"/>
-              </a:defRPr>
-            </a:lvl2pPr>
-            <a:lvl3pPr marL="857250" indent="-171450" eaLnBrk="0" hangingPunct="0">
-              <a:defRPr>
-                <a:solidFill>
-                  <a:schemeClr val="tx1"/>
-                </a:solidFill>
-                <a:latin typeface="Arial" charset="0"/>
-              </a:defRPr>
-            </a:lvl3pPr>
-            <a:lvl4pPr marL="1200150" indent="-171450" eaLnBrk="0" hangingPunct="0">
-              <a:defRPr>
-                <a:solidFill>
-                  <a:schemeClr val="tx1"/>
-                </a:solidFill>
-                <a:latin typeface="Arial" charset="0"/>
-              </a:defRPr>
-            </a:lvl4pPr>
-            <a:lvl5pPr marL="1543050" indent="-171450" eaLnBrk="0" hangingPunct="0">
-              <a:defRPr>
-                <a:solidFill>
-                  <a:schemeClr val="tx1"/>
-                </a:solidFill>
-                <a:latin typeface="Arial" charset="0"/>
-              </a:defRPr>
-            </a:lvl5pPr>
-            <a:lvl6pPr marL="1885950" indent="-171450" eaLnBrk="0" fontAlgn="base" hangingPunct="0">
-              <a:spcBef>
-                <a:spcPct val="0"/>
-              </a:spcBef>
-              <a:spcAft>
-                <a:spcPct val="0"/>
-              </a:spcAft>
-              <a:defRPr>
-                <a:solidFill>
-                  <a:schemeClr val="tx1"/>
-                </a:solidFill>
-                <a:latin typeface="Arial" charset="0"/>
-              </a:defRPr>
-            </a:lvl6pPr>
-            <a:lvl7pPr marL="2228850" indent="-171450" eaLnBrk="0" fontAlgn="base" hangingPunct="0">
-              <a:spcBef>
-                <a:spcPct val="0"/>
-              </a:spcBef>
-              <a:spcAft>
-                <a:spcPct val="0"/>
-              </a:spcAft>
-              <a:defRPr>
-                <a:solidFill>
-                  <a:schemeClr val="tx1"/>
-                </a:solidFill>
-                <a:latin typeface="Arial" charset="0"/>
-              </a:defRPr>
-            </a:lvl7pPr>
-            <a:lvl8pPr marL="2571750" indent="-171450" eaLnBrk="0" fontAlgn="base" hangingPunct="0">
-              <a:spcBef>
-                <a:spcPct val="0"/>
-              </a:spcBef>
-              <a:spcAft>
-                <a:spcPct val="0"/>
-              </a:spcAft>
-              <a:defRPr>
-                <a:solidFill>
-                  <a:schemeClr val="tx1"/>
-                </a:solidFill>
-                <a:latin typeface="Arial" charset="0"/>
-              </a:defRPr>
-            </a:lvl8pPr>
-            <a:lvl9pPr marL="2914650" indent="-171450" eaLnBrk="0" fontAlgn="base" hangingPunct="0">
-              <a:spcBef>
-                <a:spcPct val="0"/>
-              </a:spcBef>
-              <a:spcAft>
-                <a:spcPct val="0"/>
-              </a:spcAft>
-              <a:defRPr>
-                <a:solidFill>
-                  <a:schemeClr val="tx1"/>
-                </a:solidFill>
-                <a:latin typeface="Arial" charset="0"/>
-              </a:defRPr>
-            </a:lvl9pPr>
-          </a:lstStyle>
-          <a:p>
-            <a:pPr eaLnBrk="1" hangingPunct="1"/>
-            <a:fld id="{5DE43916-2E53-4087-A7F0-C9C9128B3A17}" type="slidenum">
-              <a:rPr lang="en-US" smtClean="0"/>
-              <a:pPr eaLnBrk="1" hangingPunct="1"/>
-              <a:t>4</a:t>
-            </a:fld>
-            <a:endParaRPr lang="en-US"/>
-          </a:p>
-        </p:txBody>
-      </p:sp>
-      <p:sp>
-        <p:nvSpPr>
-          <p:cNvPr id="19459" name="Rectangle 2"/>
-          <p:cNvSpPr>
-            <a:spLocks noGrp="1" noChangeArrowheads="1"/>
-          </p:cNvSpPr>
-          <p:nvPr>
-            <p:ph type="title"/>
-          </p:nvPr>
-        </p:nvSpPr>
-        <p:spPr/>
-        <p:txBody>
-          <a:bodyPr/>
-          <a:lstStyle/>
-          <a:p>
-            <a:pPr eaLnBrk="1" hangingPunct="1"/>
-            <a:r>
-              <a:rPr lang="en-US"/>
-              <a:t>Driving Force</a:t>
-            </a:r>
-          </a:p>
-        </p:txBody>
-      </p:sp>
-      <p:sp>
-        <p:nvSpPr>
-          <p:cNvPr id="19460" name="Rectangle 3"/>
-          <p:cNvSpPr>
-            <a:spLocks noGrp="1" noChangeArrowheads="1"/>
-          </p:cNvSpPr>
-          <p:nvPr>
-            <p:ph type="body" idx="1"/>
-          </p:nvPr>
-        </p:nvSpPr>
-        <p:spPr/>
-        <p:txBody>
-          <a:bodyPr>
-            <a:normAutofit/>
-          </a:bodyPr>
-          <a:lstStyle/>
-          <a:p>
-            <a:pPr eaLnBrk="1" hangingPunct="1"/>
-            <a:r>
-              <a:rPr lang="en-US" sz="1800" dirty="0"/>
-              <a:t>Last section we added a force                   that killed our oscillation</a:t>
-            </a:r>
-          </a:p>
-          <a:p>
-            <a:pPr eaLnBrk="1" hangingPunct="1"/>
-            <a:endParaRPr lang="en-US" sz="1800" dirty="0"/>
-          </a:p>
-          <a:p>
-            <a:pPr eaLnBrk="1" hangingPunct="1"/>
-            <a:r>
-              <a:rPr lang="en-US" sz="1800" dirty="0"/>
-              <a:t>Suppose we want to keep it going</a:t>
-            </a:r>
-          </a:p>
-          <a:p>
-            <a:pPr eaLnBrk="1" hangingPunct="1"/>
-            <a:endParaRPr lang="en-US" sz="1800" dirty="0"/>
-          </a:p>
-          <a:p>
-            <a:pPr eaLnBrk="1" hangingPunct="1"/>
-            <a:r>
-              <a:rPr lang="en-US" sz="1800" dirty="0"/>
-              <a:t>Add a force </a:t>
-            </a:r>
-          </a:p>
-          <a:p>
-            <a:pPr eaLnBrk="1" hangingPunct="1"/>
-            <a:endParaRPr lang="en-US" sz="1800" dirty="0"/>
-          </a:p>
-          <a:p>
-            <a:pPr eaLnBrk="1" hangingPunct="1">
-              <a:buFontTx/>
-              <a:buNone/>
-            </a:pPr>
-            <a:r>
-              <a:rPr lang="en-US" sz="1800" dirty="0"/>
-              <a:t>     where F</a:t>
-            </a:r>
-            <a:r>
-              <a:rPr lang="en-US" sz="1800" baseline="-25000" dirty="0"/>
-              <a:t>o</a:t>
-            </a:r>
-            <a:r>
-              <a:rPr lang="en-US" sz="1800" dirty="0"/>
-              <a:t> is a constant and where </a:t>
-            </a:r>
-            <a:r>
-              <a:rPr lang="en-US" sz="1800" dirty="0">
-                <a:sym typeface="Symbol" pitchFamily="18" charset="2"/>
-              </a:rPr>
-              <a:t></a:t>
-            </a:r>
-            <a:r>
-              <a:rPr lang="en-US" sz="1800" baseline="-25000" dirty="0"/>
-              <a:t>f</a:t>
-            </a:r>
-            <a:r>
-              <a:rPr lang="en-US" sz="1800" dirty="0"/>
-              <a:t> is the angular frequency of the driving force</a:t>
-            </a:r>
-          </a:p>
-          <a:p>
-            <a:pPr eaLnBrk="1" hangingPunct="1">
-              <a:buFontTx/>
-              <a:buNone/>
-            </a:pPr>
-            <a:endParaRPr lang="en-US" sz="1800" dirty="0"/>
-          </a:p>
-          <a:p>
-            <a:pPr eaLnBrk="1" hangingPunct="1">
-              <a:buFontTx/>
-              <a:buNone/>
-            </a:pPr>
-            <a:endParaRPr lang="en-US" sz="1800" dirty="0"/>
-          </a:p>
-          <a:p>
-            <a:pPr eaLnBrk="1" hangingPunct="1">
-              <a:buFontTx/>
-              <a:buNone/>
-            </a:pPr>
-            <a:endParaRPr lang="en-US" sz="1800" dirty="0"/>
-          </a:p>
-          <a:p>
-            <a:pPr eaLnBrk="1" hangingPunct="1"/>
-            <a:r>
-              <a:rPr lang="en-US" sz="1800" dirty="0"/>
-              <a:t>This one is very hard to solve</a:t>
-            </a:r>
-          </a:p>
-        </p:txBody>
-      </p:sp>
-      <p:sp>
-        <p:nvSpPr>
-          <p:cNvPr id="19461" name="Rectangle 4"/>
-          <p:cNvSpPr>
-            <a:spLocks noChangeArrowheads="1"/>
-          </p:cNvSpPr>
-          <p:nvPr/>
-        </p:nvSpPr>
-        <p:spPr bwMode="auto">
-          <a:xfrm>
-            <a:off x="1143001" y="707209"/>
-            <a:ext cx="184731" cy="300082"/>
-          </a:xfrm>
-          <a:prstGeom prst="rect">
-            <a:avLst/>
-          </a:prstGeom>
-          <a:noFill/>
-          <a:ln>
-            <a:noFill/>
-          </a:ln>
-          <a:extLst>
-            <a:ext uri="{909E8E84-426E-40DD-AFC4-6F175D3DCCD1}">
-              <a14:hiddenFill xmlns:a14="http://schemas.microsoft.com/office/drawing/2010/main">
-                <a:solidFill>
-                  <a:srgbClr val="FFFFFF"/>
-                </a:solidFill>
-              </a14:hiddenFill>
-            </a:ext>
-            <a:ext uri="{91240B29-F687-4F45-9708-019B960494DF}">
-              <a14:hiddenLine xmlns:a14="http://schemas.microsoft.com/office/drawing/2010/main" w="9525" algn="ctr">
-                <a:solidFill>
-                  <a:srgbClr val="000000"/>
-                </a:solidFill>
-                <a:miter lim="800000"/>
-                <a:headEnd/>
-                <a:tailEnd/>
-              </a14:hiddenLine>
-            </a:ext>
-          </a:extLst>
-        </p:spPr>
-        <p:txBody>
-          <a:bodyPr wrap="none" anchor="ctr">
-            <a:spAutoFit/>
-          </a:bodyPr>
-          <a:lstStyle/>
-          <a:p>
-            <a:endParaRPr lang="en-US" sz="1350"/>
-          </a:p>
-        </p:txBody>
-      </p:sp>
-      <p:graphicFrame>
-        <p:nvGraphicFramePr>
-          <p:cNvPr id="19462" name="Object 5"/>
-          <p:cNvGraphicFramePr>
-            <a:graphicFrameLocks noChangeAspect="1"/>
-          </p:cNvGraphicFramePr>
-          <p:nvPr>
-            <p:extLst>
-              <p:ext uri="{D42A27DB-BD31-4B8C-83A1-F6EECF244321}">
-                <p14:modId xmlns:p14="http://schemas.microsoft.com/office/powerpoint/2010/main" val="3118549179"/>
-              </p:ext>
-            </p:extLst>
-          </p:nvPr>
-        </p:nvGraphicFramePr>
-        <p:xfrm>
-          <a:off x="3731481" y="1669537"/>
-          <a:ext cx="757170" cy="292098"/>
-        </p:xfrm>
-        <a:graphic>
-          <a:graphicData uri="http://schemas.openxmlformats.org/presentationml/2006/ole">
-            <mc:AlternateContent xmlns:mc="http://schemas.openxmlformats.org/markup-compatibility/2006">
-              <mc:Choice xmlns:v="urn:schemas-microsoft-com:vml" Requires="v">
-                <p:oleObj name="Equation" r:id="rId2" imgW="596900" imgH="228600" progId="Equation.3">
-                  <p:embed/>
-                </p:oleObj>
-              </mc:Choice>
-              <mc:Fallback>
-                <p:oleObj name="Equation" r:id="rId2" imgW="596900" imgH="228600" progId="Equation.3">
-                  <p:embed/>
-                  <p:pic>
-                    <p:nvPicPr>
-                      <p:cNvPr id="19462" name="Object 5"/>
-                      <p:cNvPicPr>
-                        <a:picLocks noChangeAspect="1" noChangeArrowheads="1"/>
-                      </p:cNvPicPr>
-                      <p:nvPr/>
-                    </p:nvPicPr>
-                    <p:blipFill>
-                      <a:blip r:embed="rId3">
-                        <a:extLst>
-                          <a:ext uri="{28A0092B-C50C-407E-A947-70E740481C1C}">
-                            <a14:useLocalDpi xmlns:a14="http://schemas.microsoft.com/office/drawing/2010/main" val="0"/>
-                          </a:ext>
-                        </a:extLst>
-                      </a:blip>
-                      <a:srcRect/>
-                      <a:stretch>
-                        <a:fillRect/>
-                      </a:stretch>
-                    </p:blipFill>
-                    <p:spPr bwMode="auto">
-                      <a:xfrm>
-                        <a:off x="3731481" y="1669537"/>
-                        <a:ext cx="757170" cy="292098"/>
-                      </a:xfrm>
-                      <a:prstGeom prst="rect">
-                        <a:avLst/>
-                      </a:prstGeom>
-                      <a:noFill/>
-                      <a:ln>
-                        <a:noFill/>
-                      </a:ln>
-                    </p:spPr>
-                  </p:pic>
-                </p:oleObj>
-              </mc:Fallback>
-            </mc:AlternateContent>
-          </a:graphicData>
-        </a:graphic>
-      </p:graphicFrame>
-      <p:sp>
-        <p:nvSpPr>
-          <p:cNvPr id="19463" name="Rectangle 6"/>
-          <p:cNvSpPr>
-            <a:spLocks noChangeArrowheads="1"/>
-          </p:cNvSpPr>
-          <p:nvPr/>
-        </p:nvSpPr>
-        <p:spPr bwMode="auto">
-          <a:xfrm>
-            <a:off x="1143001" y="707209"/>
-            <a:ext cx="184731" cy="300082"/>
-          </a:xfrm>
-          <a:prstGeom prst="rect">
-            <a:avLst/>
-          </a:prstGeom>
-          <a:noFill/>
-          <a:ln>
-            <a:noFill/>
-          </a:ln>
-          <a:extLst>
-            <a:ext uri="{909E8E84-426E-40DD-AFC4-6F175D3DCCD1}">
-              <a14:hiddenFill xmlns:a14="http://schemas.microsoft.com/office/drawing/2010/main">
-                <a:solidFill>
-                  <a:srgbClr val="FFFFFF"/>
-                </a:solidFill>
-              </a14:hiddenFill>
-            </a:ext>
-            <a:ext uri="{91240B29-F687-4F45-9708-019B960494DF}">
-              <a14:hiddenLine xmlns:a14="http://schemas.microsoft.com/office/drawing/2010/main" w="9525" algn="ctr">
-                <a:solidFill>
-                  <a:srgbClr val="000000"/>
-                </a:solidFill>
-                <a:miter lim="800000"/>
-                <a:headEnd/>
-                <a:tailEnd/>
-              </a14:hiddenLine>
-            </a:ext>
-          </a:extLst>
-        </p:spPr>
-        <p:txBody>
-          <a:bodyPr wrap="none" anchor="ctr">
-            <a:spAutoFit/>
-          </a:bodyPr>
-          <a:lstStyle/>
-          <a:p>
-            <a:endParaRPr lang="en-US" sz="1350"/>
-          </a:p>
-        </p:txBody>
-      </p:sp>
-      <p:graphicFrame>
-        <p:nvGraphicFramePr>
-          <p:cNvPr id="19464" name="Object 7"/>
-          <p:cNvGraphicFramePr>
-            <a:graphicFrameLocks noChangeAspect="1"/>
-          </p:cNvGraphicFramePr>
-          <p:nvPr>
-            <p:extLst>
-              <p:ext uri="{D42A27DB-BD31-4B8C-83A1-F6EECF244321}">
-                <p14:modId xmlns:p14="http://schemas.microsoft.com/office/powerpoint/2010/main" val="1315654589"/>
-              </p:ext>
-            </p:extLst>
-          </p:nvPr>
-        </p:nvGraphicFramePr>
-        <p:xfrm>
-          <a:off x="2109932" y="2860706"/>
-          <a:ext cx="1990990" cy="436308"/>
-        </p:xfrm>
-        <a:graphic>
-          <a:graphicData uri="http://schemas.openxmlformats.org/presentationml/2006/ole">
-            <mc:AlternateContent xmlns:mc="http://schemas.openxmlformats.org/markup-compatibility/2006">
-              <mc:Choice xmlns:v="urn:schemas-microsoft-com:vml" Requires="v">
-                <p:oleObj name="Equation" r:id="rId4" imgW="1104900" imgH="241300" progId="Equation.3">
-                  <p:embed/>
-                </p:oleObj>
-              </mc:Choice>
-              <mc:Fallback>
-                <p:oleObj name="Equation" r:id="rId4" imgW="1104900" imgH="241300" progId="Equation.3">
-                  <p:embed/>
-                  <p:pic>
-                    <p:nvPicPr>
-                      <p:cNvPr id="19464" name="Object 7"/>
-                      <p:cNvPicPr>
-                        <a:picLocks noChangeAspect="1" noChangeArrowheads="1"/>
-                      </p:cNvPicPr>
-                      <p:nvPr/>
-                    </p:nvPicPr>
-                    <p:blipFill>
-                      <a:blip r:embed="rId5">
-                        <a:extLst>
-                          <a:ext uri="{28A0092B-C50C-407E-A947-70E740481C1C}">
-                            <a14:useLocalDpi xmlns:a14="http://schemas.microsoft.com/office/drawing/2010/main" val="0"/>
-                          </a:ext>
-                        </a:extLst>
-                      </a:blip>
-                      <a:srcRect/>
-                      <a:stretch>
-                        <a:fillRect/>
-                      </a:stretch>
-                    </p:blipFill>
-                    <p:spPr bwMode="auto">
-                      <a:xfrm>
-                        <a:off x="2109932" y="2860706"/>
-                        <a:ext cx="1990990" cy="436308"/>
-                      </a:xfrm>
-                      <a:prstGeom prst="rect">
-                        <a:avLst/>
-                      </a:prstGeom>
-                      <a:noFill/>
-                      <a:ln>
-                        <a:noFill/>
-                      </a:ln>
-                    </p:spPr>
-                  </p:pic>
-                </p:oleObj>
-              </mc:Fallback>
-            </mc:AlternateContent>
-          </a:graphicData>
-        </a:graphic>
-      </p:graphicFrame>
-      <p:graphicFrame>
-        <p:nvGraphicFramePr>
-          <p:cNvPr id="19465" name="Object 8"/>
-          <p:cNvGraphicFramePr>
-            <a:graphicFrameLocks noChangeAspect="1"/>
-          </p:cNvGraphicFramePr>
-          <p:nvPr>
-            <p:extLst>
-              <p:ext uri="{D42A27DB-BD31-4B8C-83A1-F6EECF244321}">
-                <p14:modId xmlns:p14="http://schemas.microsoft.com/office/powerpoint/2010/main" val="1468611588"/>
-              </p:ext>
-            </p:extLst>
-          </p:nvPr>
-        </p:nvGraphicFramePr>
-        <p:xfrm>
-          <a:off x="2482883" y="4275280"/>
-          <a:ext cx="3585914" cy="436309"/>
-        </p:xfrm>
-        <a:graphic>
-          <a:graphicData uri="http://schemas.openxmlformats.org/presentationml/2006/ole">
-            <mc:AlternateContent xmlns:mc="http://schemas.openxmlformats.org/markup-compatibility/2006">
-              <mc:Choice xmlns:v="urn:schemas-microsoft-com:vml" Requires="v">
-                <p:oleObj name="Equation" r:id="rId6" imgW="1993900" imgH="241300" progId="Equation.3">
-                  <p:embed/>
-                </p:oleObj>
-              </mc:Choice>
-              <mc:Fallback>
-                <p:oleObj name="Equation" r:id="rId6" imgW="1993900" imgH="241300" progId="Equation.3">
-                  <p:embed/>
-                  <p:pic>
-                    <p:nvPicPr>
-                      <p:cNvPr id="19465" name="Object 8"/>
-                      <p:cNvPicPr>
-                        <a:picLocks noChangeAspect="1" noChangeArrowheads="1"/>
-                      </p:cNvPicPr>
-                      <p:nvPr/>
-                    </p:nvPicPr>
-                    <p:blipFill>
-                      <a:blip r:embed="rId7">
-                        <a:extLst>
-                          <a:ext uri="{28A0092B-C50C-407E-A947-70E740481C1C}">
-                            <a14:useLocalDpi xmlns:a14="http://schemas.microsoft.com/office/drawing/2010/main" val="0"/>
-                          </a:ext>
-                        </a:extLst>
-                      </a:blip>
-                      <a:srcRect/>
-                      <a:stretch>
-                        <a:fillRect/>
-                      </a:stretch>
-                    </p:blipFill>
-                    <p:spPr bwMode="auto">
-                      <a:xfrm>
-                        <a:off x="2482883" y="4275280"/>
-                        <a:ext cx="3585914" cy="436309"/>
-                      </a:xfrm>
-                      <a:prstGeom prst="rect">
-                        <a:avLst/>
-                      </a:prstGeom>
-                      <a:noFill/>
-                      <a:ln>
-                        <a:noFill/>
-                      </a:ln>
-                    </p:spPr>
-                  </p:pic>
-                </p:oleObj>
-              </mc:Fallback>
-            </mc:AlternateContent>
-          </a:graphicData>
-        </a:graphic>
-      </p:graphicFrame>
-    </p:spTree>
-  </p:cSld>
-  <p:clrMapOvr>
-    <a:masterClrMapping/>
-  </p:clrMapOvr>
-</p:sld>
-</file>
-
-<file path=ppt/slides/slide40.xml><?xml version="1.0" encoding="utf-8"?>
+<file path=ppt/slides/slide41.xml><?xml version="1.0" encoding="utf-8"?>
 <p:sld xmlns:a="http://schemas.openxmlformats.org/drawingml/2006/main" xmlns:r="http://schemas.openxmlformats.org/officeDocument/2006/relationships" xmlns:p="http://schemas.openxmlformats.org/presentationml/2006/main">
   <p:cSld>
     <p:spTree>
@@ -30233,7 +30126,7 @@
 </p:sld>
 </file>
 
-<file path=ppt/slides/slide41.xml><?xml version="1.0" encoding="utf-8"?>
+<file path=ppt/slides/slide42.xml><?xml version="1.0" encoding="utf-8"?>
 <p:sld xmlns:a="http://schemas.openxmlformats.org/drawingml/2006/main" xmlns:r="http://schemas.openxmlformats.org/officeDocument/2006/relationships" xmlns:p="http://schemas.openxmlformats.org/presentationml/2006/main">
   <p:cSld>
     <p:spTree>
@@ -34455,7 +34348,7 @@
 </p:sld>
 </file>
 
-<file path=ppt/slides/slide42.xml><?xml version="1.0" encoding="utf-8"?>
+<file path=ppt/slides/slide43.xml><?xml version="1.0" encoding="utf-8"?>
 <p:sld xmlns:a="http://schemas.openxmlformats.org/drawingml/2006/main" xmlns:r="http://schemas.openxmlformats.org/officeDocument/2006/relationships" xmlns:p="http://schemas.openxmlformats.org/presentationml/2006/main">
   <p:cSld>
     <p:spTree>
@@ -39336,7 +39229,7 @@
 </p:sld>
 </file>
 
-<file path=ppt/slides/slide43.xml><?xml version="1.0" encoding="utf-8"?>
+<file path=ppt/slides/slide44.xml><?xml version="1.0" encoding="utf-8"?>
 <p:sld xmlns:a="http://schemas.openxmlformats.org/drawingml/2006/main" xmlns:r="http://schemas.openxmlformats.org/officeDocument/2006/relationships" xmlns:p="http://schemas.openxmlformats.org/presentationml/2006/main">
   <p:cSld>
     <p:spTree>
@@ -44187,7 +44080,7 @@
 </p:sld>
 </file>
 
-<file path=ppt/slides/slide44.xml><?xml version="1.0" encoding="utf-8"?>
+<file path=ppt/slides/slide45.xml><?xml version="1.0" encoding="utf-8"?>
 <p:sld xmlns:a="http://schemas.openxmlformats.org/drawingml/2006/main" xmlns:r="http://schemas.openxmlformats.org/officeDocument/2006/relationships" xmlns:p="http://schemas.openxmlformats.org/presentationml/2006/main">
   <p:cSld>
     <p:spTree>
@@ -48984,7 +48877,7 @@
 </p:sld>
 </file>
 
-<file path=ppt/slides/slide45.xml><?xml version="1.0" encoding="utf-8"?>
+<file path=ppt/slides/slide46.xml><?xml version="1.0" encoding="utf-8"?>
 <p:sld xmlns:a="http://schemas.openxmlformats.org/drawingml/2006/main" xmlns:r="http://schemas.openxmlformats.org/officeDocument/2006/relationships" xmlns:p="http://schemas.openxmlformats.org/presentationml/2006/main">
   <p:cSld>
     <p:spTree>
@@ -49121,7 +49014,7 @@
               <a:pPr>
                 <a:defRPr/>
               </a:pPr>
-              <a:t>45</a:t>
+              <a:t>46</a:t>
             </a:fld>
             <a:endParaRPr lang="en-US"/>
           </a:p>
@@ -49994,7 +49887,7 @@
 </p:sld>
 </file>
 
-<file path=ppt/slides/slide46.xml><?xml version="1.0" encoding="utf-8"?>
+<file path=ppt/slides/slide47.xml><?xml version="1.0" encoding="utf-8"?>
 <p:sld xmlns:a="http://schemas.openxmlformats.org/drawingml/2006/main" xmlns:r="http://schemas.openxmlformats.org/officeDocument/2006/relationships" xmlns:p="http://schemas.openxmlformats.org/presentationml/2006/main">
   <p:cSld>
     <p:spTree>
@@ -50202,7 +50095,7 @@
               <a:pPr>
                 <a:defRPr/>
               </a:pPr>
-              <a:t>46</a:t>
+              <a:t>47</a:t>
             </a:fld>
             <a:endParaRPr lang="en-US"/>
           </a:p>
@@ -50763,7 +50656,7 @@
 </p:sld>
 </file>
 
-<file path=ppt/slides/slide47.xml><?xml version="1.0" encoding="utf-8"?>
+<file path=ppt/slides/slide48.xml><?xml version="1.0" encoding="utf-8"?>
 <p:sld xmlns:a="http://schemas.openxmlformats.org/drawingml/2006/main" xmlns:r="http://schemas.openxmlformats.org/officeDocument/2006/relationships" xmlns:p="http://schemas.openxmlformats.org/presentationml/2006/main">
   <p:cSld>
     <p:spTree>
@@ -50886,7 +50779,7 @@
               <a:pPr>
                 <a:defRPr/>
               </a:pPr>
-              <a:t>47</a:t>
+              <a:t>48</a:t>
             </a:fld>
             <a:endParaRPr lang="en-US"/>
           </a:p>
@@ -51337,8 +51230,8 @@
           </a:p>
         </p:txBody>
       </p:sp>
-      <mc:AlternateContent xmlns:mc="http://schemas.openxmlformats.org/markup-compatibility/2006">
-        <mc:Choice xmlns:a14="http://schemas.microsoft.com/office/drawing/2010/main" Requires="a14">
+      <mc:AlternateContent xmlns:mc="http://schemas.openxmlformats.org/markup-compatibility/2006" xmlns:a14="http://schemas.microsoft.com/office/drawing/2010/main">
+        <mc:Choice Requires="a14">
           <p:sp>
             <p:nvSpPr>
               <p:cNvPr id="20488" name="Object 7"/>
@@ -51370,7 +51263,7 @@
                     <m:oMathParaPr>
                       <m:jc m:val="left"/>
                     </m:oMathParaPr>
-                    <m:oMath xmlns:m="http://schemas.openxmlformats.org/officeDocument/2006/math">
+                    <m:oMath>
                       <m:r>
                         <a:rPr lang="en-US" i="1" smtClean="0">
                           <a:solidFill>
@@ -51742,7 +51635,7 @@
             </p:txBody>
           </p:sp>
         </mc:Choice>
-        <mc:Fallback>
+        <mc:Fallback xmlns="">
           <p:sp>
             <p:nvSpPr>
               <p:cNvPr id="20488" name="Object 7"/>
@@ -51834,8 +51727,8 @@
           </a:p>
         </p:txBody>
       </p:sp>
-      <mc:AlternateContent xmlns:mc="http://schemas.openxmlformats.org/markup-compatibility/2006">
-        <mc:Choice xmlns:a14="http://schemas.microsoft.com/office/drawing/2010/main" Requires="a14">
+      <mc:AlternateContent xmlns:mc="http://schemas.openxmlformats.org/markup-compatibility/2006" xmlns:a14="http://schemas.microsoft.com/office/drawing/2010/main">
+        <mc:Choice Requires="a14">
           <p:sp>
             <p:nvSpPr>
               <p:cNvPr id="20490" name="Object 9"/>
@@ -51867,11 +51760,11 @@
                     <m:oMathParaPr>
                       <m:jc m:val="left"/>
                     </m:oMathParaPr>
-                    <m:oMath xmlns:m="http://schemas.openxmlformats.org/officeDocument/2006/math">
+                    <m:oMath>
                       <m:sSub>
                         <m:sSubPr>
                           <m:ctrlPr>
-                            <a:rPr lang="en-US" i="1" smtClean="0">
+                            <a:rPr lang="en-US" i="1">
                               <a:solidFill>
                                 <a:srgbClr val="000000"/>
                               </a:solidFill>
@@ -51969,7 +51862,7 @@
             </p:txBody>
           </p:sp>
         </mc:Choice>
-        <mc:Fallback>
+        <mc:Fallback xmlns="">
           <p:sp>
             <p:nvSpPr>
               <p:cNvPr id="20490" name="Object 9"/>
@@ -52011,8 +51904,8 @@
           </p:sp>
         </mc:Fallback>
       </mc:AlternateContent>
-      <mc:AlternateContent xmlns:mc="http://schemas.openxmlformats.org/markup-compatibility/2006">
-        <mc:Choice xmlns:a14="http://schemas.microsoft.com/office/drawing/2010/main" Requires="a14">
+      <mc:AlternateContent xmlns:mc="http://schemas.openxmlformats.org/markup-compatibility/2006" xmlns:a14="http://schemas.microsoft.com/office/drawing/2010/main">
+        <mc:Choice Requires="a14">
           <p:sp>
             <p:nvSpPr>
               <p:cNvPr id="20491" name="Object 10"/>
@@ -52044,7 +51937,7 @@
                     <m:oMathParaPr>
                       <m:jc m:val="left"/>
                     </m:oMathParaPr>
-                    <m:oMath xmlns:m="http://schemas.openxmlformats.org/officeDocument/2006/math">
+                    <m:oMath>
                       <m:r>
                         <a:rPr lang="en-US" i="1" smtClean="0">
                           <a:solidFill>
@@ -52380,7 +52273,7 @@
             </p:txBody>
           </p:sp>
         </mc:Choice>
-        <mc:Fallback>
+        <mc:Fallback xmlns="">
           <p:sp>
             <p:nvSpPr>
               <p:cNvPr id="20491" name="Object 10"/>
@@ -52422,8 +52315,8 @@
           </p:sp>
         </mc:Fallback>
       </mc:AlternateContent>
-      <mc:AlternateContent xmlns:mc="http://schemas.openxmlformats.org/markup-compatibility/2006">
-        <mc:Choice xmlns:a14="http://schemas.microsoft.com/office/drawing/2010/main" Requires="a14">
+      <mc:AlternateContent xmlns:mc="http://schemas.openxmlformats.org/markup-compatibility/2006" xmlns:a14="http://schemas.microsoft.com/office/drawing/2010/main">
+        <mc:Choice Requires="a14">
           <p:sp>
             <p:nvSpPr>
               <p:cNvPr id="20492" name="Object 11"/>
@@ -52455,7 +52348,7 @@
                     <m:oMathParaPr>
                       <m:jc m:val="left"/>
                     </m:oMathParaPr>
-                    <m:oMath xmlns:m="http://schemas.openxmlformats.org/officeDocument/2006/math">
+                    <m:oMath>
                       <m:r>
                         <a:rPr lang="en-US" i="1">
                           <a:solidFill>
@@ -52509,7 +52402,7 @@
                       <m:func>
                         <m:funcPr>
                           <m:ctrlPr>
-                            <a:rPr lang="en-US" i="1">
+                            <a:rPr lang="en-US" i="0">
                               <a:solidFill>
                                 <a:srgbClr val="000000"/>
                               </a:solidFill>
@@ -52592,7 +52485,7 @@
             </p:txBody>
           </p:sp>
         </mc:Choice>
-        <mc:Fallback>
+        <mc:Fallback xmlns="">
           <p:sp>
             <p:nvSpPr>
               <p:cNvPr id="20492" name="Object 11"/>
@@ -52920,8 +52813,8 @@
           </a:p>
         </p:txBody>
       </p:sp>
-      <mc:AlternateContent xmlns:mc="http://schemas.openxmlformats.org/markup-compatibility/2006">
-        <mc:Choice xmlns:a14="http://schemas.microsoft.com/office/drawing/2010/main" Requires="a14">
+      <mc:AlternateContent xmlns:mc="http://schemas.openxmlformats.org/markup-compatibility/2006" xmlns:a14="http://schemas.microsoft.com/office/drawing/2010/main">
+        <mc:Choice Requires="a14">
           <p:sp>
             <p:nvSpPr>
               <p:cNvPr id="21510" name="Object 5"/>
@@ -52953,7 +52846,7 @@
                     <m:oMathParaPr>
                       <m:jc m:val="left"/>
                     </m:oMathParaPr>
-                    <m:oMath xmlns:m="http://schemas.openxmlformats.org/officeDocument/2006/math">
+                    <m:oMath>
                       <m:r>
                         <a:rPr lang="en-US" i="1" smtClean="0">
                           <a:solidFill>
@@ -53289,7 +53182,7 @@
             </p:txBody>
           </p:sp>
         </mc:Choice>
-        <mc:Fallback>
+        <mc:Fallback xmlns="">
           <p:sp>
             <p:nvSpPr>
               <p:cNvPr id="21510" name="Object 5"/>
@@ -54055,8 +53948,8 @@
           </a:p>
         </p:txBody>
       </p:sp>
-      <mc:AlternateContent xmlns:mc="http://schemas.openxmlformats.org/markup-compatibility/2006">
-        <mc:Choice xmlns:a14="http://schemas.microsoft.com/office/drawing/2010/main" Requires="a14">
+      <mc:AlternateContent xmlns:mc="http://schemas.openxmlformats.org/markup-compatibility/2006" xmlns:a14="http://schemas.microsoft.com/office/drawing/2010/main">
+        <mc:Choice Requires="a14">
           <p:sp>
             <p:nvSpPr>
               <p:cNvPr id="22536" name="Object 7"/>
@@ -54088,7 +53981,7 @@
                     <m:oMathParaPr>
                       <m:jc m:val="left"/>
                     </m:oMathParaPr>
-                    <m:oMath xmlns:m="http://schemas.openxmlformats.org/officeDocument/2006/math">
+                    <m:oMath>
                       <m:r>
                         <a:rPr lang="en-US" i="1" smtClean="0">
                           <a:solidFill>
@@ -54167,7 +54060,7 @@
                       <m:func>
                         <m:funcPr>
                           <m:ctrlPr>
-                            <a:rPr lang="en-US" i="1">
+                            <a:rPr lang="en-US" i="0">
                               <a:solidFill>
                                 <a:srgbClr val="000000"/>
                               </a:solidFill>
@@ -54232,7 +54125,7 @@
             </p:txBody>
           </p:sp>
         </mc:Choice>
-        <mc:Fallback>
+        <mc:Fallback xmlns="">
           <p:sp>
             <p:nvSpPr>
               <p:cNvPr id="22536" name="Object 7"/>
@@ -55339,8 +55232,8 @@
         </p:nvSpPr>
         <p:spPr>
           <a:xfrm>
-            <a:off x="1404194" y="1731764"/>
-            <a:ext cx="6335611" cy="3394472"/>
+            <a:off x="541867" y="1731764"/>
+            <a:ext cx="7890933" cy="3394472"/>
           </a:xfrm>
         </p:spPr>
         <p:txBody>
@@ -55372,6 +55265,36 @@
           </a:p>
         </p:txBody>
       </p:sp>
+      <p:pic>
+        <p:nvPicPr>
+          <p:cNvPr id="2" name="Picture 1" descr="File:Tacoma Narrows Bridge Falling.png">
+            <a:extLst>
+              <a:ext uri="{FF2B5EF4-FFF2-40B4-BE49-F238E27FC236}">
+                <a16:creationId xmlns:a16="http://schemas.microsoft.com/office/drawing/2014/main" id="{97DA0287-7C11-6853-614F-8CB4B73A9652}"/>
+              </a:ext>
+            </a:extLst>
+          </p:cNvPr>
+          <p:cNvPicPr>
+            <a:picLocks noChangeAspect="1"/>
+          </p:cNvPicPr>
+          <p:nvPr/>
+        </p:nvPicPr>
+        <p:blipFill>
+          <a:blip r:embed="rId2"/>
+          <a:stretch>
+            <a:fillRect/>
+          </a:stretch>
+        </p:blipFill>
+        <p:spPr>
+          <a:xfrm>
+            <a:off x="2984698" y="4321475"/>
+            <a:ext cx="3174603" cy="2400000"/>
+          </a:xfrm>
+          <a:prstGeom prst="rect">
+            <a:avLst/>
+          </a:prstGeom>
+        </p:spPr>
+      </p:pic>
     </p:spTree>
   </p:cSld>
   <p:clrMapOvr>
